--- a/slides/docker-session2-flask-volume.pptx
+++ b/slides/docker-session2-flask-volume.pptx
@@ -2,42 +2,39 @@
 <file path=ppt/presentation.xml><?xml version="1.0" encoding="utf-8"?>
 <p:presentation xmlns:p="http://schemas.openxmlformats.org/presentationml/2006/main">
   <p:sldMasterIdLst>
-    <p:sldMasterId xmlns:r="http://schemas.openxmlformats.org/officeDocument/2006/relationships" id="2147483648" r:id="R47254c0f00794f3b"/>
+    <p:sldMasterId xmlns:r="http://schemas.openxmlformats.org/officeDocument/2006/relationships" id="2147483648" r:id="R5dd40132607c4e80"/>
   </p:sldMasterIdLst>
-  <p:notesMasterIdLst>
-    <p:notesMasterId xmlns:r="http://schemas.openxmlformats.org/officeDocument/2006/relationships" r:id="Rc5c96636b0a84a25"/>
-  </p:notesMasterIdLst>
   <p:sldIdLst>
-    <p:sldId xmlns:r="http://schemas.openxmlformats.org/officeDocument/2006/relationships" id="256" r:id="Rcd0d31a878604ce8"/>
-    <p:sldId xmlns:r="http://schemas.openxmlformats.org/officeDocument/2006/relationships" id="257" r:id="Re5af696162924624"/>
-    <p:sldId xmlns:r="http://schemas.openxmlformats.org/officeDocument/2006/relationships" id="258" r:id="R3d9b984ca47a4ac5"/>
-    <p:sldId xmlns:r="http://schemas.openxmlformats.org/officeDocument/2006/relationships" id="259" r:id="R03a395de12dc41f3"/>
-    <p:sldId xmlns:r="http://schemas.openxmlformats.org/officeDocument/2006/relationships" id="260" r:id="R2786d275e98f4254"/>
-    <p:sldId xmlns:r="http://schemas.openxmlformats.org/officeDocument/2006/relationships" id="261" r:id="R64c6c18ce49f43b1"/>
-    <p:sldId xmlns:r="http://schemas.openxmlformats.org/officeDocument/2006/relationships" id="262" r:id="R1e3e4b63d5d14a0a"/>
-    <p:sldId xmlns:r="http://schemas.openxmlformats.org/officeDocument/2006/relationships" id="263" r:id="Ra0ee330177ec409e"/>
-    <p:sldId xmlns:r="http://schemas.openxmlformats.org/officeDocument/2006/relationships" id="264" r:id="Rb6de46e350294bb3"/>
-    <p:sldId xmlns:r="http://schemas.openxmlformats.org/officeDocument/2006/relationships" id="265" r:id="Rbec2257d805d4969"/>
-    <p:sldId xmlns:r="http://schemas.openxmlformats.org/officeDocument/2006/relationships" id="266" r:id="Re3c0effeac91407e"/>
-    <p:sldId xmlns:r="http://schemas.openxmlformats.org/officeDocument/2006/relationships" id="267" r:id="Raa6a9c0b24294a9f"/>
-    <p:sldId xmlns:r="http://schemas.openxmlformats.org/officeDocument/2006/relationships" id="268" r:id="R79e2dd4535d94873"/>
-    <p:sldId xmlns:r="http://schemas.openxmlformats.org/officeDocument/2006/relationships" id="269" r:id="Re21572ec15ff43df"/>
-    <p:sldId xmlns:r="http://schemas.openxmlformats.org/officeDocument/2006/relationships" id="270" r:id="R9e4d386fdf994021"/>
-    <p:sldId xmlns:r="http://schemas.openxmlformats.org/officeDocument/2006/relationships" id="271" r:id="Rc834ea8931e846bf"/>
-    <p:sldId xmlns:r="http://schemas.openxmlformats.org/officeDocument/2006/relationships" id="272" r:id="R9404dd96547b4fa9"/>
-    <p:sldId xmlns:r="http://schemas.openxmlformats.org/officeDocument/2006/relationships" id="273" r:id="R7769e1db8715498f"/>
-    <p:sldId xmlns:r="http://schemas.openxmlformats.org/officeDocument/2006/relationships" id="274" r:id="R0302deb2b24e48a4"/>
-    <p:sldId xmlns:r="http://schemas.openxmlformats.org/officeDocument/2006/relationships" id="275" r:id="R0f94e37c8cf14292"/>
-    <p:sldId xmlns:r="http://schemas.openxmlformats.org/officeDocument/2006/relationships" id="276" r:id="R0ea394c2494a4aeb"/>
-    <p:sldId xmlns:r="http://schemas.openxmlformats.org/officeDocument/2006/relationships" id="277" r:id="Rfc14012940bf4bed"/>
-    <p:sldId xmlns:r="http://schemas.openxmlformats.org/officeDocument/2006/relationships" id="278" r:id="R40906c7bdfaa4d2e"/>
-    <p:sldId xmlns:r="http://schemas.openxmlformats.org/officeDocument/2006/relationships" id="279" r:id="Rd4dfaf1c90444cd9"/>
-    <p:sldId xmlns:r="http://schemas.openxmlformats.org/officeDocument/2006/relationships" id="280" r:id="Rb39280691b1947ed"/>
-    <p:sldId xmlns:r="http://schemas.openxmlformats.org/officeDocument/2006/relationships" id="281" r:id="R6537e66636d34a65"/>
-    <p:sldId xmlns:r="http://schemas.openxmlformats.org/officeDocument/2006/relationships" id="282" r:id="Rb1df1b715b5e411d"/>
-    <p:sldId xmlns:r="http://schemas.openxmlformats.org/officeDocument/2006/relationships" id="283" r:id="R9431543701df4259"/>
-    <p:sldId xmlns:r="http://schemas.openxmlformats.org/officeDocument/2006/relationships" id="284" r:id="R069948d83d764472"/>
-    <p:sldId xmlns:r="http://schemas.openxmlformats.org/officeDocument/2006/relationships" id="285" r:id="R4620555a0e3d40b2"/>
+    <p:sldId xmlns:r="http://schemas.openxmlformats.org/officeDocument/2006/relationships" id="256" r:id="R5ff8653a5c80408e"/>
+    <p:sldId xmlns:r="http://schemas.openxmlformats.org/officeDocument/2006/relationships" id="257" r:id="R35fef252c5b148e1"/>
+    <p:sldId xmlns:r="http://schemas.openxmlformats.org/officeDocument/2006/relationships" id="258" r:id="R420bcc92db664c9a"/>
+    <p:sldId xmlns:r="http://schemas.openxmlformats.org/officeDocument/2006/relationships" id="259" r:id="R27b5f5802025495e"/>
+    <p:sldId xmlns:r="http://schemas.openxmlformats.org/officeDocument/2006/relationships" id="260" r:id="R238dead04a1a4a75"/>
+    <p:sldId xmlns:r="http://schemas.openxmlformats.org/officeDocument/2006/relationships" id="261" r:id="R7a7826068faf4937"/>
+    <p:sldId xmlns:r="http://schemas.openxmlformats.org/officeDocument/2006/relationships" id="262" r:id="R7f1e18ea616d4d9c"/>
+    <p:sldId xmlns:r="http://schemas.openxmlformats.org/officeDocument/2006/relationships" id="263" r:id="Ra5957e6bea0546d3"/>
+    <p:sldId xmlns:r="http://schemas.openxmlformats.org/officeDocument/2006/relationships" id="264" r:id="Rec976999b6fc4070"/>
+    <p:sldId xmlns:r="http://schemas.openxmlformats.org/officeDocument/2006/relationships" id="265" r:id="R14a54adb5da94918"/>
+    <p:sldId xmlns:r="http://schemas.openxmlformats.org/officeDocument/2006/relationships" id="266" r:id="R316e1e92e90c4749"/>
+    <p:sldId xmlns:r="http://schemas.openxmlformats.org/officeDocument/2006/relationships" id="267" r:id="R4ef877801c854a5e"/>
+    <p:sldId xmlns:r="http://schemas.openxmlformats.org/officeDocument/2006/relationships" id="268" r:id="R5b422180ca0547bd"/>
+    <p:sldId xmlns:r="http://schemas.openxmlformats.org/officeDocument/2006/relationships" id="269" r:id="R0be14ae451794734"/>
+    <p:sldId xmlns:r="http://schemas.openxmlformats.org/officeDocument/2006/relationships" id="270" r:id="Rb46e153cf9cc4d4d"/>
+    <p:sldId xmlns:r="http://schemas.openxmlformats.org/officeDocument/2006/relationships" id="271" r:id="R173591232d004c1d"/>
+    <p:sldId xmlns:r="http://schemas.openxmlformats.org/officeDocument/2006/relationships" id="272" r:id="R2901208d8c284821"/>
+    <p:sldId xmlns:r="http://schemas.openxmlformats.org/officeDocument/2006/relationships" id="273" r:id="R8a2e41cfea784955"/>
+    <p:sldId xmlns:r="http://schemas.openxmlformats.org/officeDocument/2006/relationships" id="274" r:id="R0121db4d5ce9440b"/>
+    <p:sldId xmlns:r="http://schemas.openxmlformats.org/officeDocument/2006/relationships" id="275" r:id="R14b41ba102f0442c"/>
+    <p:sldId xmlns:r="http://schemas.openxmlformats.org/officeDocument/2006/relationships" id="276" r:id="R6a6547216b0d4eea"/>
+    <p:sldId xmlns:r="http://schemas.openxmlformats.org/officeDocument/2006/relationships" id="277" r:id="Rbbc11fa5b0a04635"/>
+    <p:sldId xmlns:r="http://schemas.openxmlformats.org/officeDocument/2006/relationships" id="278" r:id="Ra68fe3e0b34b4e4a"/>
+    <p:sldId xmlns:r="http://schemas.openxmlformats.org/officeDocument/2006/relationships" id="279" r:id="Rafe88d5fd1514212"/>
+    <p:sldId xmlns:r="http://schemas.openxmlformats.org/officeDocument/2006/relationships" id="280" r:id="R1a6e9ffe9b184c3e"/>
+    <p:sldId xmlns:r="http://schemas.openxmlformats.org/officeDocument/2006/relationships" id="281" r:id="R8cacac57a76f42c0"/>
+    <p:sldId xmlns:r="http://schemas.openxmlformats.org/officeDocument/2006/relationships" id="282" r:id="Re87491485f554d9a"/>
+    <p:sldId xmlns:r="http://schemas.openxmlformats.org/officeDocument/2006/relationships" id="283" r:id="Rf0a51c87337945ba"/>
+    <p:sldId xmlns:r="http://schemas.openxmlformats.org/officeDocument/2006/relationships" id="284" r:id="R19deeb6c7c3e4dd2"/>
+    <p:sldId xmlns:r="http://schemas.openxmlformats.org/officeDocument/2006/relationships" id="285" r:id="R11c2b837f19d4d5c"/>
   </p:sldIdLst>
   <p:sldSz cx="12192000" cy="6858000"/>
   <p:notesSz cx="6858000" cy="9144000"/>
@@ -139,2493 +136,6 @@
 </p:presentation>
 </file>
 
-<file path=ppt/notesMasters/notesMaster1.xml><?xml version="1.0" encoding="utf-8"?>
-<p:notesMaster xmlns:p="http://schemas.openxmlformats.org/presentationml/2006/main">
-  <p:cSld>
-    <p:bg>
-      <p:bgRef idx="1001">
-        <a:schemeClr xmlns:a="http://schemas.openxmlformats.org/drawingml/2006/main" val="bg1"/>
-      </p:bgRef>
-    </p:bg>
-    <p:spTree>
-      <p:nvGrpSpPr>
-        <p:cNvPr id="1" name=""/>
-        <p:cNvGrpSpPr/>
-        <p:nvPr/>
-      </p:nvGrpSpPr>
-      <p:grpSpPr>
-        <a:xfrm xmlns:a="http://schemas.openxmlformats.org/drawingml/2006/main"/>
-      </p:grpSpPr>
-      <p:sp>
-        <p:nvSpPr>
-          <p:cNvPr id="2" name="Header Placeholder"/>
-          <p:cNvSpPr/>
-          <p:nvPr>
-            <p:ph type="hdr" sz="quarter"/>
-          </p:nvPr>
-        </p:nvSpPr>
-        <p:spPr>
-          <a:prstGeom xmlns:a="http://schemas.openxmlformats.org/drawingml/2006/main" prst="rect">
-            <a:avLst/>
-          </a:prstGeom>
-        </p:spPr>
-        <p:txBody>
-          <a:bodyPr xmlns:a="http://schemas.openxmlformats.org/drawingml/2006/main"/>
-          <a:lstStyle xmlns:a="http://schemas.openxmlformats.org/drawingml/2006/main"/>
-          <a:p xmlns:a="http://schemas.openxmlformats.org/drawingml/2006/main"/>
-        </p:txBody>
-      </p:sp>
-      <p:sp>
-        <p:nvSpPr>
-          <p:cNvPr id="3" name="Date Placeholder"/>
-          <p:cNvSpPr/>
-          <p:nvPr>
-            <p:ph type="dt" sz="quarter" idx="1"/>
-          </p:nvPr>
-        </p:nvSpPr>
-        <p:spPr>
-          <a:prstGeom xmlns:a="http://schemas.openxmlformats.org/drawingml/2006/main" prst="rect">
-            <a:avLst/>
-          </a:prstGeom>
-        </p:spPr>
-        <p:txBody>
-          <a:bodyPr xmlns:a="http://schemas.openxmlformats.org/drawingml/2006/main"/>
-          <a:lstStyle xmlns:a="http://schemas.openxmlformats.org/drawingml/2006/main"/>
-          <a:p xmlns:a="http://schemas.openxmlformats.org/drawingml/2006/main"/>
-        </p:txBody>
-      </p:sp>
-      <p:sp>
-        <p:nvSpPr>
-          <p:cNvPr id="4" name="Slide Image Placeholder"/>
-          <p:cNvSpPr/>
-          <p:nvPr>
-            <p:ph type="sldImg" idx="2"/>
-          </p:nvPr>
-        </p:nvSpPr>
-        <p:spPr>
-          <a:prstGeom xmlns:a="http://schemas.openxmlformats.org/drawingml/2006/main" prst="rect">
-            <a:avLst/>
-          </a:prstGeom>
-        </p:spPr>
-        <p:txBody>
-          <a:bodyPr xmlns:a="http://schemas.openxmlformats.org/drawingml/2006/main"/>
-          <a:lstStyle xmlns:a="http://schemas.openxmlformats.org/drawingml/2006/main"/>
-          <a:p xmlns:a="http://schemas.openxmlformats.org/drawingml/2006/main"/>
-        </p:txBody>
-      </p:sp>
-      <p:sp>
-        <p:nvSpPr>
-          <p:cNvPr id="5" name="Notes Placeholder"/>
-          <p:cNvSpPr/>
-          <p:nvPr>
-            <p:ph type="body" sz="quarter" idx="3"/>
-          </p:nvPr>
-        </p:nvSpPr>
-        <p:spPr>
-          <a:prstGeom xmlns:a="http://schemas.openxmlformats.org/drawingml/2006/main" prst="rect">
-            <a:avLst/>
-          </a:prstGeom>
-        </p:spPr>
-        <p:txBody>
-          <a:bodyPr xmlns:a="http://schemas.openxmlformats.org/drawingml/2006/main"/>
-          <a:lstStyle xmlns:a="http://schemas.openxmlformats.org/drawingml/2006/main"/>
-          <a:p xmlns:a="http://schemas.openxmlformats.org/drawingml/2006/main"/>
-        </p:txBody>
-      </p:sp>
-      <p:sp>
-        <p:nvSpPr>
-          <p:cNvPr id="6" name="Footer Placeholder"/>
-          <p:cNvSpPr/>
-          <p:nvPr>
-            <p:ph type="ftr" sz="quarter" idx="4"/>
-          </p:nvPr>
-        </p:nvSpPr>
-        <p:spPr>
-          <a:prstGeom xmlns:a="http://schemas.openxmlformats.org/drawingml/2006/main" prst="rect">
-            <a:avLst/>
-          </a:prstGeom>
-        </p:spPr>
-        <p:txBody>
-          <a:bodyPr xmlns:a="http://schemas.openxmlformats.org/drawingml/2006/main"/>
-          <a:lstStyle xmlns:a="http://schemas.openxmlformats.org/drawingml/2006/main"/>
-          <a:p xmlns:a="http://schemas.openxmlformats.org/drawingml/2006/main"/>
-        </p:txBody>
-      </p:sp>
-      <p:sp>
-        <p:nvSpPr>
-          <p:cNvPr id="7" name="Slide Number Placeholder"/>
-          <p:cNvSpPr/>
-          <p:nvPr>
-            <p:ph type="sldNum" sz="quarter" idx="5"/>
-          </p:nvPr>
-        </p:nvSpPr>
-        <p:spPr>
-          <a:prstGeom xmlns:a="http://schemas.openxmlformats.org/drawingml/2006/main" prst="rect">
-            <a:avLst/>
-          </a:prstGeom>
-        </p:spPr>
-        <p:txBody>
-          <a:bodyPr xmlns:a="http://schemas.openxmlformats.org/drawingml/2006/main"/>
-          <a:lstStyle xmlns:a="http://schemas.openxmlformats.org/drawingml/2006/main"/>
-          <a:p xmlns:a="http://schemas.openxmlformats.org/drawingml/2006/main"/>
-        </p:txBody>
-      </p:sp>
-    </p:spTree>
-  </p:cSld>
-  <p:clrMap bg1="lt1" tx1="dk1" bg2="lt2" tx2="dk2" accent1="accent1" accent2="accent2" accent3="accent3" accent4="accent4" accent5="accent5" accent6="accent6" hlink="hlink" folHlink="folHlink"/>
-  <p:notesStyle>
-    <a:lvl1pPr xmlns:a="http://schemas.openxmlformats.org/drawingml/2006/main" marL="0" algn="l" defTabSz="914400" rtl="0" eaLnBrk="1" latinLnBrk="0" hangingPunct="1">
-      <a:defRPr sz="1200" kern="1200"/>
-    </a:lvl1pPr>
-  </p:notesStyle>
-</p:notesMaster>
-</file>
-
-<file path=ppt/notesMasters/theme/theme3.xml><?xml version="1.0" encoding="utf-8"?>
-<a:theme xmlns:a="http://schemas.openxmlformats.org/drawingml/2006/main" name="ChatGPT">
-  <a:themeElements>
-    <a:clrScheme name="ChatGPT">
-      <a:dk1>
-        <a:srgbClr val="000000"/>
-      </a:dk1>
-      <a:lt1>
-        <a:srgbClr val="FFFFFF"/>
-      </a:lt1>
-      <a:dk2>
-        <a:srgbClr val="0E2841"/>
-      </a:dk2>
-      <a:lt2>
-        <a:srgbClr val="E8E8E8"/>
-      </a:lt2>
-      <a:accent1>
-        <a:srgbClr val="156082"/>
-      </a:accent1>
-      <a:accent2>
-        <a:srgbClr val="E97132"/>
-      </a:accent2>
-      <a:accent3>
-        <a:srgbClr val="196B24"/>
-      </a:accent3>
-      <a:accent4>
-        <a:srgbClr val="0F9ED5"/>
-      </a:accent4>
-      <a:accent5>
-        <a:srgbClr val="A02B93"/>
-      </a:accent5>
-      <a:accent6>
-        <a:srgbClr val="4EA72E"/>
-      </a:accent6>
-      <a:hlink>
-        <a:srgbClr val="467886"/>
-      </a:hlink>
-      <a:folHlink>
-        <a:srgbClr val="96607D"/>
-      </a:folHlink>
-    </a:clrScheme>
-    <a:fontScheme name="Office">
-      <a:majorFont>
-        <a:latin typeface="Calibri Light"/>
-        <a:ea typeface="Calibri Light"/>
-        <a:cs typeface="Calibri Light"/>
-      </a:majorFont>
-      <a:minorFont>
-        <a:latin typeface="Calibri"/>
-        <a:ea typeface="Calibri"/>
-        <a:cs typeface="Calibri"/>
-      </a:minorFont>
-    </a:fontScheme>
-    <a:fmtScheme name="ChatGPT">
-      <a:fillStyleLst>
-        <a:solidFill>
-          <a:schemeClr val="phClr"/>
-        </a:solidFill>
-        <a:gradFill>
-          <a:gsLst>
-            <a:gs pos="0">
-              <a:schemeClr val="phClr">
-                <a:tint val="67000"/>
-                <a:lumMod val="110000"/>
-                <a:satMod val="105000"/>
-              </a:schemeClr>
-            </a:gs>
-            <a:gs pos="50000">
-              <a:schemeClr val="phClr">
-                <a:tint val="73000"/>
-                <a:lumMod val="105000"/>
-                <a:satMod val="103000"/>
-              </a:schemeClr>
-            </a:gs>
-            <a:gs pos="100000">
-              <a:schemeClr val="phClr">
-                <a:tint val="81000"/>
-                <a:lumMod val="105000"/>
-                <a:satMod val="109000"/>
-              </a:schemeClr>
-            </a:gs>
-          </a:gsLst>
-          <a:lin ang="5400000" scaled="0"/>
-        </a:gradFill>
-        <a:gradFill>
-          <a:gsLst>
-            <a:gs pos="0">
-              <a:schemeClr val="phClr">
-                <a:tint val="94000"/>
-                <a:lumMod val="102000"/>
-                <a:satMod val="103000"/>
-              </a:schemeClr>
-            </a:gs>
-            <a:gs pos="50000">
-              <a:schemeClr val="phClr">
-                <a:shade val="100000"/>
-                <a:lumMod val="100000"/>
-                <a:satMod val="110000"/>
-              </a:schemeClr>
-            </a:gs>
-            <a:gs pos="100000">
-              <a:schemeClr val="phClr">
-                <a:shade val="78000"/>
-                <a:lumMod val="99000"/>
-                <a:satMod val="120000"/>
-              </a:schemeClr>
-            </a:gs>
-          </a:gsLst>
-          <a:lin ang="5400000" scaled="0"/>
-        </a:gradFill>
-      </a:fillStyleLst>
-      <a:lnStyleLst>
-        <a:ln w="12700">
-          <a:solidFill>
-            <a:schemeClr val="phClr"/>
-          </a:solidFill>
-          <a:prstDash val="solid"/>
-        </a:ln>
-        <a:ln w="19050">
-          <a:solidFill>
-            <a:schemeClr val="phClr"/>
-          </a:solidFill>
-          <a:prstDash val="solid"/>
-        </a:ln>
-        <a:ln w="25400">
-          <a:solidFill>
-            <a:schemeClr val="phClr"/>
-          </a:solidFill>
-          <a:prstDash val="solid"/>
-        </a:ln>
-      </a:lnStyleLst>
-      <a:effectStyleLst>
-        <a:effectStyle>
-          <a:effectLst/>
-        </a:effectStyle>
-        <a:effectStyle>
-          <a:effectLst/>
-        </a:effectStyle>
-        <a:effectStyle>
-          <a:effectLst>
-            <a:outerShdw blurRad="57150" dist="19050" dir="5400000">
-              <a:srgbClr val="000000">
-                <a:alpha val="16000"/>
-              </a:srgbClr>
-            </a:outerShdw>
-          </a:effectLst>
-        </a:effectStyle>
-        <a:effectStyle>
-          <a:effectLst>
-            <a:outerShdw blurRad="19050" dist="9525" dir="5400000">
-              <a:srgbClr val="000000">
-                <a:alpha val="6000"/>
-              </a:srgbClr>
-            </a:outerShdw>
-          </a:effectLst>
-        </a:effectStyle>
-        <a:effectStyle>
-          <a:effectLst>
-            <a:outerShdw blurRad="28575" dist="9525" dir="5400000">
-              <a:srgbClr val="000000">
-                <a:alpha val="8000"/>
-              </a:srgbClr>
-            </a:outerShdw>
-          </a:effectLst>
-        </a:effectStyle>
-        <a:effectStyle>
-          <a:effectLst>
-            <a:outerShdw blurRad="57150" dist="19050" dir="5400000">
-              <a:srgbClr val="000000">
-                <a:alpha val="10000"/>
-              </a:srgbClr>
-            </a:outerShdw>
-          </a:effectLst>
-        </a:effectStyle>
-        <a:effectStyle>
-          <a:effectLst>
-            <a:outerShdw blurRad="114300" dist="38100" dir="5400000">
-              <a:srgbClr val="000000">
-                <a:alpha val="12000"/>
-              </a:srgbClr>
-            </a:outerShdw>
-          </a:effectLst>
-        </a:effectStyle>
-        <a:effectStyle>
-          <a:effectLst>
-            <a:outerShdw blurRad="171450" dist="57150" dir="5400000">
-              <a:srgbClr val="000000">
-                <a:alpha val="16000"/>
-              </a:srgbClr>
-            </a:outerShdw>
-          </a:effectLst>
-        </a:effectStyle>
-        <a:effectStyle>
-          <a:effectLst>
-            <a:outerShdw blurRad="266700" dist="95250" dir="5400000">
-              <a:srgbClr val="000000">
-                <a:alpha val="24000"/>
-              </a:srgbClr>
-            </a:outerShdw>
-          </a:effectLst>
-        </a:effectStyle>
-      </a:effectStyleLst>
-      <a:bgFillStyleLst>
-        <a:solidFill>
-          <a:schemeClr val="phClr"/>
-        </a:solidFill>
-        <a:solidFill>
-          <a:schemeClr val="phClr">
-            <a:tint val="95000"/>
-            <a:satMod val="170000"/>
-          </a:schemeClr>
-        </a:solidFill>
-        <a:gradFill>
-          <a:gsLst>
-            <a:gs pos="0">
-              <a:schemeClr val="phClr">
-                <a:tint val="93000"/>
-                <a:shade val="98000"/>
-                <a:lumMod val="102000"/>
-                <a:satMod val="150000"/>
-              </a:schemeClr>
-            </a:gs>
-            <a:gs pos="50000">
-              <a:schemeClr val="phClr">
-                <a:tint val="98000"/>
-                <a:shade val="90000"/>
-                <a:lumMod val="103000"/>
-                <a:satMod val="130000"/>
-              </a:schemeClr>
-            </a:gs>
-            <a:gs pos="100000">
-              <a:schemeClr val="phClr">
-                <a:shade val="63000"/>
-                <a:satMod val="120000"/>
-              </a:schemeClr>
-            </a:gs>
-          </a:gsLst>
-          <a:lin ang="5400000" scaled="0"/>
-        </a:gradFill>
-      </a:bgFillStyleLst>
-    </a:fmtScheme>
-  </a:themeElements>
-</a:theme>
-</file>
-
-<file path=ppt/notesSlides/notesSlide1.xml><?xml version="1.0" encoding="utf-8"?>
-<p:notes xmlns:p="http://schemas.openxmlformats.org/presentationml/2006/main">
-  <p:cSld>
-    <p:spTree>
-      <p:nvGrpSpPr>
-        <p:cNvPr id="1" name=""/>
-        <p:cNvGrpSpPr/>
-        <p:nvPr/>
-      </p:nvGrpSpPr>
-      <p:grpSpPr>
-        <a:xfrm xmlns:a="http://schemas.openxmlformats.org/drawingml/2006/main"/>
-      </p:grpSpPr>
-      <p:sp>
-        <p:nvSpPr>
-          <p:cNvPr id="2" name="Slide Image Placeholder 1"/>
-          <p:cNvSpPr>
-            <a:spLocks xmlns:a="http://schemas.openxmlformats.org/drawingml/2006/main" noGrp="1"/>
-          </p:cNvSpPr>
-          <p:nvPr>
-            <p:ph type="sldImg" idx="0"/>
-          </p:nvPr>
-        </p:nvSpPr>
-        <p:spPr/>
-      </p:sp>
-      <p:sp>
-        <p:nvSpPr>
-          <p:cNvPr id="3" name="Notes Placeholder 2"/>
-          <p:cNvSpPr>
-            <a:spLocks xmlns:a="http://schemas.openxmlformats.org/drawingml/2006/main" noGrp="1"/>
-          </p:cNvSpPr>
-          <p:nvPr>
-            <p:ph type="body" idx="1"/>
-          </p:nvPr>
-        </p:nvSpPr>
-        <p:spPr/>
-        <p:txBody>
-          <a:bodyPr xmlns:a="http://schemas.openxmlformats.org/drawingml/2006/main"/>
-          <a:lstStyle xmlns:a="http://schemas.openxmlformats.org/drawingml/2006/main"/>
-          <a:p xmlns:a="http://schemas.openxmlformats.org/drawingml/2006/main">
-            <a:r>
-              <a:t>第 2 堂從可以跑 Flask 的開發容器開始，接著補齊容器日常管理，最後進入 Volume。</a:t>
-            </a:r>
-          </a:p>
-        </p:txBody>
-      </p:sp>
-      <p:sp>
-        <p:nvSpPr>
-          <p:cNvPr id="4" name="Slide Number Placeholder 3"/>
-          <p:cNvSpPr>
-            <a:spLocks xmlns:a="http://schemas.openxmlformats.org/drawingml/2006/main" noGrp="1"/>
-          </p:cNvSpPr>
-          <p:nvPr>
-            <p:ph type="sldNum" idx="5"/>
-          </p:nvPr>
-        </p:nvSpPr>
-        <p:spPr/>
-        <p:txBody>
-          <a:bodyPr xmlns:a="http://schemas.openxmlformats.org/drawingml/2006/main"/>
-          <a:lstStyle xmlns:a="http://schemas.openxmlformats.org/drawingml/2006/main"/>
-          <a:p xmlns:a="http://schemas.openxmlformats.org/drawingml/2006/main"/>
-        </p:txBody>
-      </p:sp>
-    </p:spTree>
-  </p:cSld>
-  <p:clrMapOvr>
-    <a:masterClrMapping xmlns:a="http://schemas.openxmlformats.org/drawingml/2006/main"/>
-  </p:clrMapOvr>
-</p:notes>
-</file>
-
-<file path=ppt/notesSlides/notesSlide10.xml><?xml version="1.0" encoding="utf-8"?>
-<p:notes xmlns:p="http://schemas.openxmlformats.org/presentationml/2006/main">
-  <p:cSld>
-    <p:spTree>
-      <p:nvGrpSpPr>
-        <p:cNvPr id="1" name=""/>
-        <p:cNvGrpSpPr/>
-        <p:nvPr/>
-      </p:nvGrpSpPr>
-      <p:grpSpPr>
-        <a:xfrm xmlns:a="http://schemas.openxmlformats.org/drawingml/2006/main"/>
-      </p:grpSpPr>
-      <p:sp>
-        <p:nvSpPr>
-          <p:cNvPr id="2" name="Slide Image Placeholder 1"/>
-          <p:cNvSpPr>
-            <a:spLocks xmlns:a="http://schemas.openxmlformats.org/drawingml/2006/main" noGrp="1"/>
-          </p:cNvSpPr>
-          <p:nvPr>
-            <p:ph type="sldImg" idx="0"/>
-          </p:nvPr>
-        </p:nvSpPr>
-        <p:spPr/>
-      </p:sp>
-      <p:sp>
-        <p:nvSpPr>
-          <p:cNvPr id="3" name="Notes Placeholder 2"/>
-          <p:cNvSpPr>
-            <a:spLocks xmlns:a="http://schemas.openxmlformats.org/drawingml/2006/main" noGrp="1"/>
-          </p:cNvSpPr>
-          <p:nvPr>
-            <p:ph type="body" idx="1"/>
-          </p:nvPr>
-        </p:nvSpPr>
-        <p:spPr/>
-        <p:txBody>
-          <a:bodyPr xmlns:a="http://schemas.openxmlformats.org/drawingml/2006/main"/>
-          <a:lstStyle xmlns:a="http://schemas.openxmlformats.org/drawingml/2006/main"/>
-          <a:p xmlns:a="http://schemas.openxmlformats.org/drawingml/2006/main">
-            <a:r>
-              <a:t>先讓學生感受到 bind mount 的便利，後面再正式介紹 Volume 的兩種形式。</a:t>
-            </a:r>
-          </a:p>
-        </p:txBody>
-      </p:sp>
-      <p:sp>
-        <p:nvSpPr>
-          <p:cNvPr id="4" name="Slide Number Placeholder 3"/>
-          <p:cNvSpPr>
-            <a:spLocks xmlns:a="http://schemas.openxmlformats.org/drawingml/2006/main" noGrp="1"/>
-          </p:cNvSpPr>
-          <p:nvPr>
-            <p:ph type="sldNum" idx="5"/>
-          </p:nvPr>
-        </p:nvSpPr>
-        <p:spPr/>
-        <p:txBody>
-          <a:bodyPr xmlns:a="http://schemas.openxmlformats.org/drawingml/2006/main"/>
-          <a:lstStyle xmlns:a="http://schemas.openxmlformats.org/drawingml/2006/main"/>
-          <a:p xmlns:a="http://schemas.openxmlformats.org/drawingml/2006/main"/>
-        </p:txBody>
-      </p:sp>
-    </p:spTree>
-  </p:cSld>
-  <p:clrMapOvr>
-    <a:masterClrMapping xmlns:a="http://schemas.openxmlformats.org/drawingml/2006/main"/>
-  </p:clrMapOvr>
-</p:notes>
-</file>
-
-<file path=ppt/notesSlides/notesSlide11.xml><?xml version="1.0" encoding="utf-8"?>
-<p:notes xmlns:p="http://schemas.openxmlformats.org/presentationml/2006/main">
-  <p:cSld>
-    <p:spTree>
-      <p:nvGrpSpPr>
-        <p:cNvPr id="1" name=""/>
-        <p:cNvGrpSpPr/>
-        <p:nvPr/>
-      </p:nvGrpSpPr>
-      <p:grpSpPr>
-        <a:xfrm xmlns:a="http://schemas.openxmlformats.org/drawingml/2006/main"/>
-      </p:grpSpPr>
-      <p:sp>
-        <p:nvSpPr>
-          <p:cNvPr id="2" name="Slide Image Placeholder 1"/>
-          <p:cNvSpPr>
-            <a:spLocks xmlns:a="http://schemas.openxmlformats.org/drawingml/2006/main" noGrp="1"/>
-          </p:cNvSpPr>
-          <p:nvPr>
-            <p:ph type="sldImg" idx="0"/>
-          </p:nvPr>
-        </p:nvSpPr>
-        <p:spPr/>
-      </p:sp>
-      <p:sp>
-        <p:nvSpPr>
-          <p:cNvPr id="3" name="Notes Placeholder 2"/>
-          <p:cNvSpPr>
-            <a:spLocks xmlns:a="http://schemas.openxmlformats.org/drawingml/2006/main" noGrp="1"/>
-          </p:cNvSpPr>
-          <p:nvPr>
-            <p:ph type="body" idx="1"/>
-          </p:nvPr>
-        </p:nvSpPr>
-        <p:spPr/>
-        <p:txBody>
-          <a:bodyPr xmlns:a="http://schemas.openxmlformats.org/drawingml/2006/main"/>
-          <a:lstStyle xmlns:a="http://schemas.openxmlformats.org/drawingml/2006/main"/>
-          <a:p xmlns:a="http://schemas.openxmlformats.org/drawingml/2006/main">
-            <a:r>
-              <a:t>練習題來自 exercises.md 第 2 堂實作題 P1 與概念題 Q2。</a:t>
-            </a:r>
-          </a:p>
-        </p:txBody>
-      </p:sp>
-      <p:sp>
-        <p:nvSpPr>
-          <p:cNvPr id="4" name="Slide Number Placeholder 3"/>
-          <p:cNvSpPr>
-            <a:spLocks xmlns:a="http://schemas.openxmlformats.org/drawingml/2006/main" noGrp="1"/>
-          </p:cNvSpPr>
-          <p:nvPr>
-            <p:ph type="sldNum" idx="5"/>
-          </p:nvPr>
-        </p:nvSpPr>
-        <p:spPr/>
-        <p:txBody>
-          <a:bodyPr xmlns:a="http://schemas.openxmlformats.org/drawingml/2006/main"/>
-          <a:lstStyle xmlns:a="http://schemas.openxmlformats.org/drawingml/2006/main"/>
-          <a:p xmlns:a="http://schemas.openxmlformats.org/drawingml/2006/main"/>
-        </p:txBody>
-      </p:sp>
-    </p:spTree>
-  </p:cSld>
-  <p:clrMapOvr>
-    <a:masterClrMapping xmlns:a="http://schemas.openxmlformats.org/drawingml/2006/main"/>
-  </p:clrMapOvr>
-</p:notes>
-</file>
-
-<file path=ppt/notesSlides/notesSlide12.xml><?xml version="1.0" encoding="utf-8"?>
-<p:notes xmlns:p="http://schemas.openxmlformats.org/presentationml/2006/main">
-  <p:cSld>
-    <p:spTree>
-      <p:nvGrpSpPr>
-        <p:cNvPr id="1" name=""/>
-        <p:cNvGrpSpPr/>
-        <p:nvPr/>
-      </p:nvGrpSpPr>
-      <p:grpSpPr>
-        <a:xfrm xmlns:a="http://schemas.openxmlformats.org/drawingml/2006/main"/>
-      </p:grpSpPr>
-      <p:sp>
-        <p:nvSpPr>
-          <p:cNvPr id="2" name="Slide Image Placeholder 1"/>
-          <p:cNvSpPr>
-            <a:spLocks xmlns:a="http://schemas.openxmlformats.org/drawingml/2006/main" noGrp="1"/>
-          </p:cNvSpPr>
-          <p:nvPr>
-            <p:ph type="sldImg" idx="0"/>
-          </p:nvPr>
-        </p:nvSpPr>
-        <p:spPr/>
-      </p:sp>
-      <p:sp>
-        <p:nvSpPr>
-          <p:cNvPr id="3" name="Notes Placeholder 2"/>
-          <p:cNvSpPr>
-            <a:spLocks xmlns:a="http://schemas.openxmlformats.org/drawingml/2006/main" noGrp="1"/>
-          </p:cNvSpPr>
-          <p:nvPr>
-            <p:ph type="body" idx="1"/>
-          </p:nvPr>
-        </p:nvSpPr>
-        <p:spPr/>
-        <p:txBody>
-          <a:bodyPr xmlns:a="http://schemas.openxmlformats.org/drawingml/2006/main"/>
-          <a:lstStyle xmlns:a="http://schemas.openxmlformats.org/drawingml/2006/main"/>
-          <a:p xmlns:a="http://schemas.openxmlformats.org/drawingml/2006/main">
-            <a:r>
-              <a:t>這頁建立日常排查的第一步。</a:t>
-            </a:r>
-          </a:p>
-        </p:txBody>
-      </p:sp>
-      <p:sp>
-        <p:nvSpPr>
-          <p:cNvPr id="4" name="Slide Number Placeholder 3"/>
-          <p:cNvSpPr>
-            <a:spLocks xmlns:a="http://schemas.openxmlformats.org/drawingml/2006/main" noGrp="1"/>
-          </p:cNvSpPr>
-          <p:nvPr>
-            <p:ph type="sldNum" idx="5"/>
-          </p:nvPr>
-        </p:nvSpPr>
-        <p:spPr/>
-        <p:txBody>
-          <a:bodyPr xmlns:a="http://schemas.openxmlformats.org/drawingml/2006/main"/>
-          <a:lstStyle xmlns:a="http://schemas.openxmlformats.org/drawingml/2006/main"/>
-          <a:p xmlns:a="http://schemas.openxmlformats.org/drawingml/2006/main"/>
-        </p:txBody>
-      </p:sp>
-    </p:spTree>
-  </p:cSld>
-  <p:clrMapOvr>
-    <a:masterClrMapping xmlns:a="http://schemas.openxmlformats.org/drawingml/2006/main"/>
-  </p:clrMapOvr>
-</p:notes>
-</file>
-
-<file path=ppt/notesSlides/notesSlide13.xml><?xml version="1.0" encoding="utf-8"?>
-<p:notes xmlns:p="http://schemas.openxmlformats.org/presentationml/2006/main">
-  <p:cSld>
-    <p:spTree>
-      <p:nvGrpSpPr>
-        <p:cNvPr id="1" name=""/>
-        <p:cNvGrpSpPr/>
-        <p:nvPr/>
-      </p:nvGrpSpPr>
-      <p:grpSpPr>
-        <a:xfrm xmlns:a="http://schemas.openxmlformats.org/drawingml/2006/main"/>
-      </p:grpSpPr>
-      <p:sp>
-        <p:nvSpPr>
-          <p:cNvPr id="2" name="Slide Image Placeholder 1"/>
-          <p:cNvSpPr>
-            <a:spLocks xmlns:a="http://schemas.openxmlformats.org/drawingml/2006/main" noGrp="1"/>
-          </p:cNvSpPr>
-          <p:nvPr>
-            <p:ph type="sldImg" idx="0"/>
-          </p:nvPr>
-        </p:nvSpPr>
-        <p:spPr/>
-      </p:sp>
-      <p:sp>
-        <p:nvSpPr>
-          <p:cNvPr id="3" name="Notes Placeholder 2"/>
-          <p:cNvSpPr>
-            <a:spLocks xmlns:a="http://schemas.openxmlformats.org/drawingml/2006/main" noGrp="1"/>
-          </p:cNvSpPr>
-          <p:nvPr>
-            <p:ph type="body" idx="1"/>
-          </p:nvPr>
-        </p:nvSpPr>
-        <p:spPr/>
-        <p:txBody>
-          <a:bodyPr xmlns:a="http://schemas.openxmlformats.org/drawingml/2006/main"/>
-          <a:lstStyle xmlns:a="http://schemas.openxmlformats.org/drawingml/2006/main"/>
-          <a:p xmlns:a="http://schemas.openxmlformats.org/drawingml/2006/main">
-            <a:r>
-              <a:t>PORTS 是新手最常忽略的欄位。沒有 port mapping，瀏覽器從主機通常連不到容器服務。</a:t>
-            </a:r>
-          </a:p>
-        </p:txBody>
-      </p:sp>
-      <p:sp>
-        <p:nvSpPr>
-          <p:cNvPr id="4" name="Slide Number Placeholder 3"/>
-          <p:cNvSpPr>
-            <a:spLocks xmlns:a="http://schemas.openxmlformats.org/drawingml/2006/main" noGrp="1"/>
-          </p:cNvSpPr>
-          <p:nvPr>
-            <p:ph type="sldNum" idx="5"/>
-          </p:nvPr>
-        </p:nvSpPr>
-        <p:spPr/>
-        <p:txBody>
-          <a:bodyPr xmlns:a="http://schemas.openxmlformats.org/drawingml/2006/main"/>
-          <a:lstStyle xmlns:a="http://schemas.openxmlformats.org/drawingml/2006/main"/>
-          <a:p xmlns:a="http://schemas.openxmlformats.org/drawingml/2006/main"/>
-        </p:txBody>
-      </p:sp>
-    </p:spTree>
-  </p:cSld>
-  <p:clrMapOvr>
-    <a:masterClrMapping xmlns:a="http://schemas.openxmlformats.org/drawingml/2006/main"/>
-  </p:clrMapOvr>
-</p:notes>
-</file>
-
-<file path=ppt/notesSlides/notesSlide14.xml><?xml version="1.0" encoding="utf-8"?>
-<p:notes xmlns:p="http://schemas.openxmlformats.org/presentationml/2006/main">
-  <p:cSld>
-    <p:spTree>
-      <p:nvGrpSpPr>
-        <p:cNvPr id="1" name=""/>
-        <p:cNvGrpSpPr/>
-        <p:nvPr/>
-      </p:nvGrpSpPr>
-      <p:grpSpPr>
-        <a:xfrm xmlns:a="http://schemas.openxmlformats.org/drawingml/2006/main"/>
-      </p:grpSpPr>
-      <p:sp>
-        <p:nvSpPr>
-          <p:cNvPr id="2" name="Slide Image Placeholder 1"/>
-          <p:cNvSpPr>
-            <a:spLocks xmlns:a="http://schemas.openxmlformats.org/drawingml/2006/main" noGrp="1"/>
-          </p:cNvSpPr>
-          <p:nvPr>
-            <p:ph type="sldImg" idx="0"/>
-          </p:nvPr>
-        </p:nvSpPr>
-        <p:spPr/>
-      </p:sp>
-      <p:sp>
-        <p:nvSpPr>
-          <p:cNvPr id="3" name="Notes Placeholder 2"/>
-          <p:cNvSpPr>
-            <a:spLocks xmlns:a="http://schemas.openxmlformats.org/drawingml/2006/main" noGrp="1"/>
-          </p:cNvSpPr>
-          <p:nvPr>
-            <p:ph type="body" idx="1"/>
-          </p:nvPr>
-        </p:nvSpPr>
-        <p:spPr/>
-        <p:txBody>
-          <a:bodyPr xmlns:a="http://schemas.openxmlformats.org/drawingml/2006/main"/>
-          <a:lstStyle xmlns:a="http://schemas.openxmlformats.org/drawingml/2006/main"/>
-          <a:p xmlns:a="http://schemas.openxmlformats.org/drawingml/2006/main">
-            <a:r>
-              <a:t>restart 是實務上很常用的快速恢復手段，但正式環境仍要理解服務是否可以安全重啟。</a:t>
-            </a:r>
-          </a:p>
-        </p:txBody>
-      </p:sp>
-      <p:sp>
-        <p:nvSpPr>
-          <p:cNvPr id="4" name="Slide Number Placeholder 3"/>
-          <p:cNvSpPr>
-            <a:spLocks xmlns:a="http://schemas.openxmlformats.org/drawingml/2006/main" noGrp="1"/>
-          </p:cNvSpPr>
-          <p:nvPr>
-            <p:ph type="sldNum" idx="5"/>
-          </p:nvPr>
-        </p:nvSpPr>
-        <p:spPr/>
-        <p:txBody>
-          <a:bodyPr xmlns:a="http://schemas.openxmlformats.org/drawingml/2006/main"/>
-          <a:lstStyle xmlns:a="http://schemas.openxmlformats.org/drawingml/2006/main"/>
-          <a:p xmlns:a="http://schemas.openxmlformats.org/drawingml/2006/main"/>
-        </p:txBody>
-      </p:sp>
-    </p:spTree>
-  </p:cSld>
-  <p:clrMapOvr>
-    <a:masterClrMapping xmlns:a="http://schemas.openxmlformats.org/drawingml/2006/main"/>
-  </p:clrMapOvr>
-</p:notes>
-</file>
-
-<file path=ppt/notesSlides/notesSlide15.xml><?xml version="1.0" encoding="utf-8"?>
-<p:notes xmlns:p="http://schemas.openxmlformats.org/presentationml/2006/main">
-  <p:cSld>
-    <p:spTree>
-      <p:nvGrpSpPr>
-        <p:cNvPr id="1" name=""/>
-        <p:cNvGrpSpPr/>
-        <p:nvPr/>
-      </p:nvGrpSpPr>
-      <p:grpSpPr>
-        <a:xfrm xmlns:a="http://schemas.openxmlformats.org/drawingml/2006/main"/>
-      </p:grpSpPr>
-      <p:sp>
-        <p:nvSpPr>
-          <p:cNvPr id="2" name="Slide Image Placeholder 1"/>
-          <p:cNvSpPr>
-            <a:spLocks xmlns:a="http://schemas.openxmlformats.org/drawingml/2006/main" noGrp="1"/>
-          </p:cNvSpPr>
-          <p:nvPr>
-            <p:ph type="sldImg" idx="0"/>
-          </p:nvPr>
-        </p:nvSpPr>
-        <p:spPr/>
-      </p:sp>
-      <p:sp>
-        <p:nvSpPr>
-          <p:cNvPr id="3" name="Notes Placeholder 2"/>
-          <p:cNvSpPr>
-            <a:spLocks xmlns:a="http://schemas.openxmlformats.org/drawingml/2006/main" noGrp="1"/>
-          </p:cNvSpPr>
-          <p:nvPr>
-            <p:ph type="body" idx="1"/>
-          </p:nvPr>
-        </p:nvSpPr>
-        <p:spPr/>
-        <p:txBody>
-          <a:bodyPr xmlns:a="http://schemas.openxmlformats.org/drawingml/2006/main"/>
-          <a:lstStyle xmlns:a="http://schemas.openxmlformats.org/drawingml/2006/main"/>
-          <a:p xmlns:a="http://schemas.openxmlformats.org/drawingml/2006/main">
-            <a:r>
-              <a:t>用資料庫寫入作為例子，讓學生理解為什麼 Docker 預設保守。</a:t>
-            </a:r>
-          </a:p>
-        </p:txBody>
-      </p:sp>
-      <p:sp>
-        <p:nvSpPr>
-          <p:cNvPr id="4" name="Slide Number Placeholder 3"/>
-          <p:cNvSpPr>
-            <a:spLocks xmlns:a="http://schemas.openxmlformats.org/drawingml/2006/main" noGrp="1"/>
-          </p:cNvSpPr>
-          <p:nvPr>
-            <p:ph type="sldNum" idx="5"/>
-          </p:nvPr>
-        </p:nvSpPr>
-        <p:spPr/>
-        <p:txBody>
-          <a:bodyPr xmlns:a="http://schemas.openxmlformats.org/drawingml/2006/main"/>
-          <a:lstStyle xmlns:a="http://schemas.openxmlformats.org/drawingml/2006/main"/>
-          <a:p xmlns:a="http://schemas.openxmlformats.org/drawingml/2006/main"/>
-        </p:txBody>
-      </p:sp>
-    </p:spTree>
-  </p:cSld>
-  <p:clrMapOvr>
-    <a:masterClrMapping xmlns:a="http://schemas.openxmlformats.org/drawingml/2006/main"/>
-  </p:clrMapOvr>
-</p:notes>
-</file>
-
-<file path=ppt/notesSlides/notesSlide16.xml><?xml version="1.0" encoding="utf-8"?>
-<p:notes xmlns:p="http://schemas.openxmlformats.org/presentationml/2006/main">
-  <p:cSld>
-    <p:spTree>
-      <p:nvGrpSpPr>
-        <p:cNvPr id="1" name=""/>
-        <p:cNvGrpSpPr/>
-        <p:nvPr/>
-      </p:nvGrpSpPr>
-      <p:grpSpPr>
-        <a:xfrm xmlns:a="http://schemas.openxmlformats.org/drawingml/2006/main"/>
-      </p:grpSpPr>
-      <p:sp>
-        <p:nvSpPr>
-          <p:cNvPr id="2" name="Slide Image Placeholder 1"/>
-          <p:cNvSpPr>
-            <a:spLocks xmlns:a="http://schemas.openxmlformats.org/drawingml/2006/main" noGrp="1"/>
-          </p:cNvSpPr>
-          <p:nvPr>
-            <p:ph type="sldImg" idx="0"/>
-          </p:nvPr>
-        </p:nvSpPr>
-        <p:spPr/>
-      </p:sp>
-      <p:sp>
-        <p:nvSpPr>
-          <p:cNvPr id="3" name="Notes Placeholder 2"/>
-          <p:cNvSpPr>
-            <a:spLocks xmlns:a="http://schemas.openxmlformats.org/drawingml/2006/main" noGrp="1"/>
-          </p:cNvSpPr>
-          <p:nvPr>
-            <p:ph type="body" idx="1"/>
-          </p:nvPr>
-        </p:nvSpPr>
-        <p:spPr/>
-        <p:txBody>
-          <a:bodyPr xmlns:a="http://schemas.openxmlformats.org/drawingml/2006/main"/>
-          <a:lstStyle xmlns:a="http://schemas.openxmlformats.org/drawingml/2006/main"/>
-          <a:p xmlns:a="http://schemas.openxmlformats.org/drawingml/2006/main">
-            <a:r>
-              <a:t>練習題來自 exercises.md 第 2 堂實作題 P2 與概念題 Q4。</a:t>
-            </a:r>
-          </a:p>
-        </p:txBody>
-      </p:sp>
-      <p:sp>
-        <p:nvSpPr>
-          <p:cNvPr id="4" name="Slide Number Placeholder 3"/>
-          <p:cNvSpPr>
-            <a:spLocks xmlns:a="http://schemas.openxmlformats.org/drawingml/2006/main" noGrp="1"/>
-          </p:cNvSpPr>
-          <p:nvPr>
-            <p:ph type="sldNum" idx="5"/>
-          </p:nvPr>
-        </p:nvSpPr>
-        <p:spPr/>
-        <p:txBody>
-          <a:bodyPr xmlns:a="http://schemas.openxmlformats.org/drawingml/2006/main"/>
-          <a:lstStyle xmlns:a="http://schemas.openxmlformats.org/drawingml/2006/main"/>
-          <a:p xmlns:a="http://schemas.openxmlformats.org/drawingml/2006/main"/>
-        </p:txBody>
-      </p:sp>
-    </p:spTree>
-  </p:cSld>
-  <p:clrMapOvr>
-    <a:masterClrMapping xmlns:a="http://schemas.openxmlformats.org/drawingml/2006/main"/>
-  </p:clrMapOvr>
-</p:notes>
-</file>
-
-<file path=ppt/notesSlides/notesSlide17.xml><?xml version="1.0" encoding="utf-8"?>
-<p:notes xmlns:p="http://schemas.openxmlformats.org/presentationml/2006/main">
-  <p:cSld>
-    <p:spTree>
-      <p:nvGrpSpPr>
-        <p:cNvPr id="1" name=""/>
-        <p:cNvGrpSpPr/>
-        <p:nvPr/>
-      </p:nvGrpSpPr>
-      <p:grpSpPr>
-        <a:xfrm xmlns:a="http://schemas.openxmlformats.org/drawingml/2006/main"/>
-      </p:grpSpPr>
-      <p:sp>
-        <p:nvSpPr>
-          <p:cNvPr id="2" name="Slide Image Placeholder 1"/>
-          <p:cNvSpPr>
-            <a:spLocks xmlns:a="http://schemas.openxmlformats.org/drawingml/2006/main" noGrp="1"/>
-          </p:cNvSpPr>
-          <p:nvPr>
-            <p:ph type="sldImg" idx="0"/>
-          </p:nvPr>
-        </p:nvSpPr>
-        <p:spPr/>
-      </p:sp>
-      <p:sp>
-        <p:nvSpPr>
-          <p:cNvPr id="3" name="Notes Placeholder 2"/>
-          <p:cNvSpPr>
-            <a:spLocks xmlns:a="http://schemas.openxmlformats.org/drawingml/2006/main" noGrp="1"/>
-          </p:cNvSpPr>
-          <p:nvPr>
-            <p:ph type="body" idx="1"/>
-          </p:nvPr>
-        </p:nvSpPr>
-        <p:spPr/>
-        <p:txBody>
-          <a:bodyPr xmlns:a="http://schemas.openxmlformats.org/drawingml/2006/main"/>
-          <a:lstStyle xmlns:a="http://schemas.openxmlformats.org/drawingml/2006/main"/>
-          <a:p xmlns:a="http://schemas.openxmlformats.org/drawingml/2006/main">
-            <a:r>
-              <a:t>提醒學生不要只背 bash。`docker exec -it my-web sh` 很常見。</a:t>
-            </a:r>
-          </a:p>
-        </p:txBody>
-      </p:sp>
-      <p:sp>
-        <p:nvSpPr>
-          <p:cNvPr id="4" name="Slide Number Placeholder 3"/>
-          <p:cNvSpPr>
-            <a:spLocks xmlns:a="http://schemas.openxmlformats.org/drawingml/2006/main" noGrp="1"/>
-          </p:cNvSpPr>
-          <p:nvPr>
-            <p:ph type="sldNum" idx="5"/>
-          </p:nvPr>
-        </p:nvSpPr>
-        <p:spPr/>
-        <p:txBody>
-          <a:bodyPr xmlns:a="http://schemas.openxmlformats.org/drawingml/2006/main"/>
-          <a:lstStyle xmlns:a="http://schemas.openxmlformats.org/drawingml/2006/main"/>
-          <a:p xmlns:a="http://schemas.openxmlformats.org/drawingml/2006/main"/>
-        </p:txBody>
-      </p:sp>
-    </p:spTree>
-  </p:cSld>
-  <p:clrMapOvr>
-    <a:masterClrMapping xmlns:a="http://schemas.openxmlformats.org/drawingml/2006/main"/>
-  </p:clrMapOvr>
-</p:notes>
-</file>
-
-<file path=ppt/notesSlides/notesSlide18.xml><?xml version="1.0" encoding="utf-8"?>
-<p:notes xmlns:p="http://schemas.openxmlformats.org/presentationml/2006/main">
-  <p:cSld>
-    <p:spTree>
-      <p:nvGrpSpPr>
-        <p:cNvPr id="1" name=""/>
-        <p:cNvGrpSpPr/>
-        <p:nvPr/>
-      </p:nvGrpSpPr>
-      <p:grpSpPr>
-        <a:xfrm xmlns:a="http://schemas.openxmlformats.org/drawingml/2006/main"/>
-      </p:grpSpPr>
-      <p:sp>
-        <p:nvSpPr>
-          <p:cNvPr id="2" name="Slide Image Placeholder 1"/>
-          <p:cNvSpPr>
-            <a:spLocks xmlns:a="http://schemas.openxmlformats.org/drawingml/2006/main" noGrp="1"/>
-          </p:cNvSpPr>
-          <p:nvPr>
-            <p:ph type="sldImg" idx="0"/>
-          </p:nvPr>
-        </p:nvSpPr>
-        <p:spPr/>
-      </p:sp>
-      <p:sp>
-        <p:nvSpPr>
-          <p:cNvPr id="3" name="Notes Placeholder 2"/>
-          <p:cNvSpPr>
-            <a:spLocks xmlns:a="http://schemas.openxmlformats.org/drawingml/2006/main" noGrp="1"/>
-          </p:cNvSpPr>
-          <p:nvPr>
-            <p:ph type="body" idx="1"/>
-          </p:nvPr>
-        </p:nvSpPr>
-        <p:spPr/>
-        <p:txBody>
-          <a:bodyPr xmlns:a="http://schemas.openxmlformats.org/drawingml/2006/main"/>
-          <a:lstStyle xmlns:a="http://schemas.openxmlformats.org/drawingml/2006/main"/>
-          <a:p xmlns:a="http://schemas.openxmlformats.org/drawingml/2006/main">
-            <a:r>
-              <a:t>這條指令是前面內容的整合版：背景執行、命名、port、volume、workdir、啟動命令。</a:t>
-            </a:r>
-          </a:p>
-        </p:txBody>
-      </p:sp>
-      <p:sp>
-        <p:nvSpPr>
-          <p:cNvPr id="4" name="Slide Number Placeholder 3"/>
-          <p:cNvSpPr>
-            <a:spLocks xmlns:a="http://schemas.openxmlformats.org/drawingml/2006/main" noGrp="1"/>
-          </p:cNvSpPr>
-          <p:nvPr>
-            <p:ph type="sldNum" idx="5"/>
-          </p:nvPr>
-        </p:nvSpPr>
-        <p:spPr/>
-        <p:txBody>
-          <a:bodyPr xmlns:a="http://schemas.openxmlformats.org/drawingml/2006/main"/>
-          <a:lstStyle xmlns:a="http://schemas.openxmlformats.org/drawingml/2006/main"/>
-          <a:p xmlns:a="http://schemas.openxmlformats.org/drawingml/2006/main"/>
-        </p:txBody>
-      </p:sp>
-    </p:spTree>
-  </p:cSld>
-  <p:clrMapOvr>
-    <a:masterClrMapping xmlns:a="http://schemas.openxmlformats.org/drawingml/2006/main"/>
-  </p:clrMapOvr>
-</p:notes>
-</file>
-
-<file path=ppt/notesSlides/notesSlide19.xml><?xml version="1.0" encoding="utf-8"?>
-<p:notes xmlns:p="http://schemas.openxmlformats.org/presentationml/2006/main">
-  <p:cSld>
-    <p:spTree>
-      <p:nvGrpSpPr>
-        <p:cNvPr id="1" name=""/>
-        <p:cNvGrpSpPr/>
-        <p:nvPr/>
-      </p:nvGrpSpPr>
-      <p:grpSpPr>
-        <a:xfrm xmlns:a="http://schemas.openxmlformats.org/drawingml/2006/main"/>
-      </p:grpSpPr>
-      <p:sp>
-        <p:nvSpPr>
-          <p:cNvPr id="2" name="Slide Image Placeholder 1"/>
-          <p:cNvSpPr>
-            <a:spLocks xmlns:a="http://schemas.openxmlformats.org/drawingml/2006/main" noGrp="1"/>
-          </p:cNvSpPr>
-          <p:nvPr>
-            <p:ph type="sldImg" idx="0"/>
-          </p:nvPr>
-        </p:nvSpPr>
-        <p:spPr/>
-      </p:sp>
-      <p:sp>
-        <p:nvSpPr>
-          <p:cNvPr id="3" name="Notes Placeholder 2"/>
-          <p:cNvSpPr>
-            <a:spLocks xmlns:a="http://schemas.openxmlformats.org/drawingml/2006/main" noGrp="1"/>
-          </p:cNvSpPr>
-          <p:nvPr>
-            <p:ph type="body" idx="1"/>
-          </p:nvPr>
-        </p:nvSpPr>
-        <p:spPr/>
-        <p:txBody>
-          <a:bodyPr xmlns:a="http://schemas.openxmlformats.org/drawingml/2006/main"/>
-          <a:lstStyle xmlns:a="http://schemas.openxmlformats.org/drawingml/2006/main"/>
-          <a:p xmlns:a="http://schemas.openxmlformats.org/drawingml/2006/main">
-            <a:r>
-              <a:t>這頁很適合作為容器清理習慣的提醒。</a:t>
-            </a:r>
-          </a:p>
-        </p:txBody>
-      </p:sp>
-      <p:sp>
-        <p:nvSpPr>
-          <p:cNvPr id="4" name="Slide Number Placeholder 3"/>
-          <p:cNvSpPr>
-            <a:spLocks xmlns:a="http://schemas.openxmlformats.org/drawingml/2006/main" noGrp="1"/>
-          </p:cNvSpPr>
-          <p:nvPr>
-            <p:ph type="sldNum" idx="5"/>
-          </p:nvPr>
-        </p:nvSpPr>
-        <p:spPr/>
-        <p:txBody>
-          <a:bodyPr xmlns:a="http://schemas.openxmlformats.org/drawingml/2006/main"/>
-          <a:lstStyle xmlns:a="http://schemas.openxmlformats.org/drawingml/2006/main"/>
-          <a:p xmlns:a="http://schemas.openxmlformats.org/drawingml/2006/main"/>
-        </p:txBody>
-      </p:sp>
-    </p:spTree>
-  </p:cSld>
-  <p:clrMapOvr>
-    <a:masterClrMapping xmlns:a="http://schemas.openxmlformats.org/drawingml/2006/main"/>
-  </p:clrMapOvr>
-</p:notes>
-</file>
-
-<file path=ppt/notesSlides/notesSlide2.xml><?xml version="1.0" encoding="utf-8"?>
-<p:notes xmlns:p="http://schemas.openxmlformats.org/presentationml/2006/main">
-  <p:cSld>
-    <p:spTree>
-      <p:nvGrpSpPr>
-        <p:cNvPr id="1" name=""/>
-        <p:cNvGrpSpPr/>
-        <p:nvPr/>
-      </p:nvGrpSpPr>
-      <p:grpSpPr>
-        <a:xfrm xmlns:a="http://schemas.openxmlformats.org/drawingml/2006/main"/>
-      </p:grpSpPr>
-      <p:sp>
-        <p:nvSpPr>
-          <p:cNvPr id="2" name="Slide Image Placeholder 1"/>
-          <p:cNvSpPr>
-            <a:spLocks xmlns:a="http://schemas.openxmlformats.org/drawingml/2006/main" noGrp="1"/>
-          </p:cNvSpPr>
-          <p:nvPr>
-            <p:ph type="sldImg" idx="0"/>
-          </p:nvPr>
-        </p:nvSpPr>
-        <p:spPr/>
-      </p:sp>
-      <p:sp>
-        <p:nvSpPr>
-          <p:cNvPr id="3" name="Notes Placeholder 2"/>
-          <p:cNvSpPr>
-            <a:spLocks xmlns:a="http://schemas.openxmlformats.org/drawingml/2006/main" noGrp="1"/>
-          </p:cNvSpPr>
-          <p:nvPr>
-            <p:ph type="body" idx="1"/>
-          </p:nvPr>
-        </p:nvSpPr>
-        <p:spPr/>
-        <p:txBody>
-          <a:bodyPr xmlns:a="http://schemas.openxmlformats.org/drawingml/2006/main"/>
-          <a:lstStyle xmlns:a="http://schemas.openxmlformats.org/drawingml/2006/main"/>
-          <a:p xmlns:a="http://schemas.openxmlformats.org/drawingml/2006/main">
-            <a:r>
-              <a:t>明確說明每個小時的成果。第 2 堂比第 1 堂更偏實作。</a:t>
-            </a:r>
-          </a:p>
-        </p:txBody>
-      </p:sp>
-      <p:sp>
-        <p:nvSpPr>
-          <p:cNvPr id="4" name="Slide Number Placeholder 3"/>
-          <p:cNvSpPr>
-            <a:spLocks xmlns:a="http://schemas.openxmlformats.org/drawingml/2006/main" noGrp="1"/>
-          </p:cNvSpPr>
-          <p:nvPr>
-            <p:ph type="sldNum" idx="5"/>
-          </p:nvPr>
-        </p:nvSpPr>
-        <p:spPr/>
-        <p:txBody>
-          <a:bodyPr xmlns:a="http://schemas.openxmlformats.org/drawingml/2006/main"/>
-          <a:lstStyle xmlns:a="http://schemas.openxmlformats.org/drawingml/2006/main"/>
-          <a:p xmlns:a="http://schemas.openxmlformats.org/drawingml/2006/main"/>
-        </p:txBody>
-      </p:sp>
-    </p:spTree>
-  </p:cSld>
-  <p:clrMapOvr>
-    <a:masterClrMapping xmlns:a="http://schemas.openxmlformats.org/drawingml/2006/main"/>
-  </p:clrMapOvr>
-</p:notes>
-</file>
-
-<file path=ppt/notesSlides/notesSlide20.xml><?xml version="1.0" encoding="utf-8"?>
-<p:notes xmlns:p="http://schemas.openxmlformats.org/presentationml/2006/main">
-  <p:cSld>
-    <p:spTree>
-      <p:nvGrpSpPr>
-        <p:cNvPr id="1" name=""/>
-        <p:cNvGrpSpPr/>
-        <p:nvPr/>
-      </p:nvGrpSpPr>
-      <p:grpSpPr>
-        <a:xfrm xmlns:a="http://schemas.openxmlformats.org/drawingml/2006/main"/>
-      </p:grpSpPr>
-      <p:sp>
-        <p:nvSpPr>
-          <p:cNvPr id="2" name="Slide Image Placeholder 1"/>
-          <p:cNvSpPr>
-            <a:spLocks xmlns:a="http://schemas.openxmlformats.org/drawingml/2006/main" noGrp="1"/>
-          </p:cNvSpPr>
-          <p:nvPr>
-            <p:ph type="sldImg" idx="0"/>
-          </p:nvPr>
-        </p:nvSpPr>
-        <p:spPr/>
-      </p:sp>
-      <p:sp>
-        <p:nvSpPr>
-          <p:cNvPr id="3" name="Notes Placeholder 2"/>
-          <p:cNvSpPr>
-            <a:spLocks xmlns:a="http://schemas.openxmlformats.org/drawingml/2006/main" noGrp="1"/>
-          </p:cNvSpPr>
-          <p:nvPr>
-            <p:ph type="body" idx="1"/>
-          </p:nvPr>
-        </p:nvSpPr>
-        <p:spPr/>
-        <p:txBody>
-          <a:bodyPr xmlns:a="http://schemas.openxmlformats.org/drawingml/2006/main"/>
-          <a:lstStyle xmlns:a="http://schemas.openxmlformats.org/drawingml/2006/main"/>
-          <a:p xmlns:a="http://schemas.openxmlformats.org/drawingml/2006/main">
-            <a:r>
-              <a:t>用資料庫或上傳檔當例子。這是從第 1 堂的『容器用完即丟』進一步補上資料保存策略。</a:t>
-            </a:r>
-          </a:p>
-        </p:txBody>
-      </p:sp>
-      <p:sp>
-        <p:nvSpPr>
-          <p:cNvPr id="4" name="Slide Number Placeholder 3"/>
-          <p:cNvSpPr>
-            <a:spLocks xmlns:a="http://schemas.openxmlformats.org/drawingml/2006/main" noGrp="1"/>
-          </p:cNvSpPr>
-          <p:nvPr>
-            <p:ph type="sldNum" idx="5"/>
-          </p:nvPr>
-        </p:nvSpPr>
-        <p:spPr/>
-        <p:txBody>
-          <a:bodyPr xmlns:a="http://schemas.openxmlformats.org/drawingml/2006/main"/>
-          <a:lstStyle xmlns:a="http://schemas.openxmlformats.org/drawingml/2006/main"/>
-          <a:p xmlns:a="http://schemas.openxmlformats.org/drawingml/2006/main"/>
-        </p:txBody>
-      </p:sp>
-    </p:spTree>
-  </p:cSld>
-  <p:clrMapOvr>
-    <a:masterClrMapping xmlns:a="http://schemas.openxmlformats.org/drawingml/2006/main"/>
-  </p:clrMapOvr>
-</p:notes>
-</file>
-
-<file path=ppt/notesSlides/notesSlide21.xml><?xml version="1.0" encoding="utf-8"?>
-<p:notes xmlns:p="http://schemas.openxmlformats.org/presentationml/2006/main">
-  <p:cSld>
-    <p:spTree>
-      <p:nvGrpSpPr>
-        <p:cNvPr id="1" name=""/>
-        <p:cNvGrpSpPr/>
-        <p:nvPr/>
-      </p:nvGrpSpPr>
-      <p:grpSpPr>
-        <a:xfrm xmlns:a="http://schemas.openxmlformats.org/drawingml/2006/main"/>
-      </p:grpSpPr>
-      <p:sp>
-        <p:nvSpPr>
-          <p:cNvPr id="2" name="Slide Image Placeholder 1"/>
-          <p:cNvSpPr>
-            <a:spLocks xmlns:a="http://schemas.openxmlformats.org/drawingml/2006/main" noGrp="1"/>
-          </p:cNvSpPr>
-          <p:nvPr>
-            <p:ph type="sldImg" idx="0"/>
-          </p:nvPr>
-        </p:nvSpPr>
-        <p:spPr/>
-      </p:sp>
-      <p:sp>
-        <p:nvSpPr>
-          <p:cNvPr id="3" name="Notes Placeholder 2"/>
-          <p:cNvSpPr>
-            <a:spLocks xmlns:a="http://schemas.openxmlformats.org/drawingml/2006/main" noGrp="1"/>
-          </p:cNvSpPr>
-          <p:nvPr>
-            <p:ph type="body" idx="1"/>
-          </p:nvPr>
-        </p:nvSpPr>
-        <p:spPr/>
-        <p:txBody>
-          <a:bodyPr xmlns:a="http://schemas.openxmlformats.org/drawingml/2006/main"/>
-          <a:lstStyle xmlns:a="http://schemas.openxmlformats.org/drawingml/2006/main"/>
-          <a:p xmlns:a="http://schemas.openxmlformats.org/drawingml/2006/main">
-            <a:r>
-              <a:t>這頁不做太多表格文字，避免投影時擁擠。語法和適用場景先記住。</a:t>
-            </a:r>
-          </a:p>
-        </p:txBody>
-      </p:sp>
-      <p:sp>
-        <p:nvSpPr>
-          <p:cNvPr id="4" name="Slide Number Placeholder 3"/>
-          <p:cNvSpPr>
-            <a:spLocks xmlns:a="http://schemas.openxmlformats.org/drawingml/2006/main" noGrp="1"/>
-          </p:cNvSpPr>
-          <p:nvPr>
-            <p:ph type="sldNum" idx="5"/>
-          </p:nvPr>
-        </p:nvSpPr>
-        <p:spPr/>
-        <p:txBody>
-          <a:bodyPr xmlns:a="http://schemas.openxmlformats.org/drawingml/2006/main"/>
-          <a:lstStyle xmlns:a="http://schemas.openxmlformats.org/drawingml/2006/main"/>
-          <a:p xmlns:a="http://schemas.openxmlformats.org/drawingml/2006/main"/>
-        </p:txBody>
-      </p:sp>
-    </p:spTree>
-  </p:cSld>
-  <p:clrMapOvr>
-    <a:masterClrMapping xmlns:a="http://schemas.openxmlformats.org/drawingml/2006/main"/>
-  </p:clrMapOvr>
-</p:notes>
-</file>
-
-<file path=ppt/notesSlides/notesSlide22.xml><?xml version="1.0" encoding="utf-8"?>
-<p:notes xmlns:p="http://schemas.openxmlformats.org/presentationml/2006/main">
-  <p:cSld>
-    <p:spTree>
-      <p:nvGrpSpPr>
-        <p:cNvPr id="1" name=""/>
-        <p:cNvGrpSpPr/>
-        <p:nvPr/>
-      </p:nvGrpSpPr>
-      <p:grpSpPr>
-        <a:xfrm xmlns:a="http://schemas.openxmlformats.org/drawingml/2006/main"/>
-      </p:grpSpPr>
-      <p:sp>
-        <p:nvSpPr>
-          <p:cNvPr id="2" name="Slide Image Placeholder 1"/>
-          <p:cNvSpPr>
-            <a:spLocks xmlns:a="http://schemas.openxmlformats.org/drawingml/2006/main" noGrp="1"/>
-          </p:cNvSpPr>
-          <p:nvPr>
-            <p:ph type="sldImg" idx="0"/>
-          </p:nvPr>
-        </p:nvSpPr>
-        <p:spPr/>
-      </p:sp>
-      <p:sp>
-        <p:nvSpPr>
-          <p:cNvPr id="3" name="Notes Placeholder 2"/>
-          <p:cNvSpPr>
-            <a:spLocks xmlns:a="http://schemas.openxmlformats.org/drawingml/2006/main" noGrp="1"/>
-          </p:cNvSpPr>
-          <p:nvPr>
-            <p:ph type="body" idx="1"/>
-          </p:nvPr>
-        </p:nvSpPr>
-        <p:spPr/>
-        <p:txBody>
-          <a:bodyPr xmlns:a="http://schemas.openxmlformats.org/drawingml/2006/main"/>
-          <a:lstStyle xmlns:a="http://schemas.openxmlformats.org/drawingml/2006/main"/>
-          <a:p xmlns:a="http://schemas.openxmlformats.org/drawingml/2006/main">
-            <a:r>
-              <a:t>練習題來自 exercises.md 第 2 堂概念題 Q3。</a:t>
-            </a:r>
-          </a:p>
-        </p:txBody>
-      </p:sp>
-      <p:sp>
-        <p:nvSpPr>
-          <p:cNvPr id="4" name="Slide Number Placeholder 3"/>
-          <p:cNvSpPr>
-            <a:spLocks xmlns:a="http://schemas.openxmlformats.org/drawingml/2006/main" noGrp="1"/>
-          </p:cNvSpPr>
-          <p:nvPr>
-            <p:ph type="sldNum" idx="5"/>
-          </p:nvPr>
-        </p:nvSpPr>
-        <p:spPr/>
-        <p:txBody>
-          <a:bodyPr xmlns:a="http://schemas.openxmlformats.org/drawingml/2006/main"/>
-          <a:lstStyle xmlns:a="http://schemas.openxmlformats.org/drawingml/2006/main"/>
-          <a:p xmlns:a="http://schemas.openxmlformats.org/drawingml/2006/main"/>
-        </p:txBody>
-      </p:sp>
-    </p:spTree>
-  </p:cSld>
-  <p:clrMapOvr>
-    <a:masterClrMapping xmlns:a="http://schemas.openxmlformats.org/drawingml/2006/main"/>
-  </p:clrMapOvr>
-</p:notes>
-</file>
-
-<file path=ppt/notesSlides/notesSlide23.xml><?xml version="1.0" encoding="utf-8"?>
-<p:notes xmlns:p="http://schemas.openxmlformats.org/presentationml/2006/main">
-  <p:cSld>
-    <p:spTree>
-      <p:nvGrpSpPr>
-        <p:cNvPr id="1" name=""/>
-        <p:cNvGrpSpPr/>
-        <p:nvPr/>
-      </p:nvGrpSpPr>
-      <p:grpSpPr>
-        <a:xfrm xmlns:a="http://schemas.openxmlformats.org/drawingml/2006/main"/>
-      </p:grpSpPr>
-      <p:sp>
-        <p:nvSpPr>
-          <p:cNvPr id="2" name="Slide Image Placeholder 1"/>
-          <p:cNvSpPr>
-            <a:spLocks xmlns:a="http://schemas.openxmlformats.org/drawingml/2006/main" noGrp="1"/>
-          </p:cNvSpPr>
-          <p:nvPr>
-            <p:ph type="sldImg" idx="0"/>
-          </p:nvPr>
-        </p:nvSpPr>
-        <p:spPr/>
-      </p:sp>
-      <p:sp>
-        <p:nvSpPr>
-          <p:cNvPr id="3" name="Notes Placeholder 2"/>
-          <p:cNvSpPr>
-            <a:spLocks xmlns:a="http://schemas.openxmlformats.org/drawingml/2006/main" noGrp="1"/>
-          </p:cNvSpPr>
-          <p:nvPr>
-            <p:ph type="body" idx="1"/>
-          </p:nvPr>
-        </p:nvSpPr>
-        <p:spPr/>
-        <p:txBody>
-          <a:bodyPr xmlns:a="http://schemas.openxmlformats.org/drawingml/2006/main"/>
-          <a:lstStyle xmlns:a="http://schemas.openxmlformats.org/drawingml/2006/main"/>
-          <a:p xmlns:a="http://schemas.openxmlformats.org/drawingml/2006/main">
-            <a:r>
-              <a:t>prune 要提醒會刪掉所有未使用 volume，操作前要確認。</a:t>
-            </a:r>
-          </a:p>
-        </p:txBody>
-      </p:sp>
-      <p:sp>
-        <p:nvSpPr>
-          <p:cNvPr id="4" name="Slide Number Placeholder 3"/>
-          <p:cNvSpPr>
-            <a:spLocks xmlns:a="http://schemas.openxmlformats.org/drawingml/2006/main" noGrp="1"/>
-          </p:cNvSpPr>
-          <p:nvPr>
-            <p:ph type="sldNum" idx="5"/>
-          </p:nvPr>
-        </p:nvSpPr>
-        <p:spPr/>
-        <p:txBody>
-          <a:bodyPr xmlns:a="http://schemas.openxmlformats.org/drawingml/2006/main"/>
-          <a:lstStyle xmlns:a="http://schemas.openxmlformats.org/drawingml/2006/main"/>
-          <a:p xmlns:a="http://schemas.openxmlformats.org/drawingml/2006/main"/>
-        </p:txBody>
-      </p:sp>
-    </p:spTree>
-  </p:cSld>
-  <p:clrMapOvr>
-    <a:masterClrMapping xmlns:a="http://schemas.openxmlformats.org/drawingml/2006/main"/>
-  </p:clrMapOvr>
-</p:notes>
-</file>
-
-<file path=ppt/notesSlides/notesSlide24.xml><?xml version="1.0" encoding="utf-8"?>
-<p:notes xmlns:p="http://schemas.openxmlformats.org/presentationml/2006/main">
-  <p:cSld>
-    <p:spTree>
-      <p:nvGrpSpPr>
-        <p:cNvPr id="1" name=""/>
-        <p:cNvGrpSpPr/>
-        <p:nvPr/>
-      </p:nvGrpSpPr>
-      <p:grpSpPr>
-        <a:xfrm xmlns:a="http://schemas.openxmlformats.org/drawingml/2006/main"/>
-      </p:grpSpPr>
-      <p:sp>
-        <p:nvSpPr>
-          <p:cNvPr id="2" name="Slide Image Placeholder 1"/>
-          <p:cNvSpPr>
-            <a:spLocks xmlns:a="http://schemas.openxmlformats.org/drawingml/2006/main" noGrp="1"/>
-          </p:cNvSpPr>
-          <p:nvPr>
-            <p:ph type="sldImg" idx="0"/>
-          </p:nvPr>
-        </p:nvSpPr>
-        <p:spPr/>
-      </p:sp>
-      <p:sp>
-        <p:nvSpPr>
-          <p:cNvPr id="3" name="Notes Placeholder 2"/>
-          <p:cNvSpPr>
-            <a:spLocks xmlns:a="http://schemas.openxmlformats.org/drawingml/2006/main" noGrp="1"/>
-          </p:cNvSpPr>
-          <p:nvPr>
-            <p:ph type="body" idx="1"/>
-          </p:nvPr>
-        </p:nvSpPr>
-        <p:spPr/>
-        <p:txBody>
-          <a:bodyPr xmlns:a="http://schemas.openxmlformats.org/drawingml/2006/main"/>
-          <a:lstStyle xmlns:a="http://schemas.openxmlformats.org/drawingml/2006/main"/>
-          <a:p xmlns:a="http://schemas.openxmlformats.org/drawingml/2006/main">
-            <a:r>
-              <a:t>練習題來自 exercises.md 第 2 堂實作題 P3。</a:t>
-            </a:r>
-          </a:p>
-        </p:txBody>
-      </p:sp>
-      <p:sp>
-        <p:nvSpPr>
-          <p:cNvPr id="4" name="Slide Number Placeholder 3"/>
-          <p:cNvSpPr>
-            <a:spLocks xmlns:a="http://schemas.openxmlformats.org/drawingml/2006/main" noGrp="1"/>
-          </p:cNvSpPr>
-          <p:nvPr>
-            <p:ph type="sldNum" idx="5"/>
-          </p:nvPr>
-        </p:nvSpPr>
-        <p:spPr/>
-        <p:txBody>
-          <a:bodyPr xmlns:a="http://schemas.openxmlformats.org/drawingml/2006/main"/>
-          <a:lstStyle xmlns:a="http://schemas.openxmlformats.org/drawingml/2006/main"/>
-          <a:p xmlns:a="http://schemas.openxmlformats.org/drawingml/2006/main"/>
-        </p:txBody>
-      </p:sp>
-    </p:spTree>
-  </p:cSld>
-  <p:clrMapOvr>
-    <a:masterClrMapping xmlns:a="http://schemas.openxmlformats.org/drawingml/2006/main"/>
-  </p:clrMapOvr>
-</p:notes>
-</file>
-
-<file path=ppt/notesSlides/notesSlide25.xml><?xml version="1.0" encoding="utf-8"?>
-<p:notes xmlns:p="http://schemas.openxmlformats.org/presentationml/2006/main">
-  <p:cSld>
-    <p:spTree>
-      <p:nvGrpSpPr>
-        <p:cNvPr id="1" name=""/>
-        <p:cNvGrpSpPr/>
-        <p:nvPr/>
-      </p:nvGrpSpPr>
-      <p:grpSpPr>
-        <a:xfrm xmlns:a="http://schemas.openxmlformats.org/drawingml/2006/main"/>
-      </p:grpSpPr>
-      <p:sp>
-        <p:nvSpPr>
-          <p:cNvPr id="2" name="Slide Image Placeholder 1"/>
-          <p:cNvSpPr>
-            <a:spLocks xmlns:a="http://schemas.openxmlformats.org/drawingml/2006/main" noGrp="1"/>
-          </p:cNvSpPr>
-          <p:nvPr>
-            <p:ph type="sldImg" idx="0"/>
-          </p:nvPr>
-        </p:nvSpPr>
-        <p:spPr/>
-      </p:sp>
-      <p:sp>
-        <p:nvSpPr>
-          <p:cNvPr id="3" name="Notes Placeholder 2"/>
-          <p:cNvSpPr>
-            <a:spLocks xmlns:a="http://schemas.openxmlformats.org/drawingml/2006/main" noGrp="1"/>
-          </p:cNvSpPr>
-          <p:nvPr>
-            <p:ph type="body" idx="1"/>
-          </p:nvPr>
-        </p:nvSpPr>
-        <p:spPr/>
-        <p:txBody>
-          <a:bodyPr xmlns:a="http://schemas.openxmlformats.org/drawingml/2006/main"/>
-          <a:lstStyle xmlns:a="http://schemas.openxmlformats.org/drawingml/2006/main"/>
-          <a:p xmlns:a="http://schemas.openxmlformats.org/drawingml/2006/main">
-            <a:r>
-              <a:t>讓學生知道 Volume 不只是同步，也可以用權限限制保護檔案。</a:t>
-            </a:r>
-          </a:p>
-        </p:txBody>
-      </p:sp>
-      <p:sp>
-        <p:nvSpPr>
-          <p:cNvPr id="4" name="Slide Number Placeholder 3"/>
-          <p:cNvSpPr>
-            <a:spLocks xmlns:a="http://schemas.openxmlformats.org/drawingml/2006/main" noGrp="1"/>
-          </p:cNvSpPr>
-          <p:nvPr>
-            <p:ph type="sldNum" idx="5"/>
-          </p:nvPr>
-        </p:nvSpPr>
-        <p:spPr/>
-        <p:txBody>
-          <a:bodyPr xmlns:a="http://schemas.openxmlformats.org/drawingml/2006/main"/>
-          <a:lstStyle xmlns:a="http://schemas.openxmlformats.org/drawingml/2006/main"/>
-          <a:p xmlns:a="http://schemas.openxmlformats.org/drawingml/2006/main"/>
-        </p:txBody>
-      </p:sp>
-    </p:spTree>
-  </p:cSld>
-  <p:clrMapOvr>
-    <a:masterClrMapping xmlns:a="http://schemas.openxmlformats.org/drawingml/2006/main"/>
-  </p:clrMapOvr>
-</p:notes>
-</file>
-
-<file path=ppt/notesSlides/notesSlide26.xml><?xml version="1.0" encoding="utf-8"?>
-<p:notes xmlns:p="http://schemas.openxmlformats.org/presentationml/2006/main">
-  <p:cSld>
-    <p:spTree>
-      <p:nvGrpSpPr>
-        <p:cNvPr id="1" name=""/>
-        <p:cNvGrpSpPr/>
-        <p:nvPr/>
-      </p:nvGrpSpPr>
-      <p:grpSpPr>
-        <a:xfrm xmlns:a="http://schemas.openxmlformats.org/drawingml/2006/main"/>
-      </p:grpSpPr>
-      <p:sp>
-        <p:nvSpPr>
-          <p:cNvPr id="2" name="Slide Image Placeholder 1"/>
-          <p:cNvSpPr>
-            <a:spLocks xmlns:a="http://schemas.openxmlformats.org/drawingml/2006/main" noGrp="1"/>
-          </p:cNvSpPr>
-          <p:nvPr>
-            <p:ph type="sldImg" idx="0"/>
-          </p:nvPr>
-        </p:nvSpPr>
-        <p:spPr/>
-      </p:sp>
-      <p:sp>
-        <p:nvSpPr>
-          <p:cNvPr id="3" name="Notes Placeholder 2"/>
-          <p:cNvSpPr>
-            <a:spLocks xmlns:a="http://schemas.openxmlformats.org/drawingml/2006/main" noGrp="1"/>
-          </p:cNvSpPr>
-          <p:nvPr>
-            <p:ph type="body" idx="1"/>
-          </p:nvPr>
-        </p:nvSpPr>
-        <p:spPr/>
-        <p:txBody>
-          <a:bodyPr xmlns:a="http://schemas.openxmlformats.org/drawingml/2006/main"/>
-          <a:lstStyle xmlns:a="http://schemas.openxmlformats.org/drawingml/2006/main"/>
-          <a:p xmlns:a="http://schemas.openxmlformats.org/drawingml/2006/main">
-            <a:r>
-              <a:t>練習題來自 exercises.md 第 2 堂挑戰題 C1。</a:t>
-            </a:r>
-          </a:p>
-        </p:txBody>
-      </p:sp>
-      <p:sp>
-        <p:nvSpPr>
-          <p:cNvPr id="4" name="Slide Number Placeholder 3"/>
-          <p:cNvSpPr>
-            <a:spLocks xmlns:a="http://schemas.openxmlformats.org/drawingml/2006/main" noGrp="1"/>
-          </p:cNvSpPr>
-          <p:nvPr>
-            <p:ph type="sldNum" idx="5"/>
-          </p:nvPr>
-        </p:nvSpPr>
-        <p:spPr/>
-        <p:txBody>
-          <a:bodyPr xmlns:a="http://schemas.openxmlformats.org/drawingml/2006/main"/>
-          <a:lstStyle xmlns:a="http://schemas.openxmlformats.org/drawingml/2006/main"/>
-          <a:p xmlns:a="http://schemas.openxmlformats.org/drawingml/2006/main"/>
-        </p:txBody>
-      </p:sp>
-    </p:spTree>
-  </p:cSld>
-  <p:clrMapOvr>
-    <a:masterClrMapping xmlns:a="http://schemas.openxmlformats.org/drawingml/2006/main"/>
-  </p:clrMapOvr>
-</p:notes>
-</file>
-
-<file path=ppt/notesSlides/notesSlide27.xml><?xml version="1.0" encoding="utf-8"?>
-<p:notes xmlns:p="http://schemas.openxmlformats.org/presentationml/2006/main">
-  <p:cSld>
-    <p:spTree>
-      <p:nvGrpSpPr>
-        <p:cNvPr id="1" name=""/>
-        <p:cNvGrpSpPr/>
-        <p:nvPr/>
-      </p:nvGrpSpPr>
-      <p:grpSpPr>
-        <a:xfrm xmlns:a="http://schemas.openxmlformats.org/drawingml/2006/main"/>
-      </p:grpSpPr>
-      <p:sp>
-        <p:nvSpPr>
-          <p:cNvPr id="2" name="Slide Image Placeholder 1"/>
-          <p:cNvSpPr>
-            <a:spLocks xmlns:a="http://schemas.openxmlformats.org/drawingml/2006/main" noGrp="1"/>
-          </p:cNvSpPr>
-          <p:nvPr>
-            <p:ph type="sldImg" idx="0"/>
-          </p:nvPr>
-        </p:nvSpPr>
-        <p:spPr/>
-      </p:sp>
-      <p:sp>
-        <p:nvSpPr>
-          <p:cNvPr id="3" name="Notes Placeholder 2"/>
-          <p:cNvSpPr>
-            <a:spLocks xmlns:a="http://schemas.openxmlformats.org/drawingml/2006/main" noGrp="1"/>
-          </p:cNvSpPr>
-          <p:nvPr>
-            <p:ph type="body" idx="1"/>
-          </p:nvPr>
-        </p:nvSpPr>
-        <p:spPr/>
-        <p:txBody>
-          <a:bodyPr xmlns:a="http://schemas.openxmlformats.org/drawingml/2006/main"/>
-          <a:lstStyle xmlns:a="http://schemas.openxmlformats.org/drawingml/2006/main"/>
-          <a:p xmlns:a="http://schemas.openxmlformats.org/drawingml/2006/main">
-            <a:r>
-              <a:t>這個實作讓學生親眼看到宿主機和容器共用同一份檔案。</a:t>
-            </a:r>
-          </a:p>
-        </p:txBody>
-      </p:sp>
-      <p:sp>
-        <p:nvSpPr>
-          <p:cNvPr id="4" name="Slide Number Placeholder 3"/>
-          <p:cNvSpPr>
-            <a:spLocks xmlns:a="http://schemas.openxmlformats.org/drawingml/2006/main" noGrp="1"/>
-          </p:cNvSpPr>
-          <p:nvPr>
-            <p:ph type="sldNum" idx="5"/>
-          </p:nvPr>
-        </p:nvSpPr>
-        <p:spPr/>
-        <p:txBody>
-          <a:bodyPr xmlns:a="http://schemas.openxmlformats.org/drawingml/2006/main"/>
-          <a:lstStyle xmlns:a="http://schemas.openxmlformats.org/drawingml/2006/main"/>
-          <a:p xmlns:a="http://schemas.openxmlformats.org/drawingml/2006/main"/>
-        </p:txBody>
-      </p:sp>
-    </p:spTree>
-  </p:cSld>
-  <p:clrMapOvr>
-    <a:masterClrMapping xmlns:a="http://schemas.openxmlformats.org/drawingml/2006/main"/>
-  </p:clrMapOvr>
-</p:notes>
-</file>
-
-<file path=ppt/notesSlides/notesSlide28.xml><?xml version="1.0" encoding="utf-8"?>
-<p:notes xmlns:p="http://schemas.openxmlformats.org/presentationml/2006/main">
-  <p:cSld>
-    <p:spTree>
-      <p:nvGrpSpPr>
-        <p:cNvPr id="1" name=""/>
-        <p:cNvGrpSpPr/>
-        <p:nvPr/>
-      </p:nvGrpSpPr>
-      <p:grpSpPr>
-        <a:xfrm xmlns:a="http://schemas.openxmlformats.org/drawingml/2006/main"/>
-      </p:grpSpPr>
-      <p:sp>
-        <p:nvSpPr>
-          <p:cNvPr id="2" name="Slide Image Placeholder 1"/>
-          <p:cNvSpPr>
-            <a:spLocks xmlns:a="http://schemas.openxmlformats.org/drawingml/2006/main" noGrp="1"/>
-          </p:cNvSpPr>
-          <p:nvPr>
-            <p:ph type="sldImg" idx="0"/>
-          </p:nvPr>
-        </p:nvSpPr>
-        <p:spPr/>
-      </p:sp>
-      <p:sp>
-        <p:nvSpPr>
-          <p:cNvPr id="3" name="Notes Placeholder 2"/>
-          <p:cNvSpPr>
-            <a:spLocks xmlns:a="http://schemas.openxmlformats.org/drawingml/2006/main" noGrp="1"/>
-          </p:cNvSpPr>
-          <p:nvPr>
-            <p:ph type="body" idx="1"/>
-          </p:nvPr>
-        </p:nvSpPr>
-        <p:spPr/>
-        <p:txBody>
-          <a:bodyPr xmlns:a="http://schemas.openxmlformats.org/drawingml/2006/main"/>
-          <a:lstStyle xmlns:a="http://schemas.openxmlformats.org/drawingml/2006/main"/>
-          <a:p xmlns:a="http://schemas.openxmlformats.org/drawingml/2006/main">
-            <a:r>
-              <a:t>練習題來自 exercises.md 第 2 堂挑戰題 C2。</a:t>
-            </a:r>
-          </a:p>
-        </p:txBody>
-      </p:sp>
-      <p:sp>
-        <p:nvSpPr>
-          <p:cNvPr id="4" name="Slide Number Placeholder 3"/>
-          <p:cNvSpPr>
-            <a:spLocks xmlns:a="http://schemas.openxmlformats.org/drawingml/2006/main" noGrp="1"/>
-          </p:cNvSpPr>
-          <p:nvPr>
-            <p:ph type="sldNum" idx="5"/>
-          </p:nvPr>
-        </p:nvSpPr>
-        <p:spPr/>
-        <p:txBody>
-          <a:bodyPr xmlns:a="http://schemas.openxmlformats.org/drawingml/2006/main"/>
-          <a:lstStyle xmlns:a="http://schemas.openxmlformats.org/drawingml/2006/main"/>
-          <a:p xmlns:a="http://schemas.openxmlformats.org/drawingml/2006/main"/>
-        </p:txBody>
-      </p:sp>
-    </p:spTree>
-  </p:cSld>
-  <p:clrMapOvr>
-    <a:masterClrMapping xmlns:a="http://schemas.openxmlformats.org/drawingml/2006/main"/>
-  </p:clrMapOvr>
-</p:notes>
-</file>
-
-<file path=ppt/notesSlides/notesSlide29.xml><?xml version="1.0" encoding="utf-8"?>
-<p:notes xmlns:p="http://schemas.openxmlformats.org/presentationml/2006/main">
-  <p:cSld>
-    <p:spTree>
-      <p:nvGrpSpPr>
-        <p:cNvPr id="1" name=""/>
-        <p:cNvGrpSpPr/>
-        <p:nvPr/>
-      </p:nvGrpSpPr>
-      <p:grpSpPr>
-        <a:xfrm xmlns:a="http://schemas.openxmlformats.org/drawingml/2006/main"/>
-      </p:grpSpPr>
-      <p:sp>
-        <p:nvSpPr>
-          <p:cNvPr id="2" name="Slide Image Placeholder 1"/>
-          <p:cNvSpPr>
-            <a:spLocks xmlns:a="http://schemas.openxmlformats.org/drawingml/2006/main" noGrp="1"/>
-          </p:cNvSpPr>
-          <p:nvPr>
-            <p:ph type="sldImg" idx="0"/>
-          </p:nvPr>
-        </p:nvSpPr>
-        <p:spPr/>
-      </p:sp>
-      <p:sp>
-        <p:nvSpPr>
-          <p:cNvPr id="3" name="Notes Placeholder 2"/>
-          <p:cNvSpPr>
-            <a:spLocks xmlns:a="http://schemas.openxmlformats.org/drawingml/2006/main" noGrp="1"/>
-          </p:cNvSpPr>
-          <p:nvPr>
-            <p:ph type="body" idx="1"/>
-          </p:nvPr>
-        </p:nvSpPr>
-        <p:spPr/>
-        <p:txBody>
-          <a:bodyPr xmlns:a="http://schemas.openxmlformats.org/drawingml/2006/main"/>
-          <a:lstStyle xmlns:a="http://schemas.openxmlformats.org/drawingml/2006/main"/>
-          <a:p xmlns:a="http://schemas.openxmlformats.org/drawingml/2006/main">
-            <a:r>
-              <a:t>把排錯和清理放在最後，讓學生知道做完實作要恢復環境。</a:t>
-            </a:r>
-          </a:p>
-        </p:txBody>
-      </p:sp>
-      <p:sp>
-        <p:nvSpPr>
-          <p:cNvPr id="4" name="Slide Number Placeholder 3"/>
-          <p:cNvSpPr>
-            <a:spLocks xmlns:a="http://schemas.openxmlformats.org/drawingml/2006/main" noGrp="1"/>
-          </p:cNvSpPr>
-          <p:nvPr>
-            <p:ph type="sldNum" idx="5"/>
-          </p:nvPr>
-        </p:nvSpPr>
-        <p:spPr/>
-        <p:txBody>
-          <a:bodyPr xmlns:a="http://schemas.openxmlformats.org/drawingml/2006/main"/>
-          <a:lstStyle xmlns:a="http://schemas.openxmlformats.org/drawingml/2006/main"/>
-          <a:p xmlns:a="http://schemas.openxmlformats.org/drawingml/2006/main"/>
-        </p:txBody>
-      </p:sp>
-    </p:spTree>
-  </p:cSld>
-  <p:clrMapOvr>
-    <a:masterClrMapping xmlns:a="http://schemas.openxmlformats.org/drawingml/2006/main"/>
-  </p:clrMapOvr>
-</p:notes>
-</file>
-
-<file path=ppt/notesSlides/notesSlide3.xml><?xml version="1.0" encoding="utf-8"?>
-<p:notes xmlns:p="http://schemas.openxmlformats.org/presentationml/2006/main">
-  <p:cSld>
-    <p:spTree>
-      <p:nvGrpSpPr>
-        <p:cNvPr id="1" name=""/>
-        <p:cNvGrpSpPr/>
-        <p:nvPr/>
-      </p:nvGrpSpPr>
-      <p:grpSpPr>
-        <a:xfrm xmlns:a="http://schemas.openxmlformats.org/drawingml/2006/main"/>
-      </p:grpSpPr>
-      <p:sp>
-        <p:nvSpPr>
-          <p:cNvPr id="2" name="Slide Image Placeholder 1"/>
-          <p:cNvSpPr>
-            <a:spLocks xmlns:a="http://schemas.openxmlformats.org/drawingml/2006/main" noGrp="1"/>
-          </p:cNvSpPr>
-          <p:nvPr>
-            <p:ph type="sldImg" idx="0"/>
-          </p:nvPr>
-        </p:nvSpPr>
-        <p:spPr/>
-      </p:sp>
-      <p:sp>
-        <p:nvSpPr>
-          <p:cNvPr id="3" name="Notes Placeholder 2"/>
-          <p:cNvSpPr>
-            <a:spLocks xmlns:a="http://schemas.openxmlformats.org/drawingml/2006/main" noGrp="1"/>
-          </p:cNvSpPr>
-          <p:nvPr>
-            <p:ph type="body" idx="1"/>
-          </p:nvPr>
-        </p:nvSpPr>
-        <p:spPr/>
-        <p:txBody>
-          <a:bodyPr xmlns:a="http://schemas.openxmlformats.org/drawingml/2006/main"/>
-          <a:lstStyle xmlns:a="http://schemas.openxmlformats.org/drawingml/2006/main"/>
-          <a:p xmlns:a="http://schemas.openxmlformats.org/drawingml/2006/main">
-            <a:r>
-              <a:t>讓學生把 docker run 想成完整流程，而不是單一動作。後續所有 run 參數都是在這個流程上加條件。</a:t>
-            </a:r>
-          </a:p>
-        </p:txBody>
-      </p:sp>
-      <p:sp>
-        <p:nvSpPr>
-          <p:cNvPr id="4" name="Slide Number Placeholder 3"/>
-          <p:cNvSpPr>
-            <a:spLocks xmlns:a="http://schemas.openxmlformats.org/drawingml/2006/main" noGrp="1"/>
-          </p:cNvSpPr>
-          <p:nvPr>
-            <p:ph type="sldNum" idx="5"/>
-          </p:nvPr>
-        </p:nvSpPr>
-        <p:spPr/>
-        <p:txBody>
-          <a:bodyPr xmlns:a="http://schemas.openxmlformats.org/drawingml/2006/main"/>
-          <a:lstStyle xmlns:a="http://schemas.openxmlformats.org/drawingml/2006/main"/>
-          <a:p xmlns:a="http://schemas.openxmlformats.org/drawingml/2006/main"/>
-        </p:txBody>
-      </p:sp>
-    </p:spTree>
-  </p:cSld>
-  <p:clrMapOvr>
-    <a:masterClrMapping xmlns:a="http://schemas.openxmlformats.org/drawingml/2006/main"/>
-  </p:clrMapOvr>
-</p:notes>
-</file>
-
-<file path=ppt/notesSlides/notesSlide30.xml><?xml version="1.0" encoding="utf-8"?>
-<p:notes xmlns:p="http://schemas.openxmlformats.org/presentationml/2006/main">
-  <p:cSld>
-    <p:spTree>
-      <p:nvGrpSpPr>
-        <p:cNvPr id="1" name=""/>
-        <p:cNvGrpSpPr/>
-        <p:nvPr/>
-      </p:nvGrpSpPr>
-      <p:grpSpPr>
-        <a:xfrm xmlns:a="http://schemas.openxmlformats.org/drawingml/2006/main"/>
-      </p:grpSpPr>
-      <p:sp>
-        <p:nvSpPr>
-          <p:cNvPr id="2" name="Slide Image Placeholder 1"/>
-          <p:cNvSpPr>
-            <a:spLocks xmlns:a="http://schemas.openxmlformats.org/drawingml/2006/main" noGrp="1"/>
-          </p:cNvSpPr>
-          <p:nvPr>
-            <p:ph type="sldImg" idx="0"/>
-          </p:nvPr>
-        </p:nvSpPr>
-        <p:spPr/>
-      </p:sp>
-      <p:sp>
-        <p:nvSpPr>
-          <p:cNvPr id="3" name="Notes Placeholder 2"/>
-          <p:cNvSpPr>
-            <a:spLocks xmlns:a="http://schemas.openxmlformats.org/drawingml/2006/main" noGrp="1"/>
-          </p:cNvSpPr>
-          <p:nvPr>
-            <p:ph type="body" idx="1"/>
-          </p:nvPr>
-        </p:nvSpPr>
-        <p:spPr/>
-        <p:txBody>
-          <a:bodyPr xmlns:a="http://schemas.openxmlformats.org/drawingml/2006/main"/>
-          <a:lstStyle xmlns:a="http://schemas.openxmlformats.org/drawingml/2006/main"/>
-          <a:p xmlns:a="http://schemas.openxmlformats.org/drawingml/2006/main">
-            <a:r>
-              <a:t>第二堂收尾檢核。所有練習題已穿插在對應教學段落後。</a:t>
-            </a:r>
-          </a:p>
-        </p:txBody>
-      </p:sp>
-      <p:sp>
-        <p:nvSpPr>
-          <p:cNvPr id="4" name="Slide Number Placeholder 3"/>
-          <p:cNvSpPr>
-            <a:spLocks xmlns:a="http://schemas.openxmlformats.org/drawingml/2006/main" noGrp="1"/>
-          </p:cNvSpPr>
-          <p:nvPr>
-            <p:ph type="sldNum" idx="5"/>
-          </p:nvPr>
-        </p:nvSpPr>
-        <p:spPr/>
-        <p:txBody>
-          <a:bodyPr xmlns:a="http://schemas.openxmlformats.org/drawingml/2006/main"/>
-          <a:lstStyle xmlns:a="http://schemas.openxmlformats.org/drawingml/2006/main"/>
-          <a:p xmlns:a="http://schemas.openxmlformats.org/drawingml/2006/main"/>
-        </p:txBody>
-      </p:sp>
-    </p:spTree>
-  </p:cSld>
-  <p:clrMapOvr>
-    <a:masterClrMapping xmlns:a="http://schemas.openxmlformats.org/drawingml/2006/main"/>
-  </p:clrMapOvr>
-</p:notes>
-</file>
-
-<file path=ppt/notesSlides/notesSlide4.xml><?xml version="1.0" encoding="utf-8"?>
-<p:notes xmlns:p="http://schemas.openxmlformats.org/presentationml/2006/main">
-  <p:cSld>
-    <p:spTree>
-      <p:nvGrpSpPr>
-        <p:cNvPr id="1" name=""/>
-        <p:cNvGrpSpPr/>
-        <p:nvPr/>
-      </p:nvGrpSpPr>
-      <p:grpSpPr>
-        <a:xfrm xmlns:a="http://schemas.openxmlformats.org/drawingml/2006/main"/>
-      </p:grpSpPr>
-      <p:sp>
-        <p:nvSpPr>
-          <p:cNvPr id="2" name="Slide Image Placeholder 1"/>
-          <p:cNvSpPr>
-            <a:spLocks xmlns:a="http://schemas.openxmlformats.org/drawingml/2006/main" noGrp="1"/>
-          </p:cNvSpPr>
-          <p:nvPr>
-            <p:ph type="sldImg" idx="0"/>
-          </p:nvPr>
-        </p:nvSpPr>
-        <p:spPr/>
-      </p:sp>
-      <p:sp>
-        <p:nvSpPr>
-          <p:cNvPr id="3" name="Notes Placeholder 2"/>
-          <p:cNvSpPr>
-            <a:spLocks xmlns:a="http://schemas.openxmlformats.org/drawingml/2006/main" noGrp="1"/>
-          </p:cNvSpPr>
-          <p:nvPr>
-            <p:ph type="body" idx="1"/>
-          </p:nvPr>
-        </p:nvSpPr>
-        <p:spPr/>
-        <p:txBody>
-          <a:bodyPr xmlns:a="http://schemas.openxmlformats.org/drawingml/2006/main"/>
-          <a:lstStyle xmlns:a="http://schemas.openxmlformats.org/drawingml/2006/main"/>
-          <a:p xmlns:a="http://schemas.openxmlformats.org/drawingml/2006/main">
-            <a:r>
-              <a:t>`-it` 通常一起使用，適合教學、測試、進容器互動。</a:t>
-            </a:r>
-          </a:p>
-        </p:txBody>
-      </p:sp>
-      <p:sp>
-        <p:nvSpPr>
-          <p:cNvPr id="4" name="Slide Number Placeholder 3"/>
-          <p:cNvSpPr>
-            <a:spLocks xmlns:a="http://schemas.openxmlformats.org/drawingml/2006/main" noGrp="1"/>
-          </p:cNvSpPr>
-          <p:nvPr>
-            <p:ph type="sldNum" idx="5"/>
-          </p:nvPr>
-        </p:nvSpPr>
-        <p:spPr/>
-        <p:txBody>
-          <a:bodyPr xmlns:a="http://schemas.openxmlformats.org/drawingml/2006/main"/>
-          <a:lstStyle xmlns:a="http://schemas.openxmlformats.org/drawingml/2006/main"/>
-          <a:p xmlns:a="http://schemas.openxmlformats.org/drawingml/2006/main"/>
-        </p:txBody>
-      </p:sp>
-    </p:spTree>
-  </p:cSld>
-  <p:clrMapOvr>
-    <a:masterClrMapping xmlns:a="http://schemas.openxmlformats.org/drawingml/2006/main"/>
-  </p:clrMapOvr>
-</p:notes>
-</file>
-
-<file path=ppt/notesSlides/notesSlide5.xml><?xml version="1.0" encoding="utf-8"?>
-<p:notes xmlns:p="http://schemas.openxmlformats.org/presentationml/2006/main">
-  <p:cSld>
-    <p:spTree>
-      <p:nvGrpSpPr>
-        <p:cNvPr id="1" name=""/>
-        <p:cNvGrpSpPr/>
-        <p:nvPr/>
-      </p:nvGrpSpPr>
-      <p:grpSpPr>
-        <a:xfrm xmlns:a="http://schemas.openxmlformats.org/drawingml/2006/main"/>
-      </p:grpSpPr>
-      <p:sp>
-        <p:nvSpPr>
-          <p:cNvPr id="2" name="Slide Image Placeholder 1"/>
-          <p:cNvSpPr>
-            <a:spLocks xmlns:a="http://schemas.openxmlformats.org/drawingml/2006/main" noGrp="1"/>
-          </p:cNvSpPr>
-          <p:nvPr>
-            <p:ph type="sldImg" idx="0"/>
-          </p:nvPr>
-        </p:nvSpPr>
-        <p:spPr/>
-      </p:sp>
-      <p:sp>
-        <p:nvSpPr>
-          <p:cNvPr id="3" name="Notes Placeholder 2"/>
-          <p:cNvSpPr>
-            <a:spLocks xmlns:a="http://schemas.openxmlformats.org/drawingml/2006/main" noGrp="1"/>
-          </p:cNvSpPr>
-          <p:nvPr>
-            <p:ph type="body" idx="1"/>
-          </p:nvPr>
-        </p:nvSpPr>
-        <p:spPr/>
-        <p:txBody>
-          <a:bodyPr xmlns:a="http://schemas.openxmlformats.org/drawingml/2006/main"/>
-          <a:lstStyle xmlns:a="http://schemas.openxmlformats.org/drawingml/2006/main"/>
-          <a:p xmlns:a="http://schemas.openxmlformats.org/drawingml/2006/main">
-            <a:r>
-              <a:t>練習題來自 exercises.md 第 2 堂概念題 Q1。</a:t>
-            </a:r>
-          </a:p>
-        </p:txBody>
-      </p:sp>
-      <p:sp>
-        <p:nvSpPr>
-          <p:cNvPr id="4" name="Slide Number Placeholder 3"/>
-          <p:cNvSpPr>
-            <a:spLocks xmlns:a="http://schemas.openxmlformats.org/drawingml/2006/main" noGrp="1"/>
-          </p:cNvSpPr>
-          <p:nvPr>
-            <p:ph type="sldNum" idx="5"/>
-          </p:nvPr>
-        </p:nvSpPr>
-        <p:spPr/>
-        <p:txBody>
-          <a:bodyPr xmlns:a="http://schemas.openxmlformats.org/drawingml/2006/main"/>
-          <a:lstStyle xmlns:a="http://schemas.openxmlformats.org/drawingml/2006/main"/>
-          <a:p xmlns:a="http://schemas.openxmlformats.org/drawingml/2006/main"/>
-        </p:txBody>
-      </p:sp>
-    </p:spTree>
-  </p:cSld>
-  <p:clrMapOvr>
-    <a:masterClrMapping xmlns:a="http://schemas.openxmlformats.org/drawingml/2006/main"/>
-  </p:clrMapOvr>
-</p:notes>
-</file>
-
-<file path=ppt/notesSlides/notesSlide6.xml><?xml version="1.0" encoding="utf-8"?>
-<p:notes xmlns:p="http://schemas.openxmlformats.org/presentationml/2006/main">
-  <p:cSld>
-    <p:spTree>
-      <p:nvGrpSpPr>
-        <p:cNvPr id="1" name=""/>
-        <p:cNvGrpSpPr/>
-        <p:nvPr/>
-      </p:nvGrpSpPr>
-      <p:grpSpPr>
-        <a:xfrm xmlns:a="http://schemas.openxmlformats.org/drawingml/2006/main"/>
-      </p:grpSpPr>
-      <p:sp>
-        <p:nvSpPr>
-          <p:cNvPr id="2" name="Slide Image Placeholder 1"/>
-          <p:cNvSpPr>
-            <a:spLocks xmlns:a="http://schemas.openxmlformats.org/drawingml/2006/main" noGrp="1"/>
-          </p:cNvSpPr>
-          <p:nvPr>
-            <p:ph type="sldImg" idx="0"/>
-          </p:nvPr>
-        </p:nvSpPr>
-        <p:spPr/>
-      </p:sp>
-      <p:sp>
-        <p:nvSpPr>
-          <p:cNvPr id="3" name="Notes Placeholder 2"/>
-          <p:cNvSpPr>
-            <a:spLocks xmlns:a="http://schemas.openxmlformats.org/drawingml/2006/main" noGrp="1"/>
-          </p:cNvSpPr>
-          <p:nvPr>
-            <p:ph type="body" idx="1"/>
-          </p:nvPr>
-        </p:nvSpPr>
-        <p:spPr/>
-        <p:txBody>
-          <a:bodyPr xmlns:a="http://schemas.openxmlformats.org/drawingml/2006/main"/>
-          <a:lstStyle xmlns:a="http://schemas.openxmlformats.org/drawingml/2006/main"/>
-          <a:p xmlns:a="http://schemas.openxmlformats.org/drawingml/2006/main">
-            <a:r>
-              <a:t>這不是 Dockerfile 階段，先用現成 Python Image 和 bind mount 建立開發環境。</a:t>
-            </a:r>
-          </a:p>
-        </p:txBody>
-      </p:sp>
-      <p:sp>
-        <p:nvSpPr>
-          <p:cNvPr id="4" name="Slide Number Placeholder 3"/>
-          <p:cNvSpPr>
-            <a:spLocks xmlns:a="http://schemas.openxmlformats.org/drawingml/2006/main" noGrp="1"/>
-          </p:cNvSpPr>
-          <p:nvPr>
-            <p:ph type="sldNum" idx="5"/>
-          </p:nvPr>
-        </p:nvSpPr>
-        <p:spPr/>
-        <p:txBody>
-          <a:bodyPr xmlns:a="http://schemas.openxmlformats.org/drawingml/2006/main"/>
-          <a:lstStyle xmlns:a="http://schemas.openxmlformats.org/drawingml/2006/main"/>
-          <a:p xmlns:a="http://schemas.openxmlformats.org/drawingml/2006/main"/>
-        </p:txBody>
-      </p:sp>
-    </p:spTree>
-  </p:cSld>
-  <p:clrMapOvr>
-    <a:masterClrMapping xmlns:a="http://schemas.openxmlformats.org/drawingml/2006/main"/>
-  </p:clrMapOvr>
-</p:notes>
-</file>
-
-<file path=ppt/notesSlides/notesSlide7.xml><?xml version="1.0" encoding="utf-8"?>
-<p:notes xmlns:p="http://schemas.openxmlformats.org/presentationml/2006/main">
-  <p:cSld>
-    <p:spTree>
-      <p:nvGrpSpPr>
-        <p:cNvPr id="1" name=""/>
-        <p:cNvGrpSpPr/>
-        <p:nvPr/>
-      </p:nvGrpSpPr>
-      <p:grpSpPr>
-        <a:xfrm xmlns:a="http://schemas.openxmlformats.org/drawingml/2006/main"/>
-      </p:grpSpPr>
-      <p:sp>
-        <p:nvSpPr>
-          <p:cNvPr id="2" name="Slide Image Placeholder 1"/>
-          <p:cNvSpPr>
-            <a:spLocks xmlns:a="http://schemas.openxmlformats.org/drawingml/2006/main" noGrp="1"/>
-          </p:cNvSpPr>
-          <p:nvPr>
-            <p:ph type="sldImg" idx="0"/>
-          </p:nvPr>
-        </p:nvSpPr>
-        <p:spPr/>
-      </p:sp>
-      <p:sp>
-        <p:nvSpPr>
-          <p:cNvPr id="3" name="Notes Placeholder 2"/>
-          <p:cNvSpPr>
-            <a:spLocks xmlns:a="http://schemas.openxmlformats.org/drawingml/2006/main" noGrp="1"/>
-          </p:cNvSpPr>
-          <p:nvPr>
-            <p:ph type="body" idx="1"/>
-          </p:nvPr>
-        </p:nvSpPr>
-        <p:spPr/>
-        <p:txBody>
-          <a:bodyPr xmlns:a="http://schemas.openxmlformats.org/drawingml/2006/main"/>
-          <a:lstStyle xmlns:a="http://schemas.openxmlformats.org/drawingml/2006/main"/>
-          <a:p xmlns:a="http://schemas.openxmlformats.org/drawingml/2006/main">
-            <a:r>
-              <a:t>這是本堂最核心的指令。注意 Windows 路徑加雙引號，冒號左邊是宿主機，右邊是容器。</a:t>
-            </a:r>
-          </a:p>
-        </p:txBody>
-      </p:sp>
-      <p:sp>
-        <p:nvSpPr>
-          <p:cNvPr id="4" name="Slide Number Placeholder 3"/>
-          <p:cNvSpPr>
-            <a:spLocks xmlns:a="http://schemas.openxmlformats.org/drawingml/2006/main" noGrp="1"/>
-          </p:cNvSpPr>
-          <p:nvPr>
-            <p:ph type="sldNum" idx="5"/>
-          </p:nvPr>
-        </p:nvSpPr>
-        <p:spPr/>
-        <p:txBody>
-          <a:bodyPr xmlns:a="http://schemas.openxmlformats.org/drawingml/2006/main"/>
-          <a:lstStyle xmlns:a="http://schemas.openxmlformats.org/drawingml/2006/main"/>
-          <a:p xmlns:a="http://schemas.openxmlformats.org/drawingml/2006/main"/>
-        </p:txBody>
-      </p:sp>
-    </p:spTree>
-  </p:cSld>
-  <p:clrMapOvr>
-    <a:masterClrMapping xmlns:a="http://schemas.openxmlformats.org/drawingml/2006/main"/>
-  </p:clrMapOvr>
-</p:notes>
-</file>
-
-<file path=ppt/notesSlides/notesSlide8.xml><?xml version="1.0" encoding="utf-8"?>
-<p:notes xmlns:p="http://schemas.openxmlformats.org/presentationml/2006/main">
-  <p:cSld>
-    <p:spTree>
-      <p:nvGrpSpPr>
-        <p:cNvPr id="1" name=""/>
-        <p:cNvGrpSpPr/>
-        <p:nvPr/>
-      </p:nvGrpSpPr>
-      <p:grpSpPr>
-        <a:xfrm xmlns:a="http://schemas.openxmlformats.org/drawingml/2006/main"/>
-      </p:grpSpPr>
-      <p:sp>
-        <p:nvSpPr>
-          <p:cNvPr id="2" name="Slide Image Placeholder 1"/>
-          <p:cNvSpPr>
-            <a:spLocks xmlns:a="http://schemas.openxmlformats.org/drawingml/2006/main" noGrp="1"/>
-          </p:cNvSpPr>
-          <p:nvPr>
-            <p:ph type="sldImg" idx="0"/>
-          </p:nvPr>
-        </p:nvSpPr>
-        <p:spPr/>
-      </p:sp>
-      <p:sp>
-        <p:nvSpPr>
-          <p:cNvPr id="3" name="Notes Placeholder 2"/>
-          <p:cNvSpPr>
-            <a:spLocks xmlns:a="http://schemas.openxmlformats.org/drawingml/2006/main" noGrp="1"/>
-          </p:cNvSpPr>
-          <p:nvPr>
-            <p:ph type="body" idx="1"/>
-          </p:nvPr>
-        </p:nvSpPr>
-        <p:spPr/>
-        <p:txBody>
-          <a:bodyPr xmlns:a="http://schemas.openxmlformats.org/drawingml/2006/main"/>
-          <a:lstStyle xmlns:a="http://schemas.openxmlformats.org/drawingml/2006/main"/>
-          <a:p xmlns:a="http://schemas.openxmlformats.org/drawingml/2006/main">
-            <a:r>
-              <a:t>可以順手回應學生最常混淆的主機:容器格式。</a:t>
-            </a:r>
-          </a:p>
-        </p:txBody>
-      </p:sp>
-      <p:sp>
-        <p:nvSpPr>
-          <p:cNvPr id="4" name="Slide Number Placeholder 3"/>
-          <p:cNvSpPr>
-            <a:spLocks xmlns:a="http://schemas.openxmlformats.org/drawingml/2006/main" noGrp="1"/>
-          </p:cNvSpPr>
-          <p:nvPr>
-            <p:ph type="sldNum" idx="5"/>
-          </p:nvPr>
-        </p:nvSpPr>
-        <p:spPr/>
-        <p:txBody>
-          <a:bodyPr xmlns:a="http://schemas.openxmlformats.org/drawingml/2006/main"/>
-          <a:lstStyle xmlns:a="http://schemas.openxmlformats.org/drawingml/2006/main"/>
-          <a:p xmlns:a="http://schemas.openxmlformats.org/drawingml/2006/main"/>
-        </p:txBody>
-      </p:sp>
-    </p:spTree>
-  </p:cSld>
-  <p:clrMapOvr>
-    <a:masterClrMapping xmlns:a="http://schemas.openxmlformats.org/drawingml/2006/main"/>
-  </p:clrMapOvr>
-</p:notes>
-</file>
-
-<file path=ppt/notesSlides/notesSlide9.xml><?xml version="1.0" encoding="utf-8"?>
-<p:notes xmlns:p="http://schemas.openxmlformats.org/presentationml/2006/main">
-  <p:cSld>
-    <p:spTree>
-      <p:nvGrpSpPr>
-        <p:cNvPr id="1" name=""/>
-        <p:cNvGrpSpPr/>
-        <p:nvPr/>
-      </p:nvGrpSpPr>
-      <p:grpSpPr>
-        <a:xfrm xmlns:a="http://schemas.openxmlformats.org/drawingml/2006/main"/>
-      </p:grpSpPr>
-      <p:sp>
-        <p:nvSpPr>
-          <p:cNvPr id="2" name="Slide Image Placeholder 1"/>
-          <p:cNvSpPr>
-            <a:spLocks xmlns:a="http://schemas.openxmlformats.org/drawingml/2006/main" noGrp="1"/>
-          </p:cNvSpPr>
-          <p:nvPr>
-            <p:ph type="sldImg" idx="0"/>
-          </p:nvPr>
-        </p:nvSpPr>
-        <p:spPr/>
-      </p:sp>
-      <p:sp>
-        <p:nvSpPr>
-          <p:cNvPr id="3" name="Notes Placeholder 2"/>
-          <p:cNvSpPr>
-            <a:spLocks xmlns:a="http://schemas.openxmlformats.org/drawingml/2006/main" noGrp="1"/>
-          </p:cNvSpPr>
-          <p:nvPr>
-            <p:ph type="body" idx="1"/>
-          </p:nvPr>
-        </p:nvSpPr>
-        <p:spPr/>
-        <p:txBody>
-          <a:bodyPr xmlns:a="http://schemas.openxmlformats.org/drawingml/2006/main"/>
-          <a:lstStyle xmlns:a="http://schemas.openxmlformats.org/drawingml/2006/main"/>
-          <a:p xmlns:a="http://schemas.openxmlformats.org/drawingml/2006/main">
-            <a:r>
-              <a:t>這頁可以補充 Flask 預設只綁 127.0.0.1，容器外不一定連得到，所以講義使用 0.0.0.0。</a:t>
-            </a:r>
-          </a:p>
-        </p:txBody>
-      </p:sp>
-      <p:sp>
-        <p:nvSpPr>
-          <p:cNvPr id="4" name="Slide Number Placeholder 3"/>
-          <p:cNvSpPr>
-            <a:spLocks xmlns:a="http://schemas.openxmlformats.org/drawingml/2006/main" noGrp="1"/>
-          </p:cNvSpPr>
-          <p:nvPr>
-            <p:ph type="sldNum" idx="5"/>
-          </p:nvPr>
-        </p:nvSpPr>
-        <p:spPr/>
-        <p:txBody>
-          <a:bodyPr xmlns:a="http://schemas.openxmlformats.org/drawingml/2006/main"/>
-          <a:lstStyle xmlns:a="http://schemas.openxmlformats.org/drawingml/2006/main"/>
-          <a:p xmlns:a="http://schemas.openxmlformats.org/drawingml/2006/main"/>
-        </p:txBody>
-      </p:sp>
-    </p:spTree>
-  </p:cSld>
-  <p:clrMapOvr>
-    <a:masterClrMapping xmlns:a="http://schemas.openxmlformats.org/drawingml/2006/main"/>
-  </p:clrMapOvr>
-</p:notes>
-</file>
-
 <file path=ppt/slideLayouts/slideLayout1.xml><?xml version="1.0" encoding="utf-8"?>
 <p:sldLayout xmlns:p="http://schemas.openxmlformats.org/presentationml/2006/main" type="title">
   <p:cSld name="Title Slide">
@@ -2664,7 +174,7 @@
   </p:cSld>
   <p:clrMap bg1="lt1" tx1="dk1" bg2="lt2" tx2="dk2" accent1="accent1" accent2="accent2" accent3="accent3" accent4="accent4" accent5="accent5" accent6="accent6" hlink="hlink" folHlink="folHlink"/>
   <p:sldLayoutIdLst>
-    <p:sldLayoutId xmlns:r="http://schemas.openxmlformats.org/officeDocument/2006/relationships" id="2147483649" r:id="Ra2bc9eaad9e24952"/>
+    <p:sldLayoutId xmlns:r="http://schemas.openxmlformats.org/officeDocument/2006/relationships" id="2147483649" r:id="R3e141b31e09642d6"/>
   </p:sldLayoutIdLst>
   <p:txStyles>
     <p:titleStyle>
@@ -3254,14 +764,14 @@
       </p:sp>
       <p:pic>
         <p:nvPicPr>
-          <p:cNvPr id="12" name=""/>
+          <p:cNvPr id="13" name=""/>
           <p:cNvPicPr>
             <a:picLocks xmlns:a="http://schemas.openxmlformats.org/drawingml/2006/main" noChangeAspect="1"/>
           </p:cNvPicPr>
           <p:nvPr/>
         </p:nvPicPr>
         <p:blipFill>
-          <a:blip xmlns:r="http://schemas.openxmlformats.org/officeDocument/2006/relationships" xmlns:a="http://schemas.openxmlformats.org/drawingml/2006/main" r:embed="R100f046325aa4054"/>
+          <a:blip xmlns:r="http://schemas.openxmlformats.org/officeDocument/2006/relationships" xmlns:a="http://schemas.openxmlformats.org/drawingml/2006/main" r:embed="Rf9f1ae1a74d5427b"/>
           <a:srcRect xmlns:a="http://schemas.openxmlformats.org/drawingml/2006/main" l="19046" t="0" r="19046" b="0"/>
           <a:stretch xmlns:a="http://schemas.openxmlformats.org/drawingml/2006/main">
             <a:fillRect l="0" t="0" r="0" b="0"/>
@@ -16764,14 +14274,14 @@
       </p:sp>
       <p:pic>
         <p:nvPicPr>
-          <p:cNvPr id="17" name=""/>
+          <p:cNvPr id="18" name=""/>
           <p:cNvPicPr>
             <a:picLocks xmlns:a="http://schemas.openxmlformats.org/drawingml/2006/main" noChangeAspect="1"/>
           </p:cNvPicPr>
           <p:nvPr/>
         </p:nvPicPr>
         <p:blipFill>
-          <a:blip xmlns:r="http://schemas.openxmlformats.org/officeDocument/2006/relationships" xmlns:a="http://schemas.openxmlformats.org/drawingml/2006/main" r:embed="Rb9927c5d72e94a4b"/>
+          <a:blip xmlns:r="http://schemas.openxmlformats.org/officeDocument/2006/relationships" xmlns:a="http://schemas.openxmlformats.org/drawingml/2006/main" r:embed="R282184615bf64413"/>
           <a:srcRect xmlns:a="http://schemas.openxmlformats.org/drawingml/2006/main" l="3100" t="0" r="3100" b="0"/>
           <a:stretch xmlns:a="http://schemas.openxmlformats.org/drawingml/2006/main">
             <a:fillRect l="0" t="0" r="0" b="0"/>
@@ -16783,9 +14293,7 @@
             <a:ext cx="4762500" cy="2857500"/>
           </a:xfrm>
           <a:prstGeom xmlns:a="http://schemas.openxmlformats.org/drawingml/2006/main" prst="roundRect">
-            <a:avLst>
-              <a:gd name="adj" fmla="val 4667"/>
-            </a:avLst>
+            <a:avLst/>
           </a:prstGeom>
         </p:spPr>
       </p:pic>

--- a/slides/docker-session2-flask-volume.pptx
+++ b/slides/docker-session2-flask-volume.pptx
@@ -15,15 +15,19 @@
     <p:sldId xmlns:r="http://schemas.openxmlformats.org/officeDocument/2006/relationships" id="277" r:id="Rbbc11fa5b0a04635"/>
     <p:sldId xmlns:r="http://schemas.openxmlformats.org/officeDocument/2006/relationships" id="278" r:id="Ra68fe3e0b34b4e4a"/>
     <p:sldId xmlns:r="http://schemas.openxmlformats.org/officeDocument/2006/relationships" id="282" r:id="Re87491485f554d9a"/>
+    <p:sldId id="286" r:id="rId1"/>
     <p:sldId xmlns:r="http://schemas.openxmlformats.org/officeDocument/2006/relationships" id="261" r:id="R7a7826068faf4937"/>
+    <p:sldId id="287" r:id="rId2"/>
     <p:sldId xmlns:r="http://schemas.openxmlformats.org/officeDocument/2006/relationships" id="262" r:id="R7f1e18ea616d4d9c"/>
     <p:sldId xmlns:r="http://schemas.openxmlformats.org/officeDocument/2006/relationships" id="263" r:id="Ra5957e6bea0546d3"/>
     <p:sldId xmlns:r="http://schemas.openxmlformats.org/officeDocument/2006/relationships" id="264" r:id="Rec976999b6fc4070"/>
+    <p:sldId id="288" r:id="rId3"/>
     <p:sldId xmlns:r="http://schemas.openxmlformats.org/officeDocument/2006/relationships" id="265" r:id="R14a54adb5da94918"/>
     <p:sldId xmlns:r="http://schemas.openxmlformats.org/officeDocument/2006/relationships" id="266" r:id="R316e1e92e90c4749"/>
     <p:sldId xmlns:r="http://schemas.openxmlformats.org/officeDocument/2006/relationships" id="267" r:id="R4ef877801c854a5e"/>
     <p:sldId xmlns:r="http://schemas.openxmlformats.org/officeDocument/2006/relationships" id="268" r:id="R5b422180ca0547bd"/>
     <p:sldId xmlns:r="http://schemas.openxmlformats.org/officeDocument/2006/relationships" id="269" r:id="R0be14ae451794734"/>
+    <p:sldId id="289" r:id="rId4"/>
     <p:sldId xmlns:r="http://schemas.openxmlformats.org/officeDocument/2006/relationships" id="270" r:id="Rb46e153cf9cc4d4d"/>
     <p:sldId xmlns:r="http://schemas.openxmlformats.org/officeDocument/2006/relationships" id="271" r:id="R173591232d004c1d"/>
     <p:sldId xmlns:r="http://schemas.openxmlformats.org/officeDocument/2006/relationships" id="272" r:id="R2901208d8c284821"/>
@@ -35,10 +39,6 @@
     <p:sldId xmlns:r="http://schemas.openxmlformats.org/officeDocument/2006/relationships" id="283" r:id="Rf0a51c87337945ba"/>
     <p:sldId xmlns:r="http://schemas.openxmlformats.org/officeDocument/2006/relationships" id="284" r:id="R19deeb6c7c3e4dd2"/>
     <p:sldId xmlns:r="http://schemas.openxmlformats.org/officeDocument/2006/relationships" id="285" r:id="R11c2b837f19d4d5c"/>
-    <p:sldId id="286" r:id="rId1"/>
-    <p:sldId id="287" r:id="rId2"/>
-    <p:sldId id="288" r:id="rId3"/>
-    <p:sldId id="289" r:id="rId4"/>
   </p:sldIdLst>
   <p:sldSz cx="12192000" cy="6858000"/>
   <p:notesSz cx="6858000" cy="9144000"/>
@@ -27385,7 +27385,7 @@
 
 <file path=ppt/slides/slide31.xml><?xml version="1.0" encoding="utf-8"?>
 <p:sld xmlns:a="http://schemas.openxmlformats.org/drawingml/2006/main" xmlns:r="http://schemas.openxmlformats.org/officeDocument/2006/relationships" xmlns:p="http://schemas.openxmlformats.org/presentationml/2006/main">
-  <p:cSld name="程式碼附錄 1: Bind Mount + Nginx">
+  <p:cSld name="範例程式碼：Bind Mount + Nginx">
     <p:bg>
       <p:bgPr>
         <a:solidFill>
@@ -27442,7 +27442,7 @@
                 <a:ea typeface="Aptos"/>
                 <a:cs typeface="Aptos"/>
               </a:rPr>
-              <a:t>CODE APPENDIX</a:t>
+              <a:t>CODE EXAMPLE</a:t>
             </a:r>
           </a:p>
         </p:txBody>
@@ -27481,7 +27481,7 @@
                 <a:ea typeface="Aptos"/>
                 <a:cs typeface="Aptos"/>
               </a:rPr>
-              <a:t>程式碼附錄 1: Bind Mount + Nginx</a:t>
+              <a:t>範例程式碼：Bind Mount + Nginx</a:t>
             </a:r>
           </a:p>
         </p:txBody>
@@ -27758,7 +27758,7 @@
                 <a:ea typeface="Aptos"/>
                 <a:cs typeface="Aptos"/>
               </a:rPr>
-              <a:t>Docker 基礎教學 | 第 2 堂 | Code 1/4</a:t>
+              <a:t>Docker 基礎教學 | 第 2 堂 | 範例程式碼</a:t>
             </a:r>
           </a:p>
         </p:txBody>
@@ -27797,7 +27797,7 @@
                 <a:ea typeface="Aptos"/>
                 <a:cs typeface="Aptos"/>
               </a:rPr>
-              <a:t>A1</a:t>
+              <a:t>CODE</a:t>
             </a:r>
           </a:p>
         </p:txBody>
@@ -27812,7 +27812,7 @@
 
 <file path=ppt/slides/slide32.xml><?xml version="1.0" encoding="utf-8"?>
 <p:sld xmlns:a="http://schemas.openxmlformats.org/drawingml/2006/main" xmlns:r="http://schemas.openxmlformats.org/officeDocument/2006/relationships" xmlns:p="http://schemas.openxmlformats.org/presentationml/2006/main">
-  <p:cSld name="程式碼附錄 2: Flask app.py">
+  <p:cSld name="範例程式碼：Flask app.py">
     <p:bg>
       <p:bgPr>
         <a:solidFill>
@@ -27869,7 +27869,7 @@
                 <a:ea typeface="Aptos"/>
                 <a:cs typeface="Aptos"/>
               </a:rPr>
-              <a:t>CODE APPENDIX</a:t>
+              <a:t>CODE EXAMPLE</a:t>
             </a:r>
           </a:p>
         </p:txBody>
@@ -27908,7 +27908,7 @@
                 <a:ea typeface="Aptos"/>
                 <a:cs typeface="Aptos"/>
               </a:rPr>
-              <a:t>程式碼附錄 2: Flask app.py</a:t>
+              <a:t>範例程式碼：Flask app.py</a:t>
             </a:r>
           </a:p>
         </p:txBody>
@@ -28237,7 +28237,7 @@
                 <a:ea typeface="Aptos"/>
                 <a:cs typeface="Aptos"/>
               </a:rPr>
-              <a:t>Docker 基礎教學 | 第 2 堂 | Code 2/4</a:t>
+              <a:t>Docker 基礎教學 | 第 2 堂 | 範例程式碼</a:t>
             </a:r>
           </a:p>
         </p:txBody>
@@ -28276,7 +28276,7 @@
                 <a:ea typeface="Aptos"/>
                 <a:cs typeface="Aptos"/>
               </a:rPr>
-              <a:t>A2</a:t>
+              <a:t>CODE</a:t>
             </a:r>
           </a:p>
         </p:txBody>
@@ -28291,7 +28291,7 @@
 
 <file path=ppt/slides/slide33.xml><?xml version="1.0" encoding="utf-8"?>
 <p:sld xmlns:a="http://schemas.openxmlformats.org/drawingml/2006/main" xmlns:r="http://schemas.openxmlformats.org/officeDocument/2006/relationships" xmlns:p="http://schemas.openxmlformats.org/presentationml/2006/main">
-  <p:cSld name="程式碼附錄 3: requirements.txt 與啟動容器">
+  <p:cSld name="範例程式碼：requirements.txt 與啟動容器">
     <p:bg>
       <p:bgPr>
         <a:solidFill>
@@ -28348,7 +28348,7 @@
                 <a:ea typeface="Aptos"/>
                 <a:cs typeface="Aptos"/>
               </a:rPr>
-              <a:t>CODE APPENDIX</a:t>
+              <a:t>CODE EXAMPLE</a:t>
             </a:r>
           </a:p>
         </p:txBody>
@@ -28387,7 +28387,7 @@
                 <a:ea typeface="Aptos"/>
                 <a:cs typeface="Aptos"/>
               </a:rPr>
-              <a:t>程式碼附錄 3: requirements.txt 與啟動容器</a:t>
+              <a:t>範例程式碼：requirements.txt 與啟動容器</a:t>
             </a:r>
           </a:p>
         </p:txBody>
@@ -28625,7 +28625,7 @@
                 <a:ea typeface="Aptos"/>
                 <a:cs typeface="Aptos"/>
               </a:rPr>
-              <a:t>Docker 基礎教學 | 第 2 堂 | Code 3/4</a:t>
+              <a:t>Docker 基礎教學 | 第 2 堂 | 範例程式碼</a:t>
             </a:r>
           </a:p>
         </p:txBody>
@@ -28664,7 +28664,7 @@
                 <a:ea typeface="Aptos"/>
                 <a:cs typeface="Aptos"/>
               </a:rPr>
-              <a:t>A3</a:t>
+              <a:t>CODE</a:t>
             </a:r>
           </a:p>
         </p:txBody>
@@ -28679,7 +28679,7 @@
 
 <file path=ppt/slides/slide34.xml><?xml version="1.0" encoding="utf-8"?>
 <p:sld xmlns:a="http://schemas.openxmlformats.org/drawingml/2006/main" xmlns:r="http://schemas.openxmlformats.org/officeDocument/2006/relationships" xmlns:p="http://schemas.openxmlformats.org/presentationml/2006/main">
-  <p:cSld name="程式碼附錄 4: 容器生命週期常用指令">
+  <p:cSld name="範例程式碼：容器生命週期常用指令">
     <p:bg>
       <p:bgPr>
         <a:solidFill>
@@ -28736,7 +28736,7 @@
                 <a:ea typeface="Aptos"/>
                 <a:cs typeface="Aptos"/>
               </a:rPr>
-              <a:t>CODE APPENDIX</a:t>
+              <a:t>CODE EXAMPLE</a:t>
             </a:r>
           </a:p>
         </p:txBody>
@@ -28775,7 +28775,7 @@
                 <a:ea typeface="Aptos"/>
                 <a:cs typeface="Aptos"/>
               </a:rPr>
-              <a:t>程式碼附錄 4: 容器生命週期常用指令</a:t>
+              <a:t>範例程式碼：容器生命週期常用指令</a:t>
             </a:r>
           </a:p>
         </p:txBody>
@@ -29039,7 +29039,7 @@
                 <a:ea typeface="Aptos"/>
                 <a:cs typeface="Aptos"/>
               </a:rPr>
-              <a:t>Docker 基礎教學 | 第 2 堂 | Code 4/4</a:t>
+              <a:t>Docker 基礎教學 | 第 2 堂 | 範例程式碼</a:t>
             </a:r>
           </a:p>
         </p:txBody>
@@ -29078,7 +29078,7 @@
                 <a:ea typeface="Aptos"/>
                 <a:cs typeface="Aptos"/>
               </a:rPr>
-              <a:t>A4</a:t>
+              <a:t>CODE</a:t>
             </a:r>
           </a:p>
         </p:txBody>

--- a/slides/docker-session2-flask-volume.pptx
+++ b/slides/docker-session2-flask-volume.pptx
@@ -19346,7 +19346,7 @@
                 <a:ea typeface="Aptos Display"/>
                 <a:cs typeface="Aptos Display"/>
               </a:rPr>
-              <a:t>唯讀掛載避免容器改到設定檔</a:t>
+              <a:t>唯讀掛載避免容器改到宿主機檔案</a:t>
             </a:r>
           </a:p>
         </p:txBody>
@@ -19542,7 +19542,7 @@
                 <a:ea typeface="Consolas"/>
                 <a:cs typeface="Consolas"/>
               </a:rPr>
-              <a:t>docker run -v "C:\my-config:/app/config:ro" my-image</a:t>
+              <a:t>docker run --rm -p 8081:80 -v "C:\docker-lab\site:/usr/share/nginx/html:ro" nginx</a:t>
             </a:r>
           </a:p>
         </p:txBody>
@@ -19872,7 +19872,7 @@
                 <a:ea typeface="Aptos"/>
                 <a:cs typeface="Aptos"/>
               </a:rPr>
-              <a:t>掛載設定檔、憑證、只讀資料集，避免程式意外覆寫宿主機檔案。</a:t>
+              <a:t>掛載靜態網頁、設定檔或只讀資料集，避免程式意外覆寫宿主機檔案。</a:t>
             </a:r>
           </a:p>
         </p:txBody>
@@ -20721,7 +20721,7 @@
                 <a:ea typeface="Aptos"/>
                 <a:cs typeface="Aptos"/>
               </a:rPr>
-              <a:t>適合搭配講義附錄的唯讀掛載指令操作。</a:t>
+              <a:t>適合搭配前面的唯讀掛載概念操作。</a:t>
             </a:r>
           </a:p>
         </p:txBody>
@@ -22232,7 +22232,7 @@
                 <a:ea typeface="Consolas"/>
                 <a:cs typeface="Consolas"/>
               </a:rPr>
-              <a:t>docker run -d --name volume-demo -p 8080:80 \</a:t>
+              <a:t>docker run -d --name nginx-bind -p 8080:80 \</a:t>
             </a:r>
           </a:p>
           <a:p>
@@ -24508,7 +24508,7 @@
                 <a:ea typeface="Consolas"/>
                 <a:cs typeface="Consolas"/>
               </a:rPr>
-              <a:t>docker rm -f nginx-life volume-demo</a:t>
+              <a:t>docker rm -f nginx-life nginx-bind</a:t>
             </a:r>
           </a:p>
           <a:p>
@@ -26594,7 +26594,7 @@
                 <a:ea typeface="Aptos Display"/>
                 <a:cs typeface="Aptos Display"/>
               </a:rPr>
-              <a:t>Flask</a:t>
+              <a:t>Volume</a:t>
             </a:r>
           </a:p>
         </p:txBody>
@@ -26924,7 +26924,7 @@
                 <a:ea typeface="Aptos Display"/>
                 <a:cs typeface="Aptos Display"/>
               </a:rPr>
-              <a:t>Volume</a:t>
+              <a:t>Flask</a:t>
             </a:r>
           </a:p>
         </p:txBody>
@@ -27654,7 +27654,7 @@
                 <a:ea typeface="Consolas"/>
                 <a:cs typeface="Consolas"/>
               </a:rPr>
-              <a:t>docker run -d --name volume-demo -p 8080:80 -v "C:\docker-lab\volume-test:/usr/share/nginx/</a:t>
+              <a:t>docker run -d --name nginx-bind -p 8080:80 -v "C:\docker-lab\volume-test:/usr/share/nginx/</a:t>
             </a:r>
           </a:p>
           <a:p>
@@ -27693,7 +27693,7 @@
                 <a:ea typeface="Consolas"/>
                 <a:cs typeface="Consolas"/>
               </a:rPr>
-              <a:t>docker exec -it volume-demo sh</a:t>
+              <a:t>docker exec -it nginx-bind sh</a:t>
             </a:r>
           </a:p>
           <a:p>

--- a/slides/docker-session2-flask-volume.pptx
+++ b/slides/docker-session2-flask-volume.pptx
@@ -20967,7 +20967,7 @@
                 <a:ea typeface="Aptos"/>
                 <a:cs typeface="Aptos"/>
               </a:rPr>
-              <a:t>VOLUME SYNC LAB</a:t>
+              <a:t>BIND MOUNT WARM-UP</a:t>
             </a:r>
           </a:p>
         </p:txBody>
@@ -21029,7 +21029,7 @@
                 <a:ea typeface="Aptos Display"/>
                 <a:cs typeface="Aptos Display"/>
               </a:rPr>
-              <a:t>實作：Nginx + Bind Mount 同步網頁</a:t>
+              <a:t>暖身：比較 Nginx 有沒有 -v</a:t>
             </a:r>
           </a:p>
         </p:txBody>
@@ -21516,7 +21516,7 @@
                 <a:ea typeface="Aptos"/>
                 <a:cs typeface="Aptos"/>
               </a:rPr>
-              <a:t>寫入 Hello Volume 內容</a:t>
+              <a:t>寫入一行 HTML</a:t>
             </a:r>
           </a:p>
         </p:txBody>
@@ -21714,7 +21714,7 @@
                 <a:ea typeface="Aptos Display"/>
                 <a:cs typeface="Aptos Display"/>
               </a:rPr>
-              <a:t>啟動 Nginx</a:t>
+              <a:t>用官方 Nginx 讀資料夾</a:t>
             </a:r>
           </a:p>
         </p:txBody>
@@ -21974,7 +21974,7 @@
                 <a:ea typeface="Aptos Display"/>
                 <a:cs typeface="Aptos Display"/>
               </a:rPr>
-              <a:t>修改宿主機檔案</a:t>
+              <a:t>只觀察同步</a:t>
             </a:r>
           </a:p>
         </p:txBody>
@@ -22036,7 +22036,7 @@
                 <a:ea typeface="Aptos"/>
                 <a:cs typeface="Aptos"/>
               </a:rPr>
-              <a:t>瀏覽器 F5 馬上看到變更</a:t>
+              <a:t>有 -v 才會讀本機檔案</a:t>
             </a:r>
           </a:p>
         </p:txBody>
@@ -24508,7 +24508,7 @@
                 <a:ea typeface="Consolas"/>
                 <a:cs typeface="Consolas"/>
               </a:rPr>
-              <a:t>docker rm -f nginx-life nginx-bind</a:t>
+              <a:t>docker rm -f nginx-life nginx-default nginx-bind</a:t>
             </a:r>
           </a:p>
           <a:p>
@@ -27385,7 +27385,7 @@
 
 <file path=ppt/slides/slide31.xml><?xml version="1.0" encoding="utf-8"?>
 <p:sld xmlns:a="http://schemas.openxmlformats.org/drawingml/2006/main" xmlns:r="http://schemas.openxmlformats.org/officeDocument/2006/relationships" xmlns:p="http://schemas.openxmlformats.org/presentationml/2006/main">
-  <p:cSld name="範例程式碼：Bind Mount + Nginx">
+  <p:cSld name="範例程式碼：比較 Nginx 有沒有 -v">
     <p:bg>
       <p:bgPr>
         <a:solidFill>
@@ -27481,7 +27481,7 @@
                 <a:ea typeface="Aptos"/>
                 <a:cs typeface="Aptos"/>
               </a:rPr>
-              <a:t>範例程式碼：Bind Mount + Nginx</a:t>
+              <a:t>範例程式碼：比較 Nginx 有沒有 -v</a:t>
             </a:r>
           </a:p>
         </p:txBody>
@@ -27520,7 +27520,7 @@
                 <a:ea typeface="Aptos"/>
                 <a:cs typeface="Aptos"/>
               </a:rPr>
-              <a:t>第 2 堂 | 可直接照做的完整範例</a:t>
+              <a:t>第 2 堂 | 沒有 -v 是預設頁；有 -v 才讀本機資料夾</a:t>
             </a:r>
           </a:p>
         </p:txBody>
@@ -27602,7 +27602,7 @@
                 <a:ea typeface="Consolas"/>
                 <a:cs typeface="Consolas"/>
               </a:rPr>
-              <a:t>mkdir C:\docker-lab\volume-test</a:t>
+              <a:t># 沒有 -v：Nginx 讀 image 內建首頁</a:t>
             </a:r>
           </a:p>
           <a:p>
@@ -27615,7 +27615,7 @@
                 <a:ea typeface="Consolas"/>
                 <a:cs typeface="Consolas"/>
               </a:rPr>
-              <a:t>cd C:\docker-lab\volume-test</a:t>
+              <a:t>docker run -d --name nginx-default -p 8081:80 nginx</a:t>
             </a:r>
           </a:p>
           <a:p>
@@ -27641,7 +27641,7 @@
                 <a:ea typeface="Consolas"/>
                 <a:cs typeface="Consolas"/>
               </a:rPr>
-              <a:t># 建立 index.html 後啟動 Nginx</a:t>
+              <a:t># 有 -v：本機資料夾取代 Nginx 網頁目錄</a:t>
             </a:r>
           </a:p>
           <a:p>
@@ -27654,7 +27654,7 @@
                 <a:ea typeface="Consolas"/>
                 <a:cs typeface="Consolas"/>
               </a:rPr>
-              <a:t>docker run -d --name nginx-bind -p 8080:80 -v "C:\docker-lab\volume-test:/usr/share/nginx/</a:t>
+              <a:t>mkdir C:\docker-lab\volume-test</a:t>
             </a:r>
           </a:p>
           <a:p>
@@ -27667,7 +27667,7 @@
                 <a:ea typeface="Consolas"/>
                 <a:cs typeface="Consolas"/>
               </a:rPr>
-              <a:t>  html" nginx</a:t>
+              <a:t>notepad C:\docker-lab\volume-test\index.html</a:t>
             </a:r>
           </a:p>
           <a:p>
@@ -27693,7 +27693,7 @@
                 <a:ea typeface="Consolas"/>
                 <a:cs typeface="Consolas"/>
               </a:rPr>
-              <a:t>docker exec -it nginx-bind sh</a:t>
+              <a:t>docker run -d --name nginx-bind -p 8080:80 -v "C:\docker-lab\volume-test:/usr/share/nginx/html" nginx</a:t>
             </a:r>
           </a:p>
           <a:p>
@@ -27706,7 +27706,7 @@
                 <a:ea typeface="Consolas"/>
                 <a:cs typeface="Consolas"/>
               </a:rPr>
-              <a:t>cat /usr/share/nginx/html/index.html</a:t>
+              <a:t># 8081 是預設頁；8080 會讀本機 index.html</a:t>
             </a:r>
           </a:p>
           <a:p>
@@ -27719,7 +27719,7 @@
                 <a:ea typeface="Consolas"/>
                 <a:cs typeface="Consolas"/>
               </a:rPr>
-              <a:t>exit</a:t>
+              <a:t>docker rm -f nginx-default nginx-bind</a:t>
             </a:r>
           </a:p>
         </p:txBody>
@@ -31950,7 +31950,7 @@
                 <a:ea typeface="Aptos"/>
                 <a:cs typeface="Aptos"/>
               </a:rPr>
-              <a:t>重點：把程式放在宿主機，讓容器負責提供 Python 執行環境。</a:t>
+              <a:t>剛剛 Nginx 只驗證 -v；現在把同一個概念用在 Flask 專案。</a:t>
             </a:r>
           </a:p>
         </p:txBody>

--- a/slides/docker-session2-flask-volume.pptx
+++ b/slides/docker-session2-flask-volume.pptx
@@ -20,6 +20,7 @@
     <p:sldId id="287" r:id="rId2"/>
     <p:sldId xmlns:r="http://schemas.openxmlformats.org/officeDocument/2006/relationships" id="262" r:id="R7f1e18ea616d4d9c"/>
     <p:sldId xmlns:r="http://schemas.openxmlformats.org/officeDocument/2006/relationships" id="263" r:id="Ra5957e6bea0546d3"/>
+    <p:sldId id="290" r:id="rIdCodexPortDebug35"/>
     <p:sldId xmlns:r="http://schemas.openxmlformats.org/officeDocument/2006/relationships" id="264" r:id="Rec976999b6fc4070"/>
     <p:sldId id="288" r:id="rId3"/>
     <p:sldId xmlns:r="http://schemas.openxmlformats.org/officeDocument/2006/relationships" id="265" r:id="R14a54adb5da94918"/>
@@ -29091,6 +29092,717 @@
 </p:sld>
 </file>
 
+<file path=ppt/slides/slide35.xml><?xml version="1.0" encoding="utf-8"?>
+<p:sld xmlns:a="http://schemas.openxmlformats.org/drawingml/2006/main" xmlns:p="http://schemas.openxmlformats.org/presentationml/2006/main" xmlns:r="http://schemas.openxmlformats.org/officeDocument/2006/relationships">
+  <p:cSld name="Port 被佔用時怎麼查">
+    <p:bg>
+      <p:bgPr>
+        <a:solidFill>
+          <a:srgbClr val="F6F8FB"/>
+        </a:solidFill>
+      </p:bgPr>
+    </p:bg>
+    <p:spTree>
+      <p:nvGrpSpPr>
+        <p:cNvPr id="1" name=""/>
+        <p:cNvGrpSpPr/>
+        <p:nvPr/>
+      </p:nvGrpSpPr>
+      <p:grpSpPr>
+        <a:xfrm/>
+      </p:grpSpPr>
+      <p:sp>
+        <p:nvSpPr>
+          <p:cNvPr id="2" name=""/>
+          <p:cNvSpPr>
+            <a:spLocks noGrp="1"/>
+          </p:cNvSpPr>
+          <p:nvPr/>
+        </p:nvSpPr>
+        <p:spPr>
+          <a:xfrm>
+            <a:off x="609600" y="400050"/>
+            <a:ext cx="6191250" cy="228600"/>
+          </a:xfrm>
+          <a:prstGeom prst="rect">
+            <a:avLst/>
+          </a:prstGeom>
+          <a:noFill/>
+          <a:ln w="0">
+            <a:noFill/>
+            <a:prstDash val="solid"/>
+          </a:ln>
+        </p:spPr>
+        <p:txBody>
+          <a:bodyPr lIns="0" tIns="0" rIns="0" bIns="0" anchor="t">
+            <a:normAutofit fontScale="100000"/>
+          </a:bodyPr>
+          <a:lstStyle/>
+          <a:p>
+            <a:pPr algn="l">
+              <a:lnSpc>
+                <a:spcPct val="106000"/>
+              </a:lnSpc>
+              <a:buNone/>
+              <a:defRPr sz="900" b="1">
+                <a:solidFill>
+                  <a:srgbClr val="0B5CAD"/>
+                </a:solidFill>
+                <a:latin typeface="Aptos"/>
+                <a:ea typeface="Aptos"/>
+                <a:cs typeface="Aptos"/>
+              </a:defRPr>
+            </a:pPr>
+            <a:r>
+              <a:rPr sz="900" b="1">
+                <a:solidFill>
+                  <a:srgbClr val="0B5CAD"/>
+                </a:solidFill>
+                <a:latin typeface="Aptos"/>
+                <a:ea typeface="Aptos"/>
+                <a:cs typeface="Aptos"/>
+              </a:rPr>
+              <a:t>PORT CONFLICT DEBUG</a:t>
+            </a:r>
+          </a:p>
+        </p:txBody>
+      </p:sp>
+      <p:sp>
+        <p:nvSpPr>
+          <p:cNvPr id="3" name=""/>
+          <p:cNvSpPr>
+            <a:spLocks noGrp="1"/>
+          </p:cNvSpPr>
+          <p:nvPr/>
+        </p:nvSpPr>
+        <p:spPr>
+          <a:xfrm>
+            <a:off x="609600" y="742950"/>
+            <a:ext cx="9906000" cy="571500"/>
+          </a:xfrm>
+          <a:prstGeom prst="rect">
+            <a:avLst/>
+          </a:prstGeom>
+          <a:noFill/>
+          <a:ln w="0">
+            <a:noFill/>
+            <a:prstDash val="solid"/>
+          </a:ln>
+        </p:spPr>
+        <p:txBody>
+          <a:bodyPr lIns="0" tIns="0" rIns="0" bIns="0" anchor="t">
+            <a:normAutofit fontScale="100000"/>
+          </a:bodyPr>
+          <a:lstStyle/>
+          <a:p>
+            <a:pPr algn="l">
+              <a:lnSpc>
+                <a:spcPct val="106000"/>
+              </a:lnSpc>
+              <a:buNone/>
+              <a:defRPr sz="2850" b="1">
+                <a:solidFill>
+                  <a:srgbClr val="0B1220"/>
+                </a:solidFill>
+                <a:latin typeface="Aptos Display"/>
+                <a:ea typeface="Aptos Display"/>
+                <a:cs typeface="Aptos Display"/>
+              </a:defRPr>
+            </a:pPr>
+            <a:r>
+              <a:rPr sz="2850" b="1">
+                <a:solidFill>
+                  <a:srgbClr val="0B1220"/>
+                </a:solidFill>
+                <a:latin typeface="Aptos Display"/>
+                <a:ea typeface="Aptos Display"/>
+                <a:cs typeface="Aptos Display"/>
+              </a:rPr>
+              <a:t>Port 被佔用時怎麼查？</a:t>
+            </a:r>
+          </a:p>
+        </p:txBody>
+      </p:sp>
+      <p:sp>
+        <p:nvSpPr>
+          <p:cNvPr id="4" name=""/>
+          <p:cNvSpPr>
+            <a:spLocks noGrp="1"/>
+          </p:cNvSpPr>
+          <p:nvPr/>
+        </p:nvSpPr>
+        <p:spPr>
+          <a:xfrm>
+            <a:off x="762000" y="1390650"/>
+            <a:ext cx="10210800" cy="838200"/>
+          </a:xfrm>
+          <a:prstGeom prst="roundRect">
+            <a:avLst>
+              <a:gd name="adj" fmla="val 8000"/>
+            </a:avLst>
+          </a:prstGeom>
+          <a:solidFill>
+            <a:srgbClr val="EEF2F7"/>
+          </a:solidFill>
+          <a:ln w="9525">
+            <a:solidFill>
+              <a:srgbClr val="CBD5E1"/>
+            </a:solidFill>
+            <a:prstDash val="solid"/>
+          </a:ln>
+        </p:spPr>
+        <p:txBody>
+          <a:bodyPr lIns="171450" tIns="171450" rIns="171450" bIns="171450" anchor="t">
+            <a:normAutofit fontScale="100000"/>
+          </a:bodyPr>
+          <a:lstStyle/>
+          <a:p>
+            <a:pPr algn="ctr">
+              <a:lnSpc>
+                <a:spcPct val="106000"/>
+              </a:lnSpc>
+              <a:buNone/>
+              <a:defRPr sz="1450" b="1">
+                <a:solidFill>
+                  <a:srgbClr val="0B1220"/>
+                </a:solidFill>
+                <a:latin typeface="Aptos"/>
+                <a:ea typeface="Aptos"/>
+                <a:cs typeface="Aptos"/>
+              </a:defRPr>
+            </a:pPr>
+            <a:r>
+              <a:rPr sz="1450" b="1">
+                <a:solidFill>
+                  <a:srgbClr val="0B1220"/>
+                </a:solidFill>
+                <a:latin typeface="Aptos"/>
+                <a:ea typeface="Aptos"/>
+                <a:cs typeface="Aptos"/>
+              </a:rPr>
+              <a:t>-p 的左邊是主機 port；如果被佔用，可以換成 8081、5001。</a:t>
+            </a:r>
+          </a:p>
+          <a:p>
+            <a:pPr algn="ctr">
+              <a:lnSpc>
+                <a:spcPct val="106000"/>
+              </a:lnSpc>
+              <a:buNone/>
+              <a:defRPr sz="1275" b="0">
+                <a:solidFill>
+                  <a:srgbClr val="334155"/>
+                </a:solidFill>
+                <a:latin typeface="Aptos"/>
+                <a:ea typeface="Aptos"/>
+                <a:cs typeface="Aptos"/>
+              </a:defRPr>
+            </a:pPr>
+            <a:r>
+              <a:rPr sz="1275" b="0">
+                <a:solidFill>
+                  <a:srgbClr val="334155"/>
+                </a:solidFill>
+                <a:latin typeface="Aptos"/>
+                <a:ea typeface="Aptos"/>
+                <a:cs typeface="Aptos"/>
+              </a:rPr>
+              <a:t>-p 的右邊是容器內服務 port，通常照 image 或 app 設定，不先亂改。</a:t>
+            </a:r>
+          </a:p>
+        </p:txBody>
+      </p:sp>
+      <p:sp>
+        <p:nvSpPr>
+          <p:cNvPr id="5" name=""/>
+          <p:cNvSpPr>
+            <a:spLocks noGrp="1"/>
+          </p:cNvSpPr>
+          <p:nvPr/>
+        </p:nvSpPr>
+        <p:spPr>
+          <a:xfrm>
+            <a:off x="762000" y="2514600"/>
+            <a:ext cx="4876800" cy="2133600"/>
+          </a:xfrm>
+          <a:prstGeom prst="roundRect">
+            <a:avLst>
+              <a:gd name="adj" fmla="val 8000"/>
+            </a:avLst>
+          </a:prstGeom>
+          <a:solidFill>
+            <a:srgbClr val="E8F3FF"/>
+          </a:solidFill>
+          <a:ln w="9525">
+            <a:solidFill>
+              <a:srgbClr val="B7DCFF"/>
+            </a:solidFill>
+            <a:prstDash val="solid"/>
+          </a:ln>
+        </p:spPr>
+        <p:txBody>
+          <a:bodyPr lIns="171450" tIns="171450" rIns="171450" bIns="171450" anchor="t">
+            <a:normAutofit fontScale="100000"/>
+          </a:bodyPr>
+          <a:lstStyle/>
+          <a:p>
+            <a:pPr algn="l">
+              <a:lnSpc>
+                <a:spcPct val="106000"/>
+              </a:lnSpc>
+              <a:buNone/>
+              <a:defRPr sz="1800" b="1">
+                <a:solidFill>
+                  <a:srgbClr val="0B5CAD"/>
+                </a:solidFill>
+                <a:latin typeface="Aptos Display"/>
+                <a:ea typeface="Aptos Display"/>
+                <a:cs typeface="Aptos Display"/>
+              </a:defRPr>
+            </a:pPr>
+            <a:r>
+              <a:rPr sz="1800" b="1">
+                <a:solidFill>
+                  <a:srgbClr val="0B5CAD"/>
+                </a:solidFill>
+                <a:latin typeface="Aptos Display"/>
+                <a:ea typeface="Aptos Display"/>
+                <a:cs typeface="Aptos Display"/>
+              </a:rPr>
+              <a:t>Windows</a:t>
+            </a:r>
+          </a:p>
+          <a:p>
+            <a:pPr algn="l">
+              <a:lnSpc>
+                <a:spcPct val="106000"/>
+              </a:lnSpc>
+              <a:buNone/>
+              <a:defRPr sz="1225" b="1">
+                <a:solidFill>
+                  <a:srgbClr val="0B1220"/>
+                </a:solidFill>
+                <a:latin typeface="Consolas"/>
+                <a:ea typeface="Consolas"/>
+                <a:cs typeface="Consolas"/>
+              </a:defRPr>
+            </a:pPr>
+            <a:r>
+              <a:rPr sz="1225" b="1">
+                <a:solidFill>
+                  <a:srgbClr val="0B1220"/>
+                </a:solidFill>
+                <a:latin typeface="Consolas"/>
+                <a:ea typeface="Consolas"/>
+                <a:cs typeface="Consolas"/>
+              </a:rPr>
+              <a:t>netstat -ano | findstr :8080</a:t>
+            </a:r>
+          </a:p>
+          <a:p>
+            <a:pPr algn="l">
+              <a:lnSpc>
+                <a:spcPct val="106000"/>
+              </a:lnSpc>
+              <a:buNone/>
+              <a:defRPr sz="1225" b="1">
+                <a:solidFill>
+                  <a:srgbClr val="0B1220"/>
+                </a:solidFill>
+                <a:latin typeface="Consolas"/>
+                <a:ea typeface="Consolas"/>
+                <a:cs typeface="Consolas"/>
+              </a:defRPr>
+            </a:pPr>
+            <a:r>
+              <a:rPr sz="1225" b="1">
+                <a:solidFill>
+                  <a:srgbClr val="0B1220"/>
+                </a:solidFill>
+                <a:latin typeface="Consolas"/>
+                <a:ea typeface="Consolas"/>
+                <a:cs typeface="Consolas"/>
+              </a:rPr>
+              <a:t>tasklist | findstr &lt;PID&gt;</a:t>
+            </a:r>
+          </a:p>
+          <a:p>
+            <a:pPr algn="l">
+              <a:lnSpc>
+                <a:spcPct val="106000"/>
+              </a:lnSpc>
+              <a:buNone/>
+              <a:defRPr sz="1150" b="0">
+                <a:solidFill>
+                  <a:srgbClr val="334155"/>
+                </a:solidFill>
+                <a:latin typeface="Aptos"/>
+                <a:ea typeface="Aptos"/>
+                <a:cs typeface="Aptos"/>
+              </a:defRPr>
+            </a:pPr>
+            <a:r>
+              <a:rPr sz="1150" b="0">
+                <a:solidFill>
+                  <a:srgbClr val="334155"/>
+                </a:solidFill>
+                <a:latin typeface="Aptos"/>
+                <a:ea typeface="Aptos"/>
+                <a:cs typeface="Aptos"/>
+              </a:rPr>
+              <a:t>必要時用工作管理員依 PID 結束程式。</a:t>
+            </a:r>
+          </a:p>
+        </p:txBody>
+      </p:sp>
+      <p:sp>
+        <p:nvSpPr>
+          <p:cNvPr id="6" name=""/>
+          <p:cNvSpPr>
+            <a:spLocks noGrp="1"/>
+          </p:cNvSpPr>
+          <p:nvPr/>
+        </p:nvSpPr>
+        <p:spPr>
+          <a:xfrm>
+            <a:off x="6400800" y="2514600"/>
+            <a:ext cx="4876800" cy="2133600"/>
+          </a:xfrm>
+          <a:prstGeom prst="roundRect">
+            <a:avLst>
+              <a:gd name="adj" fmla="val 8000"/>
+            </a:avLst>
+          </a:prstGeom>
+          <a:solidFill>
+            <a:srgbClr val="E7F8F2"/>
+          </a:solidFill>
+          <a:ln w="9525">
+            <a:solidFill>
+              <a:srgbClr val="99E6C8"/>
+            </a:solidFill>
+            <a:prstDash val="solid"/>
+          </a:ln>
+        </p:spPr>
+        <p:txBody>
+          <a:bodyPr lIns="171450" tIns="171450" rIns="171450" bIns="171450" anchor="t">
+            <a:normAutofit fontScale="100000"/>
+          </a:bodyPr>
+          <a:lstStyle/>
+          <a:p>
+            <a:pPr algn="l">
+              <a:lnSpc>
+                <a:spcPct val="106000"/>
+              </a:lnSpc>
+              <a:buNone/>
+              <a:defRPr sz="1800" b="1">
+                <a:solidFill>
+                  <a:srgbClr val="047857"/>
+                </a:solidFill>
+                <a:latin typeface="Aptos Display"/>
+                <a:ea typeface="Aptos Display"/>
+                <a:cs typeface="Aptos Display"/>
+              </a:defRPr>
+            </a:pPr>
+            <a:r>
+              <a:rPr sz="1800" b="1">
+                <a:solidFill>
+                  <a:srgbClr val="047857"/>
+                </a:solidFill>
+                <a:latin typeface="Aptos Display"/>
+                <a:ea typeface="Aptos Display"/>
+                <a:cs typeface="Aptos Display"/>
+              </a:rPr>
+              <a:t>macOS</a:t>
+            </a:r>
+          </a:p>
+          <a:p>
+            <a:pPr algn="l">
+              <a:lnSpc>
+                <a:spcPct val="106000"/>
+              </a:lnSpc>
+              <a:buNone/>
+              <a:defRPr sz="1125" b="1">
+                <a:solidFill>
+                  <a:srgbClr val="0B1220"/>
+                </a:solidFill>
+                <a:latin typeface="Consolas"/>
+                <a:ea typeface="Consolas"/>
+                <a:cs typeface="Consolas"/>
+              </a:defRPr>
+            </a:pPr>
+            <a:r>
+              <a:rPr sz="1125" b="1">
+                <a:solidFill>
+                  <a:srgbClr val="0B1220"/>
+                </a:solidFill>
+                <a:latin typeface="Consolas"/>
+                <a:ea typeface="Consolas"/>
+                <a:cs typeface="Consolas"/>
+              </a:rPr>
+              <a:t>lsof -nP -iTCP:8080 -sTCP:LISTEN</a:t>
+            </a:r>
+          </a:p>
+          <a:p>
+            <a:pPr algn="l">
+              <a:lnSpc>
+                <a:spcPct val="106000"/>
+              </a:lnSpc>
+              <a:buNone/>
+              <a:defRPr sz="1225" b="1">
+                <a:solidFill>
+                  <a:srgbClr val="0B1220"/>
+                </a:solidFill>
+                <a:latin typeface="Consolas"/>
+                <a:ea typeface="Consolas"/>
+                <a:cs typeface="Consolas"/>
+              </a:defRPr>
+            </a:pPr>
+            <a:r>
+              <a:rPr sz="1225" b="1">
+                <a:solidFill>
+                  <a:srgbClr val="0B1220"/>
+                </a:solidFill>
+                <a:latin typeface="Consolas"/>
+                <a:ea typeface="Consolas"/>
+                <a:cs typeface="Consolas"/>
+              </a:rPr>
+              <a:t>kill &lt;PID&gt;</a:t>
+            </a:r>
+          </a:p>
+          <a:p>
+            <a:pPr algn="l">
+              <a:lnSpc>
+                <a:spcPct val="106000"/>
+              </a:lnSpc>
+              <a:buNone/>
+              <a:defRPr sz="1150" b="0">
+                <a:solidFill>
+                  <a:srgbClr val="334155"/>
+                </a:solidFill>
+                <a:latin typeface="Aptos"/>
+                <a:ea typeface="Aptos"/>
+                <a:cs typeface="Aptos"/>
+              </a:defRPr>
+            </a:pPr>
+            <a:r>
+              <a:rPr sz="1150" b="0">
+                <a:solidFill>
+                  <a:srgbClr val="334155"/>
+                </a:solidFill>
+                <a:latin typeface="Aptos"/>
+                <a:ea typeface="Aptos"/>
+                <a:cs typeface="Aptos"/>
+              </a:rPr>
+              <a:t>不確定是什麼程式時，先換 host port。</a:t>
+            </a:r>
+          </a:p>
+        </p:txBody>
+      </p:sp>
+      <p:sp>
+        <p:nvSpPr>
+          <p:cNvPr id="7" name=""/>
+          <p:cNvSpPr>
+            <a:spLocks noGrp="1"/>
+          </p:cNvSpPr>
+          <p:nvPr/>
+        </p:nvSpPr>
+        <p:spPr>
+          <a:xfrm>
+            <a:off x="1714500" y="5057775"/>
+            <a:ext cx="8382000" cy="609600"/>
+          </a:xfrm>
+          <a:prstGeom prst="roundRect">
+            <a:avLst>
+              <a:gd name="adj" fmla="val 8000"/>
+            </a:avLst>
+          </a:prstGeom>
+          <a:solidFill>
+            <a:srgbClr val="0B1220"/>
+          </a:solidFill>
+          <a:ln w="9525">
+            <a:solidFill>
+              <a:srgbClr val="1E293B"/>
+            </a:solidFill>
+            <a:prstDash val="solid"/>
+          </a:ln>
+        </p:spPr>
+        <p:txBody>
+          <a:bodyPr lIns="171450" tIns="171450" rIns="171450" bIns="171450" anchor="t">
+            <a:normAutofit fontScale="100000"/>
+          </a:bodyPr>
+          <a:lstStyle/>
+          <a:p>
+            <a:pPr algn="ctr">
+              <a:lnSpc>
+                <a:spcPct val="106000"/>
+              </a:lnSpc>
+              <a:buNone/>
+              <a:defRPr sz="1450" b="1">
+                <a:solidFill>
+                  <a:srgbClr val="FFFFFF"/>
+                </a:solidFill>
+                <a:latin typeface="Consolas"/>
+                <a:ea typeface="Consolas"/>
+                <a:cs typeface="Consolas"/>
+              </a:defRPr>
+            </a:pPr>
+            <a:r>
+              <a:rPr sz="1450" b="1">
+                <a:solidFill>
+                  <a:srgbClr val="FFFFFF"/>
+                </a:solidFill>
+                <a:latin typeface="Consolas"/>
+                <a:ea typeface="Consolas"/>
+                <a:cs typeface="Consolas"/>
+              </a:rPr>
+              <a:t>8080 被佔用時：docker run -d -p 8081:80 nginx</a:t>
+            </a:r>
+          </a:p>
+        </p:txBody>
+      </p:sp>
+      <p:sp>
+        <p:nvSpPr>
+          <p:cNvPr id="40" name=""/>
+          <p:cNvSpPr/>
+          <p:nvPr/>
+        </p:nvSpPr>
+        <p:spPr>
+          <a:xfrm>
+            <a:off x="609600" y="6305550"/>
+            <a:ext cx="9906000" cy="13335"/>
+          </a:xfrm>
+          <a:prstGeom prst="rect">
+            <a:avLst/>
+          </a:prstGeom>
+          <a:solidFill>
+            <a:srgbClr val="D9E2EC"/>
+          </a:solidFill>
+          <a:ln w="0">
+            <a:noFill/>
+            <a:prstDash val="solid"/>
+          </a:ln>
+        </p:spPr>
+      </p:sp>
+      <p:sp>
+        <p:nvSpPr>
+          <p:cNvPr id="41" name=""/>
+          <p:cNvSpPr>
+            <a:spLocks noGrp="1"/>
+          </p:cNvSpPr>
+          <p:nvPr/>
+        </p:nvSpPr>
+        <p:spPr>
+          <a:xfrm>
+            <a:off x="609600" y="6400800"/>
+            <a:ext cx="2762250" cy="171450"/>
+          </a:xfrm>
+          <a:prstGeom prst="rect">
+            <a:avLst/>
+          </a:prstGeom>
+          <a:noFill/>
+          <a:ln w="0">
+            <a:noFill/>
+            <a:prstDash val="solid"/>
+          </a:ln>
+        </p:spPr>
+        <p:txBody>
+          <a:bodyPr lIns="0" tIns="0" rIns="0" bIns="0" anchor="t">
+            <a:normAutofit fontScale="100000"/>
+          </a:bodyPr>
+          <a:lstStyle/>
+          <a:p>
+            <a:pPr algn="l">
+              <a:lnSpc>
+                <a:spcPct val="106000"/>
+              </a:lnSpc>
+              <a:buNone/>
+              <a:defRPr sz="825" b="0">
+                <a:solidFill>
+                  <a:srgbClr val="64748B"/>
+                </a:solidFill>
+                <a:latin typeface="Aptos"/>
+                <a:ea typeface="Aptos"/>
+                <a:cs typeface="Aptos"/>
+              </a:defRPr>
+            </a:pPr>
+            <a:r>
+              <a:rPr sz="825" b="0">
+                <a:solidFill>
+                  <a:srgbClr val="64748B"/>
+                </a:solidFill>
+                <a:latin typeface="Aptos"/>
+                <a:ea typeface="Aptos"/>
+                <a:cs typeface="Aptos"/>
+              </a:rPr>
+              <a:t>Docker 基礎教學 | 第 2 堂</a:t>
+            </a:r>
+          </a:p>
+        </p:txBody>
+      </p:sp>
+      <p:sp>
+        <p:nvSpPr>
+          <p:cNvPr id="42" name=""/>
+          <p:cNvSpPr>
+            <a:spLocks noGrp="1"/>
+          </p:cNvSpPr>
+          <p:nvPr/>
+        </p:nvSpPr>
+        <p:spPr>
+          <a:xfrm>
+            <a:off x="11010900" y="6381750"/>
+            <a:ext cx="571500" cy="190500"/>
+          </a:xfrm>
+          <a:prstGeom prst="rect">
+            <a:avLst/>
+          </a:prstGeom>
+          <a:noFill/>
+          <a:ln w="0">
+            <a:noFill/>
+            <a:prstDash val="solid"/>
+          </a:ln>
+        </p:spPr>
+        <p:txBody>
+          <a:bodyPr lIns="0" tIns="0" rIns="0" bIns="0" anchor="t">
+            <a:normAutofit fontScale="100000"/>
+          </a:bodyPr>
+          <a:lstStyle/>
+          <a:p>
+            <a:pPr algn="r">
+              <a:lnSpc>
+                <a:spcPct val="106000"/>
+              </a:lnSpc>
+              <a:buNone/>
+              <a:defRPr sz="900" b="1">
+                <a:solidFill>
+                  <a:srgbClr val="64748B"/>
+                </a:solidFill>
+                <a:latin typeface="Aptos"/>
+                <a:ea typeface="Aptos"/>
+                <a:cs typeface="Aptos"/>
+              </a:defRPr>
+            </a:pPr>
+            <a:r>
+              <a:rPr sz="900" b="1">
+                <a:solidFill>
+                  <a:srgbClr val="64748B"/>
+                </a:solidFill>
+                <a:latin typeface="Aptos"/>
+                <a:ea typeface="Aptos"/>
+                <a:cs typeface="Aptos"/>
+              </a:rPr>
+              <a:t>13A</a:t>
+            </a:r>
+          </a:p>
+        </p:txBody>
+      </p:sp>
+    </p:spTree>
+  </p:cSld>
+  <p:clrMapOvr>
+    <a:masterClrMapping/>
+  </p:clrMapOvr>
+</p:sld>
+</file>
+
 <file path=ppt/slides/slide4.xml><?xml version="1.0" encoding="utf-8"?>
 <p:sld xmlns:a="http://schemas.openxmlformats.org/drawingml/2006/main" xmlns:ns2="http://schemas.microsoft.com/office/drawing/2014/main" xmlns:ns3="http://schemas.microsoft.com/office/powerpoint/2010/main" xmlns:p="http://schemas.openxmlformats.org/presentationml/2006/main">
   <p:cSld>

--- a/slides/docker-session2-flask-volume.pptx
+++ b/slides/docker-session2-flask-volume.pptx
@@ -4233,7 +4233,7 @@
                 <a:ea typeface="Aptos Display"/>
                 <a:cs typeface="Aptos Display"/>
               </a:rPr>
-              <a:t>容器生命週期、Volume、Flask</a:t>
+              <a:t>容器生命週期、Nginx Volume、Flask</a:t>
             </a:r>
           </a:p>
         </p:txBody>
@@ -4295,7 +4295,7 @@
                 <a:ea typeface="Aptos"/>
                 <a:cs typeface="Aptos"/>
               </a:rPr>
-              <a:t>先理解容器怎麼建立、停止與刪除，再用 Volume 保存資料。</a:t>
+              <a:t>先用 nginx 走過生命週期與 Volume，再把同一個 Bind Mount 觀念套到 Flask 開發。</a:t>
             </a:r>
           </a:p>
         </p:txBody>
@@ -4402,7 +4402,7 @@
                 <a:ea typeface="Aptos"/>
                 <a:cs typeface="Aptos"/>
               </a:rPr>
-              <a:t>今天完成：掌握 ps/start/stop/rm/logs/exec、理解 Volume、跑起 Flask。</a:t>
+              <a:t>今天完成：指令分開練，nginx 打底 Volume，再用 Flask 練程式碼掛載。</a:t>
             </a:r>
           </a:p>
         </p:txBody>
@@ -4540,7 +4540,7 @@
                 <a:ea typeface="Aptos"/>
                 <a:cs typeface="Aptos"/>
               </a:rPr>
-              <a:t>CODE EXAMPLE</a:t>
+              <a:t>STEP 8 / RECREATE</a:t>
             </a:r>
           </a:p>
         </p:txBody>
@@ -4587,7 +4587,7 @@
                 <a:ea typeface="Aptos"/>
                 <a:cs typeface="Aptos"/>
               </a:rPr>
-              <a:t>範例程式碼：容器生命週期常用指令</a:t>
+              <a:t>Step 8：刪掉 container，再用 image 重建</a:t>
             </a:r>
           </a:p>
         </p:txBody>
@@ -4634,7 +4634,7 @@
                 <a:ea typeface="Aptos"/>
                 <a:cs typeface="Aptos"/>
               </a:rPr>
-              <a:t>第 2 堂 | 可直接照做的完整範例</a:t>
+              <a:t>第 2 堂 | 看見 container 內修改會消失</a:t>
             </a:r>
           </a:p>
         </p:txBody>
@@ -4732,7 +4732,7 @@
                 <a:ea typeface="Consolas"/>
                 <a:cs typeface="Consolas"/>
               </a:rPr>
-              <a:t xml:space="preserve"> </a:t>
+              <a:t>docker rm -f nginx-life</a:t>
             </a:r>
           </a:p>
           <a:p xmlns:a="http://schemas.openxmlformats.org/drawingml/2006/main">
@@ -4745,7 +4745,7 @@
                 <a:ea typeface="Consolas"/>
                 <a:cs typeface="Consolas"/>
               </a:rPr>
-              <a:t># 停止容器</a:t>
+              <a:t/>
             </a:r>
           </a:p>
           <a:p xmlns:a="http://schemas.openxmlformats.org/drawingml/2006/main">
@@ -4758,7 +4758,7 @@
                 <a:ea typeface="Consolas"/>
                 <a:cs typeface="Consolas"/>
               </a:rPr>
-              <a:t>docker stop &lt;容器ID或名稱&gt;</a:t>
+              <a:t># 確認 container 被刪掉</a:t>
             </a:r>
           </a:p>
           <a:p xmlns:a="http://schemas.openxmlformats.org/drawingml/2006/main">
@@ -4771,7 +4771,7 @@
                 <a:ea typeface="Consolas"/>
                 <a:cs typeface="Consolas"/>
               </a:rPr>
-              <a:t xml:space="preserve"> </a:t>
+              <a:t>docker ps -a</a:t>
             </a:r>
           </a:p>
           <a:p xmlns:a="http://schemas.openxmlformats.org/drawingml/2006/main">
@@ -4784,7 +4784,7 @@
                 <a:ea typeface="Consolas"/>
                 <a:cs typeface="Consolas"/>
               </a:rPr>
-              <a:t># 啟動已停止的容器</a:t>
+              <a:t/>
             </a:r>
           </a:p>
           <a:p xmlns:a="http://schemas.openxmlformats.org/drawingml/2006/main">
@@ -4797,7 +4797,7 @@
                 <a:ea typeface="Consolas"/>
                 <a:cs typeface="Consolas"/>
               </a:rPr>
-              <a:t>docker start &lt;容器ID或名稱&gt;</a:t>
+              <a:t># 用同一個 nginx image 重建</a:t>
             </a:r>
           </a:p>
           <a:p xmlns:a="http://schemas.openxmlformats.org/drawingml/2006/main">
@@ -4810,7 +4810,7 @@
                 <a:ea typeface="Consolas"/>
                 <a:cs typeface="Consolas"/>
               </a:rPr>
-              <a:t xml:space="preserve"> </a:t>
+              <a:t>docker run -d --name nginx-life -p 9090:80 nginx</a:t>
             </a:r>
           </a:p>
           <a:p xmlns:a="http://schemas.openxmlformats.org/drawingml/2006/main">
@@ -4823,7 +4823,7 @@
                 <a:ea typeface="Consolas"/>
                 <a:cs typeface="Consolas"/>
               </a:rPr>
-              <a:t># 重新啟動容器（等於 stop + start）</a:t>
+              <a:t/>
             </a:r>
           </a:p>
           <a:p xmlns:a="http://schemas.openxmlformats.org/drawingml/2006/main">
@@ -4836,7 +4836,20 @@
                 <a:ea typeface="Consolas"/>
                 <a:cs typeface="Consolas"/>
               </a:rPr>
-              <a:t>docker restart &lt;容器ID或名稱&gt;</a:t>
+              <a:t># 重新整理 http://localhost:9090</a:t>
+            </a:r>
+          </a:p>
+          <a:p xmlns:a="http://schemas.openxmlformats.org/drawingml/2006/main">
+            <a:r>
+              <a:rPr sz="1150">
+                <a:solidFill>
+                  <a:srgbClr val="E5E7EB"/>
+                </a:solidFill>
+                <a:latin typeface="Consolas"/>
+                <a:ea typeface="Consolas"/>
+                <a:cs typeface="Consolas"/>
+              </a:rPr>
+              <a:t># 會回到 nginx 預設歡迎頁</a:t>
             </a:r>
           </a:p>
         </p:txBody>
@@ -5021,7 +5034,7 @@
                 <a:ea typeface="Aptos"/>
                 <a:cs typeface="Aptos"/>
               </a:rPr>
-              <a:t>REMOVE CONTAINERS</a:t>
+              <a:t>STEP 9 / RM VS RMI</a:t>
             </a:r>
           </a:p>
         </p:txBody>
@@ -5083,7 +5096,7 @@
                 <a:ea typeface="Aptos Display"/>
                 <a:cs typeface="Aptos Display"/>
               </a:rPr>
-              <a:t>刪除容器前先理解 rm 和 rm -f</a:t>
+              <a:t>Step 9：rm 和 rmi 是兩件事</a:t>
             </a:r>
           </a:p>
         </p:txBody>
@@ -5186,7 +5199,7 @@
                 <a:ea typeface="Aptos Display"/>
                 <a:cs typeface="Aptos Display"/>
               </a:rPr>
-              <a:t>docker rm</a:t>
+              <a:t>docker rm nginx-life</a:t>
             </a:r>
           </a:p>
         </p:txBody>
@@ -5248,7 +5261,7 @@
                 <a:ea typeface="Aptos"/>
                 <a:cs typeface="Aptos"/>
               </a:rPr>
-              <a:t>刪除已停止的容器。Docker 預設要求先 stop，避免程式正在寫資料時被直接移除。</a:t>
+              <a:t>刪除 container。container 要先停止，或改用 rm -f。</a:t>
             </a:r>
           </a:p>
         </p:txBody>
@@ -5351,7 +5364,7 @@
                 <a:ea typeface="Aptos Display"/>
                 <a:cs typeface="Aptos Display"/>
               </a:rPr>
-              <a:t>docker rm -f</a:t>
+              <a:t>docker rmi nginx</a:t>
             </a:r>
           </a:p>
         </p:txBody>
@@ -5413,7 +5426,7 @@
                 <a:ea typeface="Aptos"/>
                 <a:cs typeface="Aptos"/>
               </a:rPr>
-              <a:t>強制刪除，不管容器是否執行中。開發環境方便，正式環境要謹慎。</a:t>
+              <a:t>刪除 image。若還有 container 使用它，要先刪 container。</a:t>
             </a:r>
           </a:p>
         </p:txBody>
@@ -5609,34 +5622,7 @@
                 <a:ea typeface="Consolas"/>
                 <a:cs typeface="Consolas"/>
               </a:rPr>
-              <a:t>docker rm &lt;容器ID或名稱&gt;</a:t>
-            </a:r>
-          </a:p>
-          <a:p xmlns:a="http://schemas.openxmlformats.org/drawingml/2006/main">
-            <a:pPr algn="l">
-              <a:lnSpc>
-                <a:spcPct val="104000"/>
-              </a:lnSpc>
-              <a:buNone/>
-              <a:defRPr sz="1800" b="0">
-                <a:solidFill>
-                  <a:srgbClr val="E5E7EB"/>
-                </a:solidFill>
-                <a:latin typeface="Consolas"/>
-                <a:ea typeface="Consolas"/>
-                <a:cs typeface="Consolas"/>
-              </a:defRPr>
-            </a:pPr>
-            <a:r>
-              <a:rPr sz="1800" b="0">
-                <a:solidFill>
-                  <a:srgbClr val="E5E7EB"/>
-                </a:solidFill>
-                <a:latin typeface="Consolas"/>
-                <a:ea typeface="Consolas"/>
-                <a:cs typeface="Consolas"/>
-              </a:rPr>
-              <a:t>docker rm -f &lt;容器ID或名稱&gt;</a:t>
+              <a:t>rm 刪 container；rmi 刪 image。</a:t>
             </a:r>
           </a:p>
         </p:txBody>
@@ -5882,7 +5868,7 @@
                 <a:ea typeface="Aptos"/>
                 <a:cs typeface="Aptos"/>
               </a:rPr>
-              <a:t>EXERCISE P1 / Q2</a:t>
+              <a:t>EXERCISE P1</a:t>
             </a:r>
           </a:p>
         </p:txBody>
@@ -5944,7 +5930,7 @@
                 <a:ea typeface="Aptos Display"/>
                 <a:cs typeface="Aptos Display"/>
               </a:rPr>
-              <a:t>實作題 P1：容器生命週期完整跑一輪</a:t>
+              <a:t>實作題 P1：照順序一段一段做</a:t>
             </a:r>
           </a:p>
         </p:txBody>
@@ -6140,7 +6126,7 @@
                 <a:ea typeface="Consolas"/>
                 <a:cs typeface="Consolas"/>
               </a:rPr>
-              <a:t>docker run -d --name nginx-life -p 9090:80 nginx</a:t>
+              <a:t>1. Image</a:t>
             </a:r>
           </a:p>
           <a:p xmlns:a="http://schemas.openxmlformats.org/drawingml/2006/main">
@@ -6167,12 +6153,7 @@
                 <a:ea typeface="Consolas"/>
                 <a:cs typeface="Consolas"/>
               </a:rPr>
-              <a:t>docker ps</a:t>
-            </a:r>
-          </a:p>
-          <a:p xmlns:a="http://schemas.openxmlformats.org/drawingml/2006/main">
-            <a:r>
-              <a:t/>
+              <a:t>docker pull nginx</a:t>
             </a:r>
           </a:p>
           <a:p xmlns:a="http://schemas.openxmlformats.org/drawingml/2006/main">
@@ -6199,7 +6180,7 @@
                 <a:ea typeface="Consolas"/>
                 <a:cs typeface="Consolas"/>
               </a:rPr>
-              <a:t>docker stop nginx-life</a:t>
+              <a:t>docker images</a:t>
             </a:r>
           </a:p>
           <a:p xmlns:a="http://schemas.openxmlformats.org/drawingml/2006/main">
@@ -6226,12 +6207,7 @@
                 <a:ea typeface="Consolas"/>
                 <a:cs typeface="Consolas"/>
               </a:rPr>
-              <a:t>docker ps -a</a:t>
-            </a:r>
-          </a:p>
-          <a:p xmlns:a="http://schemas.openxmlformats.org/drawingml/2006/main">
-            <a:r>
-              <a:t/>
+              <a:t>2. Run</a:t>
             </a:r>
           </a:p>
           <a:p xmlns:a="http://schemas.openxmlformats.org/drawingml/2006/main">
@@ -6258,7 +6234,7 @@
                 <a:ea typeface="Consolas"/>
                 <a:cs typeface="Consolas"/>
               </a:rPr>
-              <a:t>docker start nginx-life</a:t>
+              <a:t>docker run -d --name nginx-life -p 9090:80 nginx</a:t>
             </a:r>
           </a:p>
           <a:p xmlns:a="http://schemas.openxmlformats.org/drawingml/2006/main">
@@ -6289,11 +6265,6 @@
             </a:r>
           </a:p>
           <a:p xmlns:a="http://schemas.openxmlformats.org/drawingml/2006/main">
-            <a:r>
-              <a:t/>
-            </a:r>
-          </a:p>
-          <a:p xmlns:a="http://schemas.openxmlformats.org/drawingml/2006/main">
             <a:pPr algn="l">
               <a:lnSpc>
                 <a:spcPct val="104000"/>
@@ -6317,7 +6288,7 @@
                 <a:ea typeface="Consolas"/>
                 <a:cs typeface="Consolas"/>
               </a:rPr>
-              <a:t>docker restart nginx-life</a:t>
+              <a:t>3. Enter / Edit</a:t>
             </a:r>
           </a:p>
           <a:p xmlns:a="http://schemas.openxmlformats.org/drawingml/2006/main">
@@ -6344,12 +6315,7 @@
                 <a:ea typeface="Consolas"/>
                 <a:cs typeface="Consolas"/>
               </a:rPr>
-              <a:t>docker ps</a:t>
-            </a:r>
-          </a:p>
-          <a:p xmlns:a="http://schemas.openxmlformats.org/drawingml/2006/main">
-            <a:r>
-              <a:t/>
+              <a:t>docker exec -it nginx-life sh</a:t>
             </a:r>
           </a:p>
           <a:p xmlns:a="http://schemas.openxmlformats.org/drawingml/2006/main">
@@ -6376,7 +6342,7 @@
                 <a:ea typeface="Consolas"/>
                 <a:cs typeface="Consolas"/>
               </a:rPr>
-              <a:t>docker rm -f nginx-life</a:t>
+              <a:t>cd /usr/share/nginx/html</a:t>
             </a:r>
           </a:p>
           <a:p xmlns:a="http://schemas.openxmlformats.org/drawingml/2006/main">
@@ -6403,7 +6369,142 @@
                 <a:ea typeface="Consolas"/>
                 <a:cs typeface="Consolas"/>
               </a:rPr>
-              <a:t>docker ps -a</a:t>
+              <a:t>echo '&lt;h1&gt;Hello from container&lt;/h1&gt;' &gt; index.html</a:t>
+            </a:r>
+          </a:p>
+          <a:p xmlns:a="http://schemas.openxmlformats.org/drawingml/2006/main">
+            <a:pPr algn="l">
+              <a:lnSpc>
+                <a:spcPct val="104000"/>
+              </a:lnSpc>
+              <a:buNone/>
+              <a:defRPr sz="1350" b="0">
+                <a:solidFill>
+                  <a:srgbClr val="E5E7EB"/>
+                </a:solidFill>
+                <a:latin typeface="Consolas"/>
+                <a:ea typeface="Consolas"/>
+                <a:cs typeface="Consolas"/>
+              </a:defRPr>
+            </a:pPr>
+            <a:r>
+              <a:rPr sz="1350" b="0">
+                <a:solidFill>
+                  <a:srgbClr val="E5E7EB"/>
+                </a:solidFill>
+                <a:latin typeface="Consolas"/>
+                <a:ea typeface="Consolas"/>
+                <a:cs typeface="Consolas"/>
+              </a:rPr>
+              <a:t>cat index.html</a:t>
+            </a:r>
+          </a:p>
+          <a:p xmlns:a="http://schemas.openxmlformats.org/drawingml/2006/main">
+            <a:pPr algn="l">
+              <a:lnSpc>
+                <a:spcPct val="104000"/>
+              </a:lnSpc>
+              <a:buNone/>
+              <a:defRPr sz="1350" b="0">
+                <a:solidFill>
+                  <a:srgbClr val="E5E7EB"/>
+                </a:solidFill>
+                <a:latin typeface="Consolas"/>
+                <a:ea typeface="Consolas"/>
+                <a:cs typeface="Consolas"/>
+              </a:defRPr>
+            </a:pPr>
+            <a:r>
+              <a:rPr sz="1350" b="0">
+                <a:solidFill>
+                  <a:srgbClr val="E5E7EB"/>
+                </a:solidFill>
+                <a:latin typeface="Consolas"/>
+                <a:ea typeface="Consolas"/>
+                <a:cs typeface="Consolas"/>
+              </a:rPr>
+              <a:t>exit</a:t>
+            </a:r>
+          </a:p>
+          <a:p xmlns:a="http://schemas.openxmlformats.org/drawingml/2006/main">
+            <a:pPr algn="l">
+              <a:lnSpc>
+                <a:spcPct val="104000"/>
+              </a:lnSpc>
+              <a:buNone/>
+              <a:defRPr sz="1350" b="0">
+                <a:solidFill>
+                  <a:srgbClr val="E5E7EB"/>
+                </a:solidFill>
+                <a:latin typeface="Consolas"/>
+                <a:ea typeface="Consolas"/>
+                <a:cs typeface="Consolas"/>
+              </a:defRPr>
+            </a:pPr>
+            <a:r>
+              <a:rPr sz="1350" b="0">
+                <a:solidFill>
+                  <a:srgbClr val="E5E7EB"/>
+                </a:solidFill>
+                <a:latin typeface="Consolas"/>
+                <a:ea typeface="Consolas"/>
+                <a:cs typeface="Consolas"/>
+              </a:rPr>
+              <a:t>4. Recreate</a:t>
+            </a:r>
+          </a:p>
+          <a:p xmlns:a="http://schemas.openxmlformats.org/drawingml/2006/main">
+            <a:pPr algn="l">
+              <a:lnSpc>
+                <a:spcPct val="104000"/>
+              </a:lnSpc>
+              <a:buNone/>
+              <a:defRPr sz="1350" b="0">
+                <a:solidFill>
+                  <a:srgbClr val="E5E7EB"/>
+                </a:solidFill>
+                <a:latin typeface="Consolas"/>
+                <a:ea typeface="Consolas"/>
+                <a:cs typeface="Consolas"/>
+              </a:defRPr>
+            </a:pPr>
+            <a:r>
+              <a:rPr sz="1350" b="0">
+                <a:solidFill>
+                  <a:srgbClr val="E5E7EB"/>
+                </a:solidFill>
+                <a:latin typeface="Consolas"/>
+                <a:ea typeface="Consolas"/>
+                <a:cs typeface="Consolas"/>
+              </a:rPr>
+              <a:t>docker rm -f nginx-life</a:t>
+            </a:r>
+          </a:p>
+          <a:p xmlns:a="http://schemas.openxmlformats.org/drawingml/2006/main">
+            <a:pPr algn="l">
+              <a:lnSpc>
+                <a:spcPct val="104000"/>
+              </a:lnSpc>
+              <a:buNone/>
+              <a:defRPr sz="1350" b="0">
+                <a:solidFill>
+                  <a:srgbClr val="E5E7EB"/>
+                </a:solidFill>
+                <a:latin typeface="Consolas"/>
+                <a:ea typeface="Consolas"/>
+                <a:cs typeface="Consolas"/>
+              </a:defRPr>
+            </a:pPr>
+            <a:r>
+              <a:rPr sz="1350" b="0">
+                <a:solidFill>
+                  <a:srgbClr val="E5E7EB"/>
+                </a:solidFill>
+                <a:latin typeface="Consolas"/>
+                <a:ea typeface="Consolas"/>
+                <a:cs typeface="Consolas"/>
+              </a:rPr>
+              <a:t>docker run -d --name nginx-life -p 9090:80 nginx</a:t>
             </a:r>
           </a:p>
         </p:txBody>
@@ -6506,7 +6607,7 @@
                 <a:ea typeface="Aptos Display"/>
                 <a:cs typeface="Aptos Display"/>
               </a:rPr>
-              <a:t>每一步都要看狀態</a:t>
+              <a:t>每段做完都確認</a:t>
             </a:r>
           </a:p>
         </p:txBody>
@@ -6568,7 +6669,7 @@
                 <a:ea typeface="Aptos"/>
                 <a:cs typeface="Aptos"/>
               </a:rPr>
-              <a:t>Up、Exited、STATUS 時間重置，都是這題要觀察的重點。</a:t>
+              <a:t>pull 看 image；run 看 ps；edit 看瀏覽器；recreate 看頁面是否回預設。</a:t>
             </a:r>
           </a:p>
         </p:txBody>
@@ -6671,7 +6772,7 @@
                 <a:ea typeface="Aptos Display"/>
                 <a:cs typeface="Aptos Display"/>
               </a:rPr>
-              <a:t>Q2：為什麼先 stop？</a:t>
+              <a:t>Q2：為什麼改好的首頁不見？</a:t>
             </a:r>
           </a:p>
         </p:txBody>
@@ -6733,34 +6834,7 @@
                 <a:ea typeface="Aptos"/>
                 <a:cs typeface="Aptos"/>
               </a:rPr>
-              <a:t>執行中的容器可能正在處理資料。</a:t>
-            </a:r>
-          </a:p>
-          <a:p xmlns:a="http://schemas.openxmlformats.org/drawingml/2006/main">
-            <a:pPr algn="l">
-              <a:lnSpc>
-                <a:spcPct val="106000"/>
-              </a:lnSpc>
-              <a:buNone/>
-              <a:defRPr sz="1350" b="0">
-                <a:solidFill>
-                  <a:srgbClr val="E2E8F0"/>
-                </a:solidFill>
-                <a:latin typeface="Aptos"/>
-                <a:ea typeface="Aptos"/>
-                <a:cs typeface="Aptos"/>
-              </a:defRPr>
-            </a:pPr>
-            <a:r>
-              <a:rPr sz="1350" b="0">
-                <a:solidFill>
-                  <a:srgbClr val="E2E8F0"/>
-                </a:solidFill>
-                <a:latin typeface="Aptos"/>
-                <a:ea typeface="Aptos"/>
-                <a:cs typeface="Aptos"/>
-              </a:rPr>
-              <a:t>rm -f 是強制刪除，開發方便但正式環境要小心。</a:t>
+              <a:t>因為修改在 container 內；container 被刪掉後，未保存到外部的檔案也一起消失。</a:t>
             </a:r>
           </a:p>
         </p:txBody>
@@ -7006,7 +7080,7 @@
                 <a:ea typeface="Aptos"/>
                 <a:cs typeface="Aptos"/>
               </a:rPr>
-              <a:t>DEBUG COMMANDS</a:t>
+              <a:t>DEBUG / EDIT FILES</a:t>
             </a:r>
           </a:p>
         </p:txBody>
@@ -7068,7 +7142,7 @@
                 <a:ea typeface="Aptos Display"/>
                 <a:cs typeface="Aptos Display"/>
               </a:rPr>
-              <a:t>logs 看輸出，exec 進去看現場</a:t>
+              <a:t>沒有 vim/nano 時，怎麼改 container 裡的檔案</a:t>
             </a:r>
           </a:p>
         </p:txBody>
@@ -7264,12 +7338,7 @@
                 <a:ea typeface="Consolas"/>
                 <a:cs typeface="Consolas"/>
               </a:rPr>
-              <a:t>docker logs &lt;容器ID或名稱&gt;</a:t>
-            </a:r>
-          </a:p>
-          <a:p xmlns:a="http://schemas.openxmlformats.org/drawingml/2006/main">
-            <a:r>
-              <a:t/>
+              <a:t>docker exec -it nginx-life sh</a:t>
             </a:r>
           </a:p>
           <a:p xmlns:a="http://schemas.openxmlformats.org/drawingml/2006/main">
@@ -7296,7 +7365,88 @@
                 <a:ea typeface="Consolas"/>
                 <a:cs typeface="Consolas"/>
               </a:rPr>
-              <a:t>docker exec -it &lt;容器ID或名稱&gt; sh</a:t>
+              <a:t>cd /usr/share/nginx/html</a:t>
+            </a:r>
+          </a:p>
+          <a:p xmlns:a="http://schemas.openxmlformats.org/drawingml/2006/main">
+            <a:pPr algn="l">
+              <a:lnSpc>
+                <a:spcPct val="104000"/>
+              </a:lnSpc>
+              <a:buNone/>
+              <a:defRPr sz="1725" b="0">
+                <a:solidFill>
+                  <a:srgbClr val="E5E7EB"/>
+                </a:solidFill>
+                <a:latin typeface="Consolas"/>
+                <a:ea typeface="Consolas"/>
+                <a:cs typeface="Consolas"/>
+              </a:defRPr>
+            </a:pPr>
+            <a:r>
+              <a:rPr sz="1725" b="0">
+                <a:solidFill>
+                  <a:srgbClr val="E5E7EB"/>
+                </a:solidFill>
+                <a:latin typeface="Consolas"/>
+                <a:ea typeface="Consolas"/>
+                <a:cs typeface="Consolas"/>
+              </a:rPr>
+              <a:t>cat index.html</a:t>
+            </a:r>
+          </a:p>
+          <a:p xmlns:a="http://schemas.openxmlformats.org/drawingml/2006/main">
+            <a:pPr algn="l">
+              <a:lnSpc>
+                <a:spcPct val="104000"/>
+              </a:lnSpc>
+              <a:buNone/>
+              <a:defRPr sz="1725" b="0">
+                <a:solidFill>
+                  <a:srgbClr val="E5E7EB"/>
+                </a:solidFill>
+                <a:latin typeface="Consolas"/>
+                <a:ea typeface="Consolas"/>
+                <a:cs typeface="Consolas"/>
+              </a:defRPr>
+            </a:pPr>
+            <a:r>
+              <a:rPr sz="1725" b="0">
+                <a:solidFill>
+                  <a:srgbClr val="E5E7EB"/>
+                </a:solidFill>
+                <a:latin typeface="Consolas"/>
+                <a:ea typeface="Consolas"/>
+                <a:cs typeface="Consolas"/>
+              </a:rPr>
+              <a:t>echo '&lt;h1&gt;Hello again&lt;/h1&gt;' &gt; index.html</a:t>
+            </a:r>
+          </a:p>
+          <a:p xmlns:a="http://schemas.openxmlformats.org/drawingml/2006/main">
+            <a:pPr algn="l">
+              <a:lnSpc>
+                <a:spcPct val="104000"/>
+              </a:lnSpc>
+              <a:buNone/>
+              <a:defRPr sz="1725" b="0">
+                <a:solidFill>
+                  <a:srgbClr val="E5E7EB"/>
+                </a:solidFill>
+                <a:latin typeface="Consolas"/>
+                <a:ea typeface="Consolas"/>
+                <a:cs typeface="Consolas"/>
+              </a:defRPr>
+            </a:pPr>
+            <a:r>
+              <a:rPr sz="1725" b="0">
+                <a:solidFill>
+                  <a:srgbClr val="E5E7EB"/>
+                </a:solidFill>
+                <a:latin typeface="Consolas"/>
+                <a:ea typeface="Consolas"/>
+                <a:cs typeface="Consolas"/>
+              </a:rPr>
+              <a:t>exit</a:t>
             </a:r>
           </a:p>
         </p:txBody>
@@ -7399,7 +7549,7 @@
                 <a:ea typeface="Aptos Display"/>
                 <a:cs typeface="Aptos Display"/>
               </a:rPr>
-              <a:t>Debug 除錯</a:t>
+              <a:t>echo</a:t>
             </a:r>
           </a:p>
         </p:txBody>
@@ -7461,7 +7611,7 @@
                 <a:ea typeface="Aptos"/>
                 <a:cs typeface="Aptos"/>
               </a:rPr>
-              <a:t>進去看 log 檔、設定檔或程序狀態。</a:t>
+              <a:t>適合課堂示範，把短文字直接寫進檔案。</a:t>
             </a:r>
           </a:p>
         </p:txBody>
@@ -7564,7 +7714,7 @@
                 <a:ea typeface="Aptos Display"/>
                 <a:cs typeface="Aptos Display"/>
               </a:rPr>
-              <a:t>確認部署結果</a:t>
+              <a:t>cat</a:t>
             </a:r>
           </a:p>
         </p:txBody>
@@ -7626,7 +7776,7 @@
                 <a:ea typeface="Aptos"/>
                 <a:cs typeface="Aptos"/>
               </a:rPr>
-              <a:t>檢查檔案是否複製、套件是否安裝。</a:t>
+              <a:t>確認檔案內容是不是剛剛寫入的版本。</a:t>
             </a:r>
           </a:p>
         </p:txBody>
@@ -7729,7 +7879,7 @@
                 <a:ea typeface="Aptos Display"/>
                 <a:cs typeface="Aptos Display"/>
               </a:rPr>
-              <a:t>操作資料庫</a:t>
+              <a:t>docker cp</a:t>
             </a:r>
           </a:p>
         </p:txBody>
@@ -7791,7 +7941,7 @@
                 <a:ea typeface="Aptos"/>
                 <a:cs typeface="Aptos"/>
               </a:rPr>
-              <a:t>進 MySQL 容器下 SQL 指令。</a:t>
+              <a:t>檔案比較長時，可以從本機複製進 container。</a:t>
             </a:r>
           </a:p>
         </p:txBody>
@@ -7894,7 +8044,7 @@
                 <a:ea typeface="Aptos Display"/>
                 <a:cs typeface="Aptos Display"/>
               </a:rPr>
-              <a:t>臨時測試</a:t>
+              <a:t>docker logs</a:t>
             </a:r>
           </a:p>
         </p:txBody>
@@ -7956,7 +8106,7 @@
                 <a:ea typeface="Aptos"/>
                 <a:cs typeface="Aptos"/>
               </a:rPr>
-              <a:t>在容器裡跑一個指令驗證想法。</a:t>
+              <a:t>看 nginx 啟動或錯誤輸出。</a:t>
             </a:r>
           </a:p>
         </p:txBody>
@@ -8059,7 +8209,7 @@
                 <a:ea typeface="Aptos"/>
                 <a:cs typeface="Aptos"/>
               </a:rPr>
-              <a:t>如果 Image 有 bash，也可以改成 bash；Nginx、Alpine 通常用 sh。</a:t>
+              <a:t>這只是臨時改法。正式保存內容會用 Volume、Bind Mount，或重新 build 成新的 image。</a:t>
             </a:r>
           </a:p>
         </p:txBody>
@@ -9741,7 +9891,7 @@
                 <a:ea typeface="Aptos"/>
                 <a:cs typeface="Aptos"/>
               </a:rPr>
-              <a:t>資料庫、上傳檔、開發中的程式碼，都不應該只放在容器內部。</a:t>
+              <a:t>網頁檔、設定檔、資料庫資料，都不應該只放在 container 內部。</a:t>
             </a:r>
           </a:p>
         </p:txBody>
@@ -9803,7 +9953,7 @@
                 <a:ea typeface="Aptos"/>
                 <a:cs typeface="Aptos"/>
               </a:rPr>
-              <a:t>Volume 把資料放在容器外面，容器刪掉後資料仍然可以保留。</a:t>
+              <a:t>接下來全程用 nginx 示範：先同步本機資料夾，再進到 Docker 管理的 volume。</a:t>
             </a:r>
           </a:p>
         </p:txBody>
@@ -10049,7 +10199,7 @@
                 <a:ea typeface="Aptos"/>
                 <a:cs typeface="Aptos"/>
               </a:rPr>
-              <a:t>MOUNT TYPES</a:t>
+              <a:t>VOLUME EXAMPLES</a:t>
             </a:r>
           </a:p>
         </p:txBody>
@@ -10111,7 +10261,7 @@
                 <a:ea typeface="Aptos Display"/>
                 <a:cs typeface="Aptos Display"/>
               </a:rPr>
-              <a:t>兩種掛載方式：Bind Mount 與 Named Volume</a:t>
+              <a:t>兩個範例：Mounted Volume vs Named Volume</a:t>
             </a:r>
           </a:p>
         </p:txBody>
@@ -10214,7 +10364,7 @@
                 <a:ea typeface="Aptos Display"/>
                 <a:cs typeface="Aptos Display"/>
               </a:rPr>
-              <a:t>Bind Mount</a:t>
+              <a:t>Mounted Volume（Bind Mount）</a:t>
             </a:r>
           </a:p>
         </p:txBody>
@@ -10410,7 +10560,7 @@
                 <a:ea typeface="Consolas"/>
                 <a:cs typeface="Consolas"/>
               </a:rPr>
-              <a:t>-v "C:\my-project:/app"</a:t>
+              <a:t>-v 主機路徑:/usr/share/nginx/html</a:t>
             </a:r>
           </a:p>
         </p:txBody>
@@ -10472,7 +10622,7 @@
                 <a:ea typeface="Aptos"/>
                 <a:cs typeface="Aptos"/>
               </a:rPr>
-              <a:t>主機和容器看到同一份檔案。適合開發時同步程式碼。</a:t>
+              <a:t>自己指定主機路徑；改 index.html 後重新整理就變。</a:t>
             </a:r>
           </a:p>
         </p:txBody>
@@ -10771,7 +10921,7 @@
                 <a:ea typeface="Consolas"/>
                 <a:cs typeface="Consolas"/>
               </a:rPr>
-              <a:t>-v my-data:/var/lib/mysql</a:t>
+              <a:t>-v nginx-html:/usr/share/nginx/html</a:t>
             </a:r>
           </a:p>
         </p:txBody>
@@ -10833,7 +10983,7 @@
                 <a:ea typeface="Aptos"/>
                 <a:cs typeface="Aptos"/>
               </a:rPr>
-              <a:t>Docker 管理資料存放位置。適合資料庫等需要持久化的資料。</a:t>
+              <a:t>Docker 管理資料位置；刪掉 container 後資料仍在。</a:t>
             </a:r>
           </a:p>
         </p:txBody>
@@ -11079,7 +11229,7 @@
                 <a:ea typeface="Aptos"/>
                 <a:cs typeface="Aptos"/>
               </a:rPr>
-              <a:t>EXERCISE Q3</a:t>
+              <a:t>STEP 0 / BASELINE</a:t>
             </a:r>
           </a:p>
         </p:txBody>
@@ -11141,7 +11291,7 @@
                 <a:ea typeface="Aptos Display"/>
                 <a:cs typeface="Aptos Display"/>
               </a:rPr>
-              <a:t>概念快問 3：該用哪種掛載？</a:t>
+              <a:t>先看沒有 Volume 時，修改會消失</a:t>
             </a:r>
           </a:p>
         </p:txBody>
@@ -11244,7 +11394,7 @@
                 <a:ea typeface="Aptos Display"/>
                 <a:cs typeface="Aptos Display"/>
               </a:rPr>
-              <a:t>開發時同步程式碼</a:t>
+              <a:t>1. container 內改檔</a:t>
             </a:r>
           </a:p>
         </p:txBody>
@@ -11306,12 +11456,7 @@
                 <a:ea typeface="Aptos"/>
                 <a:cs typeface="Aptos"/>
               </a:rPr>
-              <a:t>Bind Mount</a:t>
-            </a:r>
-          </a:p>
-          <a:p xmlns:a="http://schemas.openxmlformats.org/drawingml/2006/main">
-            <a:r>
-              <a:t/>
+              <a:t>docker exec -it nginx-life sh</a:t>
             </a:r>
           </a:p>
           <a:p xmlns:a="http://schemas.openxmlformats.org/drawingml/2006/main">
@@ -11338,7 +11483,7 @@
                 <a:ea typeface="Aptos"/>
                 <a:cs typeface="Aptos"/>
               </a:rPr>
-              <a:t>-v "C:\project:/app"</a:t>
+              <a:t>cd /usr/share/nginx/html</a:t>
             </a:r>
           </a:p>
           <a:p xmlns:a="http://schemas.openxmlformats.org/drawingml/2006/main">
@@ -11365,7 +11510,7 @@
                 <a:ea typeface="Aptos"/>
                 <a:cs typeface="Aptos"/>
               </a:rPr>
-              <a:t>主機和容器共用同一份檔案。</a:t>
+              <a:t>echo '&lt;h1&gt;No volume&lt;/h1&gt;' &gt; index.html</a:t>
             </a:r>
           </a:p>
         </p:txBody>
@@ -11468,7 +11613,7 @@
                 <a:ea typeface="Aptos Display"/>
                 <a:cs typeface="Aptos Display"/>
               </a:rPr>
-              <a:t>資料庫資料持久化</a:t>
+              <a:t>2. 刪掉重建</a:t>
             </a:r>
           </a:p>
         </p:txBody>
@@ -11530,12 +11675,7 @@
                 <a:ea typeface="Aptos"/>
                 <a:cs typeface="Aptos"/>
               </a:rPr>
-              <a:t>Named Volume</a:t>
-            </a:r>
-          </a:p>
-          <a:p xmlns:a="http://schemas.openxmlformats.org/drawingml/2006/main">
-            <a:r>
-              <a:t/>
+              <a:t>docker rm -f nginx-life</a:t>
             </a:r>
           </a:p>
           <a:p xmlns:a="http://schemas.openxmlformats.org/drawingml/2006/main">
@@ -11562,7 +11702,7 @@
                 <a:ea typeface="Aptos"/>
                 <a:cs typeface="Aptos"/>
               </a:rPr>
-              <a:t>-v my-data:/var/lib/mysql</a:t>
+              <a:t>docker run -d --name nginx-life -p 9090:80 nginx</a:t>
             </a:r>
           </a:p>
           <a:p xmlns:a="http://schemas.openxmlformats.org/drawingml/2006/main">
@@ -11589,7 +11729,7 @@
                 <a:ea typeface="Aptos"/>
                 <a:cs typeface="Aptos"/>
               </a:rPr>
-              <a:t>由 Docker 管理資料位置。</a:t>
+              <a:t>頁面回到預設歡迎頁。</a:t>
             </a:r>
           </a:p>
         </p:txBody>
@@ -11651,7 +11791,7 @@
                 <a:ea typeface="Aptos"/>
                 <a:cs typeface="Aptos"/>
               </a:rPr>
-              <a:t>回答目標：看到場景就能選出 Bind Mount 或 Named Volume。</a:t>
+              <a:t>結論：container 內修改不是保存資料的方式，接著用 Volume 解決。</a:t>
             </a:r>
           </a:p>
         </p:txBody>
@@ -11897,7 +12037,7 @@
                 <a:ea typeface="Aptos"/>
                 <a:cs typeface="Aptos"/>
               </a:rPr>
-              <a:t>VOLUME COMMANDS</a:t>
+              <a:t>STEP 1 / HOST FOLDER</a:t>
             </a:r>
           </a:p>
         </p:txBody>
@@ -11959,7 +12099,7 @@
                 <a:ea typeface="Aptos Display"/>
                 <a:cs typeface="Aptos Display"/>
               </a:rPr>
-              <a:t>Volume 管理指令</a:t>
+              <a:t>建立本機網站資料夾</a:t>
             </a:r>
           </a:p>
         </p:txBody>
@@ -12155,12 +12295,7 @@
                 <a:ea typeface="Consolas"/>
                 <a:cs typeface="Consolas"/>
               </a:rPr>
-              <a:t>docker volume ls</a:t>
-            </a:r>
-          </a:p>
-          <a:p xmlns:a="http://schemas.openxmlformats.org/drawingml/2006/main">
-            <a:r>
-              <a:t/>
+              <a:t>mkdir C:\docker-lab\nginx-site</a:t>
             </a:r>
           </a:p>
           <a:p xmlns:a="http://schemas.openxmlformats.org/drawingml/2006/main">
@@ -12187,103 +12322,7 @@
                 <a:ea typeface="Consolas"/>
                 <a:cs typeface="Consolas"/>
               </a:rPr>
-              <a:t>docker volume create my-data</a:t>
-            </a:r>
-          </a:p>
-          <a:p xmlns:a="http://schemas.openxmlformats.org/drawingml/2006/main">
-            <a:r>
-              <a:t/>
-            </a:r>
-          </a:p>
-          <a:p xmlns:a="http://schemas.openxmlformats.org/drawingml/2006/main">
-            <a:pPr algn="l">
-              <a:lnSpc>
-                <a:spcPct val="104000"/>
-              </a:lnSpc>
-              <a:buNone/>
-              <a:defRPr sz="1650" b="0">
-                <a:solidFill>
-                  <a:srgbClr val="E5E7EB"/>
-                </a:solidFill>
-                <a:latin typeface="Consolas"/>
-                <a:ea typeface="Consolas"/>
-                <a:cs typeface="Consolas"/>
-              </a:defRPr>
-            </a:pPr>
-            <a:r>
-              <a:rPr sz="1650" b="0">
-                <a:solidFill>
-                  <a:srgbClr val="E5E7EB"/>
-                </a:solidFill>
-                <a:latin typeface="Consolas"/>
-                <a:ea typeface="Consolas"/>
-                <a:cs typeface="Consolas"/>
-              </a:rPr>
-              <a:t>docker volume inspect my-data</a:t>
-            </a:r>
-          </a:p>
-          <a:p xmlns:a="http://schemas.openxmlformats.org/drawingml/2006/main">
-            <a:r>
-              <a:t/>
-            </a:r>
-          </a:p>
-          <a:p xmlns:a="http://schemas.openxmlformats.org/drawingml/2006/main">
-            <a:pPr algn="l">
-              <a:lnSpc>
-                <a:spcPct val="104000"/>
-              </a:lnSpc>
-              <a:buNone/>
-              <a:defRPr sz="1650" b="0">
-                <a:solidFill>
-                  <a:srgbClr val="E5E7EB"/>
-                </a:solidFill>
-                <a:latin typeface="Consolas"/>
-                <a:ea typeface="Consolas"/>
-                <a:cs typeface="Consolas"/>
-              </a:defRPr>
-            </a:pPr>
-            <a:r>
-              <a:rPr sz="1650" b="0">
-                <a:solidFill>
-                  <a:srgbClr val="E5E7EB"/>
-                </a:solidFill>
-                <a:latin typeface="Consolas"/>
-                <a:ea typeface="Consolas"/>
-                <a:cs typeface="Consolas"/>
-              </a:rPr>
-              <a:t>docker volume rm my-data</a:t>
-            </a:r>
-          </a:p>
-          <a:p xmlns:a="http://schemas.openxmlformats.org/drawingml/2006/main">
-            <a:r>
-              <a:t/>
-            </a:r>
-          </a:p>
-          <a:p xmlns:a="http://schemas.openxmlformats.org/drawingml/2006/main">
-            <a:pPr algn="l">
-              <a:lnSpc>
-                <a:spcPct val="104000"/>
-              </a:lnSpc>
-              <a:buNone/>
-              <a:defRPr sz="1650" b="0">
-                <a:solidFill>
-                  <a:srgbClr val="E5E7EB"/>
-                </a:solidFill>
-                <a:latin typeface="Consolas"/>
-                <a:ea typeface="Consolas"/>
-                <a:cs typeface="Consolas"/>
-              </a:defRPr>
-            </a:pPr>
-            <a:r>
-              <a:rPr sz="1650" b="0">
-                <a:solidFill>
-                  <a:srgbClr val="E5E7EB"/>
-                </a:solidFill>
-                <a:latin typeface="Consolas"/>
-                <a:ea typeface="Consolas"/>
-                <a:cs typeface="Consolas"/>
-              </a:rPr>
-              <a:t>docker volume prune</a:t>
+              <a:t>notepad C:\docker-lab\nginx-site\index.html</a:t>
             </a:r>
           </a:p>
         </p:txBody>
@@ -12380,7 +12419,7 @@
                 <a:ea typeface="Consolas"/>
                 <a:cs typeface="Consolas"/>
               </a:rPr>
-              <a:t>ls</a:t>
+              <a:t>mkdir</a:t>
             </a:r>
           </a:p>
         </p:txBody>
@@ -12442,7 +12481,7 @@
                 <a:ea typeface="Aptos"/>
                 <a:cs typeface="Aptos"/>
               </a:rPr>
-              <a:t>查看所有 Volume</a:t>
+              <a:t>建立資料夾</a:t>
             </a:r>
           </a:p>
         </p:txBody>
@@ -12539,7 +12578,7 @@
                 <a:ea typeface="Consolas"/>
                 <a:cs typeface="Consolas"/>
               </a:rPr>
-              <a:t>create</a:t>
+              <a:t>index.html</a:t>
             </a:r>
           </a:p>
         </p:txBody>
@@ -12601,7 +12640,7 @@
                 <a:ea typeface="Aptos"/>
                 <a:cs typeface="Aptos"/>
               </a:rPr>
-              <a:t>建立一個 Volume</a:t>
+              <a:t>放首頁 HTML</a:t>
             </a:r>
           </a:p>
         </p:txBody>
@@ -12698,7 +12737,7 @@
                 <a:ea typeface="Consolas"/>
                 <a:cs typeface="Consolas"/>
               </a:rPr>
-              <a:t>inspect</a:t>
+              <a:t>主機路徑</a:t>
             </a:r>
           </a:p>
         </p:txBody>
@@ -12760,7 +12799,7 @@
                 <a:ea typeface="Aptos"/>
                 <a:cs typeface="Aptos"/>
               </a:rPr>
-              <a:t>查看詳細資訊與掛載位置</a:t>
+              <a:t>C:\docker-lab\nginx-site</a:t>
             </a:r>
           </a:p>
         </p:txBody>
@@ -12857,7 +12896,7 @@
                 <a:ea typeface="Consolas"/>
                 <a:cs typeface="Consolas"/>
               </a:rPr>
-              <a:t>rm</a:t>
+              <a:t>下一步</a:t>
             </a:r>
           </a:p>
         </p:txBody>
@@ -12919,7 +12958,7 @@
                 <a:ea typeface="Aptos"/>
                 <a:cs typeface="Aptos"/>
               </a:rPr>
-              <a:t>刪除指定 Volume</a:t>
+              <a:t>掛進 nginx</a:t>
             </a:r>
           </a:p>
         </p:txBody>
@@ -13016,7 +13055,7 @@
                 <a:ea typeface="Consolas"/>
                 <a:cs typeface="Consolas"/>
               </a:rPr>
-              <a:t>prune</a:t>
+              <a:t>先確認</a:t>
             </a:r>
           </a:p>
         </p:txBody>
@@ -13078,7 +13117,7 @@
                 <a:ea typeface="Aptos"/>
                 <a:cs typeface="Aptos"/>
               </a:rPr>
-              <a:t>刪除所有沒在使用的 Volume</a:t>
+              <a:t>主機上真的有檔案</a:t>
             </a:r>
           </a:p>
         </p:txBody>
@@ -13324,7 +13363,7 @@
                 <a:ea typeface="Aptos"/>
                 <a:cs typeface="Aptos"/>
               </a:rPr>
-              <a:t>EXERCISE P2</a:t>
+              <a:t>STEP 2 / MOUNTED VOLUME</a:t>
             </a:r>
           </a:p>
         </p:txBody>
@@ -13386,7 +13425,7 @@
                 <a:ea typeface="Aptos Display"/>
                 <a:cs typeface="Aptos Display"/>
               </a:rPr>
-              <a:t>實作題 P2：Named Volume 持久化驗證</a:t>
+              <a:t>Mounted Volume（Bind Mount）範例</a:t>
             </a:r>
           </a:p>
         </p:txBody>
@@ -13582,12 +13621,7 @@
                 <a:ea typeface="Consolas"/>
                 <a:cs typeface="Consolas"/>
               </a:rPr>
-              <a:t>docker volume create test-data</a:t>
-            </a:r>
-          </a:p>
-          <a:p xmlns:a="http://schemas.openxmlformats.org/drawingml/2006/main">
-            <a:r>
-              <a:t/>
+              <a:t>docker run -d --name nginx-bind -p 8080:80 \</a:t>
             </a:r>
           </a:p>
           <a:p xmlns:a="http://schemas.openxmlformats.org/drawingml/2006/main">
@@ -13614,179 +13648,7 @@
                 <a:ea typeface="Consolas"/>
                 <a:cs typeface="Consolas"/>
               </a:rPr>
-              <a:t>docker run -it --rm -v test-data:/data alpine sh</a:t>
-            </a:r>
-          </a:p>
-          <a:p xmlns:a="http://schemas.openxmlformats.org/drawingml/2006/main">
-            <a:pPr algn="l">
-              <a:lnSpc>
-                <a:spcPct val="104000"/>
-              </a:lnSpc>
-              <a:buNone/>
-              <a:defRPr sz="1350" b="0">
-                <a:solidFill>
-                  <a:srgbClr val="E5E7EB"/>
-                </a:solidFill>
-                <a:latin typeface="Consolas"/>
-                <a:ea typeface="Consolas"/>
-                <a:cs typeface="Consolas"/>
-              </a:defRPr>
-            </a:pPr>
-            <a:r>
-              <a:rPr sz="1350" b="0">
-                <a:solidFill>
-                  <a:srgbClr val="E5E7EB"/>
-                </a:solidFill>
-                <a:latin typeface="Consolas"/>
-                <a:ea typeface="Consolas"/>
-                <a:cs typeface="Consolas"/>
-              </a:rPr>
-              <a:t># container 內：echo "hello volume" &gt; /data/test.txt</a:t>
-            </a:r>
-          </a:p>
-          <a:p xmlns:a="http://schemas.openxmlformats.org/drawingml/2006/main">
-            <a:pPr algn="l">
-              <a:lnSpc>
-                <a:spcPct val="104000"/>
-              </a:lnSpc>
-              <a:buNone/>
-              <a:defRPr sz="1350" b="0">
-                <a:solidFill>
-                  <a:srgbClr val="E5E7EB"/>
-                </a:solidFill>
-                <a:latin typeface="Consolas"/>
-                <a:ea typeface="Consolas"/>
-                <a:cs typeface="Consolas"/>
-              </a:defRPr>
-            </a:pPr>
-            <a:r>
-              <a:rPr sz="1350" b="0">
-                <a:solidFill>
-                  <a:srgbClr val="E5E7EB"/>
-                </a:solidFill>
-                <a:latin typeface="Consolas"/>
-                <a:ea typeface="Consolas"/>
-                <a:cs typeface="Consolas"/>
-              </a:rPr>
-              <a:t># container 內：exit</a:t>
-            </a:r>
-          </a:p>
-          <a:p xmlns:a="http://schemas.openxmlformats.org/drawingml/2006/main">
-            <a:r>
-              <a:t/>
-            </a:r>
-          </a:p>
-          <a:p xmlns:a="http://schemas.openxmlformats.org/drawingml/2006/main">
-            <a:pPr algn="l">
-              <a:lnSpc>
-                <a:spcPct val="104000"/>
-              </a:lnSpc>
-              <a:buNone/>
-              <a:defRPr sz="1350" b="0">
-                <a:solidFill>
-                  <a:srgbClr val="E5E7EB"/>
-                </a:solidFill>
-                <a:latin typeface="Consolas"/>
-                <a:ea typeface="Consolas"/>
-                <a:cs typeface="Consolas"/>
-              </a:defRPr>
-            </a:pPr>
-            <a:r>
-              <a:rPr sz="1350" b="0">
-                <a:solidFill>
-                  <a:srgbClr val="E5E7EB"/>
-                </a:solidFill>
-                <a:latin typeface="Consolas"/>
-                <a:ea typeface="Consolas"/>
-                <a:cs typeface="Consolas"/>
-              </a:rPr>
-              <a:t>docker run -it --rm -v test-data:/data alpine sh</a:t>
-            </a:r>
-          </a:p>
-          <a:p xmlns:a="http://schemas.openxmlformats.org/drawingml/2006/main">
-            <a:pPr algn="l">
-              <a:lnSpc>
-                <a:spcPct val="104000"/>
-              </a:lnSpc>
-              <a:buNone/>
-              <a:defRPr sz="1350" b="0">
-                <a:solidFill>
-                  <a:srgbClr val="E5E7EB"/>
-                </a:solidFill>
-                <a:latin typeface="Consolas"/>
-                <a:ea typeface="Consolas"/>
-                <a:cs typeface="Consolas"/>
-              </a:defRPr>
-            </a:pPr>
-            <a:r>
-              <a:rPr sz="1350" b="0">
-                <a:solidFill>
-                  <a:srgbClr val="E5E7EB"/>
-                </a:solidFill>
-                <a:latin typeface="Consolas"/>
-                <a:ea typeface="Consolas"/>
-                <a:cs typeface="Consolas"/>
-              </a:rPr>
-              <a:t># container 內：cat /data/test.txt</a:t>
-            </a:r>
-          </a:p>
-          <a:p xmlns:a="http://schemas.openxmlformats.org/drawingml/2006/main">
-            <a:pPr algn="l">
-              <a:lnSpc>
-                <a:spcPct val="104000"/>
-              </a:lnSpc>
-              <a:buNone/>
-              <a:defRPr sz="1350" b="0">
-                <a:solidFill>
-                  <a:srgbClr val="E5E7EB"/>
-                </a:solidFill>
-                <a:latin typeface="Consolas"/>
-                <a:ea typeface="Consolas"/>
-                <a:cs typeface="Consolas"/>
-              </a:defRPr>
-            </a:pPr>
-            <a:r>
-              <a:rPr sz="1350" b="0">
-                <a:solidFill>
-                  <a:srgbClr val="E5E7EB"/>
-                </a:solidFill>
-                <a:latin typeface="Consolas"/>
-                <a:ea typeface="Consolas"/>
-                <a:cs typeface="Consolas"/>
-              </a:rPr>
-              <a:t># container 內：exit</a:t>
-            </a:r>
-          </a:p>
-          <a:p xmlns:a="http://schemas.openxmlformats.org/drawingml/2006/main">
-            <a:r>
-              <a:t/>
-            </a:r>
-          </a:p>
-          <a:p xmlns:a="http://schemas.openxmlformats.org/drawingml/2006/main">
-            <a:pPr algn="l">
-              <a:lnSpc>
-                <a:spcPct val="104000"/>
-              </a:lnSpc>
-              <a:buNone/>
-              <a:defRPr sz="1350" b="0">
-                <a:solidFill>
-                  <a:srgbClr val="E5E7EB"/>
-                </a:solidFill>
-                <a:latin typeface="Consolas"/>
-                <a:ea typeface="Consolas"/>
-                <a:cs typeface="Consolas"/>
-              </a:defRPr>
-            </a:pPr>
-            <a:r>
-              <a:rPr sz="1350" b="0">
-                <a:solidFill>
-                  <a:srgbClr val="E5E7EB"/>
-                </a:solidFill>
-                <a:latin typeface="Consolas"/>
-                <a:ea typeface="Consolas"/>
-                <a:cs typeface="Consolas"/>
-              </a:rPr>
-              <a:t>docker volume rm test-data</a:t>
+              <a:t xml:space="preserve">  -v "C:\docker-lab\nginx-site:/usr/share/nginx/html" nginx</a:t>
             </a:r>
           </a:p>
         </p:txBody>
@@ -13951,7 +13813,7 @@
                 <a:ea typeface="Aptos"/>
                 <a:cs typeface="Aptos"/>
               </a:rPr>
-              <a:t>第二個新容器仍能讀到 /data/test.txt。</a:t>
+              <a:t>http://localhost:8080 看到本機 index.html。</a:t>
             </a:r>
           </a:p>
         </p:txBody>
@@ -14054,7 +13916,7 @@
                 <a:ea typeface="Aptos Display"/>
                 <a:cs typeface="Aptos Display"/>
               </a:rPr>
-              <a:t>觀念</a:t>
+              <a:t>左右怎麼讀</a:t>
             </a:r>
           </a:p>
         </p:txBody>
@@ -14116,7 +13978,7 @@
                 <a:ea typeface="Aptos"/>
                 <a:cs typeface="Aptos"/>
               </a:rPr>
-              <a:t>容器被 --rm 刪掉了，但 Named Volume 還在。</a:t>
+              <a:t>左邊是你指定的主機路徑；右邊是 nginx 網頁目錄。</a:t>
             </a:r>
           </a:p>
         </p:txBody>
@@ -14684,7 +14546,7 @@
                 <a:ea typeface="Aptos"/>
                 <a:cs typeface="Aptos"/>
               </a:rPr>
-              <a:t>從 run 建立容器開始，練習命名、查看狀態、停止、啟動、刪除與除錯。</a:t>
+              <a:t>用 nginx 分段練 pull、images、run、ps、exec、stop、rm、rmi，並看見 container 修改會消失。</a:t>
             </a:r>
           </a:p>
         </p:txBody>
@@ -14781,7 +14643,7 @@
                 <a:ea typeface="Aptos"/>
                 <a:cs typeface="Aptos"/>
               </a:rPr>
-              <a:t>約 1 小時</a:t>
+              <a:t>約 50 分鐘</a:t>
             </a:r>
           </a:p>
         </p:txBody>
@@ -14979,7 +14841,7 @@
                 <a:ea typeface="Aptos Display"/>
                 <a:cs typeface="Aptos Display"/>
               </a:rPr>
-              <a:t>Volume 與 Bind Mount</a:t>
+              <a:t>Nginx Volume</a:t>
             </a:r>
           </a:p>
         </p:txBody>
@@ -15041,7 +14903,7 @@
                 <a:ea typeface="Aptos"/>
                 <a:cs typeface="Aptos"/>
               </a:rPr>
-              <a:t>理解 -v、Bind Mount、Named Volume，知道資料為什麼要放在容器外。</a:t>
+              <a:t>用 nginx 練 Bind Mount、:ro、Named Volume，知道資料為什麼要放在容器外。</a:t>
             </a:r>
           </a:p>
         </p:txBody>
@@ -15138,7 +15000,7 @@
                 <a:ea typeface="Aptos"/>
                 <a:cs typeface="Aptos"/>
               </a:rPr>
-              <a:t>約 1 小時</a:t>
+              <a:t>約 50 分鐘</a:t>
             </a:r>
           </a:p>
         </p:txBody>
@@ -15336,7 +15198,7 @@
                 <a:ea typeface="Aptos Display"/>
                 <a:cs typeface="Aptos Display"/>
               </a:rPr>
-              <a:t>Flask Web 容器</a:t>
+              <a:t>Flask Bind Mount 練習</a:t>
             </a:r>
           </a:p>
         </p:txBody>
@@ -15398,7 +15260,7 @@
                 <a:ea typeface="Aptos"/>
                 <a:cs typeface="Aptos"/>
               </a:rPr>
-              <a:t>把本機 Flask 專案掛進 Python 容器，練習 -p、-v、-w 與開發迴圈。</a:t>
+              <a:t>把本機 Flask 專案掛進 Python container，練 -p、-v、-w 與開發重啟流程。</a:t>
             </a:r>
           </a:p>
         </p:txBody>
@@ -15495,7 +15357,7 @@
                 <a:ea typeface="Aptos"/>
                 <a:cs typeface="Aptos"/>
               </a:rPr>
-              <a:t>約 1 小時</a:t>
+              <a:t>約 50 分鐘</a:t>
             </a:r>
           </a:p>
         </p:txBody>
@@ -15557,7 +15419,7 @@
                 <a:ea typeface="Aptos"/>
                 <a:cs typeface="Aptos"/>
               </a:rPr>
-              <a:t>這堂課的主線：容器可以重建；會留下來的資料，要明確放在容器外。</a:t>
+              <a:t>這堂課的主線：nginx 先看懂資料掛載；Flask 再練真實程式碼開發流程。</a:t>
             </a:r>
           </a:p>
         </p:txBody>
@@ -15803,7 +15665,7 @@
                 <a:ea typeface="Aptos"/>
                 <a:cs typeface="Aptos"/>
               </a:rPr>
-              <a:t>READ-ONLY MOUNT</a:t>
+              <a:t>STEP 3 / EDIT HOST</a:t>
             </a:r>
           </a:p>
         </p:txBody>
@@ -15865,7 +15727,7 @@
                 <a:ea typeface="Aptos Display"/>
                 <a:cs typeface="Aptos Display"/>
               </a:rPr>
-              <a:t>唯讀掛載避免容器改到宿主機檔案</a:t>
+              <a:t>改本機檔案，瀏覽器直接變</a:t>
             </a:r>
           </a:p>
         </p:txBody>
@@ -16061,7 +15923,34 @@
                 <a:ea typeface="Consolas"/>
                 <a:cs typeface="Consolas"/>
               </a:rPr>
-              <a:t>docker run --rm -p 8081:80 -v "C:\docker-lab\site:/usr/share/nginx/html:ro" nginx</a:t>
+              <a:t>notepad C:\docker-lab\nginx-site\index.html</a:t>
+            </a:r>
+          </a:p>
+          <a:p xmlns:a="http://schemas.openxmlformats.org/drawingml/2006/main">
+            <a:pPr algn="l">
+              <a:lnSpc>
+                <a:spcPct val="104000"/>
+              </a:lnSpc>
+              <a:buNone/>
+              <a:defRPr sz="1875" b="0">
+                <a:solidFill>
+                  <a:srgbClr val="E5E7EB"/>
+                </a:solidFill>
+                <a:latin typeface="Consolas"/>
+                <a:ea typeface="Consolas"/>
+                <a:cs typeface="Consolas"/>
+              </a:defRPr>
+            </a:pPr>
+            <a:r>
+              <a:rPr sz="1875" b="0">
+                <a:solidFill>
+                  <a:srgbClr val="E5E7EB"/>
+                </a:solidFill>
+                <a:latin typeface="Consolas"/>
+                <a:ea typeface="Consolas"/>
+                <a:cs typeface="Consolas"/>
+              </a:rPr>
+              <a:t># 修改後重新整理 localhost:8080</a:t>
             </a:r>
           </a:p>
         </p:txBody>
@@ -16164,7 +16053,7 @@
                 <a:ea typeface="Aptos Display"/>
                 <a:cs typeface="Aptos Display"/>
               </a:rPr>
-              <a:t>:ro</a:t>
+              <a:t>不用 restart</a:t>
             </a:r>
           </a:p>
         </p:txBody>
@@ -16226,7 +16115,7 @@
                 <a:ea typeface="Aptos"/>
                 <a:cs typeface="Aptos"/>
               </a:rPr>
-              <a:t>read-only。容器只能讀取，不能修改掛載進來的檔案。</a:t>
+              <a:t>Nginx 每次請求會讀最新靜態檔。</a:t>
             </a:r>
           </a:p>
         </p:txBody>
@@ -16329,7 +16218,7 @@
                 <a:ea typeface="Aptos Display"/>
                 <a:cs typeface="Aptos Display"/>
               </a:rPr>
-              <a:t>適合場景</a:t>
+              <a:t>不用 build</a:t>
             </a:r>
           </a:p>
         </p:txBody>
@@ -16391,7 +16280,7 @@
                 <a:ea typeface="Aptos"/>
                 <a:cs typeface="Aptos"/>
               </a:rPr>
-              <a:t>掛載靜態網頁、設定檔或只讀資料集，避免程式意外覆寫宿主機檔案。</a:t>
+              <a:t>因為改的是主機檔案，不是 image。</a:t>
             </a:r>
           </a:p>
         </p:txBody>
@@ -16637,7 +16526,7 @@
                 <a:ea typeface="Aptos"/>
                 <a:cs typeface="Aptos"/>
               </a:rPr>
-              <a:t>CHALLENGE C1</a:t>
+              <a:t>STEP 4 / VERIFY INSIDE</a:t>
             </a:r>
           </a:p>
         </p:txBody>
@@ -16699,7 +16588,7 @@
                 <a:ea typeface="Aptos Display"/>
                 <a:cs typeface="Aptos Display"/>
               </a:rPr>
-              <a:t>挑戰題 C1：唯讀設定檔掛載</a:t>
+              <a:t>進 nginx container 確認掛載結果</a:t>
             </a:r>
           </a:p>
         </p:txBody>
@@ -16895,7 +16784,7 @@
                 <a:ea typeface="Consolas"/>
                 <a:cs typeface="Consolas"/>
               </a:rPr>
-              <a:t>docker run -it --rm \</a:t>
+              <a:t>docker exec -it nginx-bind sh</a:t>
             </a:r>
           </a:p>
           <a:p xmlns:a="http://schemas.openxmlformats.org/drawingml/2006/main">
@@ -16922,12 +16811,7 @@
                 <a:ea typeface="Consolas"/>
                 <a:cs typeface="Consolas"/>
               </a:rPr>
-              <a:t xml:space="preserve">  -v "${PWD}\config:/config:ro" alpine sh</a:t>
-            </a:r>
-          </a:p>
-          <a:p xmlns:a="http://schemas.openxmlformats.org/drawingml/2006/main">
-            <a:r>
-              <a:t/>
+              <a:t>cd /usr/share/nginx/html</a:t>
             </a:r>
           </a:p>
           <a:p xmlns:a="http://schemas.openxmlformats.org/drawingml/2006/main">
@@ -16954,7 +16838,7 @@
                 <a:ea typeface="Consolas"/>
                 <a:cs typeface="Consolas"/>
               </a:rPr>
-              <a:t>cat /config/app.conf</a:t>
+              <a:t>ls</a:t>
             </a:r>
           </a:p>
           <a:p xmlns:a="http://schemas.openxmlformats.org/drawingml/2006/main">
@@ -16981,7 +16865,7 @@
                 <a:ea typeface="Consolas"/>
                 <a:cs typeface="Consolas"/>
               </a:rPr>
-              <a:t>echo "debug=true" &gt;&gt; /config/app.conf</a:t>
+              <a:t>cat index.html</a:t>
             </a:r>
           </a:p>
         </p:txBody>
@@ -17146,39 +17030,7 @@
                 <a:ea typeface="Aptos"/>
                 <a:cs typeface="Aptos"/>
               </a:rPr>
-              <a:t>cat 可以讀檔。</a:t>
-            </a:r>
-          </a:p>
-          <a:p xmlns:a="http://schemas.openxmlformats.org/drawingml/2006/main">
-            <a:r>
-              <a:t/>
-            </a:r>
-          </a:p>
-          <a:p xmlns:a="http://schemas.openxmlformats.org/drawingml/2006/main">
-            <a:pPr algn="l">
-              <a:lnSpc>
-                <a:spcPct val="106000"/>
-              </a:lnSpc>
-              <a:buNone/>
-              <a:defRPr sz="1500" b="0">
-                <a:solidFill>
-                  <a:srgbClr val="111827"/>
-                </a:solidFill>
-                <a:latin typeface="Aptos"/>
-                <a:ea typeface="Aptos"/>
-                <a:cs typeface="Aptos"/>
-              </a:defRPr>
-            </a:pPr>
-            <a:r>
-              <a:rPr sz="1500" b="0">
-                <a:solidFill>
-                  <a:srgbClr val="111827"/>
-                </a:solidFill>
-                <a:latin typeface="Aptos"/>
-                <a:ea typeface="Aptos"/>
-                <a:cs typeface="Aptos"/>
-              </a:rPr>
-              <a:t>echo 寫入會失敗，因為 :ro 是 read-only。</a:t>
+              <a:t>cat 看到的內容，會和本機 index.html 一樣。</a:t>
             </a:r>
           </a:p>
         </p:txBody>
@@ -17240,7 +17092,7 @@
                 <a:ea typeface="Aptos"/>
                 <a:cs typeface="Aptos"/>
               </a:rPr>
-              <a:t>適合搭配前面的唯讀掛載概念操作。</a:t>
+              <a:t>這一步讓學生看到：container 路徑其實指向主機資料夾。</a:t>
             </a:r>
           </a:p>
         </p:txBody>
@@ -17486,7 +17338,7 @@
                 <a:ea typeface="Aptos"/>
                 <a:cs typeface="Aptos"/>
               </a:rPr>
-              <a:t>BIND MOUNT WARM-UP</a:t>
+              <a:t>BIND MOUNT MODEL</a:t>
             </a:r>
           </a:p>
         </p:txBody>
@@ -17548,7 +17400,7 @@
                 <a:ea typeface="Aptos Display"/>
                 <a:cs typeface="Aptos Display"/>
               </a:rPr>
-              <a:t>暖身：比較 Nginx 有沒有 -v</a:t>
+              <a:t>把 -v 看成一條資料通道</a:t>
             </a:r>
           </a:p>
         </p:txBody>
@@ -17713,7 +17565,7 @@
                 <a:ea typeface="Aptos Display"/>
                 <a:cs typeface="Aptos Display"/>
               </a:rPr>
-              <a:t>建立資料夾</a:t>
+              <a:t>主機路徑</a:t>
             </a:r>
           </a:p>
         </p:txBody>
@@ -17775,7 +17627,7 @@
                 <a:ea typeface="Consolas"/>
                 <a:cs typeface="Consolas"/>
               </a:rPr>
-              <a:t>mkdir C:\docker-lab\volume-test</a:t>
+              <a:t>C:\docker-lab\nginx-site</a:t>
             </a:r>
           </a:p>
         </p:txBody>
@@ -17973,7 +17825,7 @@
                 <a:ea typeface="Aptos Display"/>
                 <a:cs typeface="Aptos Display"/>
               </a:rPr>
-              <a:t>放 index.html</a:t>
+              <a:t>容器路徑</a:t>
             </a:r>
           </a:p>
         </p:txBody>
@@ -18035,7 +17887,7 @@
                 <a:ea typeface="Aptos"/>
                 <a:cs typeface="Aptos"/>
               </a:rPr>
-              <a:t>寫入一行 HTML</a:t>
+              <a:t>/usr/share/nginx/html</a:t>
             </a:r>
           </a:p>
         </p:txBody>
@@ -18233,7 +18085,7 @@
                 <a:ea typeface="Aptos Display"/>
                 <a:cs typeface="Aptos Display"/>
               </a:rPr>
-              <a:t>用官方 Nginx 讀資料夾</a:t>
+              <a:t>冒號連接</a:t>
             </a:r>
           </a:p>
         </p:txBody>
@@ -18295,7 +18147,7 @@
                 <a:ea typeface="Consolas"/>
                 <a:cs typeface="Consolas"/>
               </a:rPr>
-              <a:t>-v "...:/usr/share/nginx/html"</a:t>
+              <a:t>主機:容器</a:t>
             </a:r>
           </a:p>
         </p:txBody>
@@ -18493,7 +18345,7 @@
                 <a:ea typeface="Aptos Display"/>
                 <a:cs typeface="Aptos Display"/>
               </a:rPr>
-              <a:t>只觀察同步</a:t>
+              <a:t>即時同步</a:t>
             </a:r>
           </a:p>
         </p:txBody>
@@ -18555,7 +18407,7 @@
                 <a:ea typeface="Aptos"/>
                 <a:cs typeface="Aptos"/>
               </a:rPr>
-              <a:t>有 -v 才會讀本機檔案</a:t>
+              <a:t>改任何一邊，另一邊看得到</a:t>
             </a:r>
           </a:p>
         </p:txBody>
@@ -18751,34 +18603,7 @@
                 <a:ea typeface="Consolas"/>
                 <a:cs typeface="Consolas"/>
               </a:rPr>
-              <a:t>docker run -d --name nginx-bind -p 8080:80 \</a:t>
-            </a:r>
-          </a:p>
-          <a:p xmlns:a="http://schemas.openxmlformats.org/drawingml/2006/main">
-            <a:pPr algn="l">
-              <a:lnSpc>
-                <a:spcPct val="104000"/>
-              </a:lnSpc>
-              <a:buNone/>
-              <a:defRPr sz="1575" b="0">
-                <a:solidFill>
-                  <a:srgbClr val="E5E7EB"/>
-                </a:solidFill>
-                <a:latin typeface="Consolas"/>
-                <a:ea typeface="Consolas"/>
-                <a:cs typeface="Consolas"/>
-              </a:defRPr>
-            </a:pPr>
-            <a:r>
-              <a:rPr sz="1575" b="0">
-                <a:solidFill>
-                  <a:srgbClr val="E5E7EB"/>
-                </a:solidFill>
-                <a:latin typeface="Consolas"/>
-                <a:ea typeface="Consolas"/>
-                <a:cs typeface="Consolas"/>
-              </a:rPr>
-              <a:t xml:space="preserve">  -v "C:\docker-lab\volume-test:/usr/share/nginx/html" nginx</a:t>
+              <a:t>-v "C:\docker-lab\nginx-site:/usr/share/nginx/html"</a:t>
             </a:r>
           </a:p>
         </p:txBody>
@@ -19056,7 +18881,7 @@
                 <a:ea typeface="Aptos"/>
                 <a:cs typeface="Aptos"/>
               </a:rPr>
-              <a:t>範例程式碼：比較 Nginx 有沒有 -v</a:t>
+              <a:t>範例程式碼：Bind Mount 基礎完整流程</a:t>
             </a:r>
           </a:p>
         </p:txBody>
@@ -19103,7 +18928,7 @@
                 <a:ea typeface="Aptos"/>
                 <a:cs typeface="Aptos"/>
               </a:rPr>
-              <a:t>第 2 堂 | 沒有 -v 是預設頁；有 -v 才讀本機資料夾</a:t>
+              <a:t>第 2 堂 | 本機資料夾同步到 nginx 網頁目錄</a:t>
             </a:r>
           </a:p>
         </p:txBody>
@@ -19201,7 +19026,7 @@
                 <a:ea typeface="Consolas"/>
                 <a:cs typeface="Consolas"/>
               </a:rPr>
-              <a:t># 沒有 -v：Nginx 讀 image 內建首頁</a:t>
+              <a:t>mkdir C:\docker-lab\nginx-site</a:t>
             </a:r>
           </a:p>
           <a:p xmlns:a="http://schemas.openxmlformats.org/drawingml/2006/main">
@@ -19214,7 +19039,7 @@
                 <a:ea typeface="Consolas"/>
                 <a:cs typeface="Consolas"/>
               </a:rPr>
-              <a:t>docker run -d --name nginx-default -p 8081:80 nginx</a:t>
+              <a:t>notepad C:\docker-lab\nginx-site\index.html</a:t>
             </a:r>
           </a:p>
           <a:p xmlns:a="http://schemas.openxmlformats.org/drawingml/2006/main">
@@ -19227,7 +19052,7 @@
                 <a:ea typeface="Consolas"/>
                 <a:cs typeface="Consolas"/>
               </a:rPr>
-              <a:t xml:space="preserve"> </a:t>
+              <a:t>docker run -d --name nginx-bind -p 8080:80 \</a:t>
             </a:r>
           </a:p>
           <a:p xmlns:a="http://schemas.openxmlformats.org/drawingml/2006/main">
@@ -19240,7 +19065,7 @@
                 <a:ea typeface="Consolas"/>
                 <a:cs typeface="Consolas"/>
               </a:rPr>
-              <a:t># 有 -v：本機資料夾取代 Nginx 網頁目錄</a:t>
+              <a:t xml:space="preserve">  -v "C:\docker-lab\nginx-site:/usr/share/nginx/html" nginx</a:t>
             </a:r>
           </a:p>
           <a:p xmlns:a="http://schemas.openxmlformats.org/drawingml/2006/main">
@@ -19253,7 +19078,7 @@
                 <a:ea typeface="Consolas"/>
                 <a:cs typeface="Consolas"/>
               </a:rPr>
-              <a:t>mkdir C:\docker-lab\volume-test</a:t>
+              <a:t>docker exec -it nginx-bind sh</a:t>
             </a:r>
           </a:p>
           <a:p xmlns:a="http://schemas.openxmlformats.org/drawingml/2006/main">
@@ -19266,7 +19091,7 @@
                 <a:ea typeface="Consolas"/>
                 <a:cs typeface="Consolas"/>
               </a:rPr>
-              <a:t>notepad C:\docker-lab\volume-test\index.html</a:t>
+              <a:t>cat /usr/share/nginx/html/index.html</a:t>
             </a:r>
           </a:p>
           <a:p xmlns:a="http://schemas.openxmlformats.org/drawingml/2006/main">
@@ -19279,46 +19104,7 @@
                 <a:ea typeface="Consolas"/>
                 <a:cs typeface="Consolas"/>
               </a:rPr>
-              <a:t xml:space="preserve"> </a:t>
-            </a:r>
-          </a:p>
-          <a:p xmlns:a="http://schemas.openxmlformats.org/drawingml/2006/main">
-            <a:r>
-              <a:rPr sz="1150">
-                <a:solidFill>
-                  <a:srgbClr val="E5E7EB"/>
-                </a:solidFill>
-                <a:latin typeface="Consolas"/>
-                <a:ea typeface="Consolas"/>
-                <a:cs typeface="Consolas"/>
-              </a:rPr>
-              <a:t>docker run -d --name nginx-bind -p 8080:80 -v "C:\docker-lab\volume-test:/usr/share/nginx/html" nginx</a:t>
-            </a:r>
-          </a:p>
-          <a:p xmlns:a="http://schemas.openxmlformats.org/drawingml/2006/main">
-            <a:r>
-              <a:rPr sz="1150">
-                <a:solidFill>
-                  <a:srgbClr val="E5E7EB"/>
-                </a:solidFill>
-                <a:latin typeface="Consolas"/>
-                <a:ea typeface="Consolas"/>
-                <a:cs typeface="Consolas"/>
-              </a:rPr>
-              <a:t># 8081 是預設頁；8080 會讀本機 index.html</a:t>
-            </a:r>
-          </a:p>
-          <a:p xmlns:a="http://schemas.openxmlformats.org/drawingml/2006/main">
-            <a:r>
-              <a:rPr sz="1150">
-                <a:solidFill>
-                  <a:srgbClr val="E5E7EB"/>
-                </a:solidFill>
-                <a:latin typeface="Consolas"/>
-                <a:ea typeface="Consolas"/>
-                <a:cs typeface="Consolas"/>
-              </a:rPr>
-              <a:t>docker rm -f nginx-default nginx-bind</a:t>
+              <a:t>exit</a:t>
             </a:r>
           </a:p>
         </p:txBody>
@@ -19503,7 +19289,7 @@
                 <a:ea typeface="Aptos"/>
                 <a:cs typeface="Aptos"/>
               </a:rPr>
-              <a:t>APP.PY</a:t>
+              <a:t>WRITE BACK</a:t>
             </a:r>
           </a:p>
         </p:txBody>
@@ -19565,7 +19351,7 @@
                 <a:ea typeface="Aptos Display"/>
                 <a:cs typeface="Aptos Display"/>
               </a:rPr>
-              <a:t>Flask 專案主程式檔案</a:t>
+              <a:t>反過來：container 裡新增檔案，主機也看得到</a:t>
             </a:r>
           </a:p>
         </p:txBody>
@@ -19761,7 +19547,7 @@
                 <a:ea typeface="Consolas"/>
                 <a:cs typeface="Consolas"/>
               </a:rPr>
-              <a:t>C:\docker-lab\flask-app</a:t>
+              <a:t>C:\docker-lab\nginx-site</a:t>
             </a:r>
           </a:p>
           <a:p xmlns:a="http://schemas.openxmlformats.org/drawingml/2006/main">
@@ -19788,7 +19574,7 @@
                 <a:ea typeface="Consolas"/>
                 <a:cs typeface="Consolas"/>
               </a:rPr>
-              <a:t xml:space="preserve">  app.py</a:t>
+              <a:t xml:space="preserve">  index.html</a:t>
             </a:r>
           </a:p>
           <a:p xmlns:a="http://schemas.openxmlformats.org/drawingml/2006/main">
@@ -19815,7 +19601,7 @@
                 <a:ea typeface="Consolas"/>
                 <a:cs typeface="Consolas"/>
               </a:rPr>
-              <a:t xml:space="preserve">  requirements.txt</a:t>
+              <a:t xml:space="preserve">  test.html</a:t>
             </a:r>
           </a:p>
         </p:txBody>
@@ -20011,12 +19797,7 @@
                 <a:ea typeface="Consolas"/>
                 <a:cs typeface="Consolas"/>
               </a:rPr>
-              <a:t>from flask import Flask</a:t>
-            </a:r>
-          </a:p>
-          <a:p xmlns:a="http://schemas.openxmlformats.org/drawingml/2006/main">
-            <a:r>
-              <a:t/>
+              <a:t>docker exec -it nginx-bind sh</a:t>
             </a:r>
           </a:p>
           <a:p xmlns:a="http://schemas.openxmlformats.org/drawingml/2006/main">
@@ -20043,12 +19824,7 @@
                 <a:ea typeface="Consolas"/>
                 <a:cs typeface="Consolas"/>
               </a:rPr>
-              <a:t>app = Flask(__name__)</a:t>
-            </a:r>
-          </a:p>
-          <a:p xmlns:a="http://schemas.openxmlformats.org/drawingml/2006/main">
-            <a:r>
-              <a:t/>
+              <a:t>cd /usr/share/nginx/html</a:t>
             </a:r>
           </a:p>
           <a:p xmlns:a="http://schemas.openxmlformats.org/drawingml/2006/main">
@@ -20075,7 +19851,7 @@
                 <a:ea typeface="Consolas"/>
                 <a:cs typeface="Consolas"/>
               </a:rPr>
-              <a:t>@app.route('/')</a:t>
+              <a:t>echo '&lt;h1&gt;Created in container&lt;/h1&gt;' &gt; test.html</a:t>
             </a:r>
           </a:p>
           <a:p xmlns:a="http://schemas.openxmlformats.org/drawingml/2006/main">
@@ -20102,93 +19878,7 @@
                 <a:ea typeface="Consolas"/>
                 <a:cs typeface="Consolas"/>
               </a:rPr>
-              <a:t>def hello():</a:t>
-            </a:r>
-          </a:p>
-          <a:p xmlns:a="http://schemas.openxmlformats.org/drawingml/2006/main">
-            <a:pPr algn="l">
-              <a:lnSpc>
-                <a:spcPct val="104000"/>
-              </a:lnSpc>
-              <a:buNone/>
-              <a:defRPr sz="1350" b="0">
-                <a:solidFill>
-                  <a:srgbClr val="E5E7EB"/>
-                </a:solidFill>
-                <a:latin typeface="Consolas"/>
-                <a:ea typeface="Consolas"/>
-                <a:cs typeface="Consolas"/>
-              </a:defRPr>
-            </a:pPr>
-            <a:r>
-              <a:rPr sz="1350" b="0">
-                <a:solidFill>
-                  <a:srgbClr val="E5E7EB"/>
-                </a:solidFill>
-                <a:latin typeface="Consolas"/>
-                <a:ea typeface="Consolas"/>
-                <a:cs typeface="Consolas"/>
-              </a:rPr>
-              <a:t xml:space="preserve">    return '&lt;h1&gt;Hello Docker!&lt;/h1&gt;'</a:t>
-            </a:r>
-          </a:p>
-          <a:p xmlns:a="http://schemas.openxmlformats.org/drawingml/2006/main">
-            <a:r>
-              <a:t/>
-            </a:r>
-          </a:p>
-          <a:p xmlns:a="http://schemas.openxmlformats.org/drawingml/2006/main">
-            <a:pPr algn="l">
-              <a:lnSpc>
-                <a:spcPct val="104000"/>
-              </a:lnSpc>
-              <a:buNone/>
-              <a:defRPr sz="1350" b="0">
-                <a:solidFill>
-                  <a:srgbClr val="E5E7EB"/>
-                </a:solidFill>
-                <a:latin typeface="Consolas"/>
-                <a:ea typeface="Consolas"/>
-                <a:cs typeface="Consolas"/>
-              </a:defRPr>
-            </a:pPr>
-            <a:r>
-              <a:rPr sz="1350" b="0">
-                <a:solidFill>
-                  <a:srgbClr val="E5E7EB"/>
-                </a:solidFill>
-                <a:latin typeface="Consolas"/>
-                <a:ea typeface="Consolas"/>
-                <a:cs typeface="Consolas"/>
-              </a:rPr>
-              <a:t>if __name__ == '__main__':</a:t>
-            </a:r>
-          </a:p>
-          <a:p xmlns:a="http://schemas.openxmlformats.org/drawingml/2006/main">
-            <a:pPr algn="l">
-              <a:lnSpc>
-                <a:spcPct val="104000"/>
-              </a:lnSpc>
-              <a:buNone/>
-              <a:defRPr sz="1350" b="0">
-                <a:solidFill>
-                  <a:srgbClr val="E5E7EB"/>
-                </a:solidFill>
-                <a:latin typeface="Consolas"/>
-                <a:ea typeface="Consolas"/>
-                <a:cs typeface="Consolas"/>
-              </a:defRPr>
-            </a:pPr>
-            <a:r>
-              <a:rPr sz="1350" b="0">
-                <a:solidFill>
-                  <a:srgbClr val="E5E7EB"/>
-                </a:solidFill>
-                <a:latin typeface="Consolas"/>
-                <a:ea typeface="Consolas"/>
-                <a:cs typeface="Consolas"/>
-              </a:rPr>
-              <a:t xml:space="preserve">    app.run(host='0.0.0.0', port=5000)</a:t>
+              <a:t>exit</a:t>
             </a:r>
           </a:p>
         </p:txBody>
@@ -20291,7 +19981,7 @@
                 <a:ea typeface="Aptos Display"/>
                 <a:cs typeface="Aptos Display"/>
               </a:rPr>
-              <a:t>requirements.txt</a:t>
+              <a:t>瀏覽器</a:t>
             </a:r>
           </a:p>
         </p:txBody>
@@ -20353,7 +20043,7 @@
                 <a:ea typeface="Consolas"/>
                 <a:cs typeface="Consolas"/>
               </a:rPr>
-              <a:t>flask</a:t>
+              <a:t>8080/test.html</a:t>
             </a:r>
           </a:p>
         </p:txBody>
@@ -20415,7 +20105,7 @@
                 <a:ea typeface="Aptos"/>
                 <a:cs typeface="Aptos"/>
               </a:rPr>
-              <a:t>剛剛 Nginx 只驗證 -v；現在把同一個概念用在 Flask 專案。</a:t>
+              <a:t>在主機資料夾也會看到 test.html。這就是 bind mount 的雙向同步。</a:t>
             </a:r>
           </a:p>
         </p:txBody>
@@ -20693,7 +20383,7 @@
                 <a:ea typeface="Aptos"/>
                 <a:cs typeface="Aptos"/>
               </a:rPr>
-              <a:t>範例程式碼：Flask app.py</a:t>
+              <a:t>範例程式碼：container 寫回主機資料夾</a:t>
             </a:r>
           </a:p>
         </p:txBody>
@@ -20740,7 +20430,7 @@
                 <a:ea typeface="Aptos"/>
                 <a:cs typeface="Aptos"/>
               </a:rPr>
-              <a:t>第 2 堂 | 可直接照做的完整範例</a:t>
+              <a:t>第 2 堂 | Bind Mount 是同一份檔案</a:t>
             </a:r>
           </a:p>
         </p:txBody>
@@ -20838,7 +20528,7 @@
                 <a:ea typeface="Consolas"/>
                 <a:cs typeface="Consolas"/>
               </a:rPr>
-              <a:t>from flask import Flask</a:t>
+              <a:t>docker exec -it nginx-bind sh</a:t>
             </a:r>
           </a:p>
           <a:p xmlns:a="http://schemas.openxmlformats.org/drawingml/2006/main">
@@ -20851,7 +20541,7 @@
                 <a:ea typeface="Consolas"/>
                 <a:cs typeface="Consolas"/>
               </a:rPr>
-              <a:t xml:space="preserve"> </a:t>
+              <a:t>cd /usr/share/nginx/html</a:t>
             </a:r>
           </a:p>
           <a:p xmlns:a="http://schemas.openxmlformats.org/drawingml/2006/main">
@@ -20864,7 +20554,7 @@
                 <a:ea typeface="Consolas"/>
                 <a:cs typeface="Consolas"/>
               </a:rPr>
-              <a:t>app = Flask(__name__)</a:t>
+              <a:t>echo '&lt;h1&gt;Created in container&lt;/h1&gt;' &gt; test.html</a:t>
             </a:r>
           </a:p>
           <a:p xmlns:a="http://schemas.openxmlformats.org/drawingml/2006/main">
@@ -20877,7 +20567,7 @@
                 <a:ea typeface="Consolas"/>
                 <a:cs typeface="Consolas"/>
               </a:rPr>
-              <a:t xml:space="preserve"> </a:t>
+              <a:t>cat test.html</a:t>
             </a:r>
           </a:p>
           <a:p xmlns:a="http://schemas.openxmlformats.org/drawingml/2006/main">
@@ -20890,7 +20580,7 @@
                 <a:ea typeface="Consolas"/>
                 <a:cs typeface="Consolas"/>
               </a:rPr>
-              <a:t>@app.route('/')</a:t>
+              <a:t>exit</a:t>
             </a:r>
           </a:p>
           <a:p xmlns:a="http://schemas.openxmlformats.org/drawingml/2006/main">
@@ -20903,7 +20593,7 @@
                 <a:ea typeface="Consolas"/>
                 <a:cs typeface="Consolas"/>
               </a:rPr>
-              <a:t>def hello():</a:t>
+              <a:t># 主機 C:\docker-lab\nginx-site 也會出現 test.html</a:t>
             </a:r>
           </a:p>
           <a:p xmlns:a="http://schemas.openxmlformats.org/drawingml/2006/main">
@@ -20916,98 +20606,7 @@
                 <a:ea typeface="Consolas"/>
                 <a:cs typeface="Consolas"/>
               </a:rPr>
-              <a:t xml:space="preserve">    return '&lt;h1&gt;Hello Docker!&lt;/h1&gt;&lt;p&gt;This is running inside a container.&lt;/p&gt;'</a:t>
-            </a:r>
-          </a:p>
-          <a:p xmlns:a="http://schemas.openxmlformats.org/drawingml/2006/main">
-            <a:r>
-              <a:rPr sz="1150">
-                <a:solidFill>
-                  <a:srgbClr val="E5E7EB"/>
-                </a:solidFill>
-                <a:latin typeface="Consolas"/>
-                <a:ea typeface="Consolas"/>
-                <a:cs typeface="Consolas"/>
-              </a:rPr>
-              <a:t xml:space="preserve"> </a:t>
-            </a:r>
-          </a:p>
-          <a:p xmlns:a="http://schemas.openxmlformats.org/drawingml/2006/main">
-            <a:r>
-              <a:rPr sz="1150">
-                <a:solidFill>
-                  <a:srgbClr val="E5E7EB"/>
-                </a:solidFill>
-                <a:latin typeface="Consolas"/>
-                <a:ea typeface="Consolas"/>
-                <a:cs typeface="Consolas"/>
-              </a:rPr>
-              <a:t>@app.route('/about')</a:t>
-            </a:r>
-          </a:p>
-          <a:p xmlns:a="http://schemas.openxmlformats.org/drawingml/2006/main">
-            <a:r>
-              <a:rPr sz="1150">
-                <a:solidFill>
-                  <a:srgbClr val="E5E7EB"/>
-                </a:solidFill>
-                <a:latin typeface="Consolas"/>
-                <a:ea typeface="Consolas"/>
-                <a:cs typeface="Consolas"/>
-              </a:rPr>
-              <a:t>def about():</a:t>
-            </a:r>
-          </a:p>
-          <a:p xmlns:a="http://schemas.openxmlformats.org/drawingml/2006/main">
-            <a:r>
-              <a:rPr sz="1150">
-                <a:solidFill>
-                  <a:srgbClr val="E5E7EB"/>
-                </a:solidFill>
-                <a:latin typeface="Consolas"/>
-                <a:ea typeface="Consolas"/>
-                <a:cs typeface="Consolas"/>
-              </a:rPr>
-              <a:t xml:space="preserve">    return '&lt;h1&gt;About&lt;/h1&gt;&lt;p&gt;This is a Flask app running in Docker.&lt;/p&gt;'</a:t>
-            </a:r>
-          </a:p>
-          <a:p xmlns:a="http://schemas.openxmlformats.org/drawingml/2006/main">
-            <a:r>
-              <a:rPr sz="1150">
-                <a:solidFill>
-                  <a:srgbClr val="E5E7EB"/>
-                </a:solidFill>
-                <a:latin typeface="Consolas"/>
-                <a:ea typeface="Consolas"/>
-                <a:cs typeface="Consolas"/>
-              </a:rPr>
-              <a:t xml:space="preserve"> </a:t>
-            </a:r>
-          </a:p>
-          <a:p xmlns:a="http://schemas.openxmlformats.org/drawingml/2006/main">
-            <a:r>
-              <a:rPr sz="1150">
-                <a:solidFill>
-                  <a:srgbClr val="E5E7EB"/>
-                </a:solidFill>
-                <a:latin typeface="Consolas"/>
-                <a:ea typeface="Consolas"/>
-                <a:cs typeface="Consolas"/>
-              </a:rPr>
-              <a:t>if __name__ == '__main__':</a:t>
-            </a:r>
-          </a:p>
-          <a:p xmlns:a="http://schemas.openxmlformats.org/drawingml/2006/main">
-            <a:r>
-              <a:rPr sz="1150">
-                <a:solidFill>
-                  <a:srgbClr val="E5E7EB"/>
-                </a:solidFill>
-                <a:latin typeface="Consolas"/>
-                <a:ea typeface="Consolas"/>
-                <a:cs typeface="Consolas"/>
-              </a:rPr>
-              <a:t xml:space="preserve">    app.run(host='0.0.0.0', port=5000)</a:t>
+              <a:t># 瀏覽器打開 http://localhost:8080/test.html</a:t>
             </a:r>
           </a:p>
         </p:txBody>
@@ -21192,7 +20791,7 @@
                 <a:ea typeface="Aptos"/>
                 <a:cs typeface="Aptos"/>
               </a:rPr>
-              <a:t>RUN FLASK CONTAINER</a:t>
+              <a:t>READ-ONLY BIND MOUNT</a:t>
             </a:r>
           </a:p>
         </p:txBody>
@@ -21254,7 +20853,7 @@
                 <a:ea typeface="Aptos Display"/>
                 <a:cs typeface="Aptos Display"/>
               </a:rPr>
-              <a:t>把本機專案掛進 Python 容器</a:t>
+              <a:t>用 :ro 保護主機檔案</a:t>
             </a:r>
           </a:p>
         </p:txBody>
@@ -21450,7 +21049,7 @@
                 <a:ea typeface="Consolas"/>
                 <a:cs typeface="Consolas"/>
               </a:rPr>
-              <a:t>docker run -it --rm -p 5000:5000 \</a:t>
+              <a:t>docker rm -f nginx-bind</a:t>
             </a:r>
           </a:p>
           <a:p xmlns:a="http://schemas.openxmlformats.org/drawingml/2006/main">
@@ -21477,7 +21076,7 @@
                 <a:ea typeface="Consolas"/>
                 <a:cs typeface="Consolas"/>
               </a:rPr>
-              <a:t xml:space="preserve">  -v "C:\docker-lab\flask-app:/app" \</a:t>
+              <a:t>docker run -d --name nginx-readonly -p 8081:80 \</a:t>
             </a:r>
           </a:p>
           <a:p xmlns:a="http://schemas.openxmlformats.org/drawingml/2006/main">
@@ -21504,7 +21103,7 @@
                 <a:ea typeface="Consolas"/>
                 <a:cs typeface="Consolas"/>
               </a:rPr>
-              <a:t xml:space="preserve">  -w /app python:3.11 bash</a:t>
+              <a:t xml:space="preserve">  -v "C:\docker-lab\nginx-site:/usr/share/nginx/html:ro" nginx</a:t>
             </a:r>
           </a:p>
         </p:txBody>
@@ -21607,7 +21206,7 @@
                 <a:ea typeface="Consolas"/>
                 <a:cs typeface="Consolas"/>
               </a:rPr>
-              <a:t>-it --rm</a:t>
+              <a:t>:ro</a:t>
             </a:r>
           </a:p>
         </p:txBody>
@@ -21669,7 +21268,7 @@
                 <a:ea typeface="Aptos"/>
                 <a:cs typeface="Aptos"/>
               </a:rPr>
-              <a:t>互動模式；exit 後自動清理</a:t>
+              <a:t>read-only，只能讀。</a:t>
             </a:r>
           </a:p>
         </p:txBody>
@@ -21772,7 +21371,7 @@
                 <a:ea typeface="Consolas"/>
                 <a:cs typeface="Consolas"/>
               </a:rPr>
-              <a:t>-p 5000:5000</a:t>
+              <a:t>-p 8081:80</a:t>
             </a:r>
           </a:p>
         </p:txBody>
@@ -21834,7 +21433,7 @@
                 <a:ea typeface="Aptos"/>
                 <a:cs typeface="Aptos"/>
               </a:rPr>
-              <a:t>主機 5000 對到容器 5000</a:t>
+              <a:t>避免和 8080 衝突。</a:t>
             </a:r>
           </a:p>
         </p:txBody>
@@ -21937,7 +21536,7 @@
                 <a:ea typeface="Consolas"/>
                 <a:cs typeface="Consolas"/>
               </a:rPr>
-              <a:t>-v ...:/app</a:t>
+              <a:t>-v ...:ro</a:t>
             </a:r>
           </a:p>
         </p:txBody>
@@ -21999,7 +21598,7 @@
                 <a:ea typeface="Aptos"/>
                 <a:cs typeface="Aptos"/>
               </a:rPr>
-              <a:t>把本機專案掛到容器 /app</a:t>
+              <a:t>主機資料夾仍是來源。</a:t>
             </a:r>
           </a:p>
         </p:txBody>
@@ -22102,7 +21701,7 @@
                 <a:ea typeface="Consolas"/>
                 <a:cs typeface="Consolas"/>
               </a:rPr>
-              <a:t>-w /app</a:t>
+              <a:t>nginx</a:t>
             </a:r>
           </a:p>
         </p:txBody>
@@ -22164,7 +21763,7 @@
                 <a:ea typeface="Aptos"/>
                 <a:cs typeface="Aptos"/>
               </a:rPr>
-              <a:t>工作目錄直接切到 /app</a:t>
+              <a:t>仍然只用 nginx。</a:t>
             </a:r>
           </a:p>
         </p:txBody>
@@ -22267,7 +21866,7 @@
                 <a:ea typeface="Consolas"/>
                 <a:cs typeface="Consolas"/>
               </a:rPr>
-              <a:t>python:3.11 bash</a:t>
+              <a:t>測試</a:t>
             </a:r>
           </a:p>
         </p:txBody>
@@ -22329,7 +21928,7 @@
                 <a:ea typeface="Aptos"/>
                 <a:cs typeface="Aptos"/>
               </a:rPr>
-              <a:t>用 Python Image 啟動 shell</a:t>
+              <a:t>進容器寫檔會失敗。</a:t>
             </a:r>
           </a:p>
         </p:txBody>
@@ -22575,7 +22174,7 @@
                 <a:ea typeface="Aptos"/>
                 <a:cs typeface="Aptos"/>
               </a:rPr>
-              <a:t>PARAMETER BREAKDOWN</a:t>
+              <a:t>READ-ONLY TEST</a:t>
             </a:r>
           </a:p>
         </p:txBody>
@@ -22637,7 +22236,7 @@
                 <a:ea typeface="Aptos Display"/>
                 <a:cs typeface="Aptos Display"/>
               </a:rPr>
-              <a:t>這條指令建立了三條通道</a:t>
+              <a:t>確認 :ro 真的不能寫</a:t>
             </a:r>
           </a:p>
         </p:txBody>
@@ -22740,7 +22339,7 @@
                 <a:ea typeface="Aptos Display"/>
                 <a:cs typeface="Aptos Display"/>
               </a:rPr>
-              <a:t>Port</a:t>
+              <a:t>Read</a:t>
             </a:r>
           </a:p>
         </p:txBody>
@@ -22802,7 +22401,7 @@
                 <a:ea typeface="Consolas"/>
                 <a:cs typeface="Consolas"/>
               </a:rPr>
-              <a:t>localhost:5000</a:t>
+              <a:t>cat index.html</a:t>
             </a:r>
           </a:p>
         </p:txBody>
@@ -22864,7 +22463,7 @@
                 <a:ea typeface="Aptos"/>
                 <a:cs typeface="Aptos"/>
               </a:rPr>
-              <a:t>容器內 Flask 的 5000 port 對外開到主機 5000。</a:t>
+              <a:t>可以讀取掛載進來的首頁。</a:t>
             </a:r>
           </a:p>
         </p:txBody>
@@ -22967,7 +22566,7 @@
                 <a:ea typeface="Aptos Display"/>
                 <a:cs typeface="Aptos Display"/>
               </a:rPr>
-              <a:t>Files</a:t>
+              <a:t>Write</a:t>
             </a:r>
           </a:p>
         </p:txBody>
@@ -23029,7 +22628,7 @@
                 <a:ea typeface="Consolas"/>
                 <a:cs typeface="Consolas"/>
               </a:rPr>
-              <a:t>C:\docker-lab\flask-app -&gt; /app</a:t>
+              <a:t>echo hi &gt; index.html</a:t>
             </a:r>
           </a:p>
         </p:txBody>
@@ -23091,7 +22690,7 @@
                 <a:ea typeface="Aptos"/>
                 <a:cs typeface="Aptos"/>
               </a:rPr>
-              <a:t>容器看到的 /app，就是你本機的專案資料夾。</a:t>
+              <a:t>會被拒絕，因為 :ro 是 read-only。</a:t>
             </a:r>
           </a:p>
         </p:txBody>
@@ -23194,7 +22793,7 @@
                 <a:ea typeface="Aptos Display"/>
                 <a:cs typeface="Aptos Display"/>
               </a:rPr>
-              <a:t>Workdir</a:t>
+              <a:t>Use case</a:t>
             </a:r>
           </a:p>
         </p:txBody>
@@ -23256,7 +22855,7 @@
                 <a:ea typeface="Consolas"/>
                 <a:cs typeface="Consolas"/>
               </a:rPr>
-              <a:t>/app</a:t>
+              <a:t>展示頁 / 設定檔</a:t>
             </a:r>
           </a:p>
         </p:txBody>
@@ -23318,7 +22917,7 @@
                 <a:ea typeface="Aptos"/>
                 <a:cs typeface="Aptos"/>
               </a:rPr>
-              <a:t>進入容器後直接在專案目錄操作，不用每次 cd。</a:t>
+              <a:t>不希望 container 改到主機檔案時使用。</a:t>
             </a:r>
           </a:p>
         </p:txBody>
@@ -23380,7 +22979,7 @@
                 <a:ea typeface="Aptos"/>
                 <a:cs typeface="Aptos"/>
               </a:rPr>
-              <a:t>讀 Docker 指令時，先抓住「主機:容器」與「本機路徑:容器路徑」。</a:t>
+              <a:t>讀 -v 時看最後一段：沒有 :ro 可讀寫，有 :ro 只讀。</a:t>
             </a:r>
           </a:p>
         </p:txBody>
@@ -23626,7 +23225,7 @@
                 <a:ea typeface="Aptos"/>
                 <a:cs typeface="Aptos"/>
               </a:rPr>
-              <a:t>PORT CONFLICT DEBUG</a:t>
+              <a:t>BIND MOUNT DEBUG</a:t>
             </a:r>
           </a:p>
         </p:txBody>
@@ -23688,7 +23287,7 @@
                 <a:ea typeface="Aptos Display"/>
                 <a:cs typeface="Aptos Display"/>
               </a:rPr>
-              <a:t>Port 被佔用時怎麼查？</a:t>
+              <a:t>路徑掛載失敗時怎麼查？</a:t>
             </a:r>
           </a:p>
         </p:txBody>
@@ -23756,7 +23355,7 @@
                 <a:ea typeface="Aptos"/>
                 <a:cs typeface="Aptos"/>
               </a:rPr>
-              <a:t>-p 的左邊是主機 port；如果被佔用，可以換成 8081、5001。</a:t>
+              <a:t>Nginx 看到空白或 403 時，先確認主機資料夾真的有 index.html。</a:t>
             </a:r>
           </a:p>
           <a:p xmlns:a="http://schemas.openxmlformats.org/drawingml/2006/main">
@@ -23765,9 +23364,9 @@
                 <a:spcPct val="106000"/>
               </a:lnSpc>
               <a:buNone/>
-              <a:defRPr sz="1275" b="0">
-                <a:solidFill>
-                  <a:srgbClr val="334155"/>
+              <a:defRPr sz="1450" b="1">
+                <a:solidFill>
+                  <a:srgbClr val="0B1220"/>
                 </a:solidFill>
                 <a:latin typeface="Aptos"/>
                 <a:ea typeface="Aptos"/>
@@ -23775,15 +23374,15 @@
               </a:defRPr>
             </a:pPr>
             <a:r>
-              <a:rPr sz="1275" b="0">
-                <a:solidFill>
-                  <a:srgbClr val="334155"/>
-                </a:solidFill>
-                <a:latin typeface="Aptos"/>
-                <a:ea typeface="Aptos"/>
-                <a:cs typeface="Aptos"/>
-              </a:rPr>
-              <a:t>-p 的右邊是容器內服務 port，通常照 image 或 app 設定，不先亂改。</a:t>
+              <a:rPr sz="1450" b="1">
+                <a:solidFill>
+                  <a:srgbClr val="0B1220"/>
+                </a:solidFill>
+                <a:latin typeface="Aptos"/>
+                <a:ea typeface="Aptos"/>
+                <a:cs typeface="Aptos"/>
+              </a:rPr>
+              <a:t>再進 container 看 /usr/share/nginx/html。</a:t>
             </a:r>
           </a:p>
         </p:txBody>
@@ -23860,25 +23459,25 @@
                 <a:spcPct val="106000"/>
               </a:lnSpc>
               <a:buNone/>
-              <a:defRPr sz="1225" b="1">
-                <a:solidFill>
-                  <a:srgbClr val="0B1220"/>
-                </a:solidFill>
-                <a:latin typeface="Consolas"/>
-                <a:ea typeface="Consolas"/>
-                <a:cs typeface="Consolas"/>
+              <a:defRPr sz="1800" b="1">
+                <a:solidFill>
+                  <a:srgbClr val="0B5CAD"/>
+                </a:solidFill>
+                <a:latin typeface="Aptos Display"/>
+                <a:ea typeface="Aptos Display"/>
+                <a:cs typeface="Aptos Display"/>
               </a:defRPr>
             </a:pPr>
             <a:r>
-              <a:rPr sz="1225" b="1">
-                <a:solidFill>
-                  <a:srgbClr val="0B1220"/>
-                </a:solidFill>
-                <a:latin typeface="Consolas"/>
-                <a:ea typeface="Consolas"/>
-                <a:cs typeface="Consolas"/>
-              </a:rPr>
-              <a:t>netstat -ano | findstr :8080</a:t>
+              <a:rPr sz="1800" b="1">
+                <a:solidFill>
+                  <a:srgbClr val="0B5CAD"/>
+                </a:solidFill>
+                <a:latin typeface="Aptos Display"/>
+                <a:ea typeface="Aptos Display"/>
+                <a:cs typeface="Aptos Display"/>
+              </a:rPr>
+              <a:t>路徑加雙引號</a:t>
             </a:r>
           </a:p>
           <a:p xmlns:a="http://schemas.openxmlformats.org/drawingml/2006/main">
@@ -23887,25 +23486,25 @@
                 <a:spcPct val="106000"/>
               </a:lnSpc>
               <a:buNone/>
-              <a:defRPr sz="1225" b="1">
-                <a:solidFill>
-                  <a:srgbClr val="0B1220"/>
-                </a:solidFill>
-                <a:latin typeface="Consolas"/>
-                <a:ea typeface="Consolas"/>
-                <a:cs typeface="Consolas"/>
+              <a:defRPr sz="1800" b="1">
+                <a:solidFill>
+                  <a:srgbClr val="0B5CAD"/>
+                </a:solidFill>
+                <a:latin typeface="Aptos Display"/>
+                <a:ea typeface="Aptos Display"/>
+                <a:cs typeface="Aptos Display"/>
               </a:defRPr>
             </a:pPr>
             <a:r>
-              <a:rPr sz="1225" b="1">
-                <a:solidFill>
-                  <a:srgbClr val="0B1220"/>
-                </a:solidFill>
-                <a:latin typeface="Consolas"/>
-                <a:ea typeface="Consolas"/>
-                <a:cs typeface="Consolas"/>
-              </a:rPr>
-              <a:t>tasklist | findstr &lt;PID&gt;</a:t>
+              <a:rPr sz="1800" b="1">
+                <a:solidFill>
+                  <a:srgbClr val="0B5CAD"/>
+                </a:solidFill>
+                <a:latin typeface="Aptos Display"/>
+                <a:ea typeface="Aptos Display"/>
+                <a:cs typeface="Aptos Display"/>
+              </a:rPr>
+              <a:t>C:\docker-lab\nginx-site</a:t>
             </a:r>
           </a:p>
           <a:p xmlns:a="http://schemas.openxmlformats.org/drawingml/2006/main">
@@ -23914,25 +23513,25 @@
                 <a:spcPct val="106000"/>
               </a:lnSpc>
               <a:buNone/>
-              <a:defRPr sz="1150" b="0">
-                <a:solidFill>
-                  <a:srgbClr val="334155"/>
-                </a:solidFill>
-                <a:latin typeface="Aptos"/>
-                <a:ea typeface="Aptos"/>
-                <a:cs typeface="Aptos"/>
+              <a:defRPr sz="1800" b="1">
+                <a:solidFill>
+                  <a:srgbClr val="0B5CAD"/>
+                </a:solidFill>
+                <a:latin typeface="Aptos Display"/>
+                <a:ea typeface="Aptos Display"/>
+                <a:cs typeface="Aptos Display"/>
               </a:defRPr>
             </a:pPr>
             <a:r>
-              <a:rPr sz="1150" b="0">
-                <a:solidFill>
-                  <a:srgbClr val="334155"/>
-                </a:solidFill>
-                <a:latin typeface="Aptos"/>
-                <a:ea typeface="Aptos"/>
-                <a:cs typeface="Aptos"/>
-              </a:rPr>
-              <a:t>必要時用工作管理員依 PID 結束程式。</a:t>
+              <a:rPr sz="1800" b="1">
+                <a:solidFill>
+                  <a:srgbClr val="0B5CAD"/>
+                </a:solidFill>
+                <a:latin typeface="Aptos Display"/>
+                <a:ea typeface="Aptos Display"/>
+                <a:cs typeface="Aptos Display"/>
+              </a:rPr>
+              <a:t>PowerShell 注意目前位置。</a:t>
             </a:r>
           </a:p>
         </p:txBody>
@@ -24000,7 +23599,7 @@
                 <a:ea typeface="Aptos Display"/>
                 <a:cs typeface="Aptos Display"/>
               </a:rPr>
-              <a:t>macOS</a:t>
+              <a:t>macOS / Linux</a:t>
             </a:r>
           </a:p>
           <a:p xmlns:a="http://schemas.openxmlformats.org/drawingml/2006/main">
@@ -24009,25 +23608,25 @@
                 <a:spcPct val="106000"/>
               </a:lnSpc>
               <a:buNone/>
-              <a:defRPr sz="1125" b="1">
-                <a:solidFill>
-                  <a:srgbClr val="0B1220"/>
-                </a:solidFill>
-                <a:latin typeface="Consolas"/>
-                <a:ea typeface="Consolas"/>
-                <a:cs typeface="Consolas"/>
+              <a:defRPr sz="1800" b="1">
+                <a:solidFill>
+                  <a:srgbClr val="047857"/>
+                </a:solidFill>
+                <a:latin typeface="Aptos Display"/>
+                <a:ea typeface="Aptos Display"/>
+                <a:cs typeface="Aptos Display"/>
               </a:defRPr>
             </a:pPr>
             <a:r>
-              <a:rPr sz="1125" b="1">
-                <a:solidFill>
-                  <a:srgbClr val="0B1220"/>
-                </a:solidFill>
-                <a:latin typeface="Consolas"/>
-                <a:ea typeface="Consolas"/>
-                <a:cs typeface="Consolas"/>
-              </a:rPr>
-              <a:t>lsof -nP -iTCP:8080 -sTCP:LISTEN</a:t>
+              <a:rPr sz="1800" b="1">
+                <a:solidFill>
+                  <a:srgbClr val="047857"/>
+                </a:solidFill>
+                <a:latin typeface="Aptos Display"/>
+                <a:ea typeface="Aptos Display"/>
+                <a:cs typeface="Aptos Display"/>
+              </a:rPr>
+              <a:t>用 $(pwd)/site:/usr/share/nginx/html</a:t>
             </a:r>
           </a:p>
           <a:p xmlns:a="http://schemas.openxmlformats.org/drawingml/2006/main">
@@ -24036,52 +23635,25 @@
                 <a:spcPct val="106000"/>
               </a:lnSpc>
               <a:buNone/>
-              <a:defRPr sz="1225" b="1">
-                <a:solidFill>
-                  <a:srgbClr val="0B1220"/>
-                </a:solidFill>
-                <a:latin typeface="Consolas"/>
-                <a:ea typeface="Consolas"/>
-                <a:cs typeface="Consolas"/>
+              <a:defRPr sz="1800" b="1">
+                <a:solidFill>
+                  <a:srgbClr val="047857"/>
+                </a:solidFill>
+                <a:latin typeface="Aptos Display"/>
+                <a:ea typeface="Aptos Display"/>
+                <a:cs typeface="Aptos Display"/>
               </a:defRPr>
             </a:pPr>
             <a:r>
-              <a:rPr sz="1225" b="1">
-                <a:solidFill>
-                  <a:srgbClr val="0B1220"/>
-                </a:solidFill>
-                <a:latin typeface="Consolas"/>
-                <a:ea typeface="Consolas"/>
-                <a:cs typeface="Consolas"/>
-              </a:rPr>
-              <a:t>kill &lt;PID&gt;</a:t>
-            </a:r>
-          </a:p>
-          <a:p xmlns:a="http://schemas.openxmlformats.org/drawingml/2006/main">
-            <a:pPr algn="l">
-              <a:lnSpc>
-                <a:spcPct val="106000"/>
-              </a:lnSpc>
-              <a:buNone/>
-              <a:defRPr sz="1150" b="0">
-                <a:solidFill>
-                  <a:srgbClr val="334155"/>
-                </a:solidFill>
-                <a:latin typeface="Aptos"/>
-                <a:ea typeface="Aptos"/>
-                <a:cs typeface="Aptos"/>
-              </a:defRPr>
-            </a:pPr>
-            <a:r>
-              <a:rPr sz="1150" b="0">
-                <a:solidFill>
-                  <a:srgbClr val="334155"/>
-                </a:solidFill>
-                <a:latin typeface="Aptos"/>
-                <a:ea typeface="Aptos"/>
-                <a:cs typeface="Aptos"/>
-              </a:rPr>
-              <a:t>不確定是什麼程式時，先換 host port。</a:t>
+              <a:rPr sz="1800" b="1">
+                <a:solidFill>
+                  <a:srgbClr val="047857"/>
+                </a:solidFill>
+                <a:latin typeface="Aptos Display"/>
+                <a:ea typeface="Aptos Display"/>
+                <a:cs typeface="Aptos Display"/>
+              </a:rPr>
+              <a:t>權限不足時先確認可讀。</a:t>
             </a:r>
           </a:p>
         </p:txBody>
@@ -24149,7 +23721,7 @@
                 <a:ea typeface="Consolas"/>
                 <a:cs typeface="Consolas"/>
               </a:rPr>
-              <a:t>8080 被佔用時：docker run -d -p 8081:80 nginx</a:t>
+              <a:t>檢查：docker exec -it nginx-bind sh</a:t>
             </a:r>
           </a:p>
         </p:txBody>
@@ -24395,7 +23967,7 @@
                 <a:ea typeface="Aptos"/>
                 <a:cs typeface="Aptos"/>
               </a:rPr>
-              <a:t>RUN APP</a:t>
+              <a:t>NAMED VOLUME EXAMPLE</a:t>
             </a:r>
           </a:p>
         </p:txBody>
@@ -24457,7 +24029,7 @@
                 <a:ea typeface="Aptos Display"/>
                 <a:cs typeface="Aptos Display"/>
               </a:rPr>
-              <a:t>進容器後安裝套件並啟動 Flask</a:t>
+              <a:t>Named Volume 範例：資料交給 Docker 管理</a:t>
             </a:r>
           </a:p>
         </p:txBody>
@@ -24653,7 +24225,7 @@
                 <a:ea typeface="Consolas"/>
                 <a:cs typeface="Consolas"/>
               </a:rPr>
-              <a:t>pip install -r requirements.txt</a:t>
+              <a:t>docker volume create nginx-html</a:t>
             </a:r>
           </a:p>
           <a:p xmlns:a="http://schemas.openxmlformats.org/drawingml/2006/main">
@@ -24680,7 +24252,7 @@
                 <a:ea typeface="Consolas"/>
                 <a:cs typeface="Consolas"/>
               </a:rPr>
-              <a:t>python app.py</a:t>
+              <a:t>docker volume ls</a:t>
             </a:r>
           </a:p>
         </p:txBody>
@@ -24816,7 +24388,7 @@
                 <a:ea typeface="Aptos Display"/>
                 <a:cs typeface="Aptos Display"/>
               </a:rPr>
-              <a:t>瀏覽器測試</a:t>
+              <a:t>適合場景</a:t>
             </a:r>
           </a:p>
         </p:txBody>
@@ -24878,7 +24450,7 @@
                 <a:ea typeface="Consolas"/>
                 <a:cs typeface="Consolas"/>
               </a:rPr>
-              <a:t>http://localhost:5000</a:t>
+              <a:t>不想綁死在主機路徑</a:t>
             </a:r>
           </a:p>
         </p:txBody>
@@ -24981,7 +24553,7 @@
                 <a:ea typeface="Aptos"/>
                 <a:cs typeface="Aptos"/>
               </a:rPr>
-              <a:t>Flask 必須監聽 host='0.0.0.0'，主機瀏覽器才連得到容器裡的服務。</a:t>
+              <a:t>你只給 volume 名稱，實際位置由 Docker 管理。</a:t>
             </a:r>
           </a:p>
         </p:txBody>
@@ -25227,7 +24799,7 @@
                 <a:ea typeface="Aptos"/>
                 <a:cs typeface="Aptos"/>
               </a:rPr>
-              <a:t>CONTAINER BASICS</a:t>
+              <a:t>STEP 1 / PULL</a:t>
             </a:r>
           </a:p>
         </p:txBody>
@@ -25289,7 +24861,7 @@
                 <a:ea typeface="Aptos Display"/>
                 <a:cs typeface="Aptos Display"/>
               </a:rPr>
-              <a:t>docker run 背後做了四件事</a:t>
+              <a:t>Step 1：先下載 nginx image</a:t>
             </a:r>
           </a:p>
         </p:txBody>
@@ -25487,7 +25059,7 @@
                 <a:ea typeface="Aptos Display"/>
                 <a:cs typeface="Aptos Display"/>
               </a:rPr>
-              <a:t>檢查本機</a:t>
+              <a:t>docker pull nginx</a:t>
             </a:r>
           </a:p>
         </p:txBody>
@@ -25549,7 +25121,7 @@
                 <a:ea typeface="Aptos"/>
                 <a:cs typeface="Aptos"/>
               </a:rPr>
-              <a:t>找有沒有指定 Image</a:t>
+              <a:t>只下載 image。</a:t>
             </a:r>
           </a:p>
         </p:txBody>
@@ -25780,7 +25352,7 @@
                 <a:ea typeface="Aptos Display"/>
                 <a:cs typeface="Aptos Display"/>
               </a:rPr>
-              <a:t>自動下載</a:t>
+              <a:t>Image</a:t>
             </a:r>
           </a:p>
         </p:txBody>
@@ -25842,7 +25414,7 @@
                 <a:ea typeface="Aptos"/>
                 <a:cs typeface="Aptos"/>
               </a:rPr>
-              <a:t>沒有就從 Docker Hub pull</a:t>
+              <a:t>唯讀範本，還不是服務。</a:t>
             </a:r>
           </a:p>
         </p:txBody>
@@ -26073,7 +25645,7 @@
                 <a:ea typeface="Aptos Display"/>
                 <a:cs typeface="Aptos Display"/>
               </a:rPr>
-              <a:t>建立容器</a:t>
+              <a:t>docker images</a:t>
             </a:r>
           </a:p>
         </p:txBody>
@@ -26135,7 +25707,7 @@
                 <a:ea typeface="Aptos"/>
                 <a:cs typeface="Aptos"/>
               </a:rPr>
-              <a:t>用 Image 建立新的 Container</a:t>
+              <a:t>下一張再確認清單。</a:t>
             </a:r>
           </a:p>
         </p:txBody>
@@ -26366,7 +25938,7 @@
                 <a:ea typeface="Aptos Display"/>
                 <a:cs typeface="Aptos Display"/>
               </a:rPr>
-              <a:t>啟動容器</a:t>
+              <a:t>docker run / rm</a:t>
             </a:r>
           </a:p>
         </p:txBody>
@@ -26428,7 +26000,7 @@
                 <a:ea typeface="Aptos"/>
                 <a:cs typeface="Aptos"/>
               </a:rPr>
-              <a:t>執行容器內的入口指令</a:t>
+              <a:t>後面再分開練。</a:t>
             </a:r>
           </a:p>
         </p:txBody>
@@ -26624,7 +26196,7 @@
                 <a:ea typeface="Consolas"/>
                 <a:cs typeface="Consolas"/>
               </a:rPr>
-              <a:t>docker run -it python:3.11 python</a:t>
+              <a:t>第 1 段只輸入：docker pull nginx</a:t>
             </a:r>
           </a:p>
         </p:txBody>
@@ -26902,7 +26474,7 @@
                 <a:ea typeface="Aptos"/>
                 <a:cs typeface="Aptos"/>
               </a:rPr>
-              <a:t>範例程式碼：requirements.txt 與啟動容器</a:t>
+              <a:t>範例程式碼：Named Volume 完整範例</a:t>
             </a:r>
           </a:p>
         </p:txBody>
@@ -27047,7 +26619,7 @@
                 <a:ea typeface="Consolas"/>
                 <a:cs typeface="Consolas"/>
               </a:rPr>
-              <a:t>flask</a:t>
+              <a:t>docker volume create nginx-html</a:t>
             </a:r>
           </a:p>
           <a:p xmlns:a="http://schemas.openxmlformats.org/drawingml/2006/main">
@@ -27060,7 +26632,7 @@
                 <a:ea typeface="Consolas"/>
                 <a:cs typeface="Consolas"/>
               </a:rPr>
-              <a:t xml:space="preserve"> </a:t>
+              <a:t>docker run -d --name nginx-volume -p 8082:80 \</a:t>
             </a:r>
           </a:p>
           <a:p xmlns:a="http://schemas.openxmlformats.org/drawingml/2006/main">
@@ -27073,7 +26645,7 @@
                 <a:ea typeface="Consolas"/>
                 <a:cs typeface="Consolas"/>
               </a:rPr>
-              <a:t># 啟動 Python 容器並掛載專案</a:t>
+              <a:t xml:space="preserve">  -v nginx-html:/usr/share/nginx/html nginx</a:t>
             </a:r>
           </a:p>
           <a:p xmlns:a="http://schemas.openxmlformats.org/drawingml/2006/main">
@@ -27086,7 +26658,7 @@
                 <a:ea typeface="Consolas"/>
                 <a:cs typeface="Consolas"/>
               </a:rPr>
-              <a:t>docker run -it --rm -p 5000:5000 -v "C:\docker-lab\flask-app:/app" -w /app python:3.11 bash</a:t>
+              <a:t>docker exec nginx-volume sh -c "echo '&lt;h1&gt;Hello Named Volume&lt;/h1&gt;' &gt; /usr/share/nginx/html/index.html"</a:t>
             </a:r>
           </a:p>
           <a:p xmlns:a="http://schemas.openxmlformats.org/drawingml/2006/main">
@@ -27099,33 +26671,7 @@
                 <a:ea typeface="Consolas"/>
                 <a:cs typeface="Consolas"/>
               </a:rPr>
-              <a:t xml:space="preserve"> </a:t>
-            </a:r>
-          </a:p>
-          <a:p xmlns:a="http://schemas.openxmlformats.org/drawingml/2006/main">
-            <a:r>
-              <a:rPr sz="1150">
-                <a:solidFill>
-                  <a:srgbClr val="E5E7EB"/>
-                </a:solidFill>
-                <a:latin typeface="Consolas"/>
-                <a:ea typeface="Consolas"/>
-                <a:cs typeface="Consolas"/>
-              </a:rPr>
-              <a:t>pip install -r requirements.txt</a:t>
-            </a:r>
-          </a:p>
-          <a:p xmlns:a="http://schemas.openxmlformats.org/drawingml/2006/main">
-            <a:r>
-              <a:rPr sz="1150">
-                <a:solidFill>
-                  <a:srgbClr val="E5E7EB"/>
-                </a:solidFill>
-                <a:latin typeface="Consolas"/>
-                <a:ea typeface="Consolas"/>
-                <a:cs typeface="Consolas"/>
-              </a:rPr>
-              <a:t>python app.py</a:t>
+              <a:t># 瀏覽器打開 http://localhost:8082</a:t>
             </a:r>
           </a:p>
         </p:txBody>
@@ -27310,7 +26856,7 @@
                 <a:ea typeface="Aptos"/>
                 <a:cs typeface="Aptos"/>
               </a:rPr>
-              <a:t>DEVELOPMENT LOOP</a:t>
+              <a:t>NAMED VOLUME PERSISTENCE</a:t>
             </a:r>
           </a:p>
         </p:txBody>
@@ -27372,7 +26918,7 @@
                 <a:ea typeface="Aptos Display"/>
                 <a:cs typeface="Aptos Display"/>
               </a:rPr>
-              <a:t>Bind Mount 讓開發迴圈變短</a:t>
+              <a:t>刪掉 container，Named Volume 仍然保留</a:t>
             </a:r>
           </a:p>
         </p:txBody>
@@ -27475,7 +27021,7 @@
                 <a:ea typeface="Aptos Display"/>
                 <a:cs typeface="Aptos Display"/>
               </a:rPr>
-              <a:t>修改宿主機 app.py</a:t>
+              <a:t>建立 Volume</a:t>
             </a:r>
           </a:p>
         </p:txBody>
@@ -27537,7 +27083,7 @@
                 <a:ea typeface="Aptos"/>
                 <a:cs typeface="Aptos"/>
               </a:rPr>
-              <a:t>用你熟悉的編輯器改程式碼</a:t>
+              <a:t>docker volume create nginx-html</a:t>
             </a:r>
           </a:p>
         </p:txBody>
@@ -27673,7 +27219,7 @@
                 <a:ea typeface="Aptos Display"/>
                 <a:cs typeface="Aptos Display"/>
               </a:rPr>
-              <a:t>容器看到同一份檔案</a:t>
+              <a:t>第一個 Nginx</a:t>
             </a:r>
           </a:p>
         </p:txBody>
@@ -27735,7 +27281,7 @@
                 <a:ea typeface="Aptos"/>
                 <a:cs typeface="Aptos"/>
               </a:rPr>
-              <a:t>-v 讓 /app 指向本機資料夾</a:t>
+              <a:t>同一個 nginx-html</a:t>
             </a:r>
           </a:p>
         </p:txBody>
@@ -27871,7 +27417,7 @@
                 <a:ea typeface="Aptos Display"/>
                 <a:cs typeface="Aptos Display"/>
               </a:rPr>
-              <a:t>重啟 Flask</a:t>
+              <a:t>刪掉 container</a:t>
             </a:r>
           </a:p>
         </p:txBody>
@@ -27933,7 +27479,7 @@
                 <a:ea typeface="Aptos"/>
                 <a:cs typeface="Aptos"/>
               </a:rPr>
-              <a:t>不用重建 Image，也不用重建容器</a:t>
+              <a:t>docker rm -f nginx-volume</a:t>
             </a:r>
           </a:p>
         </p:txBody>
@@ -28069,7 +27615,7 @@
                 <a:ea typeface="Aptos Display"/>
                 <a:cs typeface="Aptos Display"/>
               </a:rPr>
-              <a:t>瀏覽器重新整理</a:t>
+              <a:t>第二個 Nginx</a:t>
             </a:r>
           </a:p>
         </p:txBody>
@@ -28131,7 +27677,7 @@
                 <a:ea typeface="Aptos"/>
                 <a:cs typeface="Aptos"/>
               </a:rPr>
-              <a:t>localhost:5000 看到新內容</a:t>
+              <a:t>掛同一個 volume，頁面還在</a:t>
             </a:r>
           </a:p>
         </p:txBody>
@@ -28327,7 +27873,7 @@
                 <a:ea typeface="Consolas"/>
                 <a:cs typeface="Consolas"/>
               </a:rPr>
-              <a:t>-v "C:\docker-lab\flask-app:/app"</a:t>
+              <a:t>-v nginx-html:/usr/share/nginx/html</a:t>
             </a:r>
           </a:p>
         </p:txBody>
@@ -28635,7 +28181,7 @@
                 <a:ea typeface="Aptos Display"/>
                 <a:cs typeface="Aptos Display"/>
               </a:rPr>
-              <a:t>實作題 P3：Flask 容器操作全流程</a:t>
+              <a:t>實作題 P3：Named Volume 持久化</a:t>
             </a:r>
           </a:p>
         </p:txBody>
@@ -28792,7 +28338,7 @@
                 <a:ea typeface="Aptos Display"/>
                 <a:cs typeface="Aptos Display"/>
               </a:rPr>
-              <a:t>建立 app.py</a:t>
+              <a:t>create</a:t>
             </a:r>
           </a:p>
         </p:txBody>
@@ -28854,7 +28400,7 @@
                 <a:ea typeface="Aptos"/>
                 <a:cs typeface="Aptos"/>
               </a:rPr>
-              <a:t>包含 / 和 /about 兩個路由</a:t>
+              <a:t>docker volume create nginx-html</a:t>
             </a:r>
           </a:p>
         </p:txBody>
@@ -29011,7 +28557,7 @@
                 <a:ea typeface="Aptos Display"/>
                 <a:cs typeface="Aptos Display"/>
               </a:rPr>
-              <a:t>建立 requirements.txt</a:t>
+              <a:t>run</a:t>
             </a:r>
           </a:p>
         </p:txBody>
@@ -29073,7 +28619,7 @@
                 <a:ea typeface="Aptos"/>
                 <a:cs typeface="Aptos"/>
               </a:rPr>
-              <a:t>內容放 flask</a:t>
+              <a:t>nginx-volume + 8082</a:t>
             </a:r>
           </a:p>
         </p:txBody>
@@ -29230,7 +28776,7 @@
                 <a:ea typeface="Aptos Display"/>
                 <a:cs typeface="Aptos Display"/>
               </a:rPr>
-              <a:t>docker run -it --rm</a:t>
+              <a:t>write</a:t>
             </a:r>
           </a:p>
         </p:txBody>
@@ -29292,7 +28838,7 @@
                 <a:ea typeface="Aptos"/>
                 <a:cs typeface="Aptos"/>
               </a:rPr>
-              <a:t>掛載專案、設定 --rm 與 -p 5000:5000</a:t>
+              <a:t>echo 寫入 index.html</a:t>
             </a:r>
           </a:p>
         </p:txBody>
@@ -29449,7 +28995,7 @@
                 <a:ea typeface="Aptos Display"/>
                 <a:cs typeface="Aptos Display"/>
               </a:rPr>
-              <a:t>安裝並啟動</a:t>
+              <a:t>rm</a:t>
             </a:r>
           </a:p>
         </p:txBody>
@@ -29511,7 +29057,7 @@
                 <a:ea typeface="Aptos"/>
                 <a:cs typeface="Aptos"/>
               </a:rPr>
-              <a:t>pip install -r requirements.txt</a:t>
+              <a:t>刪掉 container</a:t>
             </a:r>
           </a:p>
         </p:txBody>
@@ -29668,7 +29214,7 @@
                 <a:ea typeface="Aptos Display"/>
                 <a:cs typeface="Aptos Display"/>
               </a:rPr>
-              <a:t>瀏覽器確認</a:t>
+              <a:t>run again</a:t>
             </a:r>
           </a:p>
         </p:txBody>
@@ -29730,7 +29276,7 @@
                 <a:ea typeface="Aptos"/>
                 <a:cs typeface="Aptos"/>
               </a:rPr>
-              <a:t>localhost:5000 看得到頁面</a:t>
+              <a:t>掛同一個 volume</a:t>
             </a:r>
           </a:p>
         </p:txBody>
@@ -29887,7 +29433,7 @@
                 <a:ea typeface="Aptos Display"/>
                 <a:cs typeface="Aptos Display"/>
               </a:rPr>
-              <a:t>修改程式</a:t>
+              <a:t>check</a:t>
             </a:r>
           </a:p>
         </p:txBody>
@@ -29949,7 +29495,7 @@
                 <a:ea typeface="Aptos"/>
                 <a:cs typeface="Aptos"/>
               </a:rPr>
-              <a:t>重啟 Flask 後確認變更</a:t>
+              <a:t>自訂首頁仍存在</a:t>
             </a:r>
           </a:p>
         </p:txBody>
@@ -30052,7 +29598,7 @@
                 <a:ea typeface="Aptos"/>
                 <a:cs typeface="Aptos"/>
               </a:rPr>
-              <a:t>Q4 檢查：-p 5000:5000 的左邊是主機 port，右邊是容器 port。</a:t>
+              <a:t>Q4 檢查：刪 container 不等於刪 volume。</a:t>
             </a:r>
           </a:p>
         </p:txBody>
@@ -30298,7 +29844,7 @@
                 <a:ea typeface="Aptos"/>
                 <a:cs typeface="Aptos"/>
               </a:rPr>
-              <a:t>CHALLENGE C2</a:t>
+              <a:t>ADVANCED C1</a:t>
             </a:r>
           </a:p>
         </p:txBody>
@@ -30360,7 +29906,7 @@
                 <a:ea typeface="Aptos Display"/>
                 <a:cs typeface="Aptos Display"/>
               </a:rPr>
-              <a:t>挑戰題 C2：同時跑兩個 Nginx</a:t>
+              <a:t>同一個 Named Volume 給兩個 Nginx 讀</a:t>
             </a:r>
           </a:p>
         </p:txBody>
@@ -30556,7 +30102,7 @@
                 <a:ea typeface="Consolas"/>
                 <a:cs typeface="Consolas"/>
               </a:rPr>
-              <a:t>docker run -d --name nginx-a -p 8082:80 \</a:t>
+              <a:t>docker run -d --name nginx-vol-a -p 8083:80 \</a:t>
             </a:r>
           </a:p>
           <a:p xmlns:a="http://schemas.openxmlformats.org/drawingml/2006/main">
@@ -30583,12 +30129,7 @@
                 <a:ea typeface="Consolas"/>
                 <a:cs typeface="Consolas"/>
               </a:rPr>
-              <a:t xml:space="preserve">  -v "${PWD}\site-a:/usr/share/nginx/html:ro" nginx</a:t>
-            </a:r>
-          </a:p>
-          <a:p xmlns:a="http://schemas.openxmlformats.org/drawingml/2006/main">
-            <a:r>
-              <a:t/>
+              <a:t xml:space="preserve">  -v nginx-html:/usr/share/nginx/html:ro nginx</a:t>
             </a:r>
           </a:p>
           <a:p xmlns:a="http://schemas.openxmlformats.org/drawingml/2006/main">
@@ -30615,7 +30156,7 @@
                 <a:ea typeface="Consolas"/>
                 <a:cs typeface="Consolas"/>
               </a:rPr>
-              <a:t>docker run -d --name nginx-b -p 8083:80 \</a:t>
+              <a:t>docker run -d --name nginx-vol-b -p 8084:80 \</a:t>
             </a:r>
           </a:p>
           <a:p xmlns:a="http://schemas.openxmlformats.org/drawingml/2006/main">
@@ -30642,7 +30183,7 @@
                 <a:ea typeface="Consolas"/>
                 <a:cs typeface="Consolas"/>
               </a:rPr>
-              <a:t xml:space="preserve">  -v "${PWD}\site-b:/usr/share/nginx/html:ro" nginx</a:t>
+              <a:t xml:space="preserve">  -v nginx-html:/usr/share/nginx/html:ro nginx</a:t>
             </a:r>
           </a:p>
         </p:txBody>
@@ -30807,7 +30348,7 @@
                 <a:ea typeface="Aptos"/>
                 <a:cs typeface="Aptos"/>
               </a:rPr>
-              <a:t>nginx-a / nginx-b</a:t>
+              <a:t>nginx-vol-a / nginx-vol-b</a:t>
             </a:r>
           </a:p>
         </p:txBody>
@@ -30972,7 +30513,7 @@
                 <a:ea typeface="Aptos"/>
                 <a:cs typeface="Aptos"/>
               </a:rPr>
-              <a:t>8082 / 8083</a:t>
+              <a:t>8083 / 8084</a:t>
             </a:r>
           </a:p>
         </p:txBody>
@@ -31075,7 +30616,7 @@
                 <a:ea typeface="Aptos Display"/>
                 <a:cs typeface="Aptos Display"/>
               </a:rPr>
-              <a:t>HTML 不同</a:t>
+              <a:t>HTML 相同</a:t>
             </a:r>
           </a:p>
         </p:txBody>
@@ -31137,7 +30678,7 @@
                 <a:ea typeface="Aptos"/>
                 <a:cs typeface="Aptos"/>
               </a:rPr>
-              <a:t>site-a / site-b</a:t>
+              <a:t>同一個 nginx-html volume</a:t>
             </a:r>
           </a:p>
         </p:txBody>
@@ -31445,7 +30986,7 @@
                 <a:ea typeface="Aptos Display"/>
                 <a:cs typeface="Aptos Display"/>
               </a:rPr>
-              <a:t>常見卡關點與清理</a:t>
+              <a:t>Volume 常見卡關點與清理</a:t>
             </a:r>
           </a:p>
         </p:txBody>
@@ -31610,7 +31151,7 @@
                 <a:ea typeface="Aptos"/>
                 <a:cs typeface="Aptos"/>
               </a:rPr>
-              <a:t>換 port 或先關掉佔用 5000/8080 的程式。</a:t>
+              <a:t>同一台主機的 8080、8081、8082 不可重複使用。</a:t>
             </a:r>
           </a:p>
         </p:txBody>
@@ -31775,7 +31316,7 @@
                 <a:ea typeface="Aptos"/>
                 <a:cs typeface="Aptos"/>
               </a:rPr>
-              <a:t>Windows 路徑用雙引號，確認資料夾真的存在。</a:t>
+              <a:t>Windows 路徑用雙引號，確認資料夾真的有 index.html。</a:t>
             </a:r>
           </a:p>
         </p:txBody>
@@ -31878,7 +31419,7 @@
                 <a:ea typeface="Aptos Display"/>
                 <a:cs typeface="Aptos Display"/>
               </a:rPr>
-              <a:t>bash 不存在</a:t>
+              <a:t>改用 sh</a:t>
             </a:r>
           </a:p>
         </p:txBody>
@@ -31940,7 +31481,7 @@
                 <a:ea typeface="Aptos"/>
                 <a:cs typeface="Aptos"/>
               </a:rPr>
-              <a:t>改用 sh，尤其是 nginx、alpine 這類精簡 Image。</a:t>
+              <a:t>nginx 官方 image 用 sh 進去檢查檔案最穩。</a:t>
             </a:r>
           </a:p>
         </p:txBody>
@@ -32043,7 +31584,7 @@
                 <a:ea typeface="Aptos Display"/>
                 <a:cs typeface="Aptos Display"/>
               </a:rPr>
-              <a:t>容器名稱重複</a:t>
+              <a:t>Volume 刪不掉</a:t>
             </a:r>
           </a:p>
         </p:txBody>
@@ -32105,7 +31646,7 @@
                 <a:ea typeface="Aptos"/>
                 <a:cs typeface="Aptos"/>
               </a:rPr>
-              <a:t>先 docker rm -f 舊容器，或改用新名稱。</a:t>
+              <a:t>先刪掉使用中的 container，再 docker volume rm。</a:t>
             </a:r>
           </a:p>
         </p:txBody>
@@ -32301,12 +31842,7 @@
                 <a:ea typeface="Consolas"/>
                 <a:cs typeface="Consolas"/>
               </a:rPr>
-              <a:t>docker rm -f nginx-life nginx-default nginx-bind</a:t>
-            </a:r>
-          </a:p>
-          <a:p xmlns:a="http://schemas.openxmlformats.org/drawingml/2006/main">
-            <a:r>
-              <a:t/>
+              <a:t>docker rm -f nginx-bind nginx-readonly nginx-volume nginx-vol-a nginx-vol-b</a:t>
             </a:r>
           </a:p>
           <a:p xmlns:a="http://schemas.openxmlformats.org/drawingml/2006/main">
@@ -32333,7 +31869,7 @@
                 <a:ea typeface="Consolas"/>
                 <a:cs typeface="Consolas"/>
               </a:rPr>
-              <a:t>docker volume prune</a:t>
+              <a:t>docker volume rm nginx-html</a:t>
             </a:r>
           </a:p>
         </p:txBody>
@@ -32579,7 +32115,7 @@
                 <a:ea typeface="Aptos"/>
                 <a:cs typeface="Aptos"/>
               </a:rPr>
-              <a:t>PRACTICE WRAP-UP</a:t>
+              <a:t>FLASK BRIDGE</a:t>
             </a:r>
           </a:p>
         </p:txBody>
@@ -32641,7 +32177,7 @@
                 <a:ea typeface="Aptos Display"/>
                 <a:cs typeface="Aptos Display"/>
               </a:rPr>
-              <a:t>完成檢核：第二堂你要能交付什麼</a:t>
+              <a:t>接下來：用 Flask 練同一個 Bind Mount</a:t>
             </a:r>
           </a:p>
         </p:txBody>
@@ -32744,7 +32280,7 @@
                 <a:ea typeface="Aptos Display"/>
                 <a:cs typeface="Aptos Display"/>
               </a:rPr>
-              <a:t>生命週期</a:t>
+              <a:t>為什麼接 Flask</a:t>
             </a:r>
           </a:p>
         </p:txBody>
@@ -32806,7 +32342,7 @@
                 <a:ea typeface="Aptos"/>
                 <a:cs typeface="Aptos"/>
               </a:rPr>
-              <a:t>能用 ps / logs / exec / stop / start / restart / rm 管理容器。</a:t>
+              <a:t>nginx 讓學生看懂 Volume；Flask 把同一件事用到程式碼開發。</a:t>
             </a:r>
           </a:p>
         </p:txBody>
@@ -32909,7 +32445,7 @@
                 <a:ea typeface="Aptos Display"/>
                 <a:cs typeface="Aptos Display"/>
               </a:rPr>
-              <a:t>Volume</a:t>
+              <a:t>練習目標</a:t>
             </a:r>
           </a:p>
         </p:txBody>
@@ -32971,7 +32507,7 @@
                 <a:ea typeface="Aptos"/>
                 <a:cs typeface="Aptos"/>
               </a:rPr>
-              <a:t>能分辨 Bind Mount 與 Named Volume，並用 -v 保存或同步資料。</a:t>
+              <a:t>本機 flask-app 掛到 /app，用 python:3.11 直接跑。</a:t>
             </a:r>
           </a:p>
         </p:txBody>
@@ -33074,7 +32610,7 @@
                 <a:ea typeface="Aptos Display"/>
                 <a:cs typeface="Aptos Display"/>
               </a:rPr>
-              <a:t>Flask</a:t>
+              <a:t>新的參數</a:t>
             </a:r>
           </a:p>
         </p:txBody>
@@ -33136,7 +32672,7 @@
                 <a:ea typeface="Aptos"/>
                 <a:cs typeface="Aptos"/>
               </a:rPr>
-              <a:t>能用 Python 容器跑起本機 Flask 專案，並說明 -p 和 -v。</a:t>
+              <a:t>加入 -w /app，讓 container 一進去就在專案目錄。</a:t>
             </a:r>
           </a:p>
         </p:txBody>
@@ -33239,7 +32775,7 @@
                 <a:ea typeface="Aptos Display"/>
                 <a:cs typeface="Aptos Display"/>
               </a:rPr>
-              <a:t>挑戰</a:t>
+              <a:t>差異</a:t>
             </a:r>
           </a:p>
         </p:txBody>
@@ -33301,7 +32837,7 @@
                 <a:ea typeface="Aptos"/>
                 <a:cs typeface="Aptos"/>
               </a:rPr>
-              <a:t>能完成 :ro 唯讀掛載與兩個 Nginx 同時運行。</a:t>
+              <a:t>nginx 改 HTML 重新整理；Flask 改 app.py 要重啟 process。</a:t>
             </a:r>
           </a:p>
         </p:txBody>
@@ -33363,7 +32899,7 @@
                 <a:ea typeface="Aptos Display"/>
                 <a:cs typeface="Aptos Display"/>
               </a:rPr>
-              <a:t>下一堂：MySQL、Docker Compose 與多容器管理。</a:t>
+              <a:t>先不寫 Dockerfile，不重新 build；先把開發迴圈跑順。</a:t>
             </a:r>
           </a:p>
         </p:txBody>
@@ -33594,7 +33130,7 @@
                 <a:ea typeface="Aptos"/>
                 <a:cs typeface="Aptos"/>
               </a:rPr>
-              <a:t>CODE EXAMPLE</a:t>
+              <a:t>FLASK STEP 1</a:t>
             </a:r>
           </a:p>
         </p:txBody>
@@ -33641,7 +33177,7 @@
                 <a:ea typeface="Aptos"/>
                 <a:cs typeface="Aptos"/>
               </a:rPr>
-              <a:t>完整程式碼：volume-test/index.html（v1）</a:t>
+              <a:t>建立 Flask 專案資料夾</a:t>
             </a:r>
           </a:p>
         </p:txBody>
@@ -33688,7 +33224,7 @@
                 <a:ea typeface="Aptos"/>
                 <a:cs typeface="Aptos"/>
               </a:rPr>
-              <a:t>第 2 堂 | 可直接照做的完整檔案</a:t>
+              <a:t>第 2 堂 | 專案先在主機上建立</a:t>
             </a:r>
           </a:p>
         </p:txBody>
@@ -33786,7 +33322,7 @@
                 <a:ea typeface="Consolas"/>
                 <a:cs typeface="Consolas"/>
               </a:rPr>
-              <a:t>&lt;h1&gt;Hello Volume!&lt;/h1&gt;</a:t>
+              <a:t>mkdir C:\docker-lab\flask-app</a:t>
             </a:r>
           </a:p>
           <a:p xmlns:a="http://schemas.openxmlformats.org/drawingml/2006/main">
@@ -33799,7 +33335,59 @@
                 <a:ea typeface="Consolas"/>
                 <a:cs typeface="Consolas"/>
               </a:rPr>
-              <a:t>&lt;p&gt;這是第一個版本&lt;/p&gt;</a:t>
+              <a:t>notepad C:\docker-lab\flask-app\requirements.txt</a:t>
+            </a:r>
+          </a:p>
+          <a:p xmlns:a="http://schemas.openxmlformats.org/drawingml/2006/main">
+            <a:r>
+              <a:rPr sz="1150">
+                <a:solidFill>
+                  <a:srgbClr val="E5E7EB"/>
+                </a:solidFill>
+                <a:latin typeface="Consolas"/>
+                <a:ea typeface="Consolas"/>
+                <a:cs typeface="Consolas"/>
+              </a:rPr>
+              <a:t>notepad C:\docker-lab\flask-app\app.py</a:t>
+            </a:r>
+          </a:p>
+          <a:p xmlns:a="http://schemas.openxmlformats.org/drawingml/2006/main">
+            <a:r>
+              <a:rPr sz="1150">
+                <a:solidFill>
+                  <a:srgbClr val="E5E7EB"/>
+                </a:solidFill>
+                <a:latin typeface="Consolas"/>
+                <a:ea typeface="Consolas"/>
+                <a:cs typeface="Consolas"/>
+              </a:rPr>
+              <a:t/>
+            </a:r>
+          </a:p>
+          <a:p xmlns:a="http://schemas.openxmlformats.org/drawingml/2006/main">
+            <a:r>
+              <a:rPr sz="1150">
+                <a:solidFill>
+                  <a:srgbClr val="E5E7EB"/>
+                </a:solidFill>
+                <a:latin typeface="Consolas"/>
+                <a:ea typeface="Consolas"/>
+                <a:cs typeface="Consolas"/>
+              </a:rPr>
+              <a:t># requirements.txt</a:t>
+            </a:r>
+          </a:p>
+          <a:p xmlns:a="http://schemas.openxmlformats.org/drawingml/2006/main">
+            <a:r>
+              <a:rPr sz="1150">
+                <a:solidFill>
+                  <a:srgbClr val="E5E7EB"/>
+                </a:solidFill>
+                <a:latin typeface="Consolas"/>
+                <a:ea typeface="Consolas"/>
+                <a:cs typeface="Consolas"/>
+              </a:rPr>
+              <a:t>flask==3.0.3</a:t>
             </a:r>
           </a:p>
         </p:txBody>
@@ -33846,7 +33434,7 @@
                 <a:ea typeface="Aptos"/>
                 <a:cs typeface="Aptos"/>
               </a:rPr>
-              <a:t>Docker 基礎教學 | 第 2 堂 | 範例程式碼</a:t>
+              <a:t>Docker 基礎教學 | 第 2 堂 | Flask 練習</a:t>
             </a:r>
           </a:p>
         </p:txBody>
@@ -33893,7 +33481,7 @@
                 <a:ea typeface="Aptos"/>
                 <a:cs typeface="Aptos"/>
               </a:rPr>
-              <a:t>CODE</a:t>
+              <a:t>LAB</a:t>
             </a:r>
           </a:p>
         </p:txBody>
@@ -33969,7 +33557,7 @@
                 <a:ea typeface="Aptos"/>
                 <a:cs typeface="Aptos"/>
               </a:rPr>
-              <a:t>CODE EXAMPLE</a:t>
+              <a:t>FLASK CODE</a:t>
             </a:r>
           </a:p>
         </p:txBody>
@@ -34016,7 +33604,7 @@
                 <a:ea typeface="Aptos"/>
                 <a:cs typeface="Aptos"/>
               </a:rPr>
-              <a:t>完整程式碼：volume-test/index.html（v2）</a:t>
+              <a:t>app.py：最小 Flask 網頁</a:t>
             </a:r>
           </a:p>
         </p:txBody>
@@ -34063,7 +33651,7 @@
                 <a:ea typeface="Aptos"/>
                 <a:cs typeface="Aptos"/>
               </a:rPr>
-              <a:t>第 2 堂 | 可直接照做的完整檔案</a:t>
+              <a:t>第 2 堂 | 先做兩個 route</a:t>
             </a:r>
           </a:p>
         </p:txBody>
@@ -34161,7 +33749,7 @@
                 <a:ea typeface="Consolas"/>
                 <a:cs typeface="Consolas"/>
               </a:rPr>
-              <a:t>&lt;h1&gt;Hello Volume!&lt;/h1&gt;</a:t>
+              <a:t>from flask import Flask</a:t>
             </a:r>
           </a:p>
           <a:p xmlns:a="http://schemas.openxmlformats.org/drawingml/2006/main">
@@ -34174,7 +33762,7 @@
                 <a:ea typeface="Consolas"/>
                 <a:cs typeface="Consolas"/>
               </a:rPr>
-              <a:t>&lt;p&gt;這是修改後的第二個版本！&lt;/p&gt;</a:t>
+              <a:t>app = Flask(__name__)</a:t>
             </a:r>
           </a:p>
           <a:p xmlns:a="http://schemas.openxmlformats.org/drawingml/2006/main">
@@ -34187,7 +33775,137 @@
                 <a:ea typeface="Consolas"/>
                 <a:cs typeface="Consolas"/>
               </a:rPr>
-              <a:t>&lt;p&gt;我在宿主機改的，容器裡面會自動同步&lt;/p&gt;</a:t>
+              <a:t/>
+            </a:r>
+          </a:p>
+          <a:p xmlns:a="http://schemas.openxmlformats.org/drawingml/2006/main">
+            <a:r>
+              <a:rPr sz="1150">
+                <a:solidFill>
+                  <a:srgbClr val="E5E7EB"/>
+                </a:solidFill>
+                <a:latin typeface="Consolas"/>
+                <a:ea typeface="Consolas"/>
+                <a:cs typeface="Consolas"/>
+              </a:rPr>
+              <a:t>@app.get("/")</a:t>
+            </a:r>
+          </a:p>
+          <a:p xmlns:a="http://schemas.openxmlformats.org/drawingml/2006/main">
+            <a:r>
+              <a:rPr sz="1150">
+                <a:solidFill>
+                  <a:srgbClr val="E5E7EB"/>
+                </a:solidFill>
+                <a:latin typeface="Consolas"/>
+                <a:ea typeface="Consolas"/>
+                <a:cs typeface="Consolas"/>
+              </a:rPr>
+              <a:t>def index():</a:t>
+            </a:r>
+          </a:p>
+          <a:p xmlns:a="http://schemas.openxmlformats.org/drawingml/2006/main">
+            <a:r>
+              <a:rPr sz="1150">
+                <a:solidFill>
+                  <a:srgbClr val="E5E7EB"/>
+                </a:solidFill>
+                <a:latin typeface="Consolas"/>
+                <a:ea typeface="Consolas"/>
+                <a:cs typeface="Consolas"/>
+              </a:rPr>
+              <a:t xml:space="preserve">    return "&lt;h1&gt;Hello Flask Volume!&lt;/h1&gt;"</a:t>
+            </a:r>
+          </a:p>
+          <a:p xmlns:a="http://schemas.openxmlformats.org/drawingml/2006/main">
+            <a:r>
+              <a:rPr sz="1150">
+                <a:solidFill>
+                  <a:srgbClr val="E5E7EB"/>
+                </a:solidFill>
+                <a:latin typeface="Consolas"/>
+                <a:ea typeface="Consolas"/>
+                <a:cs typeface="Consolas"/>
+              </a:rPr>
+              <a:t/>
+            </a:r>
+          </a:p>
+          <a:p xmlns:a="http://schemas.openxmlformats.org/drawingml/2006/main">
+            <a:r>
+              <a:rPr sz="1150">
+                <a:solidFill>
+                  <a:srgbClr val="E5E7EB"/>
+                </a:solidFill>
+                <a:latin typeface="Consolas"/>
+                <a:ea typeface="Consolas"/>
+                <a:cs typeface="Consolas"/>
+              </a:rPr>
+              <a:t>@app.get("/about")</a:t>
+            </a:r>
+          </a:p>
+          <a:p xmlns:a="http://schemas.openxmlformats.org/drawingml/2006/main">
+            <a:r>
+              <a:rPr sz="1150">
+                <a:solidFill>
+                  <a:srgbClr val="E5E7EB"/>
+                </a:solidFill>
+                <a:latin typeface="Consolas"/>
+                <a:ea typeface="Consolas"/>
+                <a:cs typeface="Consolas"/>
+              </a:rPr>
+              <a:t>def about():</a:t>
+            </a:r>
+          </a:p>
+          <a:p xmlns:a="http://schemas.openxmlformats.org/drawingml/2006/main">
+            <a:r>
+              <a:rPr sz="1150">
+                <a:solidFill>
+                  <a:srgbClr val="E5E7EB"/>
+                </a:solidFill>
+                <a:latin typeface="Consolas"/>
+                <a:ea typeface="Consolas"/>
+                <a:cs typeface="Consolas"/>
+              </a:rPr>
+              <a:t xml:space="preserve">    return "&lt;h1&gt;About&lt;/h1&gt;&lt;p&gt;Bind mount demo&lt;/p&gt;"</a:t>
+            </a:r>
+          </a:p>
+          <a:p xmlns:a="http://schemas.openxmlformats.org/drawingml/2006/main">
+            <a:r>
+              <a:rPr sz="1150">
+                <a:solidFill>
+                  <a:srgbClr val="E5E7EB"/>
+                </a:solidFill>
+                <a:latin typeface="Consolas"/>
+                <a:ea typeface="Consolas"/>
+                <a:cs typeface="Consolas"/>
+              </a:rPr>
+              <a:t/>
+            </a:r>
+          </a:p>
+          <a:p xmlns:a="http://schemas.openxmlformats.org/drawingml/2006/main">
+            <a:r>
+              <a:rPr sz="1150">
+                <a:solidFill>
+                  <a:srgbClr val="E5E7EB"/>
+                </a:solidFill>
+                <a:latin typeface="Consolas"/>
+                <a:ea typeface="Consolas"/>
+                <a:cs typeface="Consolas"/>
+              </a:rPr>
+              <a:t>if __name__ == "__main__":</a:t>
+            </a:r>
+          </a:p>
+          <a:p xmlns:a="http://schemas.openxmlformats.org/drawingml/2006/main">
+            <a:r>
+              <a:rPr sz="1150">
+                <a:solidFill>
+                  <a:srgbClr val="E5E7EB"/>
+                </a:solidFill>
+                <a:latin typeface="Consolas"/>
+                <a:ea typeface="Consolas"/>
+                <a:cs typeface="Consolas"/>
+              </a:rPr>
+              <a:t xml:space="preserve">    app.run(host="0.0.0.0", port=5000)</a:t>
             </a:r>
           </a:p>
         </p:txBody>
@@ -34234,7 +33952,7 @@
                 <a:ea typeface="Aptos"/>
                 <a:cs typeface="Aptos"/>
               </a:rPr>
-              <a:t>Docker 基礎教學 | 第 2 堂 | 範例程式碼</a:t>
+              <a:t>Docker 基礎教學 | 第 2 堂 | Flask 練習</a:t>
             </a:r>
           </a:p>
         </p:txBody>
@@ -34281,7 +33999,7 @@
                 <a:ea typeface="Aptos"/>
                 <a:cs typeface="Aptos"/>
               </a:rPr>
-              <a:t>CODE</a:t>
+              <a:t>LAB</a:t>
             </a:r>
           </a:p>
         </p:txBody>
@@ -34357,7 +34075,7 @@
                 <a:ea typeface="Aptos"/>
                 <a:cs typeface="Aptos"/>
               </a:rPr>
-              <a:t>CODE EXAMPLE</a:t>
+              <a:t>FLASK STEP 2</a:t>
             </a:r>
           </a:p>
         </p:txBody>
@@ -34404,7 +34122,7 @@
                 <a:ea typeface="Aptos"/>
                 <a:cs typeface="Aptos"/>
               </a:rPr>
-              <a:t>完整程式碼：p1-flask-bind-mount/solution/app.py (1/2)</a:t>
+              <a:t>用 Python container 掛載專案</a:t>
             </a:r>
           </a:p>
         </p:txBody>
@@ -34451,7 +34169,7 @@
                 <a:ea typeface="Aptos"/>
                 <a:cs typeface="Aptos"/>
               </a:rPr>
-              <a:t>第 2 堂 | 可直接照做的完整檔案</a:t>
+              <a:t>第 2 堂 | -v 仍是主機到 container</a:t>
             </a:r>
           </a:p>
         </p:txBody>
@@ -34549,7 +34267,7 @@
                 <a:ea typeface="Consolas"/>
                 <a:cs typeface="Consolas"/>
               </a:rPr>
-              <a:t>from datetime import datetime, timezone</a:t>
+              <a:t>docker run -it --rm --name flask-dev -p 5000:5000 ^</a:t>
             </a:r>
           </a:p>
           <a:p xmlns:a="http://schemas.openxmlformats.org/drawingml/2006/main">
@@ -34562,7 +34280,7 @@
                 <a:ea typeface="Consolas"/>
                 <a:cs typeface="Consolas"/>
               </a:rPr>
-              <a:t/>
+              <a:t xml:space="preserve">  -v "C:\docker-lab\flask-app:/app" ^</a:t>
             </a:r>
           </a:p>
           <a:p xmlns:a="http://schemas.openxmlformats.org/drawingml/2006/main">
@@ -34575,7 +34293,7 @@
                 <a:ea typeface="Consolas"/>
                 <a:cs typeface="Consolas"/>
               </a:rPr>
-              <a:t>from flask import Flask, jsonify</a:t>
+              <a:t xml:space="preserve">  -w /app python:3.11 bash</a:t>
             </a:r>
           </a:p>
           <a:p xmlns:a="http://schemas.openxmlformats.org/drawingml/2006/main">
@@ -34601,7 +34319,7 @@
                 <a:ea typeface="Consolas"/>
                 <a:cs typeface="Consolas"/>
               </a:rPr>
-              <a:t>app = Flask(__name__)</a:t>
+              <a:t># 主機路徑：C:\docker-lab\flask-app</a:t>
             </a:r>
           </a:p>
           <a:p xmlns:a="http://schemas.openxmlformats.org/drawingml/2006/main">
@@ -34614,215 +34332,7 @@
                 <a:ea typeface="Consolas"/>
                 <a:cs typeface="Consolas"/>
               </a:rPr>
-              <a:t/>
-            </a:r>
-          </a:p>
-          <a:p xmlns:a="http://schemas.openxmlformats.org/drawingml/2006/main">
-            <a:r>
-              <a:rPr sz="1150">
-                <a:solidFill>
-                  <a:srgbClr val="E5E7EB"/>
-                </a:solidFill>
-                <a:latin typeface="Consolas"/>
-                <a:ea typeface="Consolas"/>
-                <a:cs typeface="Consolas"/>
-              </a:rPr>
-              <a:t/>
-            </a:r>
-          </a:p>
-          <a:p xmlns:a="http://schemas.openxmlformats.org/drawingml/2006/main">
-            <a:r>
-              <a:rPr sz="1150">
-                <a:solidFill>
-                  <a:srgbClr val="E5E7EB"/>
-                </a:solidFill>
-                <a:latin typeface="Consolas"/>
-                <a:ea typeface="Consolas"/>
-                <a:cs typeface="Consolas"/>
-              </a:rPr>
-              <a:t>@app.route("/")</a:t>
-            </a:r>
-          </a:p>
-          <a:p xmlns:a="http://schemas.openxmlformats.org/drawingml/2006/main">
-            <a:r>
-              <a:rPr sz="1150">
-                <a:solidFill>
-                  <a:srgbClr val="E5E7EB"/>
-                </a:solidFill>
-                <a:latin typeface="Consolas"/>
-                <a:ea typeface="Consolas"/>
-                <a:cs typeface="Consolas"/>
-              </a:rPr>
-              <a:t>def hello():</a:t>
-            </a:r>
-          </a:p>
-          <a:p xmlns:a="http://schemas.openxmlformats.org/drawingml/2006/main">
-            <a:r>
-              <a:rPr sz="1150">
-                <a:solidFill>
-                  <a:srgbClr val="E5E7EB"/>
-                </a:solidFill>
-                <a:latin typeface="Consolas"/>
-                <a:ea typeface="Consolas"/>
-                <a:cs typeface="Consolas"/>
-              </a:rPr>
-              <a:t xml:space="preserve">    return """</a:t>
-            </a:r>
-          </a:p>
-          <a:p xmlns:a="http://schemas.openxmlformats.org/drawingml/2006/main">
-            <a:r>
-              <a:rPr sz="1150">
-                <a:solidFill>
-                  <a:srgbClr val="E5E7EB"/>
-                </a:solidFill>
-                <a:latin typeface="Consolas"/>
-                <a:ea typeface="Consolas"/>
-                <a:cs typeface="Consolas"/>
-              </a:rPr>
-              <a:t xml:space="preserve">    &lt;h1&gt;Hello Docker!&lt;/h1&gt;</a:t>
-            </a:r>
-          </a:p>
-          <a:p xmlns:a="http://schemas.openxmlformats.org/drawingml/2006/main">
-            <a:r>
-              <a:rPr sz="1150">
-                <a:solidFill>
-                  <a:srgbClr val="E5E7EB"/>
-                </a:solidFill>
-                <a:latin typeface="Consolas"/>
-                <a:ea typeface="Consolas"/>
-                <a:cs typeface="Consolas"/>
-              </a:rPr>
-              <a:t xml:space="preserve">    &lt;p&gt;This Flask app is running inside a Python container.&lt;/p&gt;</a:t>
-            </a:r>
-          </a:p>
-          <a:p xmlns:a="http://schemas.openxmlformats.org/drawingml/2006/main">
-            <a:r>
-              <a:rPr sz="1150">
-                <a:solidFill>
-                  <a:srgbClr val="E5E7EB"/>
-                </a:solidFill>
-                <a:latin typeface="Consolas"/>
-                <a:ea typeface="Consolas"/>
-                <a:cs typeface="Consolas"/>
-              </a:rPr>
-              <a:t xml:space="preserve">    &lt;p&gt;Try &lt;a href="/about"&gt;/about&lt;/a&gt; and &lt;a href="/health"&gt;/health&lt;/a&gt;.&lt;/p&gt;</a:t>
-            </a:r>
-          </a:p>
-          <a:p xmlns:a="http://schemas.openxmlformats.org/drawingml/2006/main">
-            <a:r>
-              <a:rPr sz="1150">
-                <a:solidFill>
-                  <a:srgbClr val="E5E7EB"/>
-                </a:solidFill>
-                <a:latin typeface="Consolas"/>
-                <a:ea typeface="Consolas"/>
-                <a:cs typeface="Consolas"/>
-              </a:rPr>
-              <a:t xml:space="preserve">    """</a:t>
-            </a:r>
-          </a:p>
-          <a:p xmlns:a="http://schemas.openxmlformats.org/drawingml/2006/main">
-            <a:r>
-              <a:rPr sz="1150">
-                <a:solidFill>
-                  <a:srgbClr val="E5E7EB"/>
-                </a:solidFill>
-                <a:latin typeface="Consolas"/>
-                <a:ea typeface="Consolas"/>
-                <a:cs typeface="Consolas"/>
-              </a:rPr>
-              <a:t/>
-            </a:r>
-          </a:p>
-          <a:p xmlns:a="http://schemas.openxmlformats.org/drawingml/2006/main">
-            <a:r>
-              <a:rPr sz="1150">
-                <a:solidFill>
-                  <a:srgbClr val="E5E7EB"/>
-                </a:solidFill>
-                <a:latin typeface="Consolas"/>
-                <a:ea typeface="Consolas"/>
-                <a:cs typeface="Consolas"/>
-              </a:rPr>
-              <a:t/>
-            </a:r>
-          </a:p>
-          <a:p xmlns:a="http://schemas.openxmlformats.org/drawingml/2006/main">
-            <a:r>
-              <a:rPr sz="1150">
-                <a:solidFill>
-                  <a:srgbClr val="E5E7EB"/>
-                </a:solidFill>
-                <a:latin typeface="Consolas"/>
-                <a:ea typeface="Consolas"/>
-                <a:cs typeface="Consolas"/>
-              </a:rPr>
-              <a:t>@app.route("/about")</a:t>
-            </a:r>
-          </a:p>
-          <a:p xmlns:a="http://schemas.openxmlformats.org/drawingml/2006/main">
-            <a:r>
-              <a:rPr sz="1150">
-                <a:solidFill>
-                  <a:srgbClr val="E5E7EB"/>
-                </a:solidFill>
-                <a:latin typeface="Consolas"/>
-                <a:ea typeface="Consolas"/>
-                <a:cs typeface="Consolas"/>
-              </a:rPr>
-              <a:t>def about():</a:t>
-            </a:r>
-          </a:p>
-          <a:p xmlns:a="http://schemas.openxmlformats.org/drawingml/2006/main">
-            <a:r>
-              <a:rPr sz="1150">
-                <a:solidFill>
-                  <a:srgbClr val="E5E7EB"/>
-                </a:solidFill>
-                <a:latin typeface="Consolas"/>
-                <a:ea typeface="Consolas"/>
-                <a:cs typeface="Consolas"/>
-              </a:rPr>
-              <a:t xml:space="preserve">    return "&lt;h1&gt;About&lt;/h1&gt;&lt;p&gt;Bind Mount lets local file changes appear inside the container.&lt;/p&gt;"</a:t>
-            </a:r>
-          </a:p>
-          <a:p xmlns:a="http://schemas.openxmlformats.org/drawingml/2006/main">
-            <a:r>
-              <a:rPr sz="1150">
-                <a:solidFill>
-                  <a:srgbClr val="E5E7EB"/>
-                </a:solidFill>
-                <a:latin typeface="Consolas"/>
-                <a:ea typeface="Consolas"/>
-                <a:cs typeface="Consolas"/>
-              </a:rPr>
-              <a:t/>
-            </a:r>
-          </a:p>
-          <a:p xmlns:a="http://schemas.openxmlformats.org/drawingml/2006/main">
-            <a:r>
-              <a:rPr sz="1150">
-                <a:solidFill>
-                  <a:srgbClr val="E5E7EB"/>
-                </a:solidFill>
-                <a:latin typeface="Consolas"/>
-                <a:ea typeface="Consolas"/>
-                <a:cs typeface="Consolas"/>
-              </a:rPr>
-              <a:t/>
-            </a:r>
-          </a:p>
-          <a:p xmlns:a="http://schemas.openxmlformats.org/drawingml/2006/main">
-            <a:r>
-              <a:rPr sz="1150">
-                <a:solidFill>
-                  <a:srgbClr val="E5E7EB"/>
-                </a:solidFill>
-                <a:latin typeface="Consolas"/>
-                <a:ea typeface="Consolas"/>
-                <a:cs typeface="Consolas"/>
-              </a:rPr>
-              <a:t>@app.route("/health")</a:t>
+              <a:t># container 路徑：/app</a:t>
             </a:r>
           </a:p>
         </p:txBody>
@@ -34869,7 +34379,7 @@
                 <a:ea typeface="Aptos"/>
                 <a:cs typeface="Aptos"/>
               </a:rPr>
-              <a:t>Docker 基礎教學 | 第 2 堂 | 範例程式碼</a:t>
+              <a:t>Docker 基礎教學 | 第 2 堂 | Flask 練習</a:t>
             </a:r>
           </a:p>
         </p:txBody>
@@ -34916,7 +34426,7 @@
                 <a:ea typeface="Aptos"/>
                 <a:cs typeface="Aptos"/>
               </a:rPr>
-              <a:t>CODE</a:t>
+              <a:t>LAB</a:t>
             </a:r>
           </a:p>
         </p:txBody>
@@ -34992,7 +34502,7 @@
                 <a:ea typeface="Aptos"/>
                 <a:cs typeface="Aptos"/>
               </a:rPr>
-              <a:t>CODE EXAMPLE</a:t>
+              <a:t>PARAMETER BREAKDOWN</a:t>
             </a:r>
           </a:p>
         </p:txBody>
@@ -35039,7 +34549,7 @@
                 <a:ea typeface="Aptos"/>
                 <a:cs typeface="Aptos"/>
               </a:rPr>
-              <a:t>完整程式碼：p1-flask-bind-mount/solution/app.py (2/2)</a:t>
+              <a:t>這條 Flask 指令怎麼讀</a:t>
             </a:r>
           </a:p>
         </p:txBody>
@@ -35086,7 +34596,7 @@
                 <a:ea typeface="Aptos"/>
                 <a:cs typeface="Aptos"/>
               </a:rPr>
-              <a:t>第 2 堂 | 可直接照做的完整檔案</a:t>
+              <a:t>第 2 堂 | 先看懂 -p、-v、-w</a:t>
             </a:r>
           </a:p>
         </p:txBody>
@@ -35184,7 +34694,7 @@
                 <a:ea typeface="Consolas"/>
                 <a:cs typeface="Consolas"/>
               </a:rPr>
-              <a:t>def health():</a:t>
+              <a:t>--rm</a:t>
             </a:r>
           </a:p>
           <a:p xmlns:a="http://schemas.openxmlformats.org/drawingml/2006/main">
@@ -35197,7 +34707,7 @@
                 <a:ea typeface="Consolas"/>
                 <a:cs typeface="Consolas"/>
               </a:rPr>
-              <a:t xml:space="preserve">    return jsonify(</a:t>
+              <a:t>exit 後 container 自動刪掉。</a:t>
             </a:r>
           </a:p>
           <a:p xmlns:a="http://schemas.openxmlformats.org/drawingml/2006/main">
@@ -35210,7 +34720,7 @@
                 <a:ea typeface="Consolas"/>
                 <a:cs typeface="Consolas"/>
               </a:rPr>
-              <a:t xml:space="preserve">        status="ok",</a:t>
+              <a:t/>
             </a:r>
           </a:p>
           <a:p xmlns:a="http://schemas.openxmlformats.org/drawingml/2006/main">
@@ -35223,7 +34733,7 @@
                 <a:ea typeface="Consolas"/>
                 <a:cs typeface="Consolas"/>
               </a:rPr>
-              <a:t xml:space="preserve">        service="session-02-flask-volume",</a:t>
+              <a:t>-p 5000:5000</a:t>
             </a:r>
           </a:p>
           <a:p xmlns:a="http://schemas.openxmlformats.org/drawingml/2006/main">
@@ -35236,7 +34746,7 @@
                 <a:ea typeface="Consolas"/>
                 <a:cs typeface="Consolas"/>
               </a:rPr>
-              <a:t xml:space="preserve">        checked_at=datetime.now(timezone.utc).isoformat(),</a:t>
+              <a:t>主機 5000 -&gt; container 5000。</a:t>
             </a:r>
           </a:p>
           <a:p xmlns:a="http://schemas.openxmlformats.org/drawingml/2006/main">
@@ -35249,7 +34759,7 @@
                 <a:ea typeface="Consolas"/>
                 <a:cs typeface="Consolas"/>
               </a:rPr>
-              <a:t xml:space="preserve">    )</a:t>
+              <a:t/>
             </a:r>
           </a:p>
           <a:p xmlns:a="http://schemas.openxmlformats.org/drawingml/2006/main">
@@ -35262,7 +34772,7 @@
                 <a:ea typeface="Consolas"/>
                 <a:cs typeface="Consolas"/>
               </a:rPr>
-              <a:t/>
+              <a:t>-v "C:\docker-lab\flask-app:/app"</a:t>
             </a:r>
           </a:p>
           <a:p xmlns:a="http://schemas.openxmlformats.org/drawingml/2006/main">
@@ -35275,7 +34785,7 @@
                 <a:ea typeface="Consolas"/>
                 <a:cs typeface="Consolas"/>
               </a:rPr>
-              <a:t/>
+              <a:t>主機專案 -&gt; container /app。</a:t>
             </a:r>
           </a:p>
           <a:p xmlns:a="http://schemas.openxmlformats.org/drawingml/2006/main">
@@ -35288,7 +34798,7 @@
                 <a:ea typeface="Consolas"/>
                 <a:cs typeface="Consolas"/>
               </a:rPr>
-              <a:t>if __name__ == "__main__":</a:t>
+              <a:t/>
             </a:r>
           </a:p>
           <a:p xmlns:a="http://schemas.openxmlformats.org/drawingml/2006/main">
@@ -35301,7 +34811,20 @@
                 <a:ea typeface="Consolas"/>
                 <a:cs typeface="Consolas"/>
               </a:rPr>
-              <a:t xml:space="preserve">    app.run(host="0.0.0.0", port=5000)</a:t>
+              <a:t>-w /app</a:t>
+            </a:r>
+          </a:p>
+          <a:p xmlns:a="http://schemas.openxmlformats.org/drawingml/2006/main">
+            <a:r>
+              <a:rPr sz="1150">
+                <a:solidFill>
+                  <a:srgbClr val="E5E7EB"/>
+                </a:solidFill>
+                <a:latin typeface="Consolas"/>
+                <a:ea typeface="Consolas"/>
+                <a:cs typeface="Consolas"/>
+              </a:rPr>
+              <a:t>進 container 後直接在專案目錄。</a:t>
             </a:r>
           </a:p>
         </p:txBody>
@@ -35348,7 +34871,7 @@
                 <a:ea typeface="Aptos"/>
                 <a:cs typeface="Aptos"/>
               </a:rPr>
-              <a:t>Docker 基礎教學 | 第 2 堂 | 範例程式碼</a:t>
+              <a:t>Docker 基礎教學 | 第 2 堂 | Flask 練習</a:t>
             </a:r>
           </a:p>
         </p:txBody>
@@ -35395,7 +34918,7 @@
                 <a:ea typeface="Aptos"/>
                 <a:cs typeface="Aptos"/>
               </a:rPr>
-              <a:t>CODE</a:t>
+              <a:t>LAB</a:t>
             </a:r>
           </a:p>
         </p:txBody>
@@ -35486,7 +35009,7 @@
                 <a:ea typeface="Aptos"/>
                 <a:cs typeface="Aptos"/>
               </a:rPr>
-              <a:t>INTERACTIVE CONTAINER</a:t>
+              <a:t>STEP 2 / IMAGES</a:t>
             </a:r>
           </a:p>
         </p:txBody>
@@ -35548,7 +35071,7 @@
                 <a:ea typeface="Aptos Display"/>
                 <a:cs typeface="Aptos Display"/>
               </a:rPr>
-              <a:t>先用互動式 Python 容器熱身</a:t>
+              <a:t>Step 2：確認本機 image 清單</a:t>
             </a:r>
           </a:p>
         </p:txBody>
@@ -35744,12 +35267,7 @@
                 <a:ea typeface="Consolas"/>
                 <a:cs typeface="Consolas"/>
               </a:rPr>
-              <a:t>docker run -it python:3.11 python</a:t>
-            </a:r>
-          </a:p>
-          <a:p xmlns:a="http://schemas.openxmlformats.org/drawingml/2006/main">
-            <a:r>
-              <a:t/>
+              <a:t>docker images</a:t>
             </a:r>
           </a:p>
           <a:p xmlns:a="http://schemas.openxmlformats.org/drawingml/2006/main">
@@ -35776,7 +35294,7 @@
                 <a:ea typeface="Consolas"/>
                 <a:cs typeface="Consolas"/>
               </a:rPr>
-              <a:t>print("Hello from Docker!")</a:t>
+              <a:t/>
             </a:r>
           </a:p>
           <a:p xmlns:a="http://schemas.openxmlformats.org/drawingml/2006/main">
@@ -35803,7 +35321,7 @@
                 <a:ea typeface="Consolas"/>
                 <a:cs typeface="Consolas"/>
               </a:rPr>
-              <a:t>import sys</a:t>
+              <a:t># 找到 REPOSITORY 是 nginx</a:t>
             </a:r>
           </a:p>
           <a:p xmlns:a="http://schemas.openxmlformats.org/drawingml/2006/main">
@@ -35830,39 +35348,7 @@
                 <a:ea typeface="Consolas"/>
                 <a:cs typeface="Consolas"/>
               </a:rPr>
-              <a:t>print(sys.version)</a:t>
-            </a:r>
-          </a:p>
-          <a:p xmlns:a="http://schemas.openxmlformats.org/drawingml/2006/main">
-            <a:r>
-              <a:t/>
-            </a:r>
-          </a:p>
-          <a:p xmlns:a="http://schemas.openxmlformats.org/drawingml/2006/main">
-            <a:pPr algn="l">
-              <a:lnSpc>
-                <a:spcPct val="104000"/>
-              </a:lnSpc>
-              <a:buNone/>
-              <a:defRPr sz="1650" b="0">
-                <a:solidFill>
-                  <a:srgbClr val="E5E7EB"/>
-                </a:solidFill>
-                <a:latin typeface="Consolas"/>
-                <a:ea typeface="Consolas"/>
-                <a:cs typeface="Consolas"/>
-              </a:defRPr>
-            </a:pPr>
-            <a:r>
-              <a:rPr sz="1650" b="0">
-                <a:solidFill>
-                  <a:srgbClr val="E5E7EB"/>
-                </a:solidFill>
-                <a:latin typeface="Consolas"/>
-                <a:ea typeface="Consolas"/>
-                <a:cs typeface="Consolas"/>
-              </a:rPr>
-              <a:t># 離開：Ctrl + D 或 exit()</a:t>
+              <a:t># TAG 通常是 latest</a:t>
             </a:r>
           </a:p>
         </p:txBody>
@@ -35965,7 +35451,7 @@
                 <a:ea typeface="Aptos Display"/>
                 <a:cs typeface="Aptos Display"/>
               </a:rPr>
-              <a:t>-i</a:t>
+              <a:t>只看 image</a:t>
             </a:r>
           </a:p>
         </p:txBody>
@@ -36027,7 +35513,7 @@
                 <a:ea typeface="Aptos"/>
                 <a:cs typeface="Aptos"/>
               </a:rPr>
-              <a:t>保持標準輸入開啟，讓你可以輸入內容。</a:t>
+              <a:t>這一步只確認本機有哪些 image，還不會建立 container。</a:t>
             </a:r>
           </a:p>
         </p:txBody>
@@ -36130,7 +35616,7 @@
                 <a:ea typeface="Aptos Display"/>
                 <a:cs typeface="Aptos Display"/>
               </a:rPr>
-              <a:t>-t</a:t>
+              <a:t>看欄位</a:t>
             </a:r>
           </a:p>
         </p:txBody>
@@ -36192,7 +35678,7 @@
                 <a:ea typeface="Aptos"/>
                 <a:cs typeface="Aptos"/>
               </a:rPr>
-              <a:t>分配一個終端，輸出和互動看起來像正常 shell。</a:t>
+              <a:t>REPOSITORY、TAG、IMAGE ID、SIZE 都是 image 的資訊。</a:t>
             </a:r>
           </a:p>
         </p:txBody>
@@ -36295,7 +35781,7 @@
                 <a:ea typeface="Aptos Display"/>
                 <a:cs typeface="Aptos Display"/>
               </a:rPr>
-              <a:t>最後的 python</a:t>
+              <a:t>下一步</a:t>
             </a:r>
           </a:p>
         </p:txBody>
@@ -36357,7 +35843,7 @@
                 <a:ea typeface="Aptos"/>
                 <a:cs typeface="Aptos"/>
               </a:rPr>
-              <a:t>進入容器後要執行的指令。</a:t>
+              <a:t>用 nginx image 建立一個叫 nginx-life 的 container。</a:t>
             </a:r>
           </a:p>
         </p:txBody>
@@ -36588,7 +36074,7 @@
                 <a:ea typeface="Aptos"/>
                 <a:cs typeface="Aptos"/>
               </a:rPr>
-              <a:t>CODE EXAMPLE</a:t>
+              <a:t>FLASK STEP 3</a:t>
             </a:r>
           </a:p>
         </p:txBody>
@@ -36635,7 +36121,7 @@
                 <a:ea typeface="Aptos"/>
                 <a:cs typeface="Aptos"/>
               </a:rPr>
-              <a:t>完整程式碼：p1-flask-bind-mount/solution/requirements.txt</a:t>
+              <a:t>安裝套件並啟動 Flask</a:t>
             </a:r>
           </a:p>
         </p:txBody>
@@ -36682,7 +36168,7 @@
                 <a:ea typeface="Aptos"/>
                 <a:cs typeface="Aptos"/>
               </a:rPr>
-              <a:t>第 2 堂 | 可直接照做的完整檔案</a:t>
+              <a:t>第 2 堂 | 在 container 裡執行</a:t>
             </a:r>
           </a:p>
         </p:txBody>
@@ -36780,7 +36266,98 @@
                 <a:ea typeface="Consolas"/>
                 <a:cs typeface="Consolas"/>
               </a:rPr>
-              <a:t>flask==3.0.3</a:t>
+              <a:t>pip install -r requirements.txt</a:t>
+            </a:r>
+          </a:p>
+          <a:p xmlns:a="http://schemas.openxmlformats.org/drawingml/2006/main">
+            <a:r>
+              <a:rPr sz="1150">
+                <a:solidFill>
+                  <a:srgbClr val="E5E7EB"/>
+                </a:solidFill>
+                <a:latin typeface="Consolas"/>
+                <a:ea typeface="Consolas"/>
+                <a:cs typeface="Consolas"/>
+              </a:rPr>
+              <a:t>python app.py</a:t>
+            </a:r>
+          </a:p>
+          <a:p xmlns:a="http://schemas.openxmlformats.org/drawingml/2006/main">
+            <a:r>
+              <a:rPr sz="1150">
+                <a:solidFill>
+                  <a:srgbClr val="E5E7EB"/>
+                </a:solidFill>
+                <a:latin typeface="Consolas"/>
+                <a:ea typeface="Consolas"/>
+                <a:cs typeface="Consolas"/>
+              </a:rPr>
+              <a:t/>
+            </a:r>
+          </a:p>
+          <a:p xmlns:a="http://schemas.openxmlformats.org/drawingml/2006/main">
+            <a:r>
+              <a:rPr sz="1150">
+                <a:solidFill>
+                  <a:srgbClr val="E5E7EB"/>
+                </a:solidFill>
+                <a:latin typeface="Consolas"/>
+                <a:ea typeface="Consolas"/>
+                <a:cs typeface="Consolas"/>
+              </a:rPr>
+              <a:t># browser</a:t>
+            </a:r>
+          </a:p>
+          <a:p xmlns:a="http://schemas.openxmlformats.org/drawingml/2006/main">
+            <a:r>
+              <a:rPr sz="1150">
+                <a:solidFill>
+                  <a:srgbClr val="E5E7EB"/>
+                </a:solidFill>
+                <a:latin typeface="Consolas"/>
+                <a:ea typeface="Consolas"/>
+                <a:cs typeface="Consolas"/>
+              </a:rPr>
+              <a:t>http://localhost:5000</a:t>
+            </a:r>
+          </a:p>
+          <a:p xmlns:a="http://schemas.openxmlformats.org/drawingml/2006/main">
+            <a:r>
+              <a:rPr sz="1150">
+                <a:solidFill>
+                  <a:srgbClr val="E5E7EB"/>
+                </a:solidFill>
+                <a:latin typeface="Consolas"/>
+                <a:ea typeface="Consolas"/>
+                <a:cs typeface="Consolas"/>
+              </a:rPr>
+              <a:t>http://localhost:5000/about</a:t>
+            </a:r>
+          </a:p>
+          <a:p xmlns:a="http://schemas.openxmlformats.org/drawingml/2006/main">
+            <a:r>
+              <a:rPr sz="1150">
+                <a:solidFill>
+                  <a:srgbClr val="E5E7EB"/>
+                </a:solidFill>
+                <a:latin typeface="Consolas"/>
+                <a:ea typeface="Consolas"/>
+                <a:cs typeface="Consolas"/>
+              </a:rPr>
+              <a:t/>
+            </a:r>
+          </a:p>
+          <a:p xmlns:a="http://schemas.openxmlformats.org/drawingml/2006/main">
+            <a:r>
+              <a:rPr sz="1150">
+                <a:solidFill>
+                  <a:srgbClr val="E5E7EB"/>
+                </a:solidFill>
+                <a:latin typeface="Consolas"/>
+                <a:ea typeface="Consolas"/>
+                <a:cs typeface="Consolas"/>
+              </a:rPr>
+              <a:t># app.py 必須用 host="0.0.0.0"</a:t>
             </a:r>
           </a:p>
         </p:txBody>
@@ -36827,7 +36404,7 @@
                 <a:ea typeface="Aptos"/>
                 <a:cs typeface="Aptos"/>
               </a:rPr>
-              <a:t>Docker 基礎教學 | 第 2 堂 | 範例程式碼</a:t>
+              <a:t>Docker 基礎教學 | 第 2 堂 | Flask 練習</a:t>
             </a:r>
           </a:p>
         </p:txBody>
@@ -36874,7 +36451,7 @@
                 <a:ea typeface="Aptos"/>
                 <a:cs typeface="Aptos"/>
               </a:rPr>
-              <a:t>CODE</a:t>
+              <a:t>LAB</a:t>
             </a:r>
           </a:p>
         </p:txBody>
@@ -36950,7 +36527,7 @@
                 <a:ea typeface="Aptos"/>
                 <a:cs typeface="Aptos"/>
               </a:rPr>
-              <a:t>CODE EXAMPLE</a:t>
+              <a:t>FLASK STEP 4</a:t>
             </a:r>
           </a:p>
         </p:txBody>
@@ -36997,7 +36574,7 @@
                 <a:ea typeface="Aptos"/>
                 <a:cs typeface="Aptos"/>
               </a:rPr>
-              <a:t>完整程式碼：c1-readonly-config/config/app.conf</a:t>
+              <a:t>修改主機 app.py，重啟 Flask</a:t>
             </a:r>
           </a:p>
         </p:txBody>
@@ -37044,7 +36621,7 @@
                 <a:ea typeface="Aptos"/>
                 <a:cs typeface="Aptos"/>
               </a:rPr>
-              <a:t>第 2 堂 | 可直接照做的完整檔案</a:t>
+              <a:t>第 2 堂 | 不重新 build image</a:t>
             </a:r>
           </a:p>
         </p:txBody>
@@ -37142,7 +36719,7 @@
                 <a:ea typeface="Consolas"/>
                 <a:cs typeface="Consolas"/>
               </a:rPr>
-              <a:t>APP_NAME=docker-course-demo</a:t>
+              <a:t>notepad C:\docker-lab\flask-app\app.py</a:t>
             </a:r>
           </a:p>
           <a:p xmlns:a="http://schemas.openxmlformats.org/drawingml/2006/main">
@@ -37155,7 +36732,7 @@
                 <a:ea typeface="Consolas"/>
                 <a:cs typeface="Consolas"/>
               </a:rPr>
-              <a:t>APP_ENV=development</a:t>
+              <a:t/>
             </a:r>
           </a:p>
           <a:p xmlns:a="http://schemas.openxmlformats.org/drawingml/2006/main">
@@ -37168,7 +36745,98 @@
                 <a:ea typeface="Consolas"/>
                 <a:cs typeface="Consolas"/>
               </a:rPr>
-              <a:t>LOG_LEVEL=info</a:t>
+              <a:t># 回到 Flask 終端機</a:t>
+            </a:r>
+          </a:p>
+          <a:p xmlns:a="http://schemas.openxmlformats.org/drawingml/2006/main">
+            <a:r>
+              <a:rPr sz="1150">
+                <a:solidFill>
+                  <a:srgbClr val="E5E7EB"/>
+                </a:solidFill>
+                <a:latin typeface="Consolas"/>
+                <a:ea typeface="Consolas"/>
+                <a:cs typeface="Consolas"/>
+              </a:rPr>
+              <a:t>Ctrl + C</a:t>
+            </a:r>
+          </a:p>
+          <a:p xmlns:a="http://schemas.openxmlformats.org/drawingml/2006/main">
+            <a:r>
+              <a:rPr sz="1150">
+                <a:solidFill>
+                  <a:srgbClr val="E5E7EB"/>
+                </a:solidFill>
+                <a:latin typeface="Consolas"/>
+                <a:ea typeface="Consolas"/>
+                <a:cs typeface="Consolas"/>
+              </a:rPr>
+              <a:t>python app.py</a:t>
+            </a:r>
+          </a:p>
+          <a:p xmlns:a="http://schemas.openxmlformats.org/drawingml/2006/main">
+            <a:r>
+              <a:rPr sz="1150">
+                <a:solidFill>
+                  <a:srgbClr val="E5E7EB"/>
+                </a:solidFill>
+                <a:latin typeface="Consolas"/>
+                <a:ea typeface="Consolas"/>
+                <a:cs typeface="Consolas"/>
+              </a:rPr>
+              <a:t/>
+            </a:r>
+          </a:p>
+          <a:p xmlns:a="http://schemas.openxmlformats.org/drawingml/2006/main">
+            <a:r>
+              <a:rPr sz="1150">
+                <a:solidFill>
+                  <a:srgbClr val="E5E7EB"/>
+                </a:solidFill>
+                <a:latin typeface="Consolas"/>
+                <a:ea typeface="Consolas"/>
+                <a:cs typeface="Consolas"/>
+              </a:rPr>
+              <a:t># refresh</a:t>
+            </a:r>
+          </a:p>
+          <a:p xmlns:a="http://schemas.openxmlformats.org/drawingml/2006/main">
+            <a:r>
+              <a:rPr sz="1150">
+                <a:solidFill>
+                  <a:srgbClr val="E5E7EB"/>
+                </a:solidFill>
+                <a:latin typeface="Consolas"/>
+                <a:ea typeface="Consolas"/>
+                <a:cs typeface="Consolas"/>
+              </a:rPr>
+              <a:t>http://localhost:5000</a:t>
+            </a:r>
+          </a:p>
+          <a:p xmlns:a="http://schemas.openxmlformats.org/drawingml/2006/main">
+            <a:r>
+              <a:rPr sz="1150">
+                <a:solidFill>
+                  <a:srgbClr val="E5E7EB"/>
+                </a:solidFill>
+                <a:latin typeface="Consolas"/>
+                <a:ea typeface="Consolas"/>
+                <a:cs typeface="Consolas"/>
+              </a:rPr>
+              <a:t/>
+            </a:r>
+          </a:p>
+          <a:p xmlns:a="http://schemas.openxmlformats.org/drawingml/2006/main">
+            <a:r>
+              <a:rPr sz="1150">
+                <a:solidFill>
+                  <a:srgbClr val="E5E7EB"/>
+                </a:solidFill>
+                <a:latin typeface="Consolas"/>
+                <a:ea typeface="Consolas"/>
+                <a:cs typeface="Consolas"/>
+              </a:rPr>
+              <a:t># 變的是主機檔案；container 讀同一份檔案。</a:t>
             </a:r>
           </a:p>
         </p:txBody>
@@ -37215,7 +36883,7 @@
                 <a:ea typeface="Aptos"/>
                 <a:cs typeface="Aptos"/>
               </a:rPr>
-              <a:t>Docker 基礎教學 | 第 2 堂 | 範例程式碼</a:t>
+              <a:t>Docker 基礎教學 | 第 2 堂 | Flask 練習</a:t>
             </a:r>
           </a:p>
         </p:txBody>
@@ -37262,7 +36930,7 @@
                 <a:ea typeface="Aptos"/>
                 <a:cs typeface="Aptos"/>
               </a:rPr>
-              <a:t>CODE</a:t>
+              <a:t>LAB</a:t>
             </a:r>
           </a:p>
         </p:txBody>
@@ -37338,7 +37006,7 @@
                 <a:ea typeface="Aptos"/>
                 <a:cs typeface="Aptos"/>
               </a:rPr>
-              <a:t>CODE EXAMPLE</a:t>
+              <a:t>COMPARE</a:t>
             </a:r>
           </a:p>
         </p:txBody>
@@ -37385,7 +37053,7 @@
                 <a:ea typeface="Aptos"/>
                 <a:cs typeface="Aptos"/>
               </a:rPr>
-              <a:t>完整程式碼：c2-two-nginx/site-a/index.html</a:t>
+              <a:t>nginx 與 Flask 的開發差異</a:t>
             </a:r>
           </a:p>
         </p:txBody>
@@ -37432,7 +37100,7 @@
                 <a:ea typeface="Aptos"/>
                 <a:cs typeface="Aptos"/>
               </a:rPr>
-              <a:t>第 2 堂 | 可直接照做的完整檔案</a:t>
+              <a:t>第 2 堂 | 同一個 Bind Mount，不同開發行為</a:t>
             </a:r>
           </a:p>
         </p:txBody>
@@ -37530,7 +37198,7 @@
                 <a:ea typeface="Consolas"/>
                 <a:cs typeface="Consolas"/>
               </a:rPr>
-              <a:t>&lt;!doctype html&gt;</a:t>
+              <a:t>nginx</a:t>
             </a:r>
           </a:p>
           <a:p xmlns:a="http://schemas.openxmlformats.org/drawingml/2006/main">
@@ -37543,7 +37211,7 @@
                 <a:ea typeface="Consolas"/>
                 <a:cs typeface="Consolas"/>
               </a:rPr>
-              <a:t>&lt;html lang="zh-Hant"&gt;</a:t>
+              <a:t>掛 HTML 到 /usr/share/nginx/html</a:t>
             </a:r>
           </a:p>
           <a:p xmlns:a="http://schemas.openxmlformats.org/drawingml/2006/main">
@@ -37556,7 +37224,7 @@
                 <a:ea typeface="Consolas"/>
                 <a:cs typeface="Consolas"/>
               </a:rPr>
-              <a:t>&lt;head&gt;</a:t>
+              <a:t>改檔後重新整理通常就變</a:t>
             </a:r>
           </a:p>
           <a:p xmlns:a="http://schemas.openxmlformats.org/drawingml/2006/main">
@@ -37569,7 +37237,7 @@
                 <a:ea typeface="Consolas"/>
                 <a:cs typeface="Consolas"/>
               </a:rPr>
-              <a:t xml:space="preserve">  &lt;meta charset="utf-8"&gt;</a:t>
+              <a:t/>
             </a:r>
           </a:p>
           <a:p xmlns:a="http://schemas.openxmlformats.org/drawingml/2006/main">
@@ -37582,7 +37250,7 @@
                 <a:ea typeface="Consolas"/>
                 <a:cs typeface="Consolas"/>
               </a:rPr>
-              <a:t xml:space="preserve">  &lt;title&gt;Nginx A&lt;/title&gt;</a:t>
+              <a:t>Flask</a:t>
             </a:r>
           </a:p>
           <a:p xmlns:a="http://schemas.openxmlformats.org/drawingml/2006/main">
@@ -37595,7 +37263,7 @@
                 <a:ea typeface="Consolas"/>
                 <a:cs typeface="Consolas"/>
               </a:rPr>
-              <a:t xml:space="preserve">  &lt;style&gt;</a:t>
+              <a:t>掛 Python 專案到 /app</a:t>
             </a:r>
           </a:p>
           <a:p xmlns:a="http://schemas.openxmlformats.org/drawingml/2006/main">
@@ -37608,7 +37276,7 @@
                 <a:ea typeface="Consolas"/>
                 <a:cs typeface="Consolas"/>
               </a:rPr>
-              <a:t xml:space="preserve">    body { font-family: Arial, sans-serif; margin: 64px auto; max-width: 720px; color: #111827; }</a:t>
+              <a:t>改 app.py 後重啟 Flask process</a:t>
             </a:r>
           </a:p>
           <a:p xmlns:a="http://schemas.openxmlformats.org/drawingml/2006/main">
@@ -37621,7 +37289,7 @@
                 <a:ea typeface="Consolas"/>
                 <a:cs typeface="Consolas"/>
               </a:rPr>
-              <a:t xml:space="preserve">    h1 { color: #0b5cad; }</a:t>
+              <a:t/>
             </a:r>
           </a:p>
           <a:p xmlns:a="http://schemas.openxmlformats.org/drawingml/2006/main">
@@ -37634,7 +37302,7 @@
                 <a:ea typeface="Consolas"/>
                 <a:cs typeface="Consolas"/>
               </a:rPr>
-              <a:t xml:space="preserve">  &lt;/style&gt;</a:t>
+              <a:t>共同點</a:t>
             </a:r>
           </a:p>
           <a:p xmlns:a="http://schemas.openxmlformats.org/drawingml/2006/main">
@@ -37647,72 +37315,7 @@
                 <a:ea typeface="Consolas"/>
                 <a:cs typeface="Consolas"/>
               </a:rPr>
-              <a:t>&lt;/head&gt;</a:t>
-            </a:r>
-          </a:p>
-          <a:p xmlns:a="http://schemas.openxmlformats.org/drawingml/2006/main">
-            <a:r>
-              <a:rPr sz="1150">
-                <a:solidFill>
-                  <a:srgbClr val="E5E7EB"/>
-                </a:solidFill>
-                <a:latin typeface="Consolas"/>
-                <a:ea typeface="Consolas"/>
-                <a:cs typeface="Consolas"/>
-              </a:rPr>
-              <a:t>&lt;body&gt;</a:t>
-            </a:r>
-          </a:p>
-          <a:p xmlns:a="http://schemas.openxmlformats.org/drawingml/2006/main">
-            <a:r>
-              <a:rPr sz="1150">
-                <a:solidFill>
-                  <a:srgbClr val="E5E7EB"/>
-                </a:solidFill>
-                <a:latin typeface="Consolas"/>
-                <a:ea typeface="Consolas"/>
-                <a:cs typeface="Consolas"/>
-              </a:rPr>
-              <a:t xml:space="preserve">  &lt;h1&gt;Nginx A&lt;/h1&gt;</a:t>
-            </a:r>
-          </a:p>
-          <a:p xmlns:a="http://schemas.openxmlformats.org/drawingml/2006/main">
-            <a:r>
-              <a:rPr sz="1150">
-                <a:solidFill>
-                  <a:srgbClr val="E5E7EB"/>
-                </a:solidFill>
-                <a:latin typeface="Consolas"/>
-                <a:ea typeface="Consolas"/>
-                <a:cs typeface="Consolas"/>
-              </a:rPr>
-              <a:t xml:space="preserve">  &lt;p&gt;這是第一個 Nginx 容器，host port 是 8082。&lt;/p&gt;</a:t>
-            </a:r>
-          </a:p>
-          <a:p xmlns:a="http://schemas.openxmlformats.org/drawingml/2006/main">
-            <a:r>
-              <a:rPr sz="1150">
-                <a:solidFill>
-                  <a:srgbClr val="E5E7EB"/>
-                </a:solidFill>
-                <a:latin typeface="Consolas"/>
-                <a:ea typeface="Consolas"/>
-                <a:cs typeface="Consolas"/>
-              </a:rPr>
-              <a:t>&lt;/body&gt;</a:t>
-            </a:r>
-          </a:p>
-          <a:p xmlns:a="http://schemas.openxmlformats.org/drawingml/2006/main">
-            <a:r>
-              <a:rPr sz="1150">
-                <a:solidFill>
-                  <a:srgbClr val="E5E7EB"/>
-                </a:solidFill>
-                <a:latin typeface="Consolas"/>
-                <a:ea typeface="Consolas"/>
-                <a:cs typeface="Consolas"/>
-              </a:rPr>
-              <a:t>&lt;/html&gt;</a:t>
+              <a:t>container 讀到的是主機同一份檔案</a:t>
             </a:r>
           </a:p>
         </p:txBody>
@@ -37759,7 +37362,7 @@
                 <a:ea typeface="Aptos"/>
                 <a:cs typeface="Aptos"/>
               </a:rPr>
-              <a:t>Docker 基礎教學 | 第 2 堂 | 範例程式碼</a:t>
+              <a:t>Docker 基礎教學 | 第 2 堂 | Flask 練習</a:t>
             </a:r>
           </a:p>
         </p:txBody>
@@ -37806,7 +37409,7 @@
                 <a:ea typeface="Aptos"/>
                 <a:cs typeface="Aptos"/>
               </a:rPr>
-              <a:t>CODE</a:t>
+              <a:t>LAB</a:t>
             </a:r>
           </a:p>
         </p:txBody>
@@ -37882,7 +37485,7 @@
                 <a:ea typeface="Aptos"/>
                 <a:cs typeface="Aptos"/>
               </a:rPr>
-              <a:t>CODE EXAMPLE</a:t>
+              <a:t>WRAP-UP</a:t>
             </a:r>
           </a:p>
         </p:txBody>
@@ -37929,7 +37532,7 @@
                 <a:ea typeface="Aptos"/>
                 <a:cs typeface="Aptos"/>
               </a:rPr>
-              <a:t>完整程式碼：c2-two-nginx/site-b/index.html</a:t>
+              <a:t>第二堂完成檢核</a:t>
             </a:r>
           </a:p>
         </p:txBody>
@@ -37976,7 +37579,7 @@
                 <a:ea typeface="Aptos"/>
                 <a:cs typeface="Aptos"/>
               </a:rPr>
-              <a:t>第 2 堂 | 可直接照做的完整檔案</a:t>
+              <a:t>第 2 堂 | 說得出來，才算真的會用</a:t>
             </a:r>
           </a:p>
         </p:txBody>
@@ -38074,7 +37677,7 @@
                 <a:ea typeface="Consolas"/>
                 <a:cs typeface="Consolas"/>
               </a:rPr>
-              <a:t>&lt;!doctype html&gt;</a:t>
+              <a:t>你要能說出：</a:t>
             </a:r>
           </a:p>
           <a:p xmlns:a="http://schemas.openxmlformats.org/drawingml/2006/main">
@@ -38087,7 +37690,7 @@
                 <a:ea typeface="Consolas"/>
                 <a:cs typeface="Consolas"/>
               </a:rPr>
-              <a:t>&lt;html lang="zh-Hant"&gt;</a:t>
+              <a:t/>
             </a:r>
           </a:p>
           <a:p xmlns:a="http://schemas.openxmlformats.org/drawingml/2006/main">
@@ -38100,7 +37703,7 @@
                 <a:ea typeface="Consolas"/>
                 <a:cs typeface="Consolas"/>
               </a:rPr>
-              <a:t>&lt;head&gt;</a:t>
+              <a:t>1. container 可以刪掉重建</a:t>
             </a:r>
           </a:p>
           <a:p xmlns:a="http://schemas.openxmlformats.org/drawingml/2006/main">
@@ -38113,7 +37716,7 @@
                 <a:ea typeface="Consolas"/>
                 <a:cs typeface="Consolas"/>
               </a:rPr>
-              <a:t xml:space="preserve">  &lt;meta charset="utf-8"&gt;</a:t>
+              <a:t>2. volume 讓資料留在 container 外</a:t>
             </a:r>
           </a:p>
           <a:p xmlns:a="http://schemas.openxmlformats.org/drawingml/2006/main">
@@ -38126,7 +37729,7 @@
                 <a:ea typeface="Consolas"/>
                 <a:cs typeface="Consolas"/>
               </a:rPr>
-              <a:t xml:space="preserve">  &lt;title&gt;Nginx B&lt;/title&gt;</a:t>
+              <a:t>3. bind mount 左邊是主機，右邊是 container</a:t>
             </a:r>
           </a:p>
           <a:p xmlns:a="http://schemas.openxmlformats.org/drawingml/2006/main">
@@ -38139,7 +37742,7 @@
                 <a:ea typeface="Consolas"/>
                 <a:cs typeface="Consolas"/>
               </a:rPr>
-              <a:t xml:space="preserve">  &lt;style&gt;</a:t>
+              <a:t>4. named volume 由 Docker 管理資料位置</a:t>
             </a:r>
           </a:p>
           <a:p xmlns:a="http://schemas.openxmlformats.org/drawingml/2006/main">
@@ -38152,7 +37755,7 @@
                 <a:ea typeface="Consolas"/>
                 <a:cs typeface="Consolas"/>
               </a:rPr>
-              <a:t xml:space="preserve">    body { font-family: Arial, sans-serif; margin: 64px auto; max-width: 720px; color: #111827; }</a:t>
+              <a:t>5. Flask 用 -v 掛程式碼、用 -p 開 port、用 -w 設工作目錄</a:t>
             </a:r>
           </a:p>
           <a:p xmlns:a="http://schemas.openxmlformats.org/drawingml/2006/main">
@@ -38165,7 +37768,7 @@
                 <a:ea typeface="Consolas"/>
                 <a:cs typeface="Consolas"/>
               </a:rPr>
-              <a:t xml:space="preserve">    h1 { color: #047857; }</a:t>
+              <a:t/>
             </a:r>
           </a:p>
           <a:p xmlns:a="http://schemas.openxmlformats.org/drawingml/2006/main">
@@ -38178,7 +37781,7 @@
                 <a:ea typeface="Consolas"/>
                 <a:cs typeface="Consolas"/>
               </a:rPr>
-              <a:t xml:space="preserve">  &lt;/style&gt;</a:t>
+              <a:t>清理：</a:t>
             </a:r>
           </a:p>
           <a:p xmlns:a="http://schemas.openxmlformats.org/drawingml/2006/main">
@@ -38191,7 +37794,7 @@
                 <a:ea typeface="Consolas"/>
                 <a:cs typeface="Consolas"/>
               </a:rPr>
-              <a:t>&lt;/head&gt;</a:t>
+              <a:t>docker rm -f nginx-life nginx-bind nginx-readonly nginx-volume</a:t>
             </a:r>
           </a:p>
           <a:p xmlns:a="http://schemas.openxmlformats.org/drawingml/2006/main">
@@ -38204,59 +37807,7 @@
                 <a:ea typeface="Consolas"/>
                 <a:cs typeface="Consolas"/>
               </a:rPr>
-              <a:t>&lt;body&gt;</a:t>
-            </a:r>
-          </a:p>
-          <a:p xmlns:a="http://schemas.openxmlformats.org/drawingml/2006/main">
-            <a:r>
-              <a:rPr sz="1150">
-                <a:solidFill>
-                  <a:srgbClr val="E5E7EB"/>
-                </a:solidFill>
-                <a:latin typeface="Consolas"/>
-                <a:ea typeface="Consolas"/>
-                <a:cs typeface="Consolas"/>
-              </a:rPr>
-              <a:t xml:space="preserve">  &lt;h1&gt;Nginx B&lt;/h1&gt;</a:t>
-            </a:r>
-          </a:p>
-          <a:p xmlns:a="http://schemas.openxmlformats.org/drawingml/2006/main">
-            <a:r>
-              <a:rPr sz="1150">
-                <a:solidFill>
-                  <a:srgbClr val="E5E7EB"/>
-                </a:solidFill>
-                <a:latin typeface="Consolas"/>
-                <a:ea typeface="Consolas"/>
-                <a:cs typeface="Consolas"/>
-              </a:rPr>
-              <a:t xml:space="preserve">  &lt;p&gt;這是第二個 Nginx 容器，host port 是 8083。&lt;/p&gt;</a:t>
-            </a:r>
-          </a:p>
-          <a:p xmlns:a="http://schemas.openxmlformats.org/drawingml/2006/main">
-            <a:r>
-              <a:rPr sz="1150">
-                <a:solidFill>
-                  <a:srgbClr val="E5E7EB"/>
-                </a:solidFill>
-                <a:latin typeface="Consolas"/>
-                <a:ea typeface="Consolas"/>
-                <a:cs typeface="Consolas"/>
-              </a:rPr>
-              <a:t>&lt;/body&gt;</a:t>
-            </a:r>
-          </a:p>
-          <a:p xmlns:a="http://schemas.openxmlformats.org/drawingml/2006/main">
-            <a:r>
-              <a:rPr sz="1150">
-                <a:solidFill>
-                  <a:srgbClr val="E5E7EB"/>
-                </a:solidFill>
-                <a:latin typeface="Consolas"/>
-                <a:ea typeface="Consolas"/>
-                <a:cs typeface="Consolas"/>
-              </a:rPr>
-              <a:t>&lt;/html&gt;</a:t>
+              <a:t>docker volume rm nginx-html</a:t>
             </a:r>
           </a:p>
         </p:txBody>
@@ -38303,7 +37854,7 @@
                 <a:ea typeface="Aptos"/>
                 <a:cs typeface="Aptos"/>
               </a:rPr>
-              <a:t>Docker 基礎教學 | 第 2 堂 | 範例程式碼</a:t>
+              <a:t>Docker 基礎教學 | 第 2 堂 | 完成檢核</a:t>
             </a:r>
           </a:p>
         </p:txBody>
@@ -38350,7 +37901,7 @@
                 <a:ea typeface="Aptos"/>
                 <a:cs typeface="Aptos"/>
               </a:rPr>
-              <a:t>CODE</a:t>
+              <a:t>WRAP</a:t>
             </a:r>
           </a:p>
         </p:txBody>
@@ -38441,7 +37992,7 @@
                 <a:ea typeface="Aptos"/>
                 <a:cs typeface="Aptos"/>
               </a:rPr>
-              <a:t>EXERCISE Q1</a:t>
+              <a:t>STEP 3 / RUN</a:t>
             </a:r>
           </a:p>
         </p:txBody>
@@ -38503,7 +38054,7 @@
                 <a:ea typeface="Aptos Display"/>
                 <a:cs typeface="Aptos Display"/>
               </a:rPr>
-              <a:t>概念快問 1：-d 和 -it 何時使用？</a:t>
+              <a:t>Step 3：用 nginx image 啟動網站</a:t>
             </a:r>
           </a:p>
         </p:txBody>
@@ -38606,7 +38157,7 @@
                 <a:ea typeface="Aptos Display"/>
                 <a:cs typeface="Aptos Display"/>
               </a:rPr>
-              <a:t>-it</a:t>
+              <a:t>指令</a:t>
             </a:r>
           </a:p>
         </p:txBody>
@@ -38668,7 +38219,7 @@
                 <a:ea typeface="Aptos"/>
                 <a:cs typeface="Aptos"/>
               </a:rPr>
-              <a:t>interactive + tty。</a:t>
+              <a:t>docker run -d --name nginx-life \</a:t>
             </a:r>
           </a:p>
           <a:p xmlns:a="http://schemas.openxmlformats.org/drawingml/2006/main">
@@ -38695,7 +38246,7 @@
                 <a:ea typeface="Aptos"/>
                 <a:cs typeface="Aptos"/>
               </a:rPr>
-              <a:t>適合進容器互動、測試指令、教學示範。</a:t>
+              <a:t xml:space="preserve">  -p 9090:80 nginx</a:t>
             </a:r>
           </a:p>
         </p:txBody>
@@ -38798,7 +38349,7 @@
                 <a:ea typeface="Aptos Display"/>
                 <a:cs typeface="Aptos Display"/>
               </a:rPr>
-              <a:t>-d</a:t>
+              <a:t>瀏覽器</a:t>
             </a:r>
           </a:p>
         </p:txBody>
@@ -38860,34 +38411,7 @@
                 <a:ea typeface="Aptos"/>
                 <a:cs typeface="Aptos"/>
               </a:rPr>
-              <a:t>detach 背景執行。</a:t>
-            </a:r>
-          </a:p>
-          <a:p xmlns:a="http://schemas.openxmlformats.org/drawingml/2006/main">
-            <a:pPr algn="l">
-              <a:lnSpc>
-                <a:spcPct val="106000"/>
-              </a:lnSpc>
-              <a:buNone/>
-              <a:defRPr sz="1800" b="0">
-                <a:solidFill>
-                  <a:srgbClr val="E2E8F0"/>
-                </a:solidFill>
-                <a:latin typeface="Aptos"/>
-                <a:ea typeface="Aptos"/>
-                <a:cs typeface="Aptos"/>
-              </a:defRPr>
-            </a:pPr>
-            <a:r>
-              <a:rPr sz="1800" b="0">
-                <a:solidFill>
-                  <a:srgbClr val="E2E8F0"/>
-                </a:solidFill>
-                <a:latin typeface="Aptos"/>
-                <a:ea typeface="Aptos"/>
-                <a:cs typeface="Aptos"/>
-              </a:rPr>
-              <a:t>適合 Web 伺服器、資料庫等長時間服務。</a:t>
+              <a:t>打開 http://localhost:9090，應該會看到 nginx 歡迎頁。</a:t>
             </a:r>
           </a:p>
         </p:txBody>
@@ -38949,7 +38473,7 @@
                 <a:ea typeface="Aptos"/>
                 <a:cs typeface="Aptos"/>
               </a:rPr>
-              <a:t>回答目標：看到指令時能判斷它是互動測試，還是背景服務。</a:t>
+              <a:t>這一步只做 run：-d 背景執行、--name 命名、-p 做 port 對應。</a:t>
             </a:r>
           </a:p>
         </p:txBody>
@@ -39195,7 +38719,7 @@
                 <a:ea typeface="Aptos"/>
                 <a:cs typeface="Aptos"/>
               </a:rPr>
-              <a:t>NAMED CONTAINER</a:t>
+              <a:t>STEP 4 / PS</a:t>
             </a:r>
           </a:p>
         </p:txBody>
@@ -39257,7 +38781,7 @@
                 <a:ea typeface="Aptos Display"/>
                 <a:cs typeface="Aptos Display"/>
               </a:rPr>
-              <a:t>先幫容器取名，後面才能穩定操作</a:t>
+              <a:t>Step 4：用 docker ps 檢查正在跑的 container</a:t>
             </a:r>
           </a:p>
         </p:txBody>
@@ -39453,7 +38977,7 @@
                 <a:ea typeface="Consolas"/>
                 <a:cs typeface="Consolas"/>
               </a:rPr>
-              <a:t>docker run -d --name nginx-life \</a:t>
+              <a:t>docker ps</a:t>
             </a:r>
           </a:p>
           <a:p xmlns:a="http://schemas.openxmlformats.org/drawingml/2006/main">
@@ -39480,7 +39004,7 @@
                 <a:ea typeface="Consolas"/>
                 <a:cs typeface="Consolas"/>
               </a:rPr>
-              <a:t xml:space="preserve">  -p 9090:80 nginx</a:t>
+              <a:t/>
             </a:r>
           </a:p>
           <a:p xmlns:a="http://schemas.openxmlformats.org/drawingml/2006/main">
@@ -39507,7 +39031,7 @@
                 <a:ea typeface="Consolas"/>
                 <a:cs typeface="Consolas"/>
               </a:rPr>
-              <a:t># nginx 是 image</a:t>
+              <a:t># 確認 STATUS 是 Up</a:t>
             </a:r>
           </a:p>
           <a:p xmlns:a="http://schemas.openxmlformats.org/drawingml/2006/main">
@@ -39534,7 +39058,7 @@
                 <a:ea typeface="Consolas"/>
                 <a:cs typeface="Consolas"/>
               </a:rPr>
-              <a:t># nginx-life 是容器名稱</a:t>
+              <a:t># 確認 PORTS 有 0.0.0.0:9090-&gt;80/tcp</a:t>
             </a:r>
           </a:p>
           <a:p xmlns:a="http://schemas.openxmlformats.org/drawingml/2006/main">
@@ -39561,7 +39085,7 @@
                 <a:ea typeface="Consolas"/>
                 <a:cs typeface="Consolas"/>
               </a:rPr>
-              <a:t/>
+              <a:t># 確認 NAMES 是 nginx-life</a:t>
             </a:r>
           </a:p>
         </p:txBody>
@@ -39664,7 +39188,7 @@
                 <a:ea typeface="Aptos Display"/>
                 <a:cs typeface="Aptos Display"/>
               </a:rPr>
-              <a:t>-d</a:t>
+              <a:t>STATUS</a:t>
             </a:r>
           </a:p>
         </p:txBody>
@@ -39726,7 +39250,7 @@
                 <a:ea typeface="Aptos"/>
                 <a:cs typeface="Aptos"/>
               </a:rPr>
-              <a:t>背景執行，適合長時間跑的 Web 服務。</a:t>
+              <a:t>Up 代表 container 正在執行；Exited 代表已停止。</a:t>
             </a:r>
           </a:p>
         </p:txBody>
@@ -39829,7 +39353,7 @@
                 <a:ea typeface="Aptos Display"/>
                 <a:cs typeface="Aptos Display"/>
               </a:rPr>
-              <a:t>--name nginx-life</a:t>
+              <a:t>PORTS</a:t>
             </a:r>
           </a:p>
         </p:txBody>
@@ -39891,7 +39415,7 @@
                 <a:ea typeface="Aptos"/>
                 <a:cs typeface="Aptos"/>
               </a:rPr>
-              <a:t>後續可以用名字 stop、start、restart、rm，不必記容器 ID。</a:t>
+              <a:t>9090-&gt;80 代表瀏覽器連本機 9090，會被轉進 nginx 的 80。</a:t>
             </a:r>
           </a:p>
         </p:txBody>
@@ -40137,7 +39661,7 @@
                 <a:ea typeface="Aptos"/>
                 <a:cs typeface="Aptos"/>
               </a:rPr>
-              <a:t>CONTAINER STATUS</a:t>
+              <a:t>STEP 5 / EXEC</a:t>
             </a:r>
           </a:p>
         </p:txBody>
@@ -40199,7 +39723,7 @@
                 <a:ea typeface="Aptos Display"/>
                 <a:cs typeface="Aptos Display"/>
               </a:rPr>
-              <a:t>docker ps 和 docker ps -a 差在哪裡</a:t>
+              <a:t>Step 5：進入 nginx container 看首頁檔案</a:t>
             </a:r>
           </a:p>
         </p:txBody>
@@ -40302,7 +39826,7 @@
                 <a:ea typeface="Aptos Display"/>
                 <a:cs typeface="Aptos Display"/>
               </a:rPr>
-              <a:t>docker ps</a:t>
+              <a:t>先進 shell</a:t>
             </a:r>
           </a:p>
         </p:txBody>
@@ -40364,7 +39888,7 @@
                 <a:ea typeface="Aptos"/>
                 <a:cs typeface="Aptos"/>
               </a:rPr>
-              <a:t>只看正在執行中的容器。適合確認服務現在是不是 Up。</a:t>
+              <a:t>docker exec -it nginx-life sh</a:t>
             </a:r>
           </a:p>
         </p:txBody>
@@ -40467,7 +39991,7 @@
                 <a:ea typeface="Aptos Display"/>
                 <a:cs typeface="Aptos Display"/>
               </a:rPr>
-              <a:t>docker ps -a</a:t>
+              <a:t>進入後</a:t>
             </a:r>
           </a:p>
         </p:txBody>
@@ -40529,7 +40053,61 @@
                 <a:ea typeface="Aptos"/>
                 <a:cs typeface="Aptos"/>
               </a:rPr>
-              <a:t>查看所有容器，包含已停止、Exited、之前忘記清掉的容器。</a:t>
+              <a:t>cd /usr/share/nginx/html</a:t>
+            </a:r>
+          </a:p>
+          <a:p xmlns:a="http://schemas.openxmlformats.org/drawingml/2006/main">
+            <a:pPr algn="l">
+              <a:lnSpc>
+                <a:spcPct val="106000"/>
+              </a:lnSpc>
+              <a:buNone/>
+              <a:defRPr sz="1650" b="0">
+                <a:solidFill>
+                  <a:srgbClr val="111827"/>
+                </a:solidFill>
+                <a:latin typeface="Aptos"/>
+                <a:ea typeface="Aptos"/>
+                <a:cs typeface="Aptos"/>
+              </a:defRPr>
+            </a:pPr>
+            <a:r>
+              <a:rPr sz="1650" b="0">
+                <a:solidFill>
+                  <a:srgbClr val="111827"/>
+                </a:solidFill>
+                <a:latin typeface="Aptos"/>
+                <a:ea typeface="Aptos"/>
+                <a:cs typeface="Aptos"/>
+              </a:rPr>
+              <a:t>ls</a:t>
+            </a:r>
+          </a:p>
+          <a:p xmlns:a="http://schemas.openxmlformats.org/drawingml/2006/main">
+            <a:pPr algn="l">
+              <a:lnSpc>
+                <a:spcPct val="106000"/>
+              </a:lnSpc>
+              <a:buNone/>
+              <a:defRPr sz="1650" b="0">
+                <a:solidFill>
+                  <a:srgbClr val="111827"/>
+                </a:solidFill>
+                <a:latin typeface="Aptos"/>
+                <a:ea typeface="Aptos"/>
+                <a:cs typeface="Aptos"/>
+              </a:defRPr>
+            </a:pPr>
+            <a:r>
+              <a:rPr sz="1650" b="0">
+                <a:solidFill>
+                  <a:srgbClr val="111827"/>
+                </a:solidFill>
+                <a:latin typeface="Aptos"/>
+                <a:ea typeface="Aptos"/>
+                <a:cs typeface="Aptos"/>
+              </a:rPr>
+              <a:t>cat index.html</a:t>
             </a:r>
           </a:p>
         </p:txBody>
@@ -40591,7 +40169,34 @@
                 <a:ea typeface="Aptos Display"/>
                 <a:cs typeface="Aptos Display"/>
               </a:rPr>
-              <a:t>排查時先問：容器存在嗎？正在跑嗎？port 有映射嗎？</a:t>
+              <a:t>/usr/share/nginx/html/index.html</a:t>
+            </a:r>
+          </a:p>
+          <a:p xmlns:a="http://schemas.openxmlformats.org/drawingml/2006/main">
+            <a:pPr algn="ctr">
+              <a:lnSpc>
+                <a:spcPct val="106000"/>
+              </a:lnSpc>
+              <a:buNone/>
+              <a:defRPr sz="1950" b="1">
+                <a:solidFill>
+                  <a:srgbClr val="0B1220"/>
+                </a:solidFill>
+                <a:latin typeface="Aptos Display"/>
+                <a:ea typeface="Aptos Display"/>
+                <a:cs typeface="Aptos Display"/>
+              </a:defRPr>
+            </a:pPr>
+            <a:r>
+              <a:rPr sz="1950" b="1">
+                <a:solidFill>
+                  <a:srgbClr val="0B1220"/>
+                </a:solidFill>
+                <a:latin typeface="Aptos Display"/>
+                <a:ea typeface="Aptos Display"/>
+                <a:cs typeface="Aptos Display"/>
+              </a:rPr>
+              <a:t>這就是 nginx 預設歡迎頁所在的位置。</a:t>
             </a:r>
           </a:p>
         </p:txBody>
@@ -40837,7 +40442,7 @@
                 <a:ea typeface="Aptos"/>
                 <a:cs typeface="Aptos"/>
               </a:rPr>
-              <a:t>READING STATUS</a:t>
+              <a:t>STEP 6 / EDIT</a:t>
             </a:r>
           </a:p>
         </p:txBody>
@@ -40899,7 +40504,7 @@
                 <a:ea typeface="Aptos Display"/>
                 <a:cs typeface="Aptos Display"/>
               </a:rPr>
-              <a:t>docker ps 輸出要看這幾欄</a:t>
+              <a:t>Step 6：在 container 裡修改 index.html</a:t>
             </a:r>
           </a:p>
         </p:txBody>
@@ -41095,7 +40700,7 @@
                 <a:ea typeface="Consolas"/>
                 <a:cs typeface="Consolas"/>
               </a:rPr>
-              <a:t>CONTAINER ID   IMAGE   STATUS        PORTS                  NAMES</a:t>
+              <a:t>echo '&lt;h1&gt;Hello from container&lt;/h1&gt;' &gt; index.html</a:t>
             </a:r>
           </a:p>
           <a:p xmlns:a="http://schemas.openxmlformats.org/drawingml/2006/main">
@@ -41122,7 +40727,7 @@
                 <a:ea typeface="Consolas"/>
                 <a:cs typeface="Consolas"/>
               </a:rPr>
-              <a:t>9f89a41aca7d   nginx   Up 5 seconds  0.0.0.0:9090-&gt;80/tcp   nginx-life</a:t>
+              <a:t>cat index.html</a:t>
             </a:r>
           </a:p>
         </p:txBody>
@@ -41254,7 +40859,7 @@
                 <a:ea typeface="Consolas"/>
                 <a:cs typeface="Consolas"/>
               </a:rPr>
-              <a:t>CONTAINER ID</a:t>
+              <a:t>畫面會變</a:t>
             </a:r>
           </a:p>
         </p:txBody>
@@ -41316,7 +40921,7 @@
                 <a:ea typeface="Aptos"/>
                 <a:cs typeface="Aptos"/>
               </a:rPr>
-              <a:t>容器唯一識別碼</a:t>
+              <a:t>因為 nginx 讀到 container 內新的 index.html。</a:t>
             </a:r>
           </a:p>
         </p:txBody>
@@ -41448,7 +41053,7 @@
                 <a:ea typeface="Consolas"/>
                 <a:cs typeface="Consolas"/>
               </a:rPr>
-              <a:t>IMAGE</a:t>
+              <a:t>先不要刪</a:t>
             </a:r>
           </a:p>
         </p:txBody>
@@ -41510,7 +41115,7 @@
                 <a:ea typeface="Aptos"/>
                 <a:cs typeface="Aptos"/>
               </a:rPr>
-              <a:t>建立容器所用的 Image</a:t>
+              <a:t>現在這個修改只存在 nginx-life 這個 container 裡。</a:t>
             </a:r>
           </a:p>
         </p:txBody>
@@ -41642,7 +41247,7 @@
                 <a:ea typeface="Consolas"/>
                 <a:cs typeface="Consolas"/>
               </a:rPr>
-              <a:t>STATUS</a:t>
+              <a:t>重點問題</a:t>
             </a:r>
           </a:p>
         </p:txBody>
@@ -41704,7 +41309,7 @@
                 <a:ea typeface="Aptos"/>
                 <a:cs typeface="Aptos"/>
               </a:rPr>
-              <a:t>Up、Exited、Restarting 等目前狀態</a:t>
+              <a:t>如果刪掉 container，再用同一個 image 重建，修改還在嗎？</a:t>
             </a:r>
           </a:p>
         </p:txBody>
@@ -41836,7 +41441,7 @@
                 <a:ea typeface="Consolas"/>
                 <a:cs typeface="Consolas"/>
               </a:rPr>
-              <a:t>PORTS</a:t>
+              <a:t>答案</a:t>
             </a:r>
           </a:p>
         </p:txBody>
@@ -41898,7 +41503,7 @@
                 <a:ea typeface="Aptos"/>
                 <a:cs typeface="Aptos"/>
               </a:rPr>
-              <a:t>主機 port 對到容器 port</a:t>
+              <a:t>不在。這就是等等要看到的「容器無狀態」。</a:t>
             </a:r>
           </a:p>
         </p:txBody>
@@ -42030,7 +41635,7 @@
                 <a:ea typeface="Consolas"/>
                 <a:cs typeface="Consolas"/>
               </a:rPr>
-              <a:t>NAMES</a:t>
+              <a:t>離開 shell</a:t>
             </a:r>
           </a:p>
         </p:txBody>
@@ -42092,7 +41697,7 @@
                 <a:ea typeface="Aptos"/>
                 <a:cs typeface="Aptos"/>
               </a:rPr>
-              <a:t>人類好記的容器名稱</a:t>
+              <a:t>exit</a:t>
             </a:r>
           </a:p>
         </p:txBody>
@@ -42338,7 +41943,7 @@
                 <a:ea typeface="Aptos"/>
                 <a:cs typeface="Aptos"/>
               </a:rPr>
-              <a:t>LIFECYCLE COMMANDS</a:t>
+              <a:t>STEP 7 / STOP START</a:t>
             </a:r>
           </a:p>
         </p:txBody>
@@ -42400,7 +42005,7 @@
                 <a:ea typeface="Aptos Display"/>
                 <a:cs typeface="Aptos Display"/>
               </a:rPr>
-              <a:t>stop、start、restart 的使用時機</a:t>
+              <a:t>Step 7：停止、啟動、重新啟動要分開下</a:t>
             </a:r>
           </a:p>
         </p:txBody>
@@ -42596,7 +42201,7 @@
                 <a:ea typeface="Consolas"/>
                 <a:cs typeface="Consolas"/>
               </a:rPr>
-              <a:t>docker stop &lt;容器ID或名稱&gt;</a:t>
+              <a:t>docker stop nginx-life</a:t>
             </a:r>
           </a:p>
           <a:p xmlns:a="http://schemas.openxmlformats.org/drawingml/2006/main">
@@ -42623,7 +42228,7 @@
                 <a:ea typeface="Consolas"/>
                 <a:cs typeface="Consolas"/>
               </a:rPr>
-              <a:t>docker start &lt;容器ID或名稱&gt;</a:t>
+              <a:t>docker start nginx-life</a:t>
             </a:r>
           </a:p>
           <a:p xmlns:a="http://schemas.openxmlformats.org/drawingml/2006/main">
@@ -42650,7 +42255,7 @@
                 <a:ea typeface="Consolas"/>
                 <a:cs typeface="Consolas"/>
               </a:rPr>
-              <a:t>docker restart &lt;容器ID或名稱&gt;</a:t>
+              <a:t>docker restart nginx-life</a:t>
             </a:r>
           </a:p>
         </p:txBody>
@@ -42815,7 +42420,7 @@
                 <a:ea typeface="Aptos"/>
                 <a:cs typeface="Aptos"/>
               </a:rPr>
-              <a:t>讓正在執行的容器停止。</a:t>
+              <a:t>停止正在跑的 container；再開 localhost:9090 會連不到。</a:t>
             </a:r>
           </a:p>
         </p:txBody>
@@ -42980,7 +42585,7 @@
                 <a:ea typeface="Aptos"/>
                 <a:cs typeface="Aptos"/>
               </a:rPr>
-              <a:t>啟動已停止的容器；對執行中的容器不會有明顯效果。</a:t>
+              <a:t>把已停止的 container 再啟動，剛剛改的 index.html 還在。</a:t>
             </a:r>
           </a:p>
         </p:txBody>
@@ -43145,7 +42750,7 @@
                 <a:ea typeface="Aptos"/>
                 <a:cs typeface="Aptos"/>
               </a:rPr>
-              <a:t>不管目前狀態如何，重新啟動一次；常用於服務維護或設定變更。</a:t>
+              <a:t>同一個 container 重開一次，不等於刪掉重建。</a:t>
             </a:r>
           </a:p>
         </p:txBody>

--- a/slides/docker-session2-flask-volume.pptx
+++ b/slides/docker-session2-flask-volume.pptx
@@ -135,6 +135,11 @@
       </a:defRPr>
     </a:lvl9pPr>
   </p:defaultTextStyle>
+  <p:extLst>
+    <p:ext uri="{EFAFB233-063F-42B5-8137-9DF3F51BA10A}">
+      <p15:sldGuideLst xmlns:p15="http://schemas.microsoft.com/office/powerpoint/2012/main"/>
+    </p:ext>
+  </p:extLst>
 </p:presentation>
 </file>
 
@@ -3149,7 +3154,7 @@
         </p:spPr>
         <p:txBody>
           <a:bodyPr lIns="0" tIns="0" rIns="0" bIns="0" anchor="t">
-            <a:normAutofit/>
+            <a:normAutofit fontScale="77500" lnSpcReduction="20000"/>
           </a:bodyPr>
           <a:lstStyle/>
           <a:p>
@@ -3802,7 +3807,7 @@
         </p:spPr>
         <p:txBody>
           <a:bodyPr lIns="0" tIns="0" rIns="0" bIns="0" anchor="t">
-            <a:normAutofit fontScale="87351"/>
+            <a:normAutofit fontScale="94851" lnSpcReduction="10000"/>
           </a:bodyPr>
           <a:lstStyle/>
           <a:p>
@@ -3864,7 +3869,7 @@
         </p:spPr>
         <p:txBody>
           <a:bodyPr lIns="0" tIns="0" rIns="0" bIns="0" anchor="t">
-            <a:normAutofit fontScale="92490"/>
+            <a:normAutofit fontScale="99990" lnSpcReduction="10000"/>
           </a:bodyPr>
           <a:lstStyle/>
           <a:p>
@@ -4023,7 +4028,7 @@
         </p:spPr>
         <p:txBody>
           <a:bodyPr lIns="0" tIns="0" rIns="0" bIns="0" anchor="t">
-            <a:normAutofit fontScale="92490"/>
+            <a:normAutofit fontScale="99990" lnSpcReduction="10000"/>
           </a:bodyPr>
           <a:lstStyle/>
           <a:p>
@@ -4120,7 +4125,7 @@
         </p:spPr>
         <p:txBody>
           <a:bodyPr lIns="0" tIns="0" rIns="0" bIns="0" anchor="t">
-            <a:normAutofit fontScale="87351"/>
+            <a:normAutofit fontScale="94851" lnSpcReduction="10000"/>
           </a:bodyPr>
           <a:lstStyle/>
           <a:p>
@@ -4182,7 +4187,7 @@
         </p:spPr>
         <p:txBody>
           <a:bodyPr lIns="0" tIns="0" rIns="0" bIns="0" anchor="t">
-            <a:normAutofit fontScale="92490"/>
+            <a:normAutofit fontScale="99990" lnSpcReduction="10000"/>
           </a:bodyPr>
           <a:lstStyle/>
           <a:p>
@@ -4279,7 +4284,7 @@
         </p:spPr>
         <p:txBody>
           <a:bodyPr lIns="0" tIns="0" rIns="0" bIns="0" anchor="t">
-            <a:normAutofit fontScale="87351"/>
+            <a:normAutofit fontScale="94851" lnSpcReduction="10000"/>
           </a:bodyPr>
           <a:lstStyle/>
           <a:p>
@@ -4341,7 +4346,7 @@
         </p:spPr>
         <p:txBody>
           <a:bodyPr lIns="0" tIns="0" rIns="0" bIns="0" anchor="t">
-            <a:normAutofit fontScale="92490"/>
+            <a:normAutofit fontScale="99990" lnSpcReduction="10000"/>
           </a:bodyPr>
           <a:lstStyle/>
           <a:p>
@@ -4438,7 +4443,7 @@
         </p:spPr>
         <p:txBody>
           <a:bodyPr lIns="0" tIns="0" rIns="0" bIns="0" anchor="t">
-            <a:normAutofit fontScale="87351"/>
+            <a:normAutofit fontScale="94851" lnSpcReduction="10000"/>
           </a:bodyPr>
           <a:lstStyle/>
           <a:p>
@@ -4500,7 +4505,7 @@
         </p:spPr>
         <p:txBody>
           <a:bodyPr lIns="0" tIns="0" rIns="0" bIns="0" anchor="t">
-            <a:normAutofit fontScale="92490"/>
+            <a:normAutofit fontScale="99990" lnSpcReduction="10000"/>
           </a:bodyPr>
           <a:lstStyle/>
           <a:p>
@@ -5907,7 +5912,7 @@
         </p:spPr>
         <p:txBody>
           <a:bodyPr lIns="0" tIns="0" rIns="0" bIns="0" anchor="t">
-            <a:normAutofit/>
+            <a:normAutofit fontScale="92500" lnSpcReduction="20000"/>
           </a:bodyPr>
           <a:lstStyle/>
           <a:p>
@@ -6043,7 +6048,7 @@
         </p:spPr>
         <p:txBody>
           <a:bodyPr lIns="0" tIns="0" rIns="0" bIns="0" anchor="t">
-            <a:normAutofit fontScale="70341"/>
+            <a:normAutofit fontScale="77841" lnSpcReduction="10000"/>
           </a:bodyPr>
           <a:lstStyle/>
           <a:p>
@@ -7576,7 +7581,7 @@
         </p:spPr>
         <p:txBody>
           <a:bodyPr lIns="0" tIns="0" rIns="0" bIns="0" anchor="t">
-            <a:normAutofit fontScale="86478"/>
+            <a:normAutofit fontScale="93978" lnSpcReduction="10000"/>
           </a:bodyPr>
           <a:lstStyle/>
           <a:p>
@@ -7842,7 +7847,7 @@
         </p:spPr>
         <p:txBody>
           <a:bodyPr lIns="0" tIns="0" rIns="0" bIns="0" anchor="t">
-            <a:normAutofit fontScale="86478"/>
+            <a:normAutofit fontScale="93978" lnSpcReduction="10000"/>
           </a:bodyPr>
           <a:lstStyle/>
           <a:p>
@@ -8108,7 +8113,7 @@
         </p:spPr>
         <p:txBody>
           <a:bodyPr lIns="0" tIns="0" rIns="0" bIns="0" anchor="t">
-            <a:normAutofit fontScale="86478"/>
+            <a:normAutofit fontScale="93978" lnSpcReduction="10000"/>
           </a:bodyPr>
           <a:lstStyle/>
           <a:p>
@@ -8374,7 +8379,7 @@
         </p:spPr>
         <p:txBody>
           <a:bodyPr lIns="0" tIns="0" rIns="0" bIns="0" anchor="t">
-            <a:normAutofit fontScale="86478"/>
+            <a:normAutofit fontScale="93978" lnSpcReduction="10000"/>
           </a:bodyPr>
           <a:lstStyle/>
           <a:p>
@@ -8436,7 +8441,7 @@
         </p:spPr>
         <p:txBody>
           <a:bodyPr lIns="0" tIns="0" rIns="0" bIns="0" anchor="t">
-            <a:normAutofit fontScale="90934"/>
+            <a:normAutofit fontScale="98434"/>
           </a:bodyPr>
           <a:lstStyle/>
           <a:p>
@@ -9665,7 +9670,7 @@
         </p:spPr>
         <p:txBody>
           <a:bodyPr lIns="0" tIns="0" rIns="0" bIns="0" anchor="t">
-            <a:normAutofit fontScale="91719"/>
+            <a:normAutofit fontScale="99219" lnSpcReduction="10000"/>
           </a:bodyPr>
           <a:lstStyle/>
           <a:p>
@@ -11597,7 +11602,7 @@
               </a:defRPr>
             </a:pPr>
             <a:r>
-              <a:rPr sz="2850" b="1">
+              <a:rPr sz="2850" b="1" dirty="0">
                 <a:solidFill>
                   <a:srgbClr val="0B1220"/>
                 </a:solidFill>
@@ -11605,8 +11610,49 @@
                 <a:ea typeface="Aptos Display"/>
                 <a:cs typeface="Aptos Display"/>
               </a:rPr>
-              <a:t>Named Volume 範例：資料交給 Docker 管理</a:t>
-            </a:r>
+              <a:t>Named Volume </a:t>
+            </a:r>
+            <a:r>
+              <a:rPr sz="2850" b="1" dirty="0" err="1">
+                <a:solidFill>
+                  <a:srgbClr val="0B1220"/>
+                </a:solidFill>
+                <a:latin typeface="Aptos Display"/>
+                <a:ea typeface="Aptos Display"/>
+                <a:cs typeface="Aptos Display"/>
+              </a:rPr>
+              <a:t>範例：資料交給</a:t>
+            </a:r>
+            <a:r>
+              <a:rPr sz="2850" b="1" dirty="0">
+                <a:solidFill>
+                  <a:srgbClr val="0B1220"/>
+                </a:solidFill>
+                <a:latin typeface="Aptos Display"/>
+                <a:ea typeface="Aptos Display"/>
+                <a:cs typeface="Aptos Display"/>
+              </a:rPr>
+              <a:t> Docker </a:t>
+            </a:r>
+            <a:r>
+              <a:rPr sz="2850" b="1" dirty="0" err="1">
+                <a:solidFill>
+                  <a:srgbClr val="0B1220"/>
+                </a:solidFill>
+                <a:latin typeface="Aptos Display"/>
+                <a:ea typeface="Aptos Display"/>
+                <a:cs typeface="Aptos Display"/>
+              </a:rPr>
+              <a:t>管理</a:t>
+            </a:r>
+            <a:endParaRPr sz="2850" b="1" dirty="0">
+              <a:solidFill>
+                <a:srgbClr val="0B1220"/>
+              </a:solidFill>
+              <a:latin typeface="Aptos Display"/>
+              <a:ea typeface="Aptos Display"/>
+              <a:cs typeface="Aptos Display"/>
+            </a:endParaRPr>
           </a:p>
         </p:txBody>
       </p:sp>
@@ -13245,7 +13291,7 @@
         </p:spPr>
         <p:txBody>
           <a:bodyPr lIns="0" tIns="0" rIns="0" bIns="0" anchor="t">
-            <a:normAutofit fontScale="90934"/>
+            <a:normAutofit fontScale="98434"/>
           </a:bodyPr>
           <a:lstStyle/>
           <a:p>
@@ -17125,7 +17171,7 @@
         </p:spPr>
         <p:txBody>
           <a:bodyPr lIns="0" tIns="0" rIns="0" bIns="0" anchor="t">
-            <a:normAutofit fontScale="86478"/>
+            <a:normAutofit fontScale="93978" lnSpcReduction="10000"/>
           </a:bodyPr>
           <a:lstStyle/>
           <a:p>
@@ -18238,7 +18284,7 @@
         </p:spPr>
         <p:txBody>
           <a:bodyPr lIns="0" tIns="0" rIns="0" bIns="0" anchor="t">
-            <a:normAutofit/>
+            <a:normAutofit fontScale="92500"/>
           </a:bodyPr>
           <a:lstStyle/>
           <a:p>
@@ -18664,7 +18710,7 @@
         </p:spPr>
         <p:txBody>
           <a:bodyPr lIns="0" tIns="0" rIns="0" bIns="0" anchor="t">
-            <a:normAutofit fontScale="88050"/>
+            <a:normAutofit fontScale="95550" lnSpcReduction="10000"/>
           </a:bodyPr>
           <a:lstStyle/>
           <a:p>
@@ -18835,7 +18881,7 @@
         </p:spPr>
         <p:txBody>
           <a:bodyPr lIns="0" tIns="0" rIns="0" bIns="0" anchor="t">
-            <a:normAutofit fontScale="88050"/>
+            <a:normAutofit fontScale="95550" lnSpcReduction="10000"/>
           </a:bodyPr>
           <a:lstStyle/>
           <a:p>
@@ -19006,7 +19052,7 @@
         </p:spPr>
         <p:txBody>
           <a:bodyPr lIns="0" tIns="0" rIns="0" bIns="0" anchor="t">
-            <a:normAutofit fontScale="88050"/>
+            <a:normAutofit fontScale="95550" lnSpcReduction="10000"/>
           </a:bodyPr>
           <a:lstStyle/>
           <a:p>
@@ -19177,7 +19223,7 @@
         </p:spPr>
         <p:txBody>
           <a:bodyPr lIns="0" tIns="0" rIns="0" bIns="0" anchor="t">
-            <a:normAutofit fontScale="88050"/>
+            <a:normAutofit fontScale="95550" lnSpcReduction="10000"/>
           </a:bodyPr>
           <a:lstStyle/>
           <a:p>
@@ -23534,7 +23580,7 @@
         </p:spPr>
         <p:txBody>
           <a:bodyPr lIns="0" tIns="0" rIns="0" bIns="0" anchor="t">
-            <a:normAutofit fontScale="91719"/>
+            <a:normAutofit fontScale="99219" lnSpcReduction="10000"/>
           </a:bodyPr>
           <a:lstStyle/>
           <a:p>
@@ -23833,7 +23879,7 @@
         </p:spPr>
         <p:txBody>
           <a:bodyPr lIns="0" tIns="0" rIns="0" bIns="0" anchor="t">
-            <a:normAutofit fontScale="91719"/>
+            <a:normAutofit fontScale="99219" lnSpcReduction="10000"/>
           </a:bodyPr>
           <a:lstStyle/>
           <a:p>
@@ -24132,7 +24178,7 @@
         </p:spPr>
         <p:txBody>
           <a:bodyPr lIns="0" tIns="0" rIns="0" bIns="0" anchor="t">
-            <a:normAutofit fontScale="91719"/>
+            <a:normAutofit fontScale="99219" lnSpcReduction="10000"/>
           </a:bodyPr>
           <a:lstStyle/>
           <a:p>
@@ -24431,7 +24477,7 @@
         </p:spPr>
         <p:txBody>
           <a:bodyPr lIns="0" tIns="0" rIns="0" bIns="0" anchor="t">
-            <a:normAutofit fontScale="91719"/>
+            <a:normAutofit fontScale="99219" lnSpcReduction="10000"/>
           </a:bodyPr>
           <a:lstStyle/>
           <a:p>
@@ -27750,7 +27796,7 @@
         </p:spPr>
         <p:txBody>
           <a:bodyPr lIns="0" tIns="0" rIns="0" bIns="0" anchor="t">
-            <a:normAutofit/>
+            <a:normAutofit fontScale="85000" lnSpcReduction="10000"/>
           </a:bodyPr>
           <a:lstStyle/>
           <a:p>
@@ -28948,7 +28994,7 @@
         </p:spPr>
         <p:txBody>
           <a:bodyPr lIns="0" tIns="0" rIns="0" bIns="0" anchor="t">
-            <a:normAutofit fontScale="81528"/>
+            <a:normAutofit fontScale="96528"/>
           </a:bodyPr>
           <a:lstStyle/>
           <a:p>
@@ -30592,7 +30638,7 @@
         </p:spPr>
         <p:txBody>
           <a:bodyPr lIns="0" tIns="0" rIns="0" bIns="0" anchor="t">
-            <a:normAutofit fontScale="88443"/>
+            <a:normAutofit fontScale="95943" lnSpcReduction="10000"/>
           </a:bodyPr>
           <a:lstStyle/>
           <a:p>
@@ -30813,7 +30859,7 @@
               </a:defRPr>
             </a:pPr>
             <a:r>
-              <a:rPr sz="1650" b="0">
+              <a:rPr sz="1650" b="0" dirty="0">
                 <a:solidFill>
                   <a:srgbClr val="E5E7EB"/>
                 </a:solidFill>
@@ -30821,7 +30867,29 @@
                 <a:ea typeface="Consolas"/>
                 <a:cs typeface="Consolas"/>
               </a:rPr>
-              <a:t>-v nginx-html:/usr/share/nginx/html</a:t>
+              <a:t>-v nginx-html:/</a:t>
+            </a:r>
+            <a:r>
+              <a:rPr sz="1650" b="0" dirty="0" err="1">
+                <a:solidFill>
+                  <a:srgbClr val="E5E7EB"/>
+                </a:solidFill>
+                <a:latin typeface="Consolas"/>
+                <a:ea typeface="Consolas"/>
+                <a:cs typeface="Consolas"/>
+              </a:rPr>
+              <a:t>usr</a:t>
+            </a:r>
+            <a:r>
+              <a:rPr sz="1650" b="0" dirty="0">
+                <a:solidFill>
+                  <a:srgbClr val="E5E7EB"/>
+                </a:solidFill>
+                <a:latin typeface="Consolas"/>
+                <a:ea typeface="Consolas"/>
+                <a:cs typeface="Consolas"/>
+              </a:rPr>
+              <a:t>/share/nginx/html</a:t>
             </a:r>
           </a:p>
         </p:txBody>
@@ -30856,7 +30924,7 @@
         </p:spPr>
         <p:txBody>
           <a:bodyPr lIns="0" tIns="0" rIns="0" bIns="0" anchor="t">
-            <a:normAutofit fontScale="80999"/>
+            <a:normAutofit fontScale="95999"/>
           </a:bodyPr>
           <a:lstStyle/>
           <a:p>
@@ -31282,7 +31350,7 @@
         </p:spPr>
         <p:txBody>
           <a:bodyPr lIns="0" tIns="0" rIns="0" bIns="0" anchor="t">
-            <a:normAutofit fontScale="92171"/>
+            <a:normAutofit fontScale="99671" lnSpcReduction="10000"/>
           </a:bodyPr>
           <a:lstStyle/>
           <a:p>
@@ -31548,7 +31616,7 @@
         </p:spPr>
         <p:txBody>
           <a:bodyPr lIns="0" tIns="0" rIns="0" bIns="0" anchor="t">
-            <a:normAutofit fontScale="92171"/>
+            <a:normAutofit fontScale="99671" lnSpcReduction="10000"/>
           </a:bodyPr>
           <a:lstStyle/>
           <a:p>
